--- a/docs/a2/review-slides-simplified.pptx
+++ b/docs/a2/review-slides-simplified.pptx
@@ -2,18 +2,18 @@
 <file path=ppt/presentation.xml><?xml version="1.0" encoding="utf-8"?>
 <p:presentation xmlns:p="http://schemas.openxmlformats.org/presentationml/2006/main">
   <p:sldMasterIdLst>
-    <p:sldMasterId xmlns:r="http://schemas.openxmlformats.org/officeDocument/2006/relationships" id="2147483648" r:id="Rc30bd744a3324e14"/>
+    <p:sldMasterId xmlns:r="http://schemas.openxmlformats.org/officeDocument/2006/relationships" id="2147483648" r:id="R75e052afee904b91"/>
   </p:sldMasterIdLst>
   <p:notesMasterIdLst>
-    <p:notesMasterId xmlns:r="http://schemas.openxmlformats.org/officeDocument/2006/relationships" r:id="Rc40326d9dca1447c"/>
+    <p:notesMasterId xmlns:r="http://schemas.openxmlformats.org/officeDocument/2006/relationships" r:id="R4ef18e7829d54b48"/>
   </p:notesMasterIdLst>
   <p:sldIdLst>
-    <p:sldId xmlns:r="http://schemas.openxmlformats.org/officeDocument/2006/relationships" id="256" r:id="R545fa3e787674208"/>
-    <p:sldId xmlns:r="http://schemas.openxmlformats.org/officeDocument/2006/relationships" id="257" r:id="R8390f68e1eea427d"/>
-    <p:sldId xmlns:r="http://schemas.openxmlformats.org/officeDocument/2006/relationships" id="258" r:id="R369aa28e37244351"/>
-    <p:sldId xmlns:r="http://schemas.openxmlformats.org/officeDocument/2006/relationships" id="259" r:id="R3c0e727ef30349a5"/>
-    <p:sldId xmlns:r="http://schemas.openxmlformats.org/officeDocument/2006/relationships" id="260" r:id="Ra2433104f4584f8c"/>
-    <p:sldId xmlns:r="http://schemas.openxmlformats.org/officeDocument/2006/relationships" id="261" r:id="R88d58e4888a94ccd"/>
+    <p:sldId xmlns:r="http://schemas.openxmlformats.org/officeDocument/2006/relationships" id="256" r:id="R648f395b66224787"/>
+    <p:sldId xmlns:r="http://schemas.openxmlformats.org/officeDocument/2006/relationships" id="257" r:id="Reb6c063538274ee6"/>
+    <p:sldId xmlns:r="http://schemas.openxmlformats.org/officeDocument/2006/relationships" id="258" r:id="Rc2caa89bd6ae4414"/>
+    <p:sldId xmlns:r="http://schemas.openxmlformats.org/officeDocument/2006/relationships" id="259" r:id="Rce11a347c7774683"/>
+    <p:sldId xmlns:r="http://schemas.openxmlformats.org/officeDocument/2006/relationships" id="260" r:id="R39587b10b86f420d"/>
+    <p:sldId xmlns:r="http://schemas.openxmlformats.org/officeDocument/2006/relationships" id="261" r:id="R7d2e9d4943b44c96"/>
   </p:sldIdLst>
   <p:sldSz cx="12192000" cy="6858000"/>
   <p:notesSz cx="6858000" cy="9144000"/>
@@ -163,9 +163,9 @@
 </file>
 
 <file path=ppt/notesMasters/theme/theme3.xml><?xml version="1.0" encoding="utf-8"?>
-<a:theme xmlns:a="http://schemas.openxmlformats.org/drawingml/2006/main" name="ChatGPT">
+<a:theme xmlns:a="http://schemas.openxmlformats.org/drawingml/2006/main" name="ECOllateral">
   <a:themeElements>
-    <a:clrScheme name="ChatGPT">
+    <a:clrScheme name="ECOllateral">
       <a:dk1>
         <a:srgbClr val="000000"/>
       </a:dk1>
@@ -215,7 +215,7 @@
         <a:cs typeface="Calibri"/>
       </a:minorFont>
     </a:fontScheme>
-    <a:fmtScheme name="ChatGPT">
+    <a:fmtScheme name="ECOllateral">
       <a:fillStyleLst>
         <a:solidFill>
           <a:schemeClr val="phClr"/>
@@ -467,12 +467,17 @@
           </a:p>
           <a:p xmlns:a="http://schemas.openxmlformats.org/drawingml/2006/main">
             <a:r>
-              <a:t>Cooling is one example. We still need area water totals and river needs. The AI learns</a:t>
-            </a:r>
-          </a:p>
-          <a:p xmlns:a="http://schemas.openxmlformats.org/drawingml/2006/main">
-            <a:r>
-              <a:t>made-up water-use values, so real area tests are still needed.</a:t>
+              <a:t>Cooling is one example. Current tests use computer-generated water-use examples to</a:t>
+            </a:r>
+          </a:p>
+          <a:p xmlns:a="http://schemas.openxmlformats.org/drawingml/2006/main">
+            <a:r>
+              <a:t>check the software. Next, collect real measurements, train on them, and test on records</a:t>
+            </a:r>
+          </a:p>
+          <a:p xmlns:a="http://schemas.openxmlformats.org/drawingml/2006/main">
+            <a:r>
+              <a:t>the model has not seen. We still need area water totals and river needs.</a:t>
             </a:r>
           </a:p>
           <a:p xmlns:a="http://schemas.openxmlformats.org/drawingml/2006/main">
@@ -487,12 +492,17 @@
           </a:p>
           <a:p xmlns:a="http://schemas.openxmlformats.org/drawingml/2006/main">
             <a:r>
-              <a:t>Shaun, 30 seconds. Source: docs/a2/dossier.md section 1; docs/a2/evidence/forecast.json. Synthetic labels and fictional permits. Public ingestion is a parser smoke test. The current collateral stress field is an on-site consumption proxy. Assigned day is pending.</a:t>
+              <a:t>Shaun, 30 seconds. Source: docs/a2/source/dossier.md section 1; docs/a2/evidence/forecast.json. Synthetic labels and fictional permits. Public ingestion is a parser smoke test. The current collateral stress field is an on-site consumption proxy. Assigned day is pending.</a:t>
             </a:r>
           </a:p>
           <a:p xmlns:a="http://schemas.openxmlformats.org/drawingml/2006/main">
             <a:r>
               <a:t>Regional framing: ECOllateral is an environmental impact assessment and regional ecosystem forecasting project. Primary question: development demands/cooling/location and seasonal impacts on area municipal reserves and watershed conditions. The cooling model is one pressure component. No regional impact or ecosystem health score is implemented/validated. Source: docs/project-scope.md and user context supplied October 8.</a:t>
+            </a:r>
+          </a:p>
+          <a:p xmlns:a="http://schemas.openxmlformats.org/drawingml/2006/main">
+            <a:r>
+              <a:t>Data plan: generated examples are current software checks. Collect paired measured inputs and outcomes, train on historical observations, and test on real records and areas excluded from training. No measured-target retraining has been completed.</a:t>
             </a:r>
           </a:p>
         </p:txBody>
@@ -717,7 +727,7 @@
           </a:p>
           <a:p xmlns:a="http://schemas.openxmlformats.org/drawingml/2006/main">
             <a:r>
-              <a:t>Next, we need real water-use and area measurements.</a:t>
+              <a:t>Next, train on real water-use measurements and test on separate real records.</a:t>
             </a:r>
           </a:p>
           <a:p xmlns:a="http://schemas.openxmlformats.org/drawingml/2006/main">
@@ -1057,7 +1067,12 @@
           </a:p>
           <a:p xmlns:a="http://schemas.openxmlformats.org/drawingml/2006/main">
             <a:r>
-              <a:t>show weaknesses. We must add water coming in, water used and returned, and river needs.</a:t>
+              <a:t>show weaknesses. Next, collect real measurements, train on them, and test new areas.</a:t>
+            </a:r>
+          </a:p>
+          <a:p xmlns:a="http://schemas.openxmlformats.org/drawingml/2006/main">
+            <a:r>
+              <a:t>We must add water coming in, water used and returned, and river needs.</a:t>
             </a:r>
           </a:p>
           <a:p xmlns:a="http://schemas.openxmlformats.org/drawingml/2006/main">
@@ -1087,7 +1102,12 @@
           </a:p>
           <a:p xmlns:a="http://schemas.openxmlformats.org/drawingml/2006/main">
             <a:r>
-              <a:t>can we test effects on water reserves and rivers in a new area through the year?</a:t>
+              <a:t>can training on real data predict effects on water reserves and rivers in a new area</a:t>
+            </a:r>
+          </a:p>
+          <a:p xmlns:a="http://schemas.openxmlformats.org/drawingml/2006/main">
+            <a:r>
+              <a:t>through the year?</a:t>
             </a:r>
           </a:p>
           <a:p xmlns:a="http://schemas.openxmlformats.org/drawingml/2006/main">
@@ -1102,12 +1122,17 @@
           </a:p>
           <a:p xmlns:a="http://schemas.openxmlformats.org/drawingml/2006/main">
             <a:r>
-              <a:t>Scott, 60 seconds. Source: docs/a2/dossier.md sections 7-8, evidence-summary.csv, team-contributions.md. No neural/LLM comparison run. Shaun majority coding is confirmed; Troy/Scott supporting responsibilities are assigned, not certified completed. Next measured-label study needs facility holdouts, verified station maps, real permit relevance, MAE/RMSE/R2/coverage/width. Course date, deadline, office hours and instructor access remain pending.</a:t>
+              <a:t>Scott, 60 seconds. Source: docs/a2/source/dossier.md sections 7-8, evidence-summary.csv, team-contributions.md. No neural/LLM comparison run. Shaun majority coding is confirmed; Troy/Scott supporting responsibilities are assigned, not certified completed. Next measured-label study needs facility holdouts, verified station maps, real permit relevance, MAE/RMSE/R2/coverage/width. Course date, deadline, office hours and instructor access remain pending.</a:t>
             </a:r>
           </a:p>
           <a:p xmlns:a="http://schemas.openxmlformats.org/drawingml/2006/main">
             <a:r>
               <a:t>Primary next study: observed regional supply/reserves, demands, returns, ecological baselines and unseen-area tests. Facility holdouts remain a supporting component check. Zero-shot LLM, heatwave validation, EIA/EPA ingestion and historical recharge masking are proposals, not completed benchmarks. Troy supports data/grounding; Scott evaluation/interface/failure evidence; Shaun leads coding.</a:t>
+            </a:r>
+          </a:p>
+          <a:p xmlns:a="http://schemas.openxmlformats.org/drawingml/2006/main">
+            <a:r>
+              <a:t>Real-data training is the next development step, not a completed result. Define area outcomes and river needs before claiming ecosystem forecasts. Keep model selection, interval sizing and final real-data testing separate.</a:t>
             </a:r>
           </a:p>
         </p:txBody>
@@ -1175,7 +1200,7 @@
   </p:cSld>
   <p:clrMap bg1="lt1" tx1="dk1" bg2="lt2" tx2="dk2" accent1="accent1" accent2="accent2" accent3="accent3" accent4="accent4" accent5="accent5" accent6="accent6" hlink="hlink" folHlink="folHlink"/>
   <p:sldLayoutIdLst>
-    <p:sldLayoutId xmlns:r="http://schemas.openxmlformats.org/officeDocument/2006/relationships" id="2147483649" r:id="R75eba4965b164cee"/>
+    <p:sldLayoutId xmlns:r="http://schemas.openxmlformats.org/officeDocument/2006/relationships" id="2147483649" r:id="R91986dd7aafe442a"/>
   </p:sldLayoutIdLst>
   <p:txStyles>
     <p:titleStyle>
@@ -1458,9 +1483,9 @@
 </file>
 
 <file path=ppt/slideMasters/theme/theme2.xml><?xml version="1.0" encoding="utf-8"?>
-<a:theme xmlns:a="http://schemas.openxmlformats.org/drawingml/2006/main" name="ChatGPT">
+<a:theme xmlns:a="http://schemas.openxmlformats.org/drawingml/2006/main" name="ECOllateral">
   <a:themeElements>
-    <a:clrScheme name="ChatGPT">
+    <a:clrScheme name="ECOllateral">
       <a:dk1>
         <a:srgbClr val="000000"/>
       </a:dk1>
@@ -1510,7 +1535,7 @@
         <a:cs typeface="Calibri"/>
       </a:minorFont>
     </a:fontScheme>
-    <a:fmtScheme name="ChatGPT">
+    <a:fmtScheme name="ECOllateral">
       <a:fillStyleLst>
         <a:solidFill>
           <a:schemeClr val="phClr"/>
@@ -2526,7 +2551,7 @@
           <p:cNvPr id="15" name="">
             <a:extLst xmlns:a="http://schemas.openxmlformats.org/drawingml/2006/main">
               <a:ext uri="{FF2B5EF4-FFF2-40B4-BE49-F238E27FC236}">
-                <a16:creationId xmlns:a16="http://schemas.microsoft.com/office/drawing/2014/main" id="{E15926F0-6E43-4A8D-9B42-CB96E57B38CF}"/>
+                <a16:creationId xmlns:a16="http://schemas.microsoft.com/office/drawing/2014/main" id="{2A06DBD1-C1C1-4778-A500-74D7B6B5D494}"/>
               </a:ext>
             </a:extLst>
           </p:cNvPr>
@@ -2583,7 +2608,7 @@
           <p:cNvPr id="2" name="">
             <a:extLst xmlns:a="http://schemas.openxmlformats.org/drawingml/2006/main">
               <a:ext uri="{FF2B5EF4-FFF2-40B4-BE49-F238E27FC236}">
-                <a16:creationId xmlns:a16="http://schemas.microsoft.com/office/drawing/2014/main" id="{BF72D7B3-7365-43ED-BC31-EE0F07A7AED1}"/>
+                <a16:creationId xmlns:a16="http://schemas.microsoft.com/office/drawing/2014/main" id="{782A956B-9858-45B7-B911-2C4E49B74605}"/>
               </a:ext>
             </a:extLst>
           </p:cNvPr>
@@ -2613,7 +2638,7 @@
           <p:cNvPr id="3" name="">
             <a:extLst xmlns:a="http://schemas.openxmlformats.org/drawingml/2006/main">
               <a:ext uri="{FF2B5EF4-FFF2-40B4-BE49-F238E27FC236}">
-                <a16:creationId xmlns:a16="http://schemas.microsoft.com/office/drawing/2014/main" id="{9D28E4F8-64DB-4E0D-85EA-D1161F382CCC}"/>
+                <a16:creationId xmlns:a16="http://schemas.microsoft.com/office/drawing/2014/main" id="{546B17B5-1825-4EF3-BB0E-C1919E61E351}"/>
               </a:ext>
             </a:extLst>
           </p:cNvPr>
@@ -2693,7 +2718,7 @@
           <p:cNvPr id="4" name="">
             <a:extLst xmlns:a="http://schemas.openxmlformats.org/drawingml/2006/main">
               <a:ext uri="{FF2B5EF4-FFF2-40B4-BE49-F238E27FC236}">
-                <a16:creationId xmlns:a16="http://schemas.microsoft.com/office/drawing/2014/main" id="{779038A3-1B39-4D8D-88A9-CD7240E68276}"/>
+                <a16:creationId xmlns:a16="http://schemas.microsoft.com/office/drawing/2014/main" id="{2F1C7964-98D2-4FF4-816A-C9992DBBE5AE}"/>
               </a:ext>
             </a:extLst>
           </p:cNvPr>
@@ -2740,7 +2765,7 @@
                 <a:ea typeface="Arial"/>
                 <a:cs typeface="Arial"/>
               </a:rPr>
-              <a:t>October 7 test results. Made-up water-use targets. Area impacts still need real-world tests.</a:t>
+              <a:t>Current tests use generated values. Next: train and test on real measurements.</a:t>
             </a:r>
           </a:p>
         </p:txBody>
@@ -2750,7 +2775,7 @@
           <p:cNvPr id="5" name="">
             <a:extLst xmlns:a="http://schemas.openxmlformats.org/drawingml/2006/main">
               <a:ext uri="{FF2B5EF4-FFF2-40B4-BE49-F238E27FC236}">
-                <a16:creationId xmlns:a16="http://schemas.microsoft.com/office/drawing/2014/main" id="{AE6CEA40-2B85-4395-906A-C543DBEC9910}"/>
+                <a16:creationId xmlns:a16="http://schemas.microsoft.com/office/drawing/2014/main" id="{750E40C1-4603-4AFA-802F-5C0091E374B4}"/>
               </a:ext>
             </a:extLst>
           </p:cNvPr>
@@ -2807,7 +2832,7 @@
           <p:cNvPr id="6" name="">
             <a:extLst xmlns:a="http://schemas.openxmlformats.org/drawingml/2006/main">
               <a:ext uri="{FF2B5EF4-FFF2-40B4-BE49-F238E27FC236}">
-                <a16:creationId xmlns:a16="http://schemas.microsoft.com/office/drawing/2014/main" id="{32C89695-524B-4344-8DA4-22B3EF26249D}"/>
+                <a16:creationId xmlns:a16="http://schemas.microsoft.com/office/drawing/2014/main" id="{643B33D5-FA2E-4382-BE9E-24324A594025}"/>
               </a:ext>
             </a:extLst>
           </p:cNvPr>
@@ -2864,7 +2889,7 @@
           <p:cNvPr id="7" name="">
             <a:extLst xmlns:a="http://schemas.openxmlformats.org/drawingml/2006/main">
               <a:ext uri="{FF2B5EF4-FFF2-40B4-BE49-F238E27FC236}">
-                <a16:creationId xmlns:a16="http://schemas.microsoft.com/office/drawing/2014/main" id="{93569346-F43C-484B-9806-56AC43118A2F}"/>
+                <a16:creationId xmlns:a16="http://schemas.microsoft.com/office/drawing/2014/main" id="{3061CC4A-D9A6-4979-8A02-788657C8F33E}"/>
               </a:ext>
             </a:extLst>
           </p:cNvPr>
@@ -2921,7 +2946,7 @@
           <p:cNvPr id="8" name="">
             <a:extLst xmlns:a="http://schemas.openxmlformats.org/drawingml/2006/main">
               <a:ext uri="{FF2B5EF4-FFF2-40B4-BE49-F238E27FC236}">
-                <a16:creationId xmlns:a16="http://schemas.microsoft.com/office/drawing/2014/main" id="{117F3970-3D92-419F-B65E-0F3E8509E11D}"/>
+                <a16:creationId xmlns:a16="http://schemas.microsoft.com/office/drawing/2014/main" id="{6F432F47-803A-4516-B075-24CA9DB778B8}"/>
               </a:ext>
             </a:extLst>
           </p:cNvPr>
@@ -2978,7 +3003,7 @@
           <p:cNvPr id="9" name="">
             <a:extLst xmlns:a="http://schemas.openxmlformats.org/drawingml/2006/main">
               <a:ext uri="{FF2B5EF4-FFF2-40B4-BE49-F238E27FC236}">
-                <a16:creationId xmlns:a16="http://schemas.microsoft.com/office/drawing/2014/main" id="{13257136-DEB8-46AB-80B8-0914AEE78659}"/>
+                <a16:creationId xmlns:a16="http://schemas.microsoft.com/office/drawing/2014/main" id="{E05FF779-983C-49B7-A1AD-A8CB5E8B2C64}"/>
               </a:ext>
             </a:extLst>
           </p:cNvPr>
@@ -3008,7 +3033,7 @@
           <p:cNvPr id="10" name="">
             <a:extLst xmlns:a="http://schemas.openxmlformats.org/drawingml/2006/main">
               <a:ext uri="{FF2B5EF4-FFF2-40B4-BE49-F238E27FC236}">
-                <a16:creationId xmlns:a16="http://schemas.microsoft.com/office/drawing/2014/main" id="{E1E03F3C-42F0-45FA-8463-6B96C68FBC6F}"/>
+                <a16:creationId xmlns:a16="http://schemas.microsoft.com/office/drawing/2014/main" id="{418D8BE0-AF0E-4273-B270-1EDD8DE52EE0}"/>
               </a:ext>
             </a:extLst>
           </p:cNvPr>
@@ -3111,7 +3136,7 @@
           <p:cNvPr id="11" name="">
             <a:extLst xmlns:a="http://schemas.openxmlformats.org/drawingml/2006/main">
               <a:ext uri="{FF2B5EF4-FFF2-40B4-BE49-F238E27FC236}">
-                <a16:creationId xmlns:a16="http://schemas.microsoft.com/office/drawing/2014/main" id="{64450D52-730F-4321-ABFA-C04F638B162D}"/>
+                <a16:creationId xmlns:a16="http://schemas.microsoft.com/office/drawing/2014/main" id="{63B5A434-D04D-4752-8DB1-AA4087EC46C2}"/>
               </a:ext>
             </a:extLst>
           </p:cNvPr>
@@ -3168,7 +3193,7 @@
           <p:cNvPr id="12" name="">
             <a:extLst xmlns:a="http://schemas.openxmlformats.org/drawingml/2006/main">
               <a:ext uri="{FF2B5EF4-FFF2-40B4-BE49-F238E27FC236}">
-                <a16:creationId xmlns:a16="http://schemas.microsoft.com/office/drawing/2014/main" id="{965D7732-E1E7-42B1-94F1-8AA949C38236}"/>
+                <a16:creationId xmlns:a16="http://schemas.microsoft.com/office/drawing/2014/main" id="{903E1B86-FB17-4961-9A70-A1C38D63D45A}"/>
               </a:ext>
             </a:extLst>
           </p:cNvPr>
@@ -3198,7 +3223,7 @@
           <p:cNvPr id="13" name="">
             <a:extLst xmlns:a="http://schemas.openxmlformats.org/drawingml/2006/main">
               <a:ext uri="{FF2B5EF4-FFF2-40B4-BE49-F238E27FC236}">
-                <a16:creationId xmlns:a16="http://schemas.microsoft.com/office/drawing/2014/main" id="{A41E9DB1-E81B-47FA-90E6-60A65547F825}"/>
+                <a16:creationId xmlns:a16="http://schemas.microsoft.com/office/drawing/2014/main" id="{61707A55-DCF3-46CC-9ACD-0AA9457649DA}"/>
               </a:ext>
             </a:extLst>
           </p:cNvPr>
@@ -3301,7 +3326,7 @@
           <p:cNvPr id="14" name="">
             <a:extLst xmlns:a="http://schemas.openxmlformats.org/drawingml/2006/main">
               <a:ext uri="{FF2B5EF4-FFF2-40B4-BE49-F238E27FC236}">
-                <a16:creationId xmlns:a16="http://schemas.microsoft.com/office/drawing/2014/main" id="{8D735B82-0085-4D4D-A641-4BAC5D26F490}"/>
+                <a16:creationId xmlns:a16="http://schemas.microsoft.com/office/drawing/2014/main" id="{D7AC6CAF-2F27-4C53-8A4A-FBA42666328A}"/>
               </a:ext>
             </a:extLst>
           </p:cNvPr>
@@ -3356,7 +3381,7 @@
     </p:spTree>
     <p:extLst>
       <p:ext uri="{BB962C8B-B14F-4D97-AF65-F5344CB8AC3E}">
-        <p14:creationId xmlns:p14="http://schemas.microsoft.com/office/powerpoint/2010/main" val="2078059179"/>
+        <p14:creationId xmlns:p14="http://schemas.microsoft.com/office/powerpoint/2010/main" val="1250705555"/>
       </p:ext>
     </p:extLst>
   </p:cSld>
@@ -3387,7 +3412,7 @@
           <p:cNvPr id="58" name="">
             <a:extLst xmlns:a="http://schemas.openxmlformats.org/drawingml/2006/main">
               <a:ext uri="{FF2B5EF4-FFF2-40B4-BE49-F238E27FC236}">
-                <a16:creationId xmlns:a16="http://schemas.microsoft.com/office/drawing/2014/main" id="{6A13D807-DB03-4E2F-950A-75C534E935A7}"/>
+                <a16:creationId xmlns:a16="http://schemas.microsoft.com/office/drawing/2014/main" id="{062119A8-B72A-4186-94CD-0A6360C5B1A3}"/>
               </a:ext>
             </a:extLst>
           </p:cNvPr>
@@ -3444,7 +3469,7 @@
           <p:cNvPr id="2" name="">
             <a:extLst xmlns:a="http://schemas.openxmlformats.org/drawingml/2006/main">
               <a:ext uri="{FF2B5EF4-FFF2-40B4-BE49-F238E27FC236}">
-                <a16:creationId xmlns:a16="http://schemas.microsoft.com/office/drawing/2014/main" id="{902882A6-75C7-48FC-B60A-01C24C6603E6}"/>
+                <a16:creationId xmlns:a16="http://schemas.microsoft.com/office/drawing/2014/main" id="{C8840B40-C3FC-4000-AA80-51523A6430FB}"/>
               </a:ext>
             </a:extLst>
           </p:cNvPr>
@@ -3474,7 +3499,7 @@
           <p:cNvPr id="3" name="">
             <a:extLst xmlns:a="http://schemas.openxmlformats.org/drawingml/2006/main">
               <a:ext uri="{FF2B5EF4-FFF2-40B4-BE49-F238E27FC236}">
-                <a16:creationId xmlns:a16="http://schemas.microsoft.com/office/drawing/2014/main" id="{39858E33-E7F2-4CEC-A4B5-C401DFACDFCE}"/>
+                <a16:creationId xmlns:a16="http://schemas.microsoft.com/office/drawing/2014/main" id="{4C0F60B3-6A08-4771-BAB8-A2FBEE8013B7}"/>
               </a:ext>
             </a:extLst>
           </p:cNvPr>
@@ -3531,7 +3556,7 @@
           <p:cNvPr id="4" name="">
             <a:extLst xmlns:a="http://schemas.openxmlformats.org/drawingml/2006/main">
               <a:ext uri="{FF2B5EF4-FFF2-40B4-BE49-F238E27FC236}">
-                <a16:creationId xmlns:a16="http://schemas.microsoft.com/office/drawing/2014/main" id="{59D01074-D4F0-4BCA-833C-F2615019BBB1}"/>
+                <a16:creationId xmlns:a16="http://schemas.microsoft.com/office/drawing/2014/main" id="{CF9DB5DC-9D76-4944-AEC3-355BF0D4B95D}"/>
               </a:ext>
             </a:extLst>
           </p:cNvPr>
@@ -3588,7 +3613,7 @@
           <p:cNvPr id="5" name="">
             <a:extLst xmlns:a="http://schemas.openxmlformats.org/drawingml/2006/main">
               <a:ext uri="{FF2B5EF4-FFF2-40B4-BE49-F238E27FC236}">
-                <a16:creationId xmlns:a16="http://schemas.microsoft.com/office/drawing/2014/main" id="{1DEBE62B-4B21-4C97-B909-032DA005D7E0}"/>
+                <a16:creationId xmlns:a16="http://schemas.microsoft.com/office/drawing/2014/main" id="{953AE7D6-2D0A-4DB0-A0BC-9FE54A8D3811}"/>
               </a:ext>
             </a:extLst>
           </p:cNvPr>
@@ -3645,7 +3670,7 @@
           <p:cNvPr id="6" name="">
             <a:extLst xmlns:a="http://schemas.openxmlformats.org/drawingml/2006/main">
               <a:ext uri="{FF2B5EF4-FFF2-40B4-BE49-F238E27FC236}">
-                <a16:creationId xmlns:a16="http://schemas.microsoft.com/office/drawing/2014/main" id="{26053962-7064-43A8-8FA0-6E86E9911C8B}"/>
+                <a16:creationId xmlns:a16="http://schemas.microsoft.com/office/drawing/2014/main" id="{5504D1E8-8EF7-48B8-B4E9-DAB9D30A7B0D}"/>
               </a:ext>
             </a:extLst>
           </p:cNvPr>
@@ -3702,7 +3727,7 @@
           <p:cNvPr id="7" name="">
             <a:extLst xmlns:a="http://schemas.openxmlformats.org/drawingml/2006/main">
               <a:ext uri="{FF2B5EF4-FFF2-40B4-BE49-F238E27FC236}">
-                <a16:creationId xmlns:a16="http://schemas.microsoft.com/office/drawing/2014/main" id="{0C5D6FBC-4C3F-4CEF-B0D8-E809D58290C3}"/>
+                <a16:creationId xmlns:a16="http://schemas.microsoft.com/office/drawing/2014/main" id="{97A85536-93EB-42A6-BBE0-962F225B05A8}"/>
               </a:ext>
             </a:extLst>
           </p:cNvPr>
@@ -3730,7 +3755,7 @@
           <p:cNvPr id="8" name="">
             <a:extLst xmlns:a="http://schemas.openxmlformats.org/drawingml/2006/main">
               <a:ext uri="{FF2B5EF4-FFF2-40B4-BE49-F238E27FC236}">
-                <a16:creationId xmlns:a16="http://schemas.microsoft.com/office/drawing/2014/main" id="{EF66098B-0C27-44A1-9223-A050BB3293FD}"/>
+                <a16:creationId xmlns:a16="http://schemas.microsoft.com/office/drawing/2014/main" id="{66167B23-644A-4EA1-AD96-AAD10653D5F6}"/>
               </a:ext>
             </a:extLst>
           </p:cNvPr>
@@ -3787,7 +3812,7 @@
           <p:cNvPr id="9" name="">
             <a:extLst xmlns:a="http://schemas.openxmlformats.org/drawingml/2006/main">
               <a:ext uri="{FF2B5EF4-FFF2-40B4-BE49-F238E27FC236}">
-                <a16:creationId xmlns:a16="http://schemas.microsoft.com/office/drawing/2014/main" id="{5F5BE962-939F-4E89-9957-DB3A9DF1321D}"/>
+                <a16:creationId xmlns:a16="http://schemas.microsoft.com/office/drawing/2014/main" id="{05D0EFB7-5B41-4684-A70D-A688E5E7FB41}"/>
               </a:ext>
             </a:extLst>
           </p:cNvPr>
@@ -3817,7 +3842,7 @@
           <p:cNvPr id="10" name="">
             <a:extLst xmlns:a="http://schemas.openxmlformats.org/drawingml/2006/main">
               <a:ext uri="{FF2B5EF4-FFF2-40B4-BE49-F238E27FC236}">
-                <a16:creationId xmlns:a16="http://schemas.microsoft.com/office/drawing/2014/main" id="{AEF88758-8C2C-46FE-B89E-64E99C88E6FE}"/>
+                <a16:creationId xmlns:a16="http://schemas.microsoft.com/office/drawing/2014/main" id="{60D38FE9-432B-4206-A8C6-8421283FEADD}"/>
               </a:ext>
             </a:extLst>
           </p:cNvPr>
@@ -3897,7 +3922,7 @@
           <p:cNvPr id="11" name="">
             <a:extLst xmlns:a="http://schemas.openxmlformats.org/drawingml/2006/main">
               <a:ext uri="{FF2B5EF4-FFF2-40B4-BE49-F238E27FC236}">
-                <a16:creationId xmlns:a16="http://schemas.microsoft.com/office/drawing/2014/main" id="{E811792A-D029-4B54-8682-99634AFB6818}"/>
+                <a16:creationId xmlns:a16="http://schemas.microsoft.com/office/drawing/2014/main" id="{BB14FC85-E45A-4583-A475-4192D185A852}"/>
               </a:ext>
             </a:extLst>
           </p:cNvPr>
@@ -3925,7 +3950,7 @@
           <p:cNvPr id="12" name="">
             <a:extLst xmlns:a="http://schemas.openxmlformats.org/drawingml/2006/main">
               <a:ext uri="{FF2B5EF4-FFF2-40B4-BE49-F238E27FC236}">
-                <a16:creationId xmlns:a16="http://schemas.microsoft.com/office/drawing/2014/main" id="{86E49C38-A939-45F2-9B9D-BAE4B6C788D7}"/>
+                <a16:creationId xmlns:a16="http://schemas.microsoft.com/office/drawing/2014/main" id="{F273D936-356C-4BD1-B61E-22F9B8F93D0E}"/>
               </a:ext>
             </a:extLst>
           </p:cNvPr>
@@ -3982,7 +4007,7 @@
           <p:cNvPr id="13" name="">
             <a:extLst xmlns:a="http://schemas.openxmlformats.org/drawingml/2006/main">
               <a:ext uri="{FF2B5EF4-FFF2-40B4-BE49-F238E27FC236}">
-                <a16:creationId xmlns:a16="http://schemas.microsoft.com/office/drawing/2014/main" id="{44FB94AD-D2BE-4476-B621-7AE91F1ADE60}"/>
+                <a16:creationId xmlns:a16="http://schemas.microsoft.com/office/drawing/2014/main" id="{0647CEC8-A9C6-4FC3-9941-A51A40374187}"/>
               </a:ext>
             </a:extLst>
           </p:cNvPr>
@@ -4012,7 +4037,7 @@
           <p:cNvPr id="14" name="">
             <a:extLst xmlns:a="http://schemas.openxmlformats.org/drawingml/2006/main">
               <a:ext uri="{FF2B5EF4-FFF2-40B4-BE49-F238E27FC236}">
-                <a16:creationId xmlns:a16="http://schemas.microsoft.com/office/drawing/2014/main" id="{1F7D9962-BB6E-41FF-8A52-DF90DDBCB830}"/>
+                <a16:creationId xmlns:a16="http://schemas.microsoft.com/office/drawing/2014/main" id="{3D5D5B4B-87A6-4F0B-B61B-B0221AF23312}"/>
               </a:ext>
             </a:extLst>
           </p:cNvPr>
@@ -4092,7 +4117,7 @@
           <p:cNvPr id="15" name="">
             <a:extLst xmlns:a="http://schemas.openxmlformats.org/drawingml/2006/main">
               <a:ext uri="{FF2B5EF4-FFF2-40B4-BE49-F238E27FC236}">
-                <a16:creationId xmlns:a16="http://schemas.microsoft.com/office/drawing/2014/main" id="{72EC4228-3D33-4B80-AA8B-E8696AED233A}"/>
+                <a16:creationId xmlns:a16="http://schemas.microsoft.com/office/drawing/2014/main" id="{C352B214-B302-49BA-ADBC-6A18114B413D}"/>
               </a:ext>
             </a:extLst>
           </p:cNvPr>
@@ -4120,7 +4145,7 @@
           <p:cNvPr id="16" name="">
             <a:extLst xmlns:a="http://schemas.openxmlformats.org/drawingml/2006/main">
               <a:ext uri="{FF2B5EF4-FFF2-40B4-BE49-F238E27FC236}">
-                <a16:creationId xmlns:a16="http://schemas.microsoft.com/office/drawing/2014/main" id="{7E79C377-13B4-43D4-95D3-FFBF2D68403C}"/>
+                <a16:creationId xmlns:a16="http://schemas.microsoft.com/office/drawing/2014/main" id="{05633805-53FC-4315-B47D-C2AD0539E1D0}"/>
               </a:ext>
             </a:extLst>
           </p:cNvPr>
@@ -4177,7 +4202,7 @@
           <p:cNvPr id="17" name="">
             <a:extLst xmlns:a="http://schemas.openxmlformats.org/drawingml/2006/main">
               <a:ext uri="{FF2B5EF4-FFF2-40B4-BE49-F238E27FC236}">
-                <a16:creationId xmlns:a16="http://schemas.microsoft.com/office/drawing/2014/main" id="{71D03059-0BEC-4852-9633-04D590CEA5C5}"/>
+                <a16:creationId xmlns:a16="http://schemas.microsoft.com/office/drawing/2014/main" id="{E7DBDD7B-AB99-4D45-98E3-E36F11321A75}"/>
               </a:ext>
             </a:extLst>
           </p:cNvPr>
@@ -4207,7 +4232,7 @@
           <p:cNvPr id="18" name="">
             <a:extLst xmlns:a="http://schemas.openxmlformats.org/drawingml/2006/main">
               <a:ext uri="{FF2B5EF4-FFF2-40B4-BE49-F238E27FC236}">
-                <a16:creationId xmlns:a16="http://schemas.microsoft.com/office/drawing/2014/main" id="{CBFF2838-59FC-45E0-A922-16CF1BB3035C}"/>
+                <a16:creationId xmlns:a16="http://schemas.microsoft.com/office/drawing/2014/main" id="{07282E7F-B4C8-43DA-B757-52C74FAEB304}"/>
               </a:ext>
             </a:extLst>
           </p:cNvPr>
@@ -4287,7 +4312,7 @@
           <p:cNvPr id="19" name="">
             <a:extLst xmlns:a="http://schemas.openxmlformats.org/drawingml/2006/main">
               <a:ext uri="{FF2B5EF4-FFF2-40B4-BE49-F238E27FC236}">
-                <a16:creationId xmlns:a16="http://schemas.microsoft.com/office/drawing/2014/main" id="{538141E5-F1E5-4C73-A002-03869B8080D9}"/>
+                <a16:creationId xmlns:a16="http://schemas.microsoft.com/office/drawing/2014/main" id="{DCA7D4D8-D2D0-401F-B355-69C6D0A9C95E}"/>
               </a:ext>
             </a:extLst>
           </p:cNvPr>
@@ -4315,7 +4340,7 @@
           <p:cNvPr id="20" name="">
             <a:extLst xmlns:a="http://schemas.openxmlformats.org/drawingml/2006/main">
               <a:ext uri="{FF2B5EF4-FFF2-40B4-BE49-F238E27FC236}">
-                <a16:creationId xmlns:a16="http://schemas.microsoft.com/office/drawing/2014/main" id="{9C6DF48A-017D-4E51-940F-A0EF796A648C}"/>
+                <a16:creationId xmlns:a16="http://schemas.microsoft.com/office/drawing/2014/main" id="{BE1960FF-1ACD-48DA-8DC6-FC3991B3F23F}"/>
               </a:ext>
             </a:extLst>
           </p:cNvPr>
@@ -4372,7 +4397,7 @@
           <p:cNvPr id="21" name="">
             <a:extLst xmlns:a="http://schemas.openxmlformats.org/drawingml/2006/main">
               <a:ext uri="{FF2B5EF4-FFF2-40B4-BE49-F238E27FC236}">
-                <a16:creationId xmlns:a16="http://schemas.microsoft.com/office/drawing/2014/main" id="{01F863E2-CF13-47D5-B8FB-7E2040D6BF52}"/>
+                <a16:creationId xmlns:a16="http://schemas.microsoft.com/office/drawing/2014/main" id="{5D51C37A-996D-4A33-8E38-E6764120AFB9}"/>
               </a:ext>
             </a:extLst>
           </p:cNvPr>
@@ -4402,7 +4427,7 @@
           <p:cNvPr id="22" name="">
             <a:extLst xmlns:a="http://schemas.openxmlformats.org/drawingml/2006/main">
               <a:ext uri="{FF2B5EF4-FFF2-40B4-BE49-F238E27FC236}">
-                <a16:creationId xmlns:a16="http://schemas.microsoft.com/office/drawing/2014/main" id="{F48106F8-DBA1-422D-8A73-1FD91FD996E0}"/>
+                <a16:creationId xmlns:a16="http://schemas.microsoft.com/office/drawing/2014/main" id="{7ADCB0F9-67F5-4380-ADAD-EDCAE878DBF5}"/>
               </a:ext>
             </a:extLst>
           </p:cNvPr>
@@ -4482,7 +4507,7 @@
           <p:cNvPr id="23" name="">
             <a:extLst xmlns:a="http://schemas.openxmlformats.org/drawingml/2006/main">
               <a:ext uri="{FF2B5EF4-FFF2-40B4-BE49-F238E27FC236}">
-                <a16:creationId xmlns:a16="http://schemas.microsoft.com/office/drawing/2014/main" id="{9B576209-E315-46E5-BEF2-5C3437D97108}"/>
+                <a16:creationId xmlns:a16="http://schemas.microsoft.com/office/drawing/2014/main" id="{D1961F66-54F5-4836-8962-4D0B83C68618}"/>
               </a:ext>
             </a:extLst>
           </p:cNvPr>
@@ -4510,7 +4535,7 @@
           <p:cNvPr id="24" name="">
             <a:extLst xmlns:a="http://schemas.openxmlformats.org/drawingml/2006/main">
               <a:ext uri="{FF2B5EF4-FFF2-40B4-BE49-F238E27FC236}">
-                <a16:creationId xmlns:a16="http://schemas.microsoft.com/office/drawing/2014/main" id="{BE212C12-E28F-4DEE-83F0-D09DC0994DC8}"/>
+                <a16:creationId xmlns:a16="http://schemas.microsoft.com/office/drawing/2014/main" id="{51BD8417-4C2E-4308-BE38-FAE6898C9C50}"/>
               </a:ext>
             </a:extLst>
           </p:cNvPr>
@@ -4567,7 +4592,7 @@
           <p:cNvPr id="25" name="">
             <a:extLst xmlns:a="http://schemas.openxmlformats.org/drawingml/2006/main">
               <a:ext uri="{FF2B5EF4-FFF2-40B4-BE49-F238E27FC236}">
-                <a16:creationId xmlns:a16="http://schemas.microsoft.com/office/drawing/2014/main" id="{B9284083-0116-48C9-A4C3-F07F307C2ED7}"/>
+                <a16:creationId xmlns:a16="http://schemas.microsoft.com/office/drawing/2014/main" id="{305E8ADE-314F-41C5-8035-CA0E9221CD8B}"/>
               </a:ext>
             </a:extLst>
           </p:cNvPr>
@@ -4597,7 +4622,7 @@
           <p:cNvPr id="26" name="">
             <a:extLst xmlns:a="http://schemas.openxmlformats.org/drawingml/2006/main">
               <a:ext uri="{FF2B5EF4-FFF2-40B4-BE49-F238E27FC236}">
-                <a16:creationId xmlns:a16="http://schemas.microsoft.com/office/drawing/2014/main" id="{A01D2851-C340-418A-8552-1403B5311470}"/>
+                <a16:creationId xmlns:a16="http://schemas.microsoft.com/office/drawing/2014/main" id="{2092F0BD-37B1-4AF7-99D4-917E46BE6887}"/>
               </a:ext>
             </a:extLst>
           </p:cNvPr>
@@ -4677,7 +4702,7 @@
           <p:cNvPr id="27" name="">
             <a:extLst xmlns:a="http://schemas.openxmlformats.org/drawingml/2006/main">
               <a:ext uri="{FF2B5EF4-FFF2-40B4-BE49-F238E27FC236}">
-                <a16:creationId xmlns:a16="http://schemas.microsoft.com/office/drawing/2014/main" id="{02296C83-0445-47C0-AA6D-9A8718BD364B}"/>
+                <a16:creationId xmlns:a16="http://schemas.microsoft.com/office/drawing/2014/main" id="{2C9C82E1-F8EB-430C-A331-AAA5088F830F}"/>
               </a:ext>
             </a:extLst>
           </p:cNvPr>
@@ -4705,7 +4730,7 @@
           <p:cNvPr id="28" name="">
             <a:extLst xmlns:a="http://schemas.openxmlformats.org/drawingml/2006/main">
               <a:ext uri="{FF2B5EF4-FFF2-40B4-BE49-F238E27FC236}">
-                <a16:creationId xmlns:a16="http://schemas.microsoft.com/office/drawing/2014/main" id="{E8A75EDC-6DDD-4250-A1DB-BDB9D933CA77}"/>
+                <a16:creationId xmlns:a16="http://schemas.microsoft.com/office/drawing/2014/main" id="{31A66588-B9DF-4AAE-A4E2-53D2127A4874}"/>
               </a:ext>
             </a:extLst>
           </p:cNvPr>
@@ -4762,7 +4787,7 @@
           <p:cNvPr id="29" name="">
             <a:extLst xmlns:a="http://schemas.openxmlformats.org/drawingml/2006/main">
               <a:ext uri="{FF2B5EF4-FFF2-40B4-BE49-F238E27FC236}">
-                <a16:creationId xmlns:a16="http://schemas.microsoft.com/office/drawing/2014/main" id="{4C0DE860-17E2-480D-9A8B-BA9C8C2B19F4}"/>
+                <a16:creationId xmlns:a16="http://schemas.microsoft.com/office/drawing/2014/main" id="{60CBE930-8318-4F75-8A37-11F845DBDDEA}"/>
               </a:ext>
             </a:extLst>
           </p:cNvPr>
@@ -4792,7 +4817,7 @@
           <p:cNvPr id="30" name="">
             <a:extLst xmlns:a="http://schemas.openxmlformats.org/drawingml/2006/main">
               <a:ext uri="{FF2B5EF4-FFF2-40B4-BE49-F238E27FC236}">
-                <a16:creationId xmlns:a16="http://schemas.microsoft.com/office/drawing/2014/main" id="{C73C92FB-72C5-4A03-A42A-B6CF37CAA7B3}"/>
+                <a16:creationId xmlns:a16="http://schemas.microsoft.com/office/drawing/2014/main" id="{2EEB660F-8567-4523-B63F-7A41E0EC9C52}"/>
               </a:ext>
             </a:extLst>
           </p:cNvPr>
@@ -4872,7 +4897,7 @@
           <p:cNvPr id="31" name="">
             <a:extLst xmlns:a="http://schemas.openxmlformats.org/drawingml/2006/main">
               <a:ext uri="{FF2B5EF4-FFF2-40B4-BE49-F238E27FC236}">
-                <a16:creationId xmlns:a16="http://schemas.microsoft.com/office/drawing/2014/main" id="{0C9EAF6C-2459-463B-A857-8D84B5187604}"/>
+                <a16:creationId xmlns:a16="http://schemas.microsoft.com/office/drawing/2014/main" id="{BD2C9165-871B-454B-B4CD-05C9E9C0B901}"/>
               </a:ext>
             </a:extLst>
           </p:cNvPr>
@@ -4900,7 +4925,7 @@
           <p:cNvPr id="32" name="">
             <a:extLst xmlns:a="http://schemas.openxmlformats.org/drawingml/2006/main">
               <a:ext uri="{FF2B5EF4-FFF2-40B4-BE49-F238E27FC236}">
-                <a16:creationId xmlns:a16="http://schemas.microsoft.com/office/drawing/2014/main" id="{E32CF797-C025-4CE4-BC07-B4C31855A301}"/>
+                <a16:creationId xmlns:a16="http://schemas.microsoft.com/office/drawing/2014/main" id="{69FDE02B-3E94-4372-B966-6B87394A8A55}"/>
               </a:ext>
             </a:extLst>
           </p:cNvPr>
@@ -4957,7 +4982,7 @@
           <p:cNvPr id="33" name="">
             <a:extLst xmlns:a="http://schemas.openxmlformats.org/drawingml/2006/main">
               <a:ext uri="{FF2B5EF4-FFF2-40B4-BE49-F238E27FC236}">
-                <a16:creationId xmlns:a16="http://schemas.microsoft.com/office/drawing/2014/main" id="{209972D8-FF00-483B-8543-E0BB80F7C5C4}"/>
+                <a16:creationId xmlns:a16="http://schemas.microsoft.com/office/drawing/2014/main" id="{7B163A8E-E904-4A3F-9A22-6E0292CAC722}"/>
               </a:ext>
             </a:extLst>
           </p:cNvPr>
@@ -4987,7 +5012,7 @@
           <p:cNvPr id="34" name="">
             <a:extLst xmlns:a="http://schemas.openxmlformats.org/drawingml/2006/main">
               <a:ext uri="{FF2B5EF4-FFF2-40B4-BE49-F238E27FC236}">
-                <a16:creationId xmlns:a16="http://schemas.microsoft.com/office/drawing/2014/main" id="{AA6649F8-DBD8-4183-AA70-DB3D8B67E653}"/>
+                <a16:creationId xmlns:a16="http://schemas.microsoft.com/office/drawing/2014/main" id="{8D7780C1-B646-442D-A5CD-36153A634580}"/>
               </a:ext>
             </a:extLst>
           </p:cNvPr>
@@ -5067,7 +5092,7 @@
           <p:cNvPr id="35" name="">
             <a:extLst xmlns:a="http://schemas.openxmlformats.org/drawingml/2006/main">
               <a:ext uri="{FF2B5EF4-FFF2-40B4-BE49-F238E27FC236}">
-                <a16:creationId xmlns:a16="http://schemas.microsoft.com/office/drawing/2014/main" id="{798C0332-17C5-4DF7-BAA2-7BFA7143E1EE}"/>
+                <a16:creationId xmlns:a16="http://schemas.microsoft.com/office/drawing/2014/main" id="{D7F5E057-5CEF-4427-8365-D1E01BE1A482}"/>
               </a:ext>
             </a:extLst>
           </p:cNvPr>
@@ -5095,7 +5120,7 @@
           <p:cNvPr id="36" name="">
             <a:extLst xmlns:a="http://schemas.openxmlformats.org/drawingml/2006/main">
               <a:ext uri="{FF2B5EF4-FFF2-40B4-BE49-F238E27FC236}">
-                <a16:creationId xmlns:a16="http://schemas.microsoft.com/office/drawing/2014/main" id="{044C2F16-F337-4BBE-AC1C-7A0239BCBD9C}"/>
+                <a16:creationId xmlns:a16="http://schemas.microsoft.com/office/drawing/2014/main" id="{9AD858C2-0FC7-4415-888D-753A1051DDE4}"/>
               </a:ext>
             </a:extLst>
           </p:cNvPr>
@@ -5152,7 +5177,7 @@
           <p:cNvPr id="37" name="">
             <a:extLst xmlns:a="http://schemas.openxmlformats.org/drawingml/2006/main">
               <a:ext uri="{FF2B5EF4-FFF2-40B4-BE49-F238E27FC236}">
-                <a16:creationId xmlns:a16="http://schemas.microsoft.com/office/drawing/2014/main" id="{0C64D53B-B445-4351-AB90-1052A0687FE7}"/>
+                <a16:creationId xmlns:a16="http://schemas.microsoft.com/office/drawing/2014/main" id="{DD0F5CED-0497-4450-8C1B-BA77A9350939}"/>
               </a:ext>
             </a:extLst>
           </p:cNvPr>
@@ -5182,7 +5207,7 @@
           <p:cNvPr id="38" name="">
             <a:extLst xmlns:a="http://schemas.openxmlformats.org/drawingml/2006/main">
               <a:ext uri="{FF2B5EF4-FFF2-40B4-BE49-F238E27FC236}">
-                <a16:creationId xmlns:a16="http://schemas.microsoft.com/office/drawing/2014/main" id="{C804A706-6F52-4CDB-A086-07873FDFCC1B}"/>
+                <a16:creationId xmlns:a16="http://schemas.microsoft.com/office/drawing/2014/main" id="{336D1030-010D-48CD-B37A-FA4719AD0D74}"/>
               </a:ext>
             </a:extLst>
           </p:cNvPr>
@@ -5262,7 +5287,7 @@
           <p:cNvPr id="39" name="">
             <a:extLst xmlns:a="http://schemas.openxmlformats.org/drawingml/2006/main">
               <a:ext uri="{FF2B5EF4-FFF2-40B4-BE49-F238E27FC236}">
-                <a16:creationId xmlns:a16="http://schemas.microsoft.com/office/drawing/2014/main" id="{A05CBF11-6E4E-49EA-8C9E-C85BA13A5D3E}"/>
+                <a16:creationId xmlns:a16="http://schemas.microsoft.com/office/drawing/2014/main" id="{85C15D18-081E-46D4-907D-4C2D0C3ED4D7}"/>
               </a:ext>
             </a:extLst>
           </p:cNvPr>
@@ -5290,7 +5315,7 @@
           <p:cNvPr id="40" name="">
             <a:extLst xmlns:a="http://schemas.openxmlformats.org/drawingml/2006/main">
               <a:ext uri="{FF2B5EF4-FFF2-40B4-BE49-F238E27FC236}">
-                <a16:creationId xmlns:a16="http://schemas.microsoft.com/office/drawing/2014/main" id="{E440A5E6-D955-49F7-8F26-12640304BC1F}"/>
+                <a16:creationId xmlns:a16="http://schemas.microsoft.com/office/drawing/2014/main" id="{F0915395-13FA-40B3-85D8-5052EBE384A1}"/>
               </a:ext>
             </a:extLst>
           </p:cNvPr>
@@ -5347,7 +5372,7 @@
           <p:cNvPr id="41" name="">
             <a:extLst xmlns:a="http://schemas.openxmlformats.org/drawingml/2006/main">
               <a:ext uri="{FF2B5EF4-FFF2-40B4-BE49-F238E27FC236}">
-                <a16:creationId xmlns:a16="http://schemas.microsoft.com/office/drawing/2014/main" id="{2C32FCC6-219D-4D1E-A388-9A8E90B96398}"/>
+                <a16:creationId xmlns:a16="http://schemas.microsoft.com/office/drawing/2014/main" id="{E7BA170E-A62A-4432-A3E1-CB94DF9A64ED}"/>
               </a:ext>
             </a:extLst>
           </p:cNvPr>
@@ -5377,7 +5402,7 @@
           <p:cNvPr id="42" name="">
             <a:extLst xmlns:a="http://schemas.openxmlformats.org/drawingml/2006/main">
               <a:ext uri="{FF2B5EF4-FFF2-40B4-BE49-F238E27FC236}">
-                <a16:creationId xmlns:a16="http://schemas.microsoft.com/office/drawing/2014/main" id="{B48F5BDC-B87E-4D5A-AE75-AD3171C6E4A4}"/>
+                <a16:creationId xmlns:a16="http://schemas.microsoft.com/office/drawing/2014/main" id="{B2098A97-241F-4EAD-B652-AD0128D89413}"/>
               </a:ext>
             </a:extLst>
           </p:cNvPr>
@@ -5457,7 +5482,7 @@
           <p:cNvPr id="43" name="">
             <a:extLst xmlns:a="http://schemas.openxmlformats.org/drawingml/2006/main">
               <a:ext uri="{FF2B5EF4-FFF2-40B4-BE49-F238E27FC236}">
-                <a16:creationId xmlns:a16="http://schemas.microsoft.com/office/drawing/2014/main" id="{AA4BCAF6-C137-4B85-ABFE-6B09F228FEA8}"/>
+                <a16:creationId xmlns:a16="http://schemas.microsoft.com/office/drawing/2014/main" id="{3C4C230E-1D61-41E4-B8C4-4136C7B11C0F}"/>
               </a:ext>
             </a:extLst>
           </p:cNvPr>
@@ -5485,7 +5510,7 @@
           <p:cNvPr id="44" name="">
             <a:extLst xmlns:a="http://schemas.openxmlformats.org/drawingml/2006/main">
               <a:ext uri="{FF2B5EF4-FFF2-40B4-BE49-F238E27FC236}">
-                <a16:creationId xmlns:a16="http://schemas.microsoft.com/office/drawing/2014/main" id="{432640C9-0B8D-48C1-9261-4EA177775C2B}"/>
+                <a16:creationId xmlns:a16="http://schemas.microsoft.com/office/drawing/2014/main" id="{590D64BE-5627-4576-AE74-71E14231CA75}"/>
               </a:ext>
             </a:extLst>
           </p:cNvPr>
@@ -5542,7 +5567,7 @@
           <p:cNvPr id="45" name="">
             <a:extLst xmlns:a="http://schemas.openxmlformats.org/drawingml/2006/main">
               <a:ext uri="{FF2B5EF4-FFF2-40B4-BE49-F238E27FC236}">
-                <a16:creationId xmlns:a16="http://schemas.microsoft.com/office/drawing/2014/main" id="{86FBC0A7-227E-4566-9297-A0166030FDC3}"/>
+                <a16:creationId xmlns:a16="http://schemas.microsoft.com/office/drawing/2014/main" id="{6DEB19DB-F92E-45EA-9C56-776B40D6B489}"/>
               </a:ext>
             </a:extLst>
           </p:cNvPr>
@@ -5572,7 +5597,7 @@
           <p:cNvPr id="46" name="">
             <a:extLst xmlns:a="http://schemas.openxmlformats.org/drawingml/2006/main">
               <a:ext uri="{FF2B5EF4-FFF2-40B4-BE49-F238E27FC236}">
-                <a16:creationId xmlns:a16="http://schemas.microsoft.com/office/drawing/2014/main" id="{E19D5482-97DB-43F7-84FC-9283D92C860C}"/>
+                <a16:creationId xmlns:a16="http://schemas.microsoft.com/office/drawing/2014/main" id="{FE3EE52F-030B-42E3-9A71-01CFB781440E}"/>
               </a:ext>
             </a:extLst>
           </p:cNvPr>
@@ -5877,7 +5902,7 @@
           <p:cNvPr id="56" name="">
             <a:extLst xmlns:a="http://schemas.openxmlformats.org/drawingml/2006/main">
               <a:ext uri="{FF2B5EF4-FFF2-40B4-BE49-F238E27FC236}">
-                <a16:creationId xmlns:a16="http://schemas.microsoft.com/office/drawing/2014/main" id="{22C58892-6FFF-441D-A91E-BA6038F16747}"/>
+                <a16:creationId xmlns:a16="http://schemas.microsoft.com/office/drawing/2014/main" id="{ED40F6D8-E96A-44A5-91AD-7FAE131DE458}"/>
               </a:ext>
             </a:extLst>
           </p:cNvPr>
@@ -5934,7 +5959,7 @@
           <p:cNvPr id="57" name="">
             <a:extLst xmlns:a="http://schemas.openxmlformats.org/drawingml/2006/main">
               <a:ext uri="{FF2B5EF4-FFF2-40B4-BE49-F238E27FC236}">
-                <a16:creationId xmlns:a16="http://schemas.microsoft.com/office/drawing/2014/main" id="{EF09786F-386B-49C6-ACDB-BE637F189C1E}"/>
+                <a16:creationId xmlns:a16="http://schemas.microsoft.com/office/drawing/2014/main" id="{13D3F89C-63C9-410D-ACA3-82A1661E4218}"/>
               </a:ext>
             </a:extLst>
           </p:cNvPr>
@@ -5989,7 +6014,7 @@
     </p:spTree>
     <p:extLst>
       <p:ext uri="{BB962C8B-B14F-4D97-AF65-F5344CB8AC3E}">
-        <p14:creationId xmlns:p14="http://schemas.microsoft.com/office/powerpoint/2010/main" val="758712969"/>
+        <p14:creationId xmlns:p14="http://schemas.microsoft.com/office/powerpoint/2010/main" val="211860750"/>
       </p:ext>
     </p:extLst>
   </p:cSld>
@@ -6020,7 +6045,7 @@
           <p:cNvPr id="12" name="">
             <a:extLst xmlns:a="http://schemas.openxmlformats.org/drawingml/2006/main">
               <a:ext uri="{FF2B5EF4-FFF2-40B4-BE49-F238E27FC236}">
-                <a16:creationId xmlns:a16="http://schemas.microsoft.com/office/drawing/2014/main" id="{F6DD2A06-CEF1-4BCD-81EB-73FDDE051E74}"/>
+                <a16:creationId xmlns:a16="http://schemas.microsoft.com/office/drawing/2014/main" id="{4F214116-CAD7-4531-AC7F-C0D4B8B1133C}"/>
               </a:ext>
             </a:extLst>
           </p:cNvPr>
@@ -6077,7 +6102,7 @@
           <p:cNvPr id="2" name="">
             <a:extLst xmlns:a="http://schemas.openxmlformats.org/drawingml/2006/main">
               <a:ext uri="{FF2B5EF4-FFF2-40B4-BE49-F238E27FC236}">
-                <a16:creationId xmlns:a16="http://schemas.microsoft.com/office/drawing/2014/main" id="{51A5947F-6A76-42C6-84E5-5690BCE60DE7}"/>
+                <a16:creationId xmlns:a16="http://schemas.microsoft.com/office/drawing/2014/main" id="{565DD42C-0D49-4570-BC64-1FA96F23A9DD}"/>
               </a:ext>
             </a:extLst>
           </p:cNvPr>
@@ -6107,7 +6132,7 @@
           <p:cNvPr id="3" name="">
             <a:extLst xmlns:a="http://schemas.openxmlformats.org/drawingml/2006/main">
               <a:ext uri="{FF2B5EF4-FFF2-40B4-BE49-F238E27FC236}">
-                <a16:creationId xmlns:a16="http://schemas.microsoft.com/office/drawing/2014/main" id="{F0DD799D-E729-4A65-8CE9-6C497618A09E}"/>
+                <a16:creationId xmlns:a16="http://schemas.microsoft.com/office/drawing/2014/main" id="{7F95C882-D52A-4374-92D5-0A87C6B1BBEB}"/>
               </a:ext>
             </a:extLst>
           </p:cNvPr>
@@ -6164,7 +6189,7 @@
           <p:cNvPr id="4" name="">
             <a:extLst xmlns:a="http://schemas.openxmlformats.org/drawingml/2006/main">
               <a:ext uri="{FF2B5EF4-FFF2-40B4-BE49-F238E27FC236}">
-                <a16:creationId xmlns:a16="http://schemas.microsoft.com/office/drawing/2014/main" id="{92784A86-1C14-4209-B4D4-49C08FE1C8BC}"/>
+                <a16:creationId xmlns:a16="http://schemas.microsoft.com/office/drawing/2014/main" id="{15A5CEDD-D5B7-4B24-A86B-96A75E25606B}"/>
               </a:ext>
             </a:extLst>
           </p:cNvPr>
@@ -6221,7 +6246,7 @@
           <p:cNvPr id="5" name="">
             <a:extLst xmlns:a="http://schemas.openxmlformats.org/drawingml/2006/main">
               <a:ext uri="{FF2B5EF4-FFF2-40B4-BE49-F238E27FC236}">
-                <a16:creationId xmlns:a16="http://schemas.microsoft.com/office/drawing/2014/main" id="{77C9031E-21E5-43E7-932E-0097742ECC20}"/>
+                <a16:creationId xmlns:a16="http://schemas.microsoft.com/office/drawing/2014/main" id="{CF665E81-C7BE-4ADB-89E5-59F0F5087E37}"/>
               </a:ext>
             </a:extLst>
           </p:cNvPr>
@@ -6285,7 +6310,7 @@
         </p:xfrm>
         <a:graphic xmlns:a="http://schemas.openxmlformats.org/drawingml/2006/main">
           <a:graphicData uri="http://schemas.openxmlformats.org/drawingml/2006/chart">
-            <c:chart xmlns:r="http://schemas.openxmlformats.org/officeDocument/2006/relationships" xmlns:c="http://schemas.openxmlformats.org/drawingml/2006/chart" r:id="R3745892191e44047"/>
+            <c:chart xmlns:r="http://schemas.openxmlformats.org/officeDocument/2006/relationships" xmlns:c="http://schemas.openxmlformats.org/drawingml/2006/chart" r:id="R4d59c7667ec2488b"/>
           </a:graphicData>
         </a:graphic>
       </p:graphicFrame>
@@ -6294,7 +6319,7 @@
           <p:cNvPr id="7" name="">
             <a:extLst xmlns:a="http://schemas.openxmlformats.org/drawingml/2006/main">
               <a:ext uri="{FF2B5EF4-FFF2-40B4-BE49-F238E27FC236}">
-                <a16:creationId xmlns:a16="http://schemas.microsoft.com/office/drawing/2014/main" id="{E68F5AED-8F1B-4E3C-AB64-712D448188B2}"/>
+                <a16:creationId xmlns:a16="http://schemas.microsoft.com/office/drawing/2014/main" id="{614CC316-A3FF-46A7-AB50-26C299603F21}"/>
               </a:ext>
             </a:extLst>
           </p:cNvPr>
@@ -6351,7 +6376,7 @@
           <p:cNvPr id="8" name="">
             <a:extLst xmlns:a="http://schemas.openxmlformats.org/drawingml/2006/main">
               <a:ext uri="{FF2B5EF4-FFF2-40B4-BE49-F238E27FC236}">
-                <a16:creationId xmlns:a16="http://schemas.microsoft.com/office/drawing/2014/main" id="{F9845862-E5F7-404F-8271-1F833E2A5C65}"/>
+                <a16:creationId xmlns:a16="http://schemas.microsoft.com/office/drawing/2014/main" id="{86693ADE-6017-45B6-8DD1-AC13231D6F00}"/>
               </a:ext>
             </a:extLst>
           </p:cNvPr>
@@ -6381,7 +6406,7 @@
           <p:cNvPr id="9" name="">
             <a:extLst xmlns:a="http://schemas.openxmlformats.org/drawingml/2006/main">
               <a:ext uri="{FF2B5EF4-FFF2-40B4-BE49-F238E27FC236}">
-                <a16:creationId xmlns:a16="http://schemas.microsoft.com/office/drawing/2014/main" id="{A7160B25-AB40-4CA2-820B-CA7000D585C8}"/>
+                <a16:creationId xmlns:a16="http://schemas.microsoft.com/office/drawing/2014/main" id="{8807E750-3CB6-452A-B354-E27B7BF5583C}"/>
               </a:ext>
             </a:extLst>
           </p:cNvPr>
@@ -6484,7 +6509,7 @@
           <p:cNvPr id="10" name="">
             <a:extLst xmlns:a="http://schemas.openxmlformats.org/drawingml/2006/main">
               <a:ext uri="{FF2B5EF4-FFF2-40B4-BE49-F238E27FC236}">
-                <a16:creationId xmlns:a16="http://schemas.microsoft.com/office/drawing/2014/main" id="{00EBBC9B-58C3-4A14-A0C9-43EC89EE6648}"/>
+                <a16:creationId xmlns:a16="http://schemas.microsoft.com/office/drawing/2014/main" id="{90D9187B-9131-4346-84AD-E7DC14A971ED}"/>
               </a:ext>
             </a:extLst>
           </p:cNvPr>
@@ -6531,7 +6556,7 @@
                 <a:ea typeface="Arial"/>
                 <a:cs typeface="Arial"/>
               </a:rPr>
-              <a:t>Next: real water use</a:t>
+              <a:t>Next: train and test</a:t>
             </a:r>
           </a:p>
           <a:p xmlns:a="http://schemas.openxmlformats.org/drawingml/2006/main">
@@ -6554,7 +6579,7 @@
                 <a:ea typeface="Arial"/>
                 <a:cs typeface="Arial"/>
               </a:rPr>
-              <a:t>and area measurements.</a:t>
+              <a:t>on real measurements.</a:t>
             </a:r>
           </a:p>
         </p:txBody>
@@ -6564,7 +6589,7 @@
           <p:cNvPr id="11" name="">
             <a:extLst xmlns:a="http://schemas.openxmlformats.org/drawingml/2006/main">
               <a:ext uri="{FF2B5EF4-FFF2-40B4-BE49-F238E27FC236}">
-                <a16:creationId xmlns:a16="http://schemas.microsoft.com/office/drawing/2014/main" id="{F3B0D266-41D3-4A9D-8AFA-861411695280}"/>
+                <a16:creationId xmlns:a16="http://schemas.microsoft.com/office/drawing/2014/main" id="{C1DC3C26-DF6C-44A9-9752-903C15D8B461}"/>
               </a:ext>
             </a:extLst>
           </p:cNvPr>
@@ -6642,7 +6667,7 @@
     </p:spTree>
     <p:extLst>
       <p:ext uri="{BB962C8B-B14F-4D97-AF65-F5344CB8AC3E}">
-        <p14:creationId xmlns:p14="http://schemas.microsoft.com/office/powerpoint/2010/main" val="1010966740"/>
+        <p14:creationId xmlns:p14="http://schemas.microsoft.com/office/powerpoint/2010/main" val="803390419"/>
       </p:ext>
     </p:extLst>
   </p:cSld>
@@ -6673,7 +6698,7 @@
           <p:cNvPr id="14" name="">
             <a:extLst xmlns:a="http://schemas.openxmlformats.org/drawingml/2006/main">
               <a:ext uri="{FF2B5EF4-FFF2-40B4-BE49-F238E27FC236}">
-                <a16:creationId xmlns:a16="http://schemas.microsoft.com/office/drawing/2014/main" id="{637CFA71-841A-4CD0-971D-01846F3A06BF}"/>
+                <a16:creationId xmlns:a16="http://schemas.microsoft.com/office/drawing/2014/main" id="{E9F5AE39-60C5-474B-B2C5-09BCF9C8D90E}"/>
               </a:ext>
             </a:extLst>
           </p:cNvPr>
@@ -6730,7 +6755,7 @@
           <p:cNvPr id="2" name="">
             <a:extLst xmlns:a="http://schemas.openxmlformats.org/drawingml/2006/main">
               <a:ext uri="{FF2B5EF4-FFF2-40B4-BE49-F238E27FC236}">
-                <a16:creationId xmlns:a16="http://schemas.microsoft.com/office/drawing/2014/main" id="{FD614480-E71F-44A5-B52D-76C557F1F36B}"/>
+                <a16:creationId xmlns:a16="http://schemas.microsoft.com/office/drawing/2014/main" id="{1A87CE41-8959-4A25-A264-A5A272A06CF2}"/>
               </a:ext>
             </a:extLst>
           </p:cNvPr>
@@ -6760,7 +6785,7 @@
           <p:cNvPr id="3" name="">
             <a:extLst xmlns:a="http://schemas.openxmlformats.org/drawingml/2006/main">
               <a:ext uri="{FF2B5EF4-FFF2-40B4-BE49-F238E27FC236}">
-                <a16:creationId xmlns:a16="http://schemas.microsoft.com/office/drawing/2014/main" id="{538E8079-9AB5-4A08-AE24-5004B0A804AE}"/>
+                <a16:creationId xmlns:a16="http://schemas.microsoft.com/office/drawing/2014/main" id="{41093080-5E95-418F-B5A2-6F2E464F2FEC}"/>
               </a:ext>
             </a:extLst>
           </p:cNvPr>
@@ -6817,7 +6842,7 @@
           <p:cNvPr id="4" name="">
             <a:extLst xmlns:a="http://schemas.openxmlformats.org/drawingml/2006/main">
               <a:ext uri="{FF2B5EF4-FFF2-40B4-BE49-F238E27FC236}">
-                <a16:creationId xmlns:a16="http://schemas.microsoft.com/office/drawing/2014/main" id="{7B49761C-95D0-4EC5-BA73-D5C60C1E2858}"/>
+                <a16:creationId xmlns:a16="http://schemas.microsoft.com/office/drawing/2014/main" id="{119B99B1-B338-434A-AE7E-DF6D5EFCA2D5}"/>
               </a:ext>
             </a:extLst>
           </p:cNvPr>
@@ -6874,7 +6899,7 @@
           <p:cNvPr id="5" name="">
             <a:extLst xmlns:a="http://schemas.openxmlformats.org/drawingml/2006/main">
               <a:ext uri="{FF2B5EF4-FFF2-40B4-BE49-F238E27FC236}">
-                <a16:creationId xmlns:a16="http://schemas.microsoft.com/office/drawing/2014/main" id="{5B7ECDAD-29F1-472B-A72A-C474514B3E33}"/>
+                <a16:creationId xmlns:a16="http://schemas.microsoft.com/office/drawing/2014/main" id="{389D5CF2-33EC-4EA4-975C-59A088241E75}"/>
               </a:ext>
             </a:extLst>
           </p:cNvPr>
@@ -6938,7 +6963,7 @@
         </p:xfrm>
         <a:graphic xmlns:a="http://schemas.openxmlformats.org/drawingml/2006/main">
           <a:graphicData uri="http://schemas.openxmlformats.org/drawingml/2006/chart">
-            <c:chart xmlns:r="http://schemas.openxmlformats.org/officeDocument/2006/relationships" xmlns:c="http://schemas.openxmlformats.org/drawingml/2006/chart" r:id="R084d955eb4544d31"/>
+            <c:chart xmlns:r="http://schemas.openxmlformats.org/officeDocument/2006/relationships" xmlns:c="http://schemas.openxmlformats.org/drawingml/2006/chart" r:id="R0812704257764b22"/>
           </a:graphicData>
         </a:graphic>
       </p:graphicFrame>
@@ -6947,7 +6972,7 @@
           <p:cNvPr id="7" name="">
             <a:extLst xmlns:a="http://schemas.openxmlformats.org/drawingml/2006/main">
               <a:ext uri="{FF2B5EF4-FFF2-40B4-BE49-F238E27FC236}">
-                <a16:creationId xmlns:a16="http://schemas.microsoft.com/office/drawing/2014/main" id="{ED39EC02-9F59-4905-A00F-721B0D2BCD04}"/>
+                <a16:creationId xmlns:a16="http://schemas.microsoft.com/office/drawing/2014/main" id="{2CB172E5-EEA0-4F03-8A83-CBD7E9C668CB}"/>
               </a:ext>
             </a:extLst>
           </p:cNvPr>
@@ -7004,7 +7029,7 @@
           <p:cNvPr id="8" name="">
             <a:extLst xmlns:a="http://schemas.openxmlformats.org/drawingml/2006/main">
               <a:ext uri="{FF2B5EF4-FFF2-40B4-BE49-F238E27FC236}">
-                <a16:creationId xmlns:a16="http://schemas.microsoft.com/office/drawing/2014/main" id="{B8C973D4-225A-4B41-AB65-C4658A1C8CF3}"/>
+                <a16:creationId xmlns:a16="http://schemas.microsoft.com/office/drawing/2014/main" id="{99A402B1-276C-4F6C-9E76-B8D8F6F2DD9B}"/>
               </a:ext>
             </a:extLst>
           </p:cNvPr>
@@ -7034,7 +7059,7 @@
           <p:cNvPr id="9" name="">
             <a:extLst xmlns:a="http://schemas.openxmlformats.org/drawingml/2006/main">
               <a:ext uri="{FF2B5EF4-FFF2-40B4-BE49-F238E27FC236}">
-                <a16:creationId xmlns:a16="http://schemas.microsoft.com/office/drawing/2014/main" id="{0473EFFC-C2DF-4B22-9A4B-F042FE76C2F6}"/>
+                <a16:creationId xmlns:a16="http://schemas.microsoft.com/office/drawing/2014/main" id="{81F69A18-76A6-4B5E-8BD7-0974253F7B40}"/>
               </a:ext>
             </a:extLst>
           </p:cNvPr>
@@ -7091,7 +7116,7 @@
           <p:cNvPr id="10" name="">
             <a:extLst xmlns:a="http://schemas.openxmlformats.org/drawingml/2006/main">
               <a:ext uri="{FF2B5EF4-FFF2-40B4-BE49-F238E27FC236}">
-                <a16:creationId xmlns:a16="http://schemas.microsoft.com/office/drawing/2014/main" id="{281412E3-D887-4A08-BE5E-DF94FB1BCCDD}"/>
+                <a16:creationId xmlns:a16="http://schemas.microsoft.com/office/drawing/2014/main" id="{F1DEC269-C72C-4E1D-8172-544EBEF5AD5A}"/>
               </a:ext>
             </a:extLst>
           </p:cNvPr>
@@ -7171,7 +7196,7 @@
           <p:cNvPr id="11" name="">
             <a:extLst xmlns:a="http://schemas.openxmlformats.org/drawingml/2006/main">
               <a:ext uri="{FF2B5EF4-FFF2-40B4-BE49-F238E27FC236}">
-                <a16:creationId xmlns:a16="http://schemas.microsoft.com/office/drawing/2014/main" id="{7FB5A647-C512-4E67-89E4-258B0997971B}"/>
+                <a16:creationId xmlns:a16="http://schemas.microsoft.com/office/drawing/2014/main" id="{112E6BDC-DFA0-489C-B0E2-AB3D83CB8AB1}"/>
               </a:ext>
             </a:extLst>
           </p:cNvPr>
@@ -7201,7 +7226,7 @@
           <p:cNvPr id="12" name="">
             <a:extLst xmlns:a="http://schemas.openxmlformats.org/drawingml/2006/main">
               <a:ext uri="{FF2B5EF4-FFF2-40B4-BE49-F238E27FC236}">
-                <a16:creationId xmlns:a16="http://schemas.microsoft.com/office/drawing/2014/main" id="{8F497CD5-36E0-4EFF-86A8-65031C5EAB43}"/>
+                <a16:creationId xmlns:a16="http://schemas.microsoft.com/office/drawing/2014/main" id="{52B8AC20-C4A3-4E8D-B6F8-C99555FFCBE2}"/>
               </a:ext>
             </a:extLst>
           </p:cNvPr>
@@ -7281,7 +7306,7 @@
           <p:cNvPr id="13" name="">
             <a:extLst xmlns:a="http://schemas.openxmlformats.org/drawingml/2006/main">
               <a:ext uri="{FF2B5EF4-FFF2-40B4-BE49-F238E27FC236}">
-                <a16:creationId xmlns:a16="http://schemas.microsoft.com/office/drawing/2014/main" id="{83FCC845-1D02-456B-99F4-C3234AFF44A8}"/>
+                <a16:creationId xmlns:a16="http://schemas.microsoft.com/office/drawing/2014/main" id="{E9E20375-D43C-40EF-8D7E-9A2484DC2BE4}"/>
               </a:ext>
             </a:extLst>
           </p:cNvPr>
@@ -7336,7 +7361,7 @@
     </p:spTree>
     <p:extLst>
       <p:ext uri="{BB962C8B-B14F-4D97-AF65-F5344CB8AC3E}">
-        <p14:creationId xmlns:p14="http://schemas.microsoft.com/office/powerpoint/2010/main" val="1522190998"/>
+        <p14:creationId xmlns:p14="http://schemas.microsoft.com/office/powerpoint/2010/main" val="944463669"/>
       </p:ext>
     </p:extLst>
   </p:cSld>
@@ -7367,7 +7392,7 @@
           <p:cNvPr id="14" name="">
             <a:extLst xmlns:a="http://schemas.openxmlformats.org/drawingml/2006/main">
               <a:ext uri="{FF2B5EF4-FFF2-40B4-BE49-F238E27FC236}">
-                <a16:creationId xmlns:a16="http://schemas.microsoft.com/office/drawing/2014/main" id="{C58A8406-B5B0-4E99-BE6B-F41D4E64539F}"/>
+                <a16:creationId xmlns:a16="http://schemas.microsoft.com/office/drawing/2014/main" id="{235D0633-D6BC-4440-BC8B-8FD00AC5A35F}"/>
               </a:ext>
             </a:extLst>
           </p:cNvPr>
@@ -7424,7 +7449,7 @@
           <p:cNvPr id="2" name="">
             <a:extLst xmlns:a="http://schemas.openxmlformats.org/drawingml/2006/main">
               <a:ext uri="{FF2B5EF4-FFF2-40B4-BE49-F238E27FC236}">
-                <a16:creationId xmlns:a16="http://schemas.microsoft.com/office/drawing/2014/main" id="{C6CF7A76-7E81-4146-BCF6-6ABA63EE02EE}"/>
+                <a16:creationId xmlns:a16="http://schemas.microsoft.com/office/drawing/2014/main" id="{A1EB80B1-F67F-4910-A4F5-F02BCAA288DD}"/>
               </a:ext>
             </a:extLst>
           </p:cNvPr>
@@ -7454,7 +7479,7 @@
           <p:cNvPr id="3" name="">
             <a:extLst xmlns:a="http://schemas.openxmlformats.org/drawingml/2006/main">
               <a:ext uri="{FF2B5EF4-FFF2-40B4-BE49-F238E27FC236}">
-                <a16:creationId xmlns:a16="http://schemas.microsoft.com/office/drawing/2014/main" id="{32B0A4EA-8112-4FF3-918A-E5D50DEE6AA7}"/>
+                <a16:creationId xmlns:a16="http://schemas.microsoft.com/office/drawing/2014/main" id="{ED22B19F-80B1-4AC6-9586-96EC20D6CA59}"/>
               </a:ext>
             </a:extLst>
           </p:cNvPr>
@@ -7511,7 +7536,7 @@
           <p:cNvPr id="4" name="">
             <a:extLst xmlns:a="http://schemas.openxmlformats.org/drawingml/2006/main">
               <a:ext uri="{FF2B5EF4-FFF2-40B4-BE49-F238E27FC236}">
-                <a16:creationId xmlns:a16="http://schemas.microsoft.com/office/drawing/2014/main" id="{E018E243-5C5D-4EBD-B5CB-01DF6F6E0732}"/>
+                <a16:creationId xmlns:a16="http://schemas.microsoft.com/office/drawing/2014/main" id="{B59C7438-8D29-44CC-826B-39CBB71483B4}"/>
               </a:ext>
             </a:extLst>
           </p:cNvPr>
@@ -7568,7 +7593,7 @@
           <p:cNvPr id="5" name="">
             <a:extLst xmlns:a="http://schemas.openxmlformats.org/drawingml/2006/main">
               <a:ext uri="{FF2B5EF4-FFF2-40B4-BE49-F238E27FC236}">
-                <a16:creationId xmlns:a16="http://schemas.microsoft.com/office/drawing/2014/main" id="{B50A5917-C18E-4E09-9B3B-81508F7C336F}"/>
+                <a16:creationId xmlns:a16="http://schemas.microsoft.com/office/drawing/2014/main" id="{5739281B-B9F7-4F81-BC7D-FFF40132A127}"/>
               </a:ext>
             </a:extLst>
           </p:cNvPr>
@@ -7632,7 +7657,7 @@
         </p:xfrm>
         <a:graphic xmlns:a="http://schemas.openxmlformats.org/drawingml/2006/main">
           <a:graphicData uri="http://schemas.openxmlformats.org/drawingml/2006/chart">
-            <c:chart xmlns:r="http://schemas.openxmlformats.org/officeDocument/2006/relationships" xmlns:c="http://schemas.openxmlformats.org/drawingml/2006/chart" r:id="R9cbb31f594634d46"/>
+            <c:chart xmlns:r="http://schemas.openxmlformats.org/officeDocument/2006/relationships" xmlns:c="http://schemas.openxmlformats.org/drawingml/2006/chart" r:id="R86980e3acb5b4595"/>
           </a:graphicData>
         </a:graphic>
       </p:graphicFrame>
@@ -7641,7 +7666,7 @@
           <p:cNvPr id="7" name="">
             <a:extLst xmlns:a="http://schemas.openxmlformats.org/drawingml/2006/main">
               <a:ext uri="{FF2B5EF4-FFF2-40B4-BE49-F238E27FC236}">
-                <a16:creationId xmlns:a16="http://schemas.microsoft.com/office/drawing/2014/main" id="{15B09B2F-E2DC-4125-AA08-7AC7057656CA}"/>
+                <a16:creationId xmlns:a16="http://schemas.microsoft.com/office/drawing/2014/main" id="{422CC7F2-BA2D-4345-B8D8-F28CCC1115D1}"/>
               </a:ext>
             </a:extLst>
           </p:cNvPr>
@@ -7698,7 +7723,7 @@
           <p:cNvPr id="8" name="">
             <a:extLst xmlns:a="http://schemas.openxmlformats.org/drawingml/2006/main">
               <a:ext uri="{FF2B5EF4-FFF2-40B4-BE49-F238E27FC236}">
-                <a16:creationId xmlns:a16="http://schemas.microsoft.com/office/drawing/2014/main" id="{3DBD6285-817B-42C6-BF97-AA87B1D989F7}"/>
+                <a16:creationId xmlns:a16="http://schemas.microsoft.com/office/drawing/2014/main" id="{2AD0B1AE-377E-4113-A71A-D16BCDD84125}"/>
               </a:ext>
             </a:extLst>
           </p:cNvPr>
@@ -7728,7 +7753,7 @@
           <p:cNvPr id="9" name="">
             <a:extLst xmlns:a="http://schemas.openxmlformats.org/drawingml/2006/main">
               <a:ext uri="{FF2B5EF4-FFF2-40B4-BE49-F238E27FC236}">
-                <a16:creationId xmlns:a16="http://schemas.microsoft.com/office/drawing/2014/main" id="{26BD9CD4-CA44-4A88-B61E-FEA766C9CD29}"/>
+                <a16:creationId xmlns:a16="http://schemas.microsoft.com/office/drawing/2014/main" id="{75AEDFE7-B4E3-4F70-988E-CB5D40A50C74}"/>
               </a:ext>
             </a:extLst>
           </p:cNvPr>
@@ -7785,7 +7810,7 @@
           <p:cNvPr id="10" name="">
             <a:extLst xmlns:a="http://schemas.openxmlformats.org/drawingml/2006/main">
               <a:ext uri="{FF2B5EF4-FFF2-40B4-BE49-F238E27FC236}">
-                <a16:creationId xmlns:a16="http://schemas.microsoft.com/office/drawing/2014/main" id="{32FB10AE-0128-49F6-9924-EF44CF146484}"/>
+                <a16:creationId xmlns:a16="http://schemas.microsoft.com/office/drawing/2014/main" id="{9ACE69FB-D66E-4CE1-A24C-489D38794FEB}"/>
               </a:ext>
             </a:extLst>
           </p:cNvPr>
@@ -7865,7 +7890,7 @@
           <p:cNvPr id="11" name="">
             <a:extLst xmlns:a="http://schemas.openxmlformats.org/drawingml/2006/main">
               <a:ext uri="{FF2B5EF4-FFF2-40B4-BE49-F238E27FC236}">
-                <a16:creationId xmlns:a16="http://schemas.microsoft.com/office/drawing/2014/main" id="{CD8131FA-7B71-4D0F-8127-BD93E1FCAA51}"/>
+                <a16:creationId xmlns:a16="http://schemas.microsoft.com/office/drawing/2014/main" id="{8635A8D7-8EBB-4546-BBFC-82078655165F}"/>
               </a:ext>
             </a:extLst>
           </p:cNvPr>
@@ -7895,7 +7920,7 @@
           <p:cNvPr id="12" name="">
             <a:extLst xmlns:a="http://schemas.openxmlformats.org/drawingml/2006/main">
               <a:ext uri="{FF2B5EF4-FFF2-40B4-BE49-F238E27FC236}">
-                <a16:creationId xmlns:a16="http://schemas.microsoft.com/office/drawing/2014/main" id="{9C3792BC-BD10-46ED-A5E6-7EA9F1D287B6}"/>
+                <a16:creationId xmlns:a16="http://schemas.microsoft.com/office/drawing/2014/main" id="{59C4CBE9-CC95-4A60-9523-83DBF2E1E8C7}"/>
               </a:ext>
             </a:extLst>
           </p:cNvPr>
@@ -7952,7 +7977,7 @@
           <p:cNvPr id="13" name="">
             <a:extLst xmlns:a="http://schemas.openxmlformats.org/drawingml/2006/main">
               <a:ext uri="{FF2B5EF4-FFF2-40B4-BE49-F238E27FC236}">
-                <a16:creationId xmlns:a16="http://schemas.microsoft.com/office/drawing/2014/main" id="{F4CF21FA-E284-461D-AD0F-0CA3A3569C35}"/>
+                <a16:creationId xmlns:a16="http://schemas.microsoft.com/office/drawing/2014/main" id="{A92F4223-7BEE-4C03-A3BC-36AF790EEA80}"/>
               </a:ext>
             </a:extLst>
           </p:cNvPr>
@@ -8007,7 +8032,7 @@
     </p:spTree>
     <p:extLst>
       <p:ext uri="{BB962C8B-B14F-4D97-AF65-F5344CB8AC3E}">
-        <p14:creationId xmlns:p14="http://schemas.microsoft.com/office/powerpoint/2010/main" val="575367561"/>
+        <p14:creationId xmlns:p14="http://schemas.microsoft.com/office/powerpoint/2010/main" val="480517653"/>
       </p:ext>
     </p:extLst>
   </p:cSld>
@@ -8038,7 +8063,7 @@
           <p:cNvPr id="20" name="">
             <a:extLst xmlns:a="http://schemas.openxmlformats.org/drawingml/2006/main">
               <a:ext uri="{FF2B5EF4-FFF2-40B4-BE49-F238E27FC236}">
-                <a16:creationId xmlns:a16="http://schemas.microsoft.com/office/drawing/2014/main" id="{108F82B7-256C-4A58-98EC-A9AC0B2F890C}"/>
+                <a16:creationId xmlns:a16="http://schemas.microsoft.com/office/drawing/2014/main" id="{F5491690-CD99-4E93-8AA5-587218284CFB}"/>
               </a:ext>
             </a:extLst>
           </p:cNvPr>
@@ -8095,7 +8120,7 @@
           <p:cNvPr id="2" name="">
             <a:extLst xmlns:a="http://schemas.openxmlformats.org/drawingml/2006/main">
               <a:ext uri="{FF2B5EF4-FFF2-40B4-BE49-F238E27FC236}">
-                <a16:creationId xmlns:a16="http://schemas.microsoft.com/office/drawing/2014/main" id="{186CFD77-A83D-4C26-9024-32BEB6899643}"/>
+                <a16:creationId xmlns:a16="http://schemas.microsoft.com/office/drawing/2014/main" id="{8E8FA838-42FC-4DC7-ACB0-801DCEDFE70A}"/>
               </a:ext>
             </a:extLst>
           </p:cNvPr>
@@ -8125,7 +8150,7 @@
           <p:cNvPr id="3" name="">
             <a:extLst xmlns:a="http://schemas.openxmlformats.org/drawingml/2006/main">
               <a:ext uri="{FF2B5EF4-FFF2-40B4-BE49-F238E27FC236}">
-                <a16:creationId xmlns:a16="http://schemas.microsoft.com/office/drawing/2014/main" id="{A4B4E75F-1AA1-41D3-9E39-76A94D738A00}"/>
+                <a16:creationId xmlns:a16="http://schemas.microsoft.com/office/drawing/2014/main" id="{6C15CAF1-B543-4C29-BB1B-8E763DBF02EB}"/>
               </a:ext>
             </a:extLst>
           </p:cNvPr>
@@ -8182,7 +8207,7 @@
           <p:cNvPr id="4" name="">
             <a:extLst xmlns:a="http://schemas.openxmlformats.org/drawingml/2006/main">
               <a:ext uri="{FF2B5EF4-FFF2-40B4-BE49-F238E27FC236}">
-                <a16:creationId xmlns:a16="http://schemas.microsoft.com/office/drawing/2014/main" id="{930222B9-5089-4435-8506-29324AF29627}"/>
+                <a16:creationId xmlns:a16="http://schemas.microsoft.com/office/drawing/2014/main" id="{61D0FC07-3D63-4DB8-BFFF-4FA7DD23E045}"/>
               </a:ext>
             </a:extLst>
           </p:cNvPr>
@@ -8239,7 +8264,7 @@
           <p:cNvPr id="5" name="">
             <a:extLst xmlns:a="http://schemas.openxmlformats.org/drawingml/2006/main">
               <a:ext uri="{FF2B5EF4-FFF2-40B4-BE49-F238E27FC236}">
-                <a16:creationId xmlns:a16="http://schemas.microsoft.com/office/drawing/2014/main" id="{D6560180-3243-430D-9C69-E73BE0C502BD}"/>
+                <a16:creationId xmlns:a16="http://schemas.microsoft.com/office/drawing/2014/main" id="{6B7F58E0-928F-4C73-A151-02928F7FD3A3}"/>
               </a:ext>
             </a:extLst>
           </p:cNvPr>
@@ -8296,7 +8321,7 @@
           <p:cNvPr id="6" name="">
             <a:extLst xmlns:a="http://schemas.openxmlformats.org/drawingml/2006/main">
               <a:ext uri="{FF2B5EF4-FFF2-40B4-BE49-F238E27FC236}">
-                <a16:creationId xmlns:a16="http://schemas.microsoft.com/office/drawing/2014/main" id="{9734A96F-8902-4FA0-B878-7FA231B81F18}"/>
+                <a16:creationId xmlns:a16="http://schemas.microsoft.com/office/drawing/2014/main" id="{10C3646E-16EF-4866-B05B-9E4A6CAFDBA0}"/>
               </a:ext>
             </a:extLst>
           </p:cNvPr>
@@ -8353,7 +8378,7 @@
           <p:cNvPr id="7" name="">
             <a:extLst xmlns:a="http://schemas.openxmlformats.org/drawingml/2006/main">
               <a:ext uri="{FF2B5EF4-FFF2-40B4-BE49-F238E27FC236}">
-                <a16:creationId xmlns:a16="http://schemas.microsoft.com/office/drawing/2014/main" id="{41664B7B-8BC5-41F4-A7BB-2AD2B8CDE8D9}"/>
+                <a16:creationId xmlns:a16="http://schemas.microsoft.com/office/drawing/2014/main" id="{CBDC32E0-28DD-47D8-BB48-50B0AADBFBC3}"/>
               </a:ext>
             </a:extLst>
           </p:cNvPr>
@@ -8383,7 +8408,7 @@
           <p:cNvPr id="8" name="">
             <a:extLst xmlns:a="http://schemas.openxmlformats.org/drawingml/2006/main">
               <a:ext uri="{FF2B5EF4-FFF2-40B4-BE49-F238E27FC236}">
-                <a16:creationId xmlns:a16="http://schemas.microsoft.com/office/drawing/2014/main" id="{4BF0E92A-746D-40E8-A08D-D38D933C8DA4}"/>
+                <a16:creationId xmlns:a16="http://schemas.microsoft.com/office/drawing/2014/main" id="{438A724F-92A3-417C-BFCD-3582E7BC2DD7}"/>
               </a:ext>
             </a:extLst>
           </p:cNvPr>
@@ -8463,7 +8488,7 @@
           <p:cNvPr id="9" name="">
             <a:extLst xmlns:a="http://schemas.openxmlformats.org/drawingml/2006/main">
               <a:ext uri="{FF2B5EF4-FFF2-40B4-BE49-F238E27FC236}">
-                <a16:creationId xmlns:a16="http://schemas.microsoft.com/office/drawing/2014/main" id="{17445E61-0E93-44B4-8462-17AFBCD03334}"/>
+                <a16:creationId xmlns:a16="http://schemas.microsoft.com/office/drawing/2014/main" id="{0634917E-7FA4-4E2A-B909-2EFAFF499CA3}"/>
               </a:ext>
             </a:extLst>
           </p:cNvPr>
@@ -8520,7 +8545,7 @@
           <p:cNvPr id="10" name="">
             <a:extLst xmlns:a="http://schemas.openxmlformats.org/drawingml/2006/main">
               <a:ext uri="{FF2B5EF4-FFF2-40B4-BE49-F238E27FC236}">
-                <a16:creationId xmlns:a16="http://schemas.microsoft.com/office/drawing/2014/main" id="{B66D7F65-CAA7-4EAE-9BA7-FAF7BF585EF1}"/>
+                <a16:creationId xmlns:a16="http://schemas.microsoft.com/office/drawing/2014/main" id="{6A8E5075-7000-4DE7-8F14-B70A6AD3F9F2}"/>
               </a:ext>
             </a:extLst>
           </p:cNvPr>
@@ -8550,7 +8575,7 @@
           <p:cNvPr id="11" name="">
             <a:extLst xmlns:a="http://schemas.openxmlformats.org/drawingml/2006/main">
               <a:ext uri="{FF2B5EF4-FFF2-40B4-BE49-F238E27FC236}">
-                <a16:creationId xmlns:a16="http://schemas.microsoft.com/office/drawing/2014/main" id="{B375B523-FD4B-4A54-A64E-4C45BB1AE05D}"/>
+                <a16:creationId xmlns:a16="http://schemas.microsoft.com/office/drawing/2014/main" id="{F7A0B658-FFFB-4A2D-A0A9-0D7BE4E6C80A}"/>
               </a:ext>
             </a:extLst>
           </p:cNvPr>
@@ -8620,7 +8645,7 @@
                 <a:ea typeface="Arial"/>
                 <a:cs typeface="Arial"/>
               </a:rPr>
-              <a:t>Improve gap filling and ranges. Add area water totals.</a:t>
+              <a:t>Train on real data. Improve gaps/ranges + area totals.</a:t>
             </a:r>
           </a:p>
         </p:txBody>
@@ -8630,7 +8655,7 @@
           <p:cNvPr id="12" name="">
             <a:extLst xmlns:a="http://schemas.openxmlformats.org/drawingml/2006/main">
               <a:ext uri="{FF2B5EF4-FFF2-40B4-BE49-F238E27FC236}">
-                <a16:creationId xmlns:a16="http://schemas.microsoft.com/office/drawing/2014/main" id="{08351AB9-AE66-4E05-8E50-07D3F2CBEEF8}"/>
+                <a16:creationId xmlns:a16="http://schemas.microsoft.com/office/drawing/2014/main" id="{B2BBD46F-390E-465C-BD6D-39CF876BFA9C}"/>
               </a:ext>
             </a:extLst>
           </p:cNvPr>
@@ -8687,7 +8712,7 @@
           <p:cNvPr id="13" name="">
             <a:extLst xmlns:a="http://schemas.openxmlformats.org/drawingml/2006/main">
               <a:ext uri="{FF2B5EF4-FFF2-40B4-BE49-F238E27FC236}">
-                <a16:creationId xmlns:a16="http://schemas.microsoft.com/office/drawing/2014/main" id="{F816227F-C3C1-416A-9AA4-684848A425AE}"/>
+                <a16:creationId xmlns:a16="http://schemas.microsoft.com/office/drawing/2014/main" id="{69AD2320-088A-463D-A23F-8B883B8159C0}"/>
               </a:ext>
             </a:extLst>
           </p:cNvPr>
@@ -8717,7 +8742,7 @@
           <p:cNvPr id="14" name="">
             <a:extLst xmlns:a="http://schemas.openxmlformats.org/drawingml/2006/main">
               <a:ext uri="{FF2B5EF4-FFF2-40B4-BE49-F238E27FC236}">
-                <a16:creationId xmlns:a16="http://schemas.microsoft.com/office/drawing/2014/main" id="{340F0F5D-8EE8-48F7-94FA-66F0B4E00E8C}"/>
+                <a16:creationId xmlns:a16="http://schemas.microsoft.com/office/drawing/2014/main" id="{3D744239-8E84-4299-94CC-5BD9D469FBCD}"/>
               </a:ext>
             </a:extLst>
           </p:cNvPr>
@@ -8797,7 +8822,7 @@
           <p:cNvPr id="15" name="">
             <a:extLst xmlns:a="http://schemas.openxmlformats.org/drawingml/2006/main">
               <a:ext uri="{FF2B5EF4-FFF2-40B4-BE49-F238E27FC236}">
-                <a16:creationId xmlns:a16="http://schemas.microsoft.com/office/drawing/2014/main" id="{AC7A5C0D-F57D-4617-B371-0CC2C3866413}"/>
+                <a16:creationId xmlns:a16="http://schemas.microsoft.com/office/drawing/2014/main" id="{2202D93B-C78B-4F98-AA30-74F4F30BFCBB}"/>
               </a:ext>
             </a:extLst>
           </p:cNvPr>
@@ -8854,7 +8879,7 @@
           <p:cNvPr id="16" name="">
             <a:extLst xmlns:a="http://schemas.openxmlformats.org/drawingml/2006/main">
               <a:ext uri="{FF2B5EF4-FFF2-40B4-BE49-F238E27FC236}">
-                <a16:creationId xmlns:a16="http://schemas.microsoft.com/office/drawing/2014/main" id="{7B2E4E81-F9D4-4963-9FD4-4B5D032A4EDB}"/>
+                <a16:creationId xmlns:a16="http://schemas.microsoft.com/office/drawing/2014/main" id="{311F9102-BE3F-42CC-BCE8-4606F61CABD7}"/>
               </a:ext>
             </a:extLst>
           </p:cNvPr>
@@ -8884,7 +8909,7 @@
           <p:cNvPr id="17" name="">
             <a:extLst xmlns:a="http://schemas.openxmlformats.org/drawingml/2006/main">
               <a:ext uri="{FF2B5EF4-FFF2-40B4-BE49-F238E27FC236}">
-                <a16:creationId xmlns:a16="http://schemas.microsoft.com/office/drawing/2014/main" id="{55D06CB0-4F80-463D-A4CF-B7A8880B76EA}"/>
+                <a16:creationId xmlns:a16="http://schemas.microsoft.com/office/drawing/2014/main" id="{21F84A38-ECC3-4421-99D6-9539FE392001}"/>
               </a:ext>
             </a:extLst>
           </p:cNvPr>
@@ -8941,7 +8966,7 @@
           <p:cNvPr id="18" name="">
             <a:extLst xmlns:a="http://schemas.openxmlformats.org/drawingml/2006/main">
               <a:ext uri="{FF2B5EF4-FFF2-40B4-BE49-F238E27FC236}">
-                <a16:creationId xmlns:a16="http://schemas.microsoft.com/office/drawing/2014/main" id="{250F68D8-09FA-442D-AA9B-7AC0B81937D6}"/>
+                <a16:creationId xmlns:a16="http://schemas.microsoft.com/office/drawing/2014/main" id="{69A7238C-9BF3-4D9F-8150-1F5CD4317BFF}"/>
               </a:ext>
             </a:extLst>
           </p:cNvPr>
@@ -8988,7 +9013,7 @@
                 <a:ea typeface="Arial"/>
                 <a:cs typeface="Arial"/>
               </a:rPr>
-              <a:t>Can we test effects on water reserves and rivers in a new area through the year?</a:t>
+              <a:t>Can training on real data predict effects on water reserves and rivers in a new area?</a:t>
             </a:r>
           </a:p>
         </p:txBody>
@@ -8998,7 +9023,7 @@
           <p:cNvPr id="19" name="">
             <a:extLst xmlns:a="http://schemas.openxmlformats.org/drawingml/2006/main">
               <a:ext uri="{FF2B5EF4-FFF2-40B4-BE49-F238E27FC236}">
-                <a16:creationId xmlns:a16="http://schemas.microsoft.com/office/drawing/2014/main" id="{DA37BF8E-8305-4C35-9550-FED7DC7A1E45}"/>
+                <a16:creationId xmlns:a16="http://schemas.microsoft.com/office/drawing/2014/main" id="{6322CEE3-DED0-4FB1-BF88-C8E54F8DF9AA}"/>
               </a:ext>
             </a:extLst>
           </p:cNvPr>
@@ -9099,7 +9124,7 @@
     </p:spTree>
     <p:extLst>
       <p:ext uri="{BB962C8B-B14F-4D97-AF65-F5344CB8AC3E}">
-        <p14:creationId xmlns:p14="http://schemas.microsoft.com/office/powerpoint/2010/main" val="1816138024"/>
+        <p14:creationId xmlns:p14="http://schemas.microsoft.com/office/powerpoint/2010/main" val="1220705751"/>
       </p:ext>
     </p:extLst>
   </p:cSld>
@@ -9107,9 +9132,9 @@
 </file>
 
 <file path=ppt/theme/theme1.xml><?xml version="1.0" encoding="utf-8"?>
-<a:theme xmlns:a="http://schemas.openxmlformats.org/drawingml/2006/main" name="ChatGPT">
+<a:theme xmlns:a="http://schemas.openxmlformats.org/drawingml/2006/main" name="ECOllateral">
   <a:themeElements>
-    <a:clrScheme name="ChatGPT">
+    <a:clrScheme name="ECOllateral">
       <a:dk1>
         <a:srgbClr val="000000"/>
       </a:dk1>
@@ -9159,7 +9184,7 @@
         <a:cs typeface="Calibri"/>
       </a:minorFont>
     </a:fontScheme>
-    <a:fmtScheme name="ChatGPT">
+    <a:fmtScheme name="ECOllateral">
       <a:fillStyleLst>
         <a:solidFill>
           <a:schemeClr val="phClr"/>

--- a/docs/a2/review-slides-simplified.pptx
+++ b/docs/a2/review-slides-simplified.pptx
@@ -2,18 +2,18 @@
 <file path=ppt/presentation.xml><?xml version="1.0" encoding="utf-8"?>
 <p:presentation xmlns:p="http://schemas.openxmlformats.org/presentationml/2006/main">
   <p:sldMasterIdLst>
-    <p:sldMasterId xmlns:r="http://schemas.openxmlformats.org/officeDocument/2006/relationships" id="2147483648" r:id="R75e052afee904b91"/>
+    <p:sldMasterId xmlns:r="http://schemas.openxmlformats.org/officeDocument/2006/relationships" id="2147483648" r:id="Rce528cfcf73a40b8"/>
   </p:sldMasterIdLst>
   <p:notesMasterIdLst>
-    <p:notesMasterId xmlns:r="http://schemas.openxmlformats.org/officeDocument/2006/relationships" r:id="R4ef18e7829d54b48"/>
+    <p:notesMasterId xmlns:r="http://schemas.openxmlformats.org/officeDocument/2006/relationships" r:id="R24d7d8cb816b433d"/>
   </p:notesMasterIdLst>
   <p:sldIdLst>
-    <p:sldId xmlns:r="http://schemas.openxmlformats.org/officeDocument/2006/relationships" id="256" r:id="R648f395b66224787"/>
-    <p:sldId xmlns:r="http://schemas.openxmlformats.org/officeDocument/2006/relationships" id="257" r:id="Reb6c063538274ee6"/>
-    <p:sldId xmlns:r="http://schemas.openxmlformats.org/officeDocument/2006/relationships" id="258" r:id="Rc2caa89bd6ae4414"/>
-    <p:sldId xmlns:r="http://schemas.openxmlformats.org/officeDocument/2006/relationships" id="259" r:id="Rce11a347c7774683"/>
-    <p:sldId xmlns:r="http://schemas.openxmlformats.org/officeDocument/2006/relationships" id="260" r:id="R39587b10b86f420d"/>
-    <p:sldId xmlns:r="http://schemas.openxmlformats.org/officeDocument/2006/relationships" id="261" r:id="R7d2e9d4943b44c96"/>
+    <p:sldId xmlns:r="http://schemas.openxmlformats.org/officeDocument/2006/relationships" id="256" r:id="R6bc55408797c463b"/>
+    <p:sldId xmlns:r="http://schemas.openxmlformats.org/officeDocument/2006/relationships" id="257" r:id="R22817f439c504fb3"/>
+    <p:sldId xmlns:r="http://schemas.openxmlformats.org/officeDocument/2006/relationships" id="258" r:id="Rbb963250fa2d4db9"/>
+    <p:sldId xmlns:r="http://schemas.openxmlformats.org/officeDocument/2006/relationships" id="259" r:id="R96fa558fc9834767"/>
+    <p:sldId xmlns:r="http://schemas.openxmlformats.org/officeDocument/2006/relationships" id="260" r:id="R7312682a2dd948aa"/>
+    <p:sldId xmlns:r="http://schemas.openxmlformats.org/officeDocument/2006/relationships" id="261" r:id="Rfa21efe4ce9e46ed"/>
   </p:sldIdLst>
   <p:sldSz cx="12192000" cy="6858000"/>
   <p:notesSz cx="6858000" cy="9144000"/>
@@ -447,62 +447,22 @@
           <a:lstStyle xmlns:a="http://schemas.openxmlformats.org/drawingml/2006/main"/>
           <a:p xmlns:a="http://schemas.openxmlformats.org/drawingml/2006/main">
             <a:r>
-              <a:t>Plain-English talk:</a:t>
+              <a:t>Shaun, 30 seconds.</a:t>
             </a:r>
           </a:p>
           <a:p xmlns:a="http://schemas.openxmlformats.org/drawingml/2006/main">
             <a:r>
-              <a:t>ECOllateral asks how new development could affect an area's water supply and rivers</a:t>
+              <a:t>Regional goal: seasonal water reserves and watershed conditions for planners, researchers, and utilities. The current component estimates daily on-site cooling consumption. Regional supply, demands, returns, and ecological baselines remain planned.</a:t>
             </a:r>
           </a:p>
           <a:p xmlns:a="http://schemas.openxmlformats.org/drawingml/2006/main">
             <a:r>
-              <a:t>through the year. It is for town planners, researchers, and water providers. Our working</a:t>
+              <a:t>Data: synthetic facility targets and fictional permits. The observed two-day download tests parsing and units.</a:t>
             </a:r>
           </a:p>
           <a:p xmlns:a="http://schemas.openxmlformats.org/drawingml/2006/main">
             <a:r>
-              <a:t>demo estimates cooling water use, checks physical limits, and adds local permit quotes.</a:t>
-            </a:r>
-          </a:p>
-          <a:p xmlns:a="http://schemas.openxmlformats.org/drawingml/2006/main">
-            <a:r>
-              <a:t>Cooling is one example. Current tests use computer-generated water-use examples to</a:t>
-            </a:r>
-          </a:p>
-          <a:p xmlns:a="http://schemas.openxmlformats.org/drawingml/2006/main">
-            <a:r>
-              <a:t>check the software. Next, collect real measurements, train on them, and test on records</a:t>
-            </a:r>
-          </a:p>
-          <a:p xmlns:a="http://schemas.openxmlformats.org/drawingml/2006/main">
-            <a:r>
-              <a:t>the model has not seen. We still need area water totals and river needs.</a:t>
-            </a:r>
-          </a:p>
-          <a:p xmlns:a="http://schemas.openxmlformats.org/drawingml/2006/main">
-            <a:r>
-              <a:t/>
-            </a:r>
-          </a:p>
-          <a:p xmlns:a="http://schemas.openxmlformats.org/drawingml/2006/main">
-            <a:r>
-              <a:t>Extra details for questions:</a:t>
-            </a:r>
-          </a:p>
-          <a:p xmlns:a="http://schemas.openxmlformats.org/drawingml/2006/main">
-            <a:r>
-              <a:t>Shaun, 30 seconds. Source: docs/a2/source/dossier.md section 1; docs/a2/evidence/forecast.json. Synthetic labels and fictional permits. Public ingestion is a parser smoke test. The current collateral stress field is an on-site consumption proxy. Assigned day is pending.</a:t>
-            </a:r>
-          </a:p>
-          <a:p xmlns:a="http://schemas.openxmlformats.org/drawingml/2006/main">
-            <a:r>
-              <a:t>Regional framing: ECOllateral is an environmental impact assessment and regional ecosystem forecasting project. Primary question: development demands/cooling/location and seasonal impacts on area municipal reserves and watershed conditions. The cooling model is one pressure component. No regional impact or ecosystem health score is implemented/validated. Source: docs/project-scope.md and user context supplied October 8.</a:t>
-            </a:r>
-          </a:p>
-          <a:p xmlns:a="http://schemas.openxmlformats.org/drawingml/2006/main">
-            <a:r>
-              <a:t>Data plan: generated examples are current software checks. Collect paired measured inputs and outcomes, train on historical observations, and test on real records and areas excluded from training. No measured-target retraining has been completed.</a:t>
+              <a:t>Sources: README.md; docs/a2/source/dossier.md, Problem and current scope; docs/a2/evidence/forecast.json.</a:t>
             </a:r>
           </a:p>
         </p:txBody>
@@ -572,52 +532,22 @@
           <a:lstStyle xmlns:a="http://schemas.openxmlformats.org/drawingml/2006/main"/>
           <a:p xmlns:a="http://schemas.openxmlformats.org/drawingml/2006/main">
             <a:r>
-              <a:t>Plain-English talk:</a:t>
+              <a:t>Shaun, 30 seconds.</a:t>
             </a:r>
           </a:p>
           <a:p xmlns:a="http://schemas.openxmlformats.org/drawingml/2006/main">
             <a:r>
-              <a:t>The semantic map shows what each part means and how it connects. Six inputs describe</a:t>
+              <a:t>Six inputs: IT MW, dry/wet-bulb temperatures, streamflow, PDSI, season. Separate tree models predict consumption; physical rules bound it. TF-IDF word vectors and FAISS rank permit text; HUC or coordinate-radius eligibility precedes top-k selection.</a:t>
             </a:r>
           </a:p>
           <a:p xmlns:a="http://schemas.openxmlformats.org/drawingml/2006/main">
             <a:r>
-              <a:t>size, two temperatures, river flow, drought, and season. AI predicts cooling water use.</a:t>
+              <a:t>E3: injected -1 and 1,000,000 MGD outputs clip to 0 and 0.446484 MGD at 40 MW, 30/20 C. E4: four fictional location cases pass. Quotations retain sources; the summary does not interpret permit caps.</a:t>
             </a:r>
           </a:p>
           <a:p xmlns:a="http://schemas.openxmlformats.org/drawingml/2006/main">
             <a:r>
-              <a:t>Rules check power and heat limits. The text path turns words into numbers to find local</a:t>
-            </a:r>
-          </a:p>
-          <a:p xmlns:a="http://schemas.openxmlformats.org/drawingml/2006/main">
-            <a:r>
-              <a:t>permit quotes with sources. All four location tests pass. Forced wrong numbers move</a:t>
-            </a:r>
-          </a:p>
-          <a:p xmlns:a="http://schemas.openxmlformats.org/drawingml/2006/main">
-            <a:r>
-              <a:t>inside the limits and trigger warnings. A person reviews the permit rules.</a:t>
-            </a:r>
-          </a:p>
-          <a:p xmlns:a="http://schemas.openxmlformats.org/drawingml/2006/main">
-            <a:r>
-              <a:t/>
-            </a:r>
-          </a:p>
-          <a:p xmlns:a="http://schemas.openxmlformats.org/drawingml/2006/main">
-            <a:r>
-              <a:t>Extra details for questions:</a:t>
-            </a:r>
-          </a:p>
-          <a:p xmlns:a="http://schemas.openxmlformats.org/drawingml/2006/main">
-            <a:r>
-              <a:t>Shaun, 30 seconds. Sources: src/models/regression.py, src/rules/thermodynamic.py, src/grounding/store.py, src/grounding/generator.py; docs/a2/evidence E3/E4 JSON. Rules also use capacity and ambient features. Fault injection -1/1e6 MGD clips to 0/0.446484 MGD for 40 MW, 30 C dry, 20 C wet. Four fictional retrieval cases pass. No LLM arithmetic or legal compliance decision.</a:t>
-            </a:r>
-          </a:p>
-          <a:p xmlns:a="http://schemas.openxmlformats.org/drawingml/2006/main">
-            <a:r>
-              <a:t>This map describes current components. Regional balances, ecological flow needs, cumulative demands/returns, verified boundaries, and regional targets remain planned. Current vectors are sparse TF-IDF, not dense learned embeddings. Groundwater depth is not recharge.</a:t>
+              <a:t>Sources: src/models/regression.py; src/rules/thermodynamic.py; src/grounding/store.py; docs/a2/evidence/constraint-failure-cases.json; retrieval-cases.json.</a:t>
             </a:r>
           </a:p>
         </p:txBody>
@@ -687,62 +617,22 @@
           <a:lstStyle xmlns:a="http://schemas.openxmlformats.org/drawingml/2006/main"/>
           <a:p xmlns:a="http://schemas.openxmlformats.org/drawingml/2006/main">
             <a:r>
-              <a:t>Plain-English talk:</a:t>
+              <a:t>Shaun, 45 seconds.</a:t>
             </a:r>
           </a:p>
           <a:p xmlns:a="http://schemas.openxmlformats.org/drawingml/2006/main">
             <a:r>
-              <a:t>We tested two AI models on the same made-up water-use values. RF means RandomForest.</a:t>
+              <a:t>1,600 synthetic rows per cooling type across six years, seed 42. Whole dates stay together: oldest 60% train, next 20% select by calibration RMSE and size intervals, newest 20% test (333 rows per type). Imputation fits training rows only.</a:t>
             </a:r>
           </a:p>
           <a:p xmlns:a="http://schemas.openxmlformats.org/drawingml/2006/main">
             <a:r>
-              <a:t>Lower bars mean smaller</a:t>
+              <a:t>Bounded test MAE, RF/XGB: tower 0.004890/0.003668 MGD; direct 0.003842/0.003191. Selected R2: 0.99808/0.99728. Dry cooling has a zero target and undefined R2.</a:t>
             </a:r>
           </a:p>
           <a:p xmlns:a="http://schemas.openxmlformats.org/drawingml/2006/main">
             <a:r>
-              <a:t>errors. XGBoost made smaller errors for both cooling types. Tower error fell from about</a:t>
-            </a:r>
-          </a:p>
-          <a:p xmlns:a="http://schemas.openxmlformats.org/drawingml/2006/main">
-            <a:r>
-              <a:t>0.00489 to 0.00367 million gallons per day. Direct cooling error fell from 0.00384 to</a:t>
-            </a:r>
-          </a:p>
-          <a:p xmlns:a="http://schemas.openxmlformats.org/drawingml/2006/main">
-            <a:r>
-              <a:t>0.00319. Each test group has 333 rows. We use the oldest 60 percent of dates to teach</a:t>
-            </a:r>
-          </a:p>
-          <a:p xmlns:a="http://schemas.openxmlformats.org/drawingml/2006/main">
-            <a:r>
-              <a:t>the model, the next 20 percent to choose it and set its range, and the last 20 percent</a:t>
-            </a:r>
-          </a:p>
-          <a:p xmlns:a="http://schemas.openxmlformats.org/drawingml/2006/main">
-            <a:r>
-              <a:t>to test it. We keep RandomForest to compare. Dry air cooling uses zero water here.</a:t>
-            </a:r>
-          </a:p>
-          <a:p xmlns:a="http://schemas.openxmlformats.org/drawingml/2006/main">
-            <a:r>
-              <a:t>Next, train on real water-use measurements and test on separate real records.</a:t>
-            </a:r>
-          </a:p>
-          <a:p xmlns:a="http://schemas.openxmlformats.org/drawingml/2006/main">
-            <a:r>
-              <a:t/>
-            </a:r>
-          </a:p>
-          <a:p xmlns:a="http://schemas.openxmlformats.org/drawingml/2006/main">
-            <a:r>
-              <a:t>Extra details for questions:</a:t>
-            </a:r>
-          </a:p>
-          <a:p xmlns:a="http://schemas.openxmlformats.org/drawingml/2006/main">
-            <a:r>
-              <a:t>Shaun, 45 seconds. Source: docs/a2/evidence/regression-comparison.csv and benchmark.json. 1,600 synthetic rows per type, six years, seed 42. Selected tower R2 .99808, direct .99728. No field generalization claim. Model selection and interval sizing reuse calibration partition.</a:t>
+              <a:t>Sources: docs/a2/evidence/regression-comparison.csv; benchmark.json.</a:t>
             </a:r>
           </a:p>
         </p:txBody>
@@ -812,57 +702,22 @@
           <a:lstStyle xmlns:a="http://schemas.openxmlformats.org/drawingml/2006/main"/>
           <a:p xmlns:a="http://schemas.openxmlformats.org/drawingml/2006/main">
             <a:r>
-              <a:t>Plain-English talk:</a:t>
+              <a:t>Troy, 40 seconds.</a:t>
             </a:r>
           </a:p>
           <a:p xmlns:a="http://schemas.openxmlformats.org/drawingml/2006/main">
             <a:r>
-              <a:t>We removed 10, 25, and 40 percent of drought readings and repeated each test 50 times.</a:t>
+              <a:t>365 synthetic dates, 121 drought dates (PDSI &lt;= -2). Mask 10%, 25%, 40% with identical masks for both filling methods, 50 repeats, seed 42. Chart variance is multiplied by 1e8. All main drought changes and central 90% bands stay within +/-0.05 MGD.</a:t>
             </a:r>
           </a:p>
           <a:p xmlns:a="http://schemas.openxmlformats.org/drawingml/2006/main">
             <a:r>
-              <a:t>We filled gaps using a nearby station or a straight line between readings. Lower bars</a:t>
+              <a:t>Separate diagnostic: donors +100 MGD, 40% gaps, 20 repeats, predictor=0.01*flow. Coverage: spatial 60.33%, linear 98.60%. Both fail the all-date band criterion. This diagnostic uses a separate formula. Linear filling uses later readings. Groundwater reconstruction stays in meters.</a:t>
             </a:r>
           </a:p>
           <a:p xmlns:a="http://schemas.openxmlformats.org/drawingml/2006/main">
             <a:r>
-              <a:t>mean predictions changed less. All main tests stayed within 0.05 million gallons per</a:t>
-            </a:r>
-          </a:p>
-          <a:p xmlns:a="http://schemas.openxmlformats.org/drawingml/2006/main">
-            <a:r>
-              <a:t>day of the result with no missing data. Our made-up stations act alike. What if a</a:t>
-            </a:r>
-          </a:p>
-          <a:p xmlns:a="http://schemas.openxmlformats.org/drawingml/2006/main">
-            <a:r>
-              <a:t>neighbor reads too high? In a separate test, we added 100 million gallons per day to</a:t>
-            </a:r>
-          </a:p>
-          <a:p xmlns:a="http://schemas.openxmlformats.org/drawingml/2006/main">
-            <a:r>
-              <a:t>neighbor readings. Only 60.3 percent stayed within limits. That test uses a simple</a:t>
-            </a:r>
-          </a:p>
-          <a:p xmlns:a="http://schemas.openxmlformats.org/drawingml/2006/main">
-            <a:r>
-              <a:t>formula. Next, test bad readings, long gaps, and stations losing data together.</a:t>
-            </a:r>
-          </a:p>
-          <a:p xmlns:a="http://schemas.openxmlformats.org/drawingml/2006/main">
-            <a:r>
-              <a:t/>
-            </a:r>
-          </a:p>
-          <a:p xmlns:a="http://schemas.openxmlformats.org/drawingml/2006/main">
-            <a:r>
-              <a:t>Extra details for questions:</a:t>
-            </a:r>
-          </a:p>
-          <a:p xmlns:a="http://schemas.openxmlformats.org/drawingml/2006/main">
-            <a:r>
-              <a:t>Troy, 40 seconds. Main data source: missingness-summary.csv. Bar values are exact variance multiplied by 1e8. Random gaps, fixed trained model, seed 42. Biased diagnostic: +100 MGD donors, 40% gaps, 20 repeats, predictor=.01*flow, spatial coverage .603305785, linear .985950413. Not a fitted-model failure rate. Interpolation is retrospective; sensitivity bands are not forecast intervals.</a:t>
+              <a:t>Sources: docs/a2/evidence/missingness-summary.csv; biased-donor-diagnostic.csv; groundwater-reconstruction.csv.</a:t>
             </a:r>
           </a:p>
         </p:txBody>
@@ -932,52 +787,22 @@
           <a:lstStyle xmlns:a="http://schemas.openxmlformats.org/drawingml/2006/main"/>
           <a:p xmlns:a="http://schemas.openxmlformats.org/drawingml/2006/main">
             <a:r>
-              <a:t>Plain-English talk:</a:t>
+              <a:t>Troy, 35 seconds.</a:t>
             </a:r>
           </a:p>
           <a:p xmlns:a="http://schemas.openxmlformats.org/drawingml/2006/main">
             <a:r>
-              <a:t>A prediction range gives a low and high estimate. Our goal was to include 90 percent</a:t>
+              <a:t>Nominal coverage 90%. Tower: 294/333 (88.29%); direct: 293/333 (87.99%). Dry cooling has zero-width intervals with 100% coverage and is excluded from this chart.</a:t>
             </a:r>
           </a:p>
           <a:p xmlns:a="http://schemas.openxmlformats.org/drawingml/2006/main">
             <a:r>
-              <a:t>of test values. We reached 88.3 percent for towers and 88.0 percent for direct cooling.</a:t>
+              <a:t>Absolute bounded calibration residuals set the finite-sample quantile. Selection and interval sizing reuse the same partition. Temporal dependence also limits coverage claims. No significance test was run. Next: separate selection/calibration data and check coverage and width on measured data by facility, time, and drought.</a:t>
             </a:r>
           </a:p>
           <a:p xmlns:a="http://schemas.openxmlformats.org/drawingml/2006/main">
             <a:r>
-              <a:t>That is below our goal. We have not checked whether the difference is more than chance.</a:t>
-            </a:r>
-          </a:p>
-          <a:p xmlns:a="http://schemas.openxmlformats.org/drawingml/2006/main">
-            <a:r>
-              <a:t>The fit score, called R-squared, is high, but it cannot promise a useful range.</a:t>
-            </a:r>
-          </a:p>
-          <a:p xmlns:a="http://schemas.openxmlformats.org/drawingml/2006/main">
-            <a:r>
-              <a:t>We used the same data to choose the model and set its range. Next, use separate data</a:t>
-            </a:r>
-          </a:p>
-          <a:p xmlns:a="http://schemas.openxmlformats.org/drawingml/2006/main">
-            <a:r>
-              <a:t>for those jobs and test other facilities, dates, and drought conditions.</a:t>
-            </a:r>
-          </a:p>
-          <a:p xmlns:a="http://schemas.openxmlformats.org/drawingml/2006/main">
-            <a:r>
-              <a:t/>
-            </a:r>
-          </a:p>
-          <a:p xmlns:a="http://schemas.openxmlformats.org/drawingml/2006/main">
-            <a:r>
-              <a:t>Extra details for questions:</a:t>
-            </a:r>
-          </a:p>
-          <a:p xmlns:a="http://schemas.openxmlformats.org/drawingml/2006/main">
-            <a:r>
-              <a:t>Troy, 35 seconds. Sources: interval-coverage.csv; src/models/regression.py. Tower 294/333, direct 293/333, nominal .9. Selection and radius share calibration set. Chronological dependence complicates exchangeability. These finite samples do not establish statistical significance. R2 is not confidence; air zero target excluded.</a:t>
+              <a:t>Sources: docs/a2/evidence/interval-coverage.csv; benchmark.json; src/models/regression.py.</a:t>
             </a:r>
           </a:p>
         </p:txBody>
@@ -1047,92 +872,27 @@
           <a:lstStyle xmlns:a="http://schemas.openxmlformats.org/drawingml/2006/main"/>
           <a:p xmlns:a="http://schemas.openxmlformats.org/drawingml/2006/main">
             <a:r>
-              <a:t>Plain-English talk:</a:t>
+              <a:t>Scott, 60 seconds.</a:t>
             </a:r>
           </a:p>
           <a:p xmlns:a="http://schemas.openxmlformats.org/drawingml/2006/main">
             <a:r>
-              <a:t>Keep, change, do not use, and wait are our four decisions. We keep XGBoost because its</a:t>
+              <a:t>Adopt models and safeguards (E1, E3, E4). Modify gap and range tests (E2, E5). Reject R2-as-confidence and regional health claims from cooling consumption alone. Defer neural/LLM comparisons pending measured data.</a:t>
             </a:r>
           </a:p>
           <a:p xmlns:a="http://schemas.openxmlformats.org/drawingml/2006/main">
             <a:r>
-              <a:t>errors are smaller, along with the tested limits and location checks. We will improve</a:t>
+              <a:t>Next study: measured regional supply/reserves, demand, returns, ecological baselines, and unseen-area tests. Facility holdouts support the cooling component. Recharge, heatwave, dense-embedding, and zero-shot LLM studies remain planned.</a:t>
             </a:r>
           </a:p>
           <a:p xmlns:a="http://schemas.openxmlformats.org/drawingml/2006/main">
             <a:r>
-              <a:t>gap filling and prediction ranges because the bad-reading test and the 90 percent goal</a:t>
+              <a:t>Shaun leads coding. Troy's data/grounding and Scott's evaluation/slides roles are assigned; completed contributions are unconfirmed.</a:t>
             </a:r>
           </a:p>
           <a:p xmlns:a="http://schemas.openxmlformats.org/drawingml/2006/main">
             <a:r>
-              <a:t>show weaknesses. Next, collect real measurements, train on them, and test new areas.</a:t>
-            </a:r>
-          </a:p>
-          <a:p xmlns:a="http://schemas.openxmlformats.org/drawingml/2006/main">
-            <a:r>
-              <a:t>We must add water coming in, water used and returned, and river needs.</a:t>
-            </a:r>
-          </a:p>
-          <a:p xmlns:a="http://schemas.openxmlformats.org/drawingml/2006/main">
-            <a:r>
-              <a:t>A cooling-water estimate alone cannot show ecosystem health. A fit score cannot promise</a:t>
-            </a:r>
-          </a:p>
-          <a:p xmlns:a="http://schemas.openxmlformats.org/drawingml/2006/main">
-            <a:r>
-              <a:t>a correct answer. We also cannot let a language model invent a risk score. We will wait</a:t>
-            </a:r>
-          </a:p>
-          <a:p xmlns:a="http://schemas.openxmlformats.org/drawingml/2006/main">
-            <a:r>
-              <a:t>for real area measurements before comparing more AI methods. We have not run those</a:t>
-            </a:r>
-          </a:p>
-          <a:p xmlns:a="http://schemas.openxmlformats.org/drawingml/2006/main">
-            <a:r>
-              <a:t>comparisons yet. Shaun leads coding. Troy supports data and source quotes. Scott supports</a:t>
-            </a:r>
-          </a:p>
-          <a:p xmlns:a="http://schemas.openxmlformats.org/drawingml/2006/main">
-            <a:r>
-              <a:t>tests and results. Those supporting duties still need confirmation. Our next question:</a:t>
-            </a:r>
-          </a:p>
-          <a:p xmlns:a="http://schemas.openxmlformats.org/drawingml/2006/main">
-            <a:r>
-              <a:t>can training on real data predict effects on water reserves and rivers in a new area</a:t>
-            </a:r>
-          </a:p>
-          <a:p xmlns:a="http://schemas.openxmlformats.org/drawingml/2006/main">
-            <a:r>
-              <a:t>through the year?</a:t>
-            </a:r>
-          </a:p>
-          <a:p xmlns:a="http://schemas.openxmlformats.org/drawingml/2006/main">
-            <a:r>
-              <a:t/>
-            </a:r>
-          </a:p>
-          <a:p xmlns:a="http://schemas.openxmlformats.org/drawingml/2006/main">
-            <a:r>
-              <a:t>Extra details for questions:</a:t>
-            </a:r>
-          </a:p>
-          <a:p xmlns:a="http://schemas.openxmlformats.org/drawingml/2006/main">
-            <a:r>
-              <a:t>Scott, 60 seconds. Source: docs/a2/source/dossier.md sections 7-8, evidence-summary.csv, team-contributions.md. No neural/LLM comparison run. Shaun majority coding is confirmed; Troy/Scott supporting responsibilities are assigned, not certified completed. Next measured-label study needs facility holdouts, verified station maps, real permit relevance, MAE/RMSE/R2/coverage/width. Course date, deadline, office hours and instructor access remain pending.</a:t>
-            </a:r>
-          </a:p>
-          <a:p xmlns:a="http://schemas.openxmlformats.org/drawingml/2006/main">
-            <a:r>
-              <a:t>Primary next study: observed regional supply/reserves, demands, returns, ecological baselines and unseen-area tests. Facility holdouts remain a supporting component check. Zero-shot LLM, heatwave validation, EIA/EPA ingestion and historical recharge masking are proposals, not completed benchmarks. Troy supports data/grounding; Scott evaluation/interface/failure evidence; Shaun leads coding.</a:t>
-            </a:r>
-          </a:p>
-          <a:p xmlns:a="http://schemas.openxmlformats.org/drawingml/2006/main">
-            <a:r>
-              <a:t>Real-data training is the next development step, not a completed result. Define area outcomes and river needs before claiming ecosystem forecasts. Keep model selection, interval sizing and final real-data testing separate.</a:t>
+              <a:t>Sources: docs/a2/evidence-summary.csv; source/dossier.md; team-contributions.md. Course status: source/project-checkoff.md.</a:t>
             </a:r>
           </a:p>
         </p:txBody>
@@ -1200,7 +960,7 @@
   </p:cSld>
   <p:clrMap bg1="lt1" tx1="dk1" bg2="lt2" tx2="dk2" accent1="accent1" accent2="accent2" accent3="accent3" accent4="accent4" accent5="accent5" accent6="accent6" hlink="hlink" folHlink="folHlink"/>
   <p:sldLayoutIdLst>
-    <p:sldLayoutId xmlns:r="http://schemas.openxmlformats.org/officeDocument/2006/relationships" id="2147483649" r:id="R91986dd7aafe442a"/>
+    <p:sldLayoutId xmlns:r="http://schemas.openxmlformats.org/officeDocument/2006/relationships" id="2147483649" r:id="Rd5fe453850044db1"/>
   </p:sldLayoutIdLst>
   <p:txStyles>
     <p:titleStyle>
@@ -2533,7 +2293,7 @@
     <p:bg>
       <p:bgPr>
         <a:solidFill xmlns:a="http://schemas.openxmlformats.org/drawingml/2006/main">
-          <a:srgbClr val="F9FAFB"/>
+          <a:srgbClr val="FFFFFF"/>
         </a:solidFill>
       </p:bgPr>
     </p:bg>
@@ -2577,9 +2337,81 @@
           <a:bodyPr xmlns:a="http://schemas.openxmlformats.org/drawingml/2006/main" lIns="0" tIns="0" rIns="0" bIns="0">
             <a:noAutofit/>
           </a:bodyPr>
-          <a:lstStyle xmlns:a="http://schemas.openxmlformats.org/drawingml/2006/main"/>
+          <a:lstStyle xmlns:a="http://schemas.openxmlformats.org/drawingml/2006/main">
+            <a:defPPr>
+              <a:defRPr>
+                <a:latin typeface="Arial"/>
+                <a:ea typeface="Arial"/>
+                <a:cs typeface="Arial"/>
+              </a:defRPr>
+            </a:defPPr>
+            <a:lvl1pPr>
+              <a:defRPr>
+                <a:latin typeface="Arial"/>
+                <a:ea typeface="Arial"/>
+                <a:cs typeface="Arial"/>
+              </a:defRPr>
+            </a:lvl1pPr>
+            <a:lvl2pPr>
+              <a:defRPr>
+                <a:latin typeface="Arial"/>
+                <a:ea typeface="Arial"/>
+                <a:cs typeface="Arial"/>
+              </a:defRPr>
+            </a:lvl2pPr>
+            <a:lvl3pPr>
+              <a:defRPr>
+                <a:latin typeface="Arial"/>
+                <a:ea typeface="Arial"/>
+                <a:cs typeface="Arial"/>
+              </a:defRPr>
+            </a:lvl3pPr>
+            <a:lvl4pPr>
+              <a:defRPr>
+                <a:latin typeface="Arial"/>
+                <a:ea typeface="Arial"/>
+                <a:cs typeface="Arial"/>
+              </a:defRPr>
+            </a:lvl4pPr>
+            <a:lvl5pPr>
+              <a:defRPr>
+                <a:latin typeface="Arial"/>
+                <a:ea typeface="Arial"/>
+                <a:cs typeface="Arial"/>
+              </a:defRPr>
+            </a:lvl5pPr>
+            <a:lvl6pPr>
+              <a:defRPr>
+                <a:latin typeface="Arial"/>
+                <a:ea typeface="Arial"/>
+                <a:cs typeface="Arial"/>
+              </a:defRPr>
+            </a:lvl6pPr>
+            <a:lvl7pPr>
+              <a:defRPr>
+                <a:latin typeface="Arial"/>
+                <a:ea typeface="Arial"/>
+                <a:cs typeface="Arial"/>
+              </a:defRPr>
+            </a:lvl7pPr>
+            <a:lvl8pPr>
+              <a:defRPr>
+                <a:latin typeface="Arial"/>
+                <a:ea typeface="Arial"/>
+                <a:cs typeface="Arial"/>
+              </a:defRPr>
+            </a:lvl8pPr>
+            <a:lvl9pPr>
+              <a:defRPr>
+                <a:latin typeface="Arial"/>
+                <a:ea typeface="Arial"/>
+                <a:cs typeface="Arial"/>
+              </a:defRPr>
+            </a:lvl9pPr>
+          </a:lstStyle>
           <a:p xmlns:a="http://schemas.openxmlformats.org/drawingml/2006/main">
             <a:pPr>
+              <a:buNone/>
               <a:defRPr sz="1050" b="0">
                 <a:solidFill>
                   <a:srgbClr val="6B7280"/>
@@ -2598,7 +2430,7 @@
                 <a:ea typeface="Arial"/>
                 <a:cs typeface="Arial"/>
               </a:rPr>
-              <a:t>E C O L L A T E R A L   /   C S C I  4 1 5 0  A 2</a:t>
+              <a:t>ECOllateral / CSCI 4150 A2</a:t>
             </a:r>
           </a:p>
         </p:txBody>
@@ -2664,51 +2496,100 @@
           <a:bodyPr xmlns:a="http://schemas.openxmlformats.org/drawingml/2006/main" lIns="0" tIns="0" rIns="0" bIns="0">
             <a:noAutofit/>
           </a:bodyPr>
-          <a:lstStyle xmlns:a="http://schemas.openxmlformats.org/drawingml/2006/main"/>
+          <a:lstStyle xmlns:a="http://schemas.openxmlformats.org/drawingml/2006/main">
+            <a:defPPr>
+              <a:defRPr sz="3150" b="1">
+                <a:latin typeface="Arial"/>
+                <a:ea typeface="Arial"/>
+                <a:cs typeface="Arial"/>
+              </a:defRPr>
+            </a:defPPr>
+            <a:lvl1pPr>
+              <a:defRPr sz="3150" b="1">
+                <a:latin typeface="Arial"/>
+                <a:ea typeface="Arial"/>
+                <a:cs typeface="Arial"/>
+              </a:defRPr>
+            </a:lvl1pPr>
+            <a:lvl2pPr>
+              <a:defRPr sz="3150" b="1">
+                <a:latin typeface="Arial"/>
+                <a:ea typeface="Arial"/>
+                <a:cs typeface="Arial"/>
+              </a:defRPr>
+            </a:lvl2pPr>
+            <a:lvl3pPr>
+              <a:defRPr sz="3150" b="1">
+                <a:latin typeface="Arial"/>
+                <a:ea typeface="Arial"/>
+                <a:cs typeface="Arial"/>
+              </a:defRPr>
+            </a:lvl3pPr>
+            <a:lvl4pPr>
+              <a:defRPr sz="3150" b="1">
+                <a:latin typeface="Arial"/>
+                <a:ea typeface="Arial"/>
+                <a:cs typeface="Arial"/>
+              </a:defRPr>
+            </a:lvl4pPr>
+            <a:lvl5pPr>
+              <a:defRPr sz="3150" b="1">
+                <a:latin typeface="Arial"/>
+                <a:ea typeface="Arial"/>
+                <a:cs typeface="Arial"/>
+              </a:defRPr>
+            </a:lvl5pPr>
+            <a:lvl6pPr>
+              <a:defRPr sz="3150" b="1">
+                <a:latin typeface="Arial"/>
+                <a:ea typeface="Arial"/>
+                <a:cs typeface="Arial"/>
+              </a:defRPr>
+            </a:lvl6pPr>
+            <a:lvl7pPr>
+              <a:defRPr sz="3150" b="1">
+                <a:latin typeface="Arial"/>
+                <a:ea typeface="Arial"/>
+                <a:cs typeface="Arial"/>
+              </a:defRPr>
+            </a:lvl7pPr>
+            <a:lvl8pPr>
+              <a:defRPr sz="3150" b="1">
+                <a:latin typeface="Arial"/>
+                <a:ea typeface="Arial"/>
+                <a:cs typeface="Arial"/>
+              </a:defRPr>
+            </a:lvl8pPr>
+            <a:lvl9pPr>
+              <a:defRPr sz="3150" b="1">
+                <a:latin typeface="Arial"/>
+                <a:ea typeface="Arial"/>
+                <a:cs typeface="Arial"/>
+              </a:defRPr>
+            </a:lvl9pPr>
+          </a:lstStyle>
           <a:p xmlns:a="http://schemas.openxmlformats.org/drawingml/2006/main">
             <a:pPr>
-              <a:defRPr sz="4350" b="0">
+              <a:buNone/>
+              <a:defRPr sz="3150" b="1">
                 <a:solidFill>
                   <a:srgbClr val="111827"/>
                 </a:solidFill>
-                <a:latin typeface="Georgia"/>
-                <a:ea typeface="Georgia"/>
-                <a:cs typeface="Georgia"/>
+                <a:latin typeface="Arial"/>
+                <a:ea typeface="Arial"/>
+                <a:cs typeface="Arial"/>
               </a:defRPr>
             </a:pPr>
             <a:r>
-              <a:rPr sz="4350" b="0">
+              <a:rPr sz="3150" b="1">
                 <a:solidFill>
                   <a:srgbClr val="111827"/>
                 </a:solidFill>
-                <a:latin typeface="Georgia"/>
-                <a:ea typeface="Georgia"/>
-                <a:cs typeface="Georgia"/>
+                <a:latin typeface="Arial"/>
+                <a:ea typeface="Arial"/>
+                <a:cs typeface="Arial"/>
               </a:rPr>
-              <a:t>PROBLEM &amp; USERS:</a:t>
-            </a:r>
-          </a:p>
-          <a:p xmlns:a="http://schemas.openxmlformats.org/drawingml/2006/main">
-            <a:pPr>
-              <a:defRPr sz="4350" b="0">
-                <a:solidFill>
-                  <a:srgbClr val="111827"/>
-                </a:solidFill>
-                <a:latin typeface="Georgia"/>
-                <a:ea typeface="Georgia"/>
-                <a:cs typeface="Georgia"/>
-              </a:defRPr>
-            </a:pPr>
-            <a:r>
-              <a:rPr sz="4350" b="0">
-                <a:solidFill>
-                  <a:srgbClr val="111827"/>
-                </a:solidFill>
-                <a:latin typeface="Georgia"/>
-                <a:ea typeface="Georgia"/>
-                <a:cs typeface="Georgia"/>
-              </a:rPr>
-              <a:t>ECOSYSTEMS ACROSS AN AREA</a:t>
+              <a:t>Development and regional water</a:t>
             </a:r>
           </a:p>
         </p:txBody>
@@ -2744,9 +2625,81 @@
           <a:bodyPr xmlns:a="http://schemas.openxmlformats.org/drawingml/2006/main" lIns="0" tIns="0" rIns="0" bIns="0">
             <a:noAutofit/>
           </a:bodyPr>
-          <a:lstStyle xmlns:a="http://schemas.openxmlformats.org/drawingml/2006/main"/>
+          <a:lstStyle xmlns:a="http://schemas.openxmlformats.org/drawingml/2006/main">
+            <a:defPPr>
+              <a:defRPr>
+                <a:latin typeface="Arial"/>
+                <a:ea typeface="Arial"/>
+                <a:cs typeface="Arial"/>
+              </a:defRPr>
+            </a:defPPr>
+            <a:lvl1pPr>
+              <a:defRPr>
+                <a:latin typeface="Arial"/>
+                <a:ea typeface="Arial"/>
+                <a:cs typeface="Arial"/>
+              </a:defRPr>
+            </a:lvl1pPr>
+            <a:lvl2pPr>
+              <a:defRPr>
+                <a:latin typeface="Arial"/>
+                <a:ea typeface="Arial"/>
+                <a:cs typeface="Arial"/>
+              </a:defRPr>
+            </a:lvl2pPr>
+            <a:lvl3pPr>
+              <a:defRPr>
+                <a:latin typeface="Arial"/>
+                <a:ea typeface="Arial"/>
+                <a:cs typeface="Arial"/>
+              </a:defRPr>
+            </a:lvl3pPr>
+            <a:lvl4pPr>
+              <a:defRPr>
+                <a:latin typeface="Arial"/>
+                <a:ea typeface="Arial"/>
+                <a:cs typeface="Arial"/>
+              </a:defRPr>
+            </a:lvl4pPr>
+            <a:lvl5pPr>
+              <a:defRPr>
+                <a:latin typeface="Arial"/>
+                <a:ea typeface="Arial"/>
+                <a:cs typeface="Arial"/>
+              </a:defRPr>
+            </a:lvl5pPr>
+            <a:lvl6pPr>
+              <a:defRPr>
+                <a:latin typeface="Arial"/>
+                <a:ea typeface="Arial"/>
+                <a:cs typeface="Arial"/>
+              </a:defRPr>
+            </a:lvl6pPr>
+            <a:lvl7pPr>
+              <a:defRPr>
+                <a:latin typeface="Arial"/>
+                <a:ea typeface="Arial"/>
+                <a:cs typeface="Arial"/>
+              </a:defRPr>
+            </a:lvl7pPr>
+            <a:lvl8pPr>
+              <a:defRPr>
+                <a:latin typeface="Arial"/>
+                <a:ea typeface="Arial"/>
+                <a:cs typeface="Arial"/>
+              </a:defRPr>
+            </a:lvl8pPr>
+            <a:lvl9pPr>
+              <a:defRPr>
+                <a:latin typeface="Arial"/>
+                <a:ea typeface="Arial"/>
+                <a:cs typeface="Arial"/>
+              </a:defRPr>
+            </a:lvl9pPr>
+          </a:lstStyle>
           <a:p xmlns:a="http://schemas.openxmlformats.org/drawingml/2006/main">
             <a:pPr>
+              <a:buNone/>
               <a:defRPr sz="975" b="0">
                 <a:solidFill>
                   <a:srgbClr val="6B7280"/>
@@ -2801,9 +2754,81 @@
           <a:bodyPr xmlns:a="http://schemas.openxmlformats.org/drawingml/2006/main" lIns="0" tIns="0" rIns="0" bIns="0">
             <a:noAutofit/>
           </a:bodyPr>
-          <a:lstStyle xmlns:a="http://schemas.openxmlformats.org/drawingml/2006/main"/>
+          <a:lstStyle xmlns:a="http://schemas.openxmlformats.org/drawingml/2006/main">
+            <a:defPPr>
+              <a:defRPr>
+                <a:latin typeface="Arial"/>
+                <a:ea typeface="Arial"/>
+                <a:cs typeface="Arial"/>
+              </a:defRPr>
+            </a:defPPr>
+            <a:lvl1pPr>
+              <a:defRPr>
+                <a:latin typeface="Arial"/>
+                <a:ea typeface="Arial"/>
+                <a:cs typeface="Arial"/>
+              </a:defRPr>
+            </a:lvl1pPr>
+            <a:lvl2pPr>
+              <a:defRPr>
+                <a:latin typeface="Arial"/>
+                <a:ea typeface="Arial"/>
+                <a:cs typeface="Arial"/>
+              </a:defRPr>
+            </a:lvl2pPr>
+            <a:lvl3pPr>
+              <a:defRPr>
+                <a:latin typeface="Arial"/>
+                <a:ea typeface="Arial"/>
+                <a:cs typeface="Arial"/>
+              </a:defRPr>
+            </a:lvl3pPr>
+            <a:lvl4pPr>
+              <a:defRPr>
+                <a:latin typeface="Arial"/>
+                <a:ea typeface="Arial"/>
+                <a:cs typeface="Arial"/>
+              </a:defRPr>
+            </a:lvl4pPr>
+            <a:lvl5pPr>
+              <a:defRPr>
+                <a:latin typeface="Arial"/>
+                <a:ea typeface="Arial"/>
+                <a:cs typeface="Arial"/>
+              </a:defRPr>
+            </a:lvl5pPr>
+            <a:lvl6pPr>
+              <a:defRPr>
+                <a:latin typeface="Arial"/>
+                <a:ea typeface="Arial"/>
+                <a:cs typeface="Arial"/>
+              </a:defRPr>
+            </a:lvl6pPr>
+            <a:lvl7pPr>
+              <a:defRPr>
+                <a:latin typeface="Arial"/>
+                <a:ea typeface="Arial"/>
+                <a:cs typeface="Arial"/>
+              </a:defRPr>
+            </a:lvl7pPr>
+            <a:lvl8pPr>
+              <a:defRPr>
+                <a:latin typeface="Arial"/>
+                <a:ea typeface="Arial"/>
+                <a:cs typeface="Arial"/>
+              </a:defRPr>
+            </a:lvl8pPr>
+            <a:lvl9pPr>
+              <a:defRPr>
+                <a:latin typeface="Arial"/>
+                <a:ea typeface="Arial"/>
+                <a:cs typeface="Arial"/>
+              </a:defRPr>
+            </a:lvl9pPr>
+          </a:lstStyle>
           <a:p xmlns:a="http://schemas.openxmlformats.org/drawingml/2006/main">
             <a:pPr>
+              <a:buNone/>
               <a:defRPr sz="1050" b="0">
                 <a:solidFill>
                   <a:srgbClr val="6B7280"/>
@@ -2858,9 +2883,81 @@
           <a:bodyPr xmlns:a="http://schemas.openxmlformats.org/drawingml/2006/main" lIns="0" tIns="0" rIns="0" bIns="0">
             <a:noAutofit/>
           </a:bodyPr>
-          <a:lstStyle xmlns:a="http://schemas.openxmlformats.org/drawingml/2006/main"/>
+          <a:lstStyle xmlns:a="http://schemas.openxmlformats.org/drawingml/2006/main">
+            <a:defPPr>
+              <a:defRPr>
+                <a:latin typeface="Arial"/>
+                <a:ea typeface="Arial"/>
+                <a:cs typeface="Arial"/>
+              </a:defRPr>
+            </a:defPPr>
+            <a:lvl1pPr>
+              <a:defRPr>
+                <a:latin typeface="Arial"/>
+                <a:ea typeface="Arial"/>
+                <a:cs typeface="Arial"/>
+              </a:defRPr>
+            </a:lvl1pPr>
+            <a:lvl2pPr>
+              <a:defRPr>
+                <a:latin typeface="Arial"/>
+                <a:ea typeface="Arial"/>
+                <a:cs typeface="Arial"/>
+              </a:defRPr>
+            </a:lvl2pPr>
+            <a:lvl3pPr>
+              <a:defRPr>
+                <a:latin typeface="Arial"/>
+                <a:ea typeface="Arial"/>
+                <a:cs typeface="Arial"/>
+              </a:defRPr>
+            </a:lvl3pPr>
+            <a:lvl4pPr>
+              <a:defRPr>
+                <a:latin typeface="Arial"/>
+                <a:ea typeface="Arial"/>
+                <a:cs typeface="Arial"/>
+              </a:defRPr>
+            </a:lvl4pPr>
+            <a:lvl5pPr>
+              <a:defRPr>
+                <a:latin typeface="Arial"/>
+                <a:ea typeface="Arial"/>
+                <a:cs typeface="Arial"/>
+              </a:defRPr>
+            </a:lvl5pPr>
+            <a:lvl6pPr>
+              <a:defRPr>
+                <a:latin typeface="Arial"/>
+                <a:ea typeface="Arial"/>
+                <a:cs typeface="Arial"/>
+              </a:defRPr>
+            </a:lvl6pPr>
+            <a:lvl7pPr>
+              <a:defRPr>
+                <a:latin typeface="Arial"/>
+                <a:ea typeface="Arial"/>
+                <a:cs typeface="Arial"/>
+              </a:defRPr>
+            </a:lvl7pPr>
+            <a:lvl8pPr>
+              <a:defRPr>
+                <a:latin typeface="Arial"/>
+                <a:ea typeface="Arial"/>
+                <a:cs typeface="Arial"/>
+              </a:defRPr>
+            </a:lvl8pPr>
+            <a:lvl9pPr>
+              <a:defRPr>
+                <a:latin typeface="Arial"/>
+                <a:ea typeface="Arial"/>
+                <a:cs typeface="Arial"/>
+              </a:defRPr>
+            </a:lvl9pPr>
+          </a:lstStyle>
           <a:p xmlns:a="http://schemas.openxmlformats.org/drawingml/2006/main">
             <a:pPr>
+              <a:buNone/>
               <a:defRPr sz="1500" b="0">
                 <a:solidFill>
                   <a:srgbClr val="6B7280"/>
@@ -2915,9 +3012,81 @@
           <a:bodyPr xmlns:a="http://schemas.openxmlformats.org/drawingml/2006/main" lIns="0" tIns="0" rIns="0" bIns="0">
             <a:noAutofit/>
           </a:bodyPr>
-          <a:lstStyle xmlns:a="http://schemas.openxmlformats.org/drawingml/2006/main"/>
+          <a:lstStyle xmlns:a="http://schemas.openxmlformats.org/drawingml/2006/main">
+            <a:defPPr>
+              <a:defRPr>
+                <a:latin typeface="Arial"/>
+                <a:ea typeface="Arial"/>
+                <a:cs typeface="Arial"/>
+              </a:defRPr>
+            </a:defPPr>
+            <a:lvl1pPr>
+              <a:defRPr>
+                <a:latin typeface="Arial"/>
+                <a:ea typeface="Arial"/>
+                <a:cs typeface="Arial"/>
+              </a:defRPr>
+            </a:lvl1pPr>
+            <a:lvl2pPr>
+              <a:defRPr>
+                <a:latin typeface="Arial"/>
+                <a:ea typeface="Arial"/>
+                <a:cs typeface="Arial"/>
+              </a:defRPr>
+            </a:lvl2pPr>
+            <a:lvl3pPr>
+              <a:defRPr>
+                <a:latin typeface="Arial"/>
+                <a:ea typeface="Arial"/>
+                <a:cs typeface="Arial"/>
+              </a:defRPr>
+            </a:lvl3pPr>
+            <a:lvl4pPr>
+              <a:defRPr>
+                <a:latin typeface="Arial"/>
+                <a:ea typeface="Arial"/>
+                <a:cs typeface="Arial"/>
+              </a:defRPr>
+            </a:lvl4pPr>
+            <a:lvl5pPr>
+              <a:defRPr>
+                <a:latin typeface="Arial"/>
+                <a:ea typeface="Arial"/>
+                <a:cs typeface="Arial"/>
+              </a:defRPr>
+            </a:lvl5pPr>
+            <a:lvl6pPr>
+              <a:defRPr>
+                <a:latin typeface="Arial"/>
+                <a:ea typeface="Arial"/>
+                <a:cs typeface="Arial"/>
+              </a:defRPr>
+            </a:lvl6pPr>
+            <a:lvl7pPr>
+              <a:defRPr>
+                <a:latin typeface="Arial"/>
+                <a:ea typeface="Arial"/>
+                <a:cs typeface="Arial"/>
+              </a:defRPr>
+            </a:lvl7pPr>
+            <a:lvl8pPr>
+              <a:defRPr>
+                <a:latin typeface="Arial"/>
+                <a:ea typeface="Arial"/>
+                <a:cs typeface="Arial"/>
+              </a:defRPr>
+            </a:lvl8pPr>
+            <a:lvl9pPr>
+              <a:defRPr>
+                <a:latin typeface="Arial"/>
+                <a:ea typeface="Arial"/>
+                <a:cs typeface="Arial"/>
+              </a:defRPr>
+            </a:lvl9pPr>
+          </a:lstStyle>
           <a:p xmlns:a="http://schemas.openxmlformats.org/drawingml/2006/main">
             <a:pPr>
+              <a:buNone/>
               <a:defRPr sz="1875" b="0">
                 <a:solidFill>
                   <a:srgbClr val="111827"/>
@@ -2972,9 +3141,81 @@
           <a:bodyPr xmlns:a="http://schemas.openxmlformats.org/drawingml/2006/main" lIns="0" tIns="0" rIns="0" bIns="0">
             <a:noAutofit/>
           </a:bodyPr>
-          <a:lstStyle xmlns:a="http://schemas.openxmlformats.org/drawingml/2006/main"/>
+          <a:lstStyle xmlns:a="http://schemas.openxmlformats.org/drawingml/2006/main">
+            <a:defPPr>
+              <a:defRPr>
+                <a:latin typeface="Arial"/>
+                <a:ea typeface="Arial"/>
+                <a:cs typeface="Arial"/>
+              </a:defRPr>
+            </a:defPPr>
+            <a:lvl1pPr>
+              <a:defRPr>
+                <a:latin typeface="Arial"/>
+                <a:ea typeface="Arial"/>
+                <a:cs typeface="Arial"/>
+              </a:defRPr>
+            </a:lvl1pPr>
+            <a:lvl2pPr>
+              <a:defRPr>
+                <a:latin typeface="Arial"/>
+                <a:ea typeface="Arial"/>
+                <a:cs typeface="Arial"/>
+              </a:defRPr>
+            </a:lvl2pPr>
+            <a:lvl3pPr>
+              <a:defRPr>
+                <a:latin typeface="Arial"/>
+                <a:ea typeface="Arial"/>
+                <a:cs typeface="Arial"/>
+              </a:defRPr>
+            </a:lvl3pPr>
+            <a:lvl4pPr>
+              <a:defRPr>
+                <a:latin typeface="Arial"/>
+                <a:ea typeface="Arial"/>
+                <a:cs typeface="Arial"/>
+              </a:defRPr>
+            </a:lvl4pPr>
+            <a:lvl5pPr>
+              <a:defRPr>
+                <a:latin typeface="Arial"/>
+                <a:ea typeface="Arial"/>
+                <a:cs typeface="Arial"/>
+              </a:defRPr>
+            </a:lvl5pPr>
+            <a:lvl6pPr>
+              <a:defRPr>
+                <a:latin typeface="Arial"/>
+                <a:ea typeface="Arial"/>
+                <a:cs typeface="Arial"/>
+              </a:defRPr>
+            </a:lvl6pPr>
+            <a:lvl7pPr>
+              <a:defRPr>
+                <a:latin typeface="Arial"/>
+                <a:ea typeface="Arial"/>
+                <a:cs typeface="Arial"/>
+              </a:defRPr>
+            </a:lvl7pPr>
+            <a:lvl8pPr>
+              <a:defRPr>
+                <a:latin typeface="Arial"/>
+                <a:ea typeface="Arial"/>
+                <a:cs typeface="Arial"/>
+              </a:defRPr>
+            </a:lvl8pPr>
+            <a:lvl9pPr>
+              <a:defRPr>
+                <a:latin typeface="Arial"/>
+                <a:ea typeface="Arial"/>
+                <a:cs typeface="Arial"/>
+              </a:defRPr>
+            </a:lvl9pPr>
+          </a:lstStyle>
           <a:p xmlns:a="http://schemas.openxmlformats.org/drawingml/2006/main">
             <a:pPr>
+              <a:buNone/>
               <a:defRPr sz="1200" b="0">
                 <a:solidFill>
                   <a:srgbClr val="6B7280"/>
@@ -2993,7 +3234,7 @@
                 <a:ea typeface="Arial"/>
                 <a:cs typeface="Arial"/>
               </a:rPr>
-              <a:t>P R O J E C T  G O A L</a:t>
+              <a:t>Project goal</a:t>
             </a:r>
           </a:p>
         </p:txBody>
@@ -3059,9 +3300,81 @@
           <a:bodyPr xmlns:a="http://schemas.openxmlformats.org/drawingml/2006/main" lIns="0" tIns="0" rIns="0" bIns="0">
             <a:noAutofit/>
           </a:bodyPr>
-          <a:lstStyle xmlns:a="http://schemas.openxmlformats.org/drawingml/2006/main"/>
+          <a:lstStyle xmlns:a="http://schemas.openxmlformats.org/drawingml/2006/main">
+            <a:defPPr>
+              <a:defRPr>
+                <a:latin typeface="Arial"/>
+                <a:ea typeface="Arial"/>
+                <a:cs typeface="Arial"/>
+              </a:defRPr>
+            </a:defPPr>
+            <a:lvl1pPr>
+              <a:defRPr>
+                <a:latin typeface="Arial"/>
+                <a:ea typeface="Arial"/>
+                <a:cs typeface="Arial"/>
+              </a:defRPr>
+            </a:lvl1pPr>
+            <a:lvl2pPr>
+              <a:defRPr>
+                <a:latin typeface="Arial"/>
+                <a:ea typeface="Arial"/>
+                <a:cs typeface="Arial"/>
+              </a:defRPr>
+            </a:lvl2pPr>
+            <a:lvl3pPr>
+              <a:defRPr>
+                <a:latin typeface="Arial"/>
+                <a:ea typeface="Arial"/>
+                <a:cs typeface="Arial"/>
+              </a:defRPr>
+            </a:lvl3pPr>
+            <a:lvl4pPr>
+              <a:defRPr>
+                <a:latin typeface="Arial"/>
+                <a:ea typeface="Arial"/>
+                <a:cs typeface="Arial"/>
+              </a:defRPr>
+            </a:lvl4pPr>
+            <a:lvl5pPr>
+              <a:defRPr>
+                <a:latin typeface="Arial"/>
+                <a:ea typeface="Arial"/>
+                <a:cs typeface="Arial"/>
+              </a:defRPr>
+            </a:lvl5pPr>
+            <a:lvl6pPr>
+              <a:defRPr>
+                <a:latin typeface="Arial"/>
+                <a:ea typeface="Arial"/>
+                <a:cs typeface="Arial"/>
+              </a:defRPr>
+            </a:lvl6pPr>
+            <a:lvl7pPr>
+              <a:defRPr>
+                <a:latin typeface="Arial"/>
+                <a:ea typeface="Arial"/>
+                <a:cs typeface="Arial"/>
+              </a:defRPr>
+            </a:lvl7pPr>
+            <a:lvl8pPr>
+              <a:defRPr>
+                <a:latin typeface="Arial"/>
+                <a:ea typeface="Arial"/>
+                <a:cs typeface="Arial"/>
+              </a:defRPr>
+            </a:lvl8pPr>
+            <a:lvl9pPr>
+              <a:defRPr>
+                <a:latin typeface="Arial"/>
+                <a:ea typeface="Arial"/>
+                <a:cs typeface="Arial"/>
+              </a:defRPr>
+            </a:lvl9pPr>
+          </a:lstStyle>
           <a:p xmlns:a="http://schemas.openxmlformats.org/drawingml/2006/main">
             <a:pPr>
+              <a:buNone/>
               <a:defRPr sz="1875" b="0">
                 <a:solidFill>
                   <a:srgbClr val="111827"/>
@@ -3085,6 +3398,7 @@
           </a:p>
           <a:p xmlns:a="http://schemas.openxmlformats.org/drawingml/2006/main">
             <a:pPr>
+              <a:buNone/>
               <a:defRPr sz="1875" b="0">
                 <a:solidFill>
                   <a:srgbClr val="111827"/>
@@ -3108,6 +3422,7 @@
           </a:p>
           <a:p xmlns:a="http://schemas.openxmlformats.org/drawingml/2006/main">
             <a:pPr>
+              <a:buNone/>
               <a:defRPr sz="1875" b="0">
                 <a:solidFill>
                   <a:srgbClr val="111827"/>
@@ -3162,9 +3477,81 @@
           <a:bodyPr xmlns:a="http://schemas.openxmlformats.org/drawingml/2006/main" lIns="0" tIns="0" rIns="0" bIns="0">
             <a:noAutofit/>
           </a:bodyPr>
-          <a:lstStyle xmlns:a="http://schemas.openxmlformats.org/drawingml/2006/main"/>
+          <a:lstStyle xmlns:a="http://schemas.openxmlformats.org/drawingml/2006/main">
+            <a:defPPr>
+              <a:defRPr>
+                <a:latin typeface="Arial"/>
+                <a:ea typeface="Arial"/>
+                <a:cs typeface="Arial"/>
+              </a:defRPr>
+            </a:defPPr>
+            <a:lvl1pPr>
+              <a:defRPr>
+                <a:latin typeface="Arial"/>
+                <a:ea typeface="Arial"/>
+                <a:cs typeface="Arial"/>
+              </a:defRPr>
+            </a:lvl1pPr>
+            <a:lvl2pPr>
+              <a:defRPr>
+                <a:latin typeface="Arial"/>
+                <a:ea typeface="Arial"/>
+                <a:cs typeface="Arial"/>
+              </a:defRPr>
+            </a:lvl2pPr>
+            <a:lvl3pPr>
+              <a:defRPr>
+                <a:latin typeface="Arial"/>
+                <a:ea typeface="Arial"/>
+                <a:cs typeface="Arial"/>
+              </a:defRPr>
+            </a:lvl3pPr>
+            <a:lvl4pPr>
+              <a:defRPr>
+                <a:latin typeface="Arial"/>
+                <a:ea typeface="Arial"/>
+                <a:cs typeface="Arial"/>
+              </a:defRPr>
+            </a:lvl4pPr>
+            <a:lvl5pPr>
+              <a:defRPr>
+                <a:latin typeface="Arial"/>
+                <a:ea typeface="Arial"/>
+                <a:cs typeface="Arial"/>
+              </a:defRPr>
+            </a:lvl5pPr>
+            <a:lvl6pPr>
+              <a:defRPr>
+                <a:latin typeface="Arial"/>
+                <a:ea typeface="Arial"/>
+                <a:cs typeface="Arial"/>
+              </a:defRPr>
+            </a:lvl6pPr>
+            <a:lvl7pPr>
+              <a:defRPr>
+                <a:latin typeface="Arial"/>
+                <a:ea typeface="Arial"/>
+                <a:cs typeface="Arial"/>
+              </a:defRPr>
+            </a:lvl7pPr>
+            <a:lvl8pPr>
+              <a:defRPr>
+                <a:latin typeface="Arial"/>
+                <a:ea typeface="Arial"/>
+                <a:cs typeface="Arial"/>
+              </a:defRPr>
+            </a:lvl8pPr>
+            <a:lvl9pPr>
+              <a:defRPr>
+                <a:latin typeface="Arial"/>
+                <a:ea typeface="Arial"/>
+                <a:cs typeface="Arial"/>
+              </a:defRPr>
+            </a:lvl9pPr>
+          </a:lstStyle>
           <a:p xmlns:a="http://schemas.openxmlformats.org/drawingml/2006/main">
             <a:pPr>
+              <a:buNone/>
               <a:defRPr sz="1200" b="0">
                 <a:solidFill>
                   <a:srgbClr val="6B7280"/>
@@ -3183,7 +3570,7 @@
                 <a:ea typeface="Arial"/>
                 <a:cs typeface="Arial"/>
               </a:rPr>
-              <a:t>W O R K I N G  D E M O</a:t>
+              <a:t>Working demo</a:t>
             </a:r>
           </a:p>
         </p:txBody>
@@ -3249,9 +3636,81 @@
           <a:bodyPr xmlns:a="http://schemas.openxmlformats.org/drawingml/2006/main" lIns="0" tIns="0" rIns="0" bIns="0">
             <a:noAutofit/>
           </a:bodyPr>
-          <a:lstStyle xmlns:a="http://schemas.openxmlformats.org/drawingml/2006/main"/>
+          <a:lstStyle xmlns:a="http://schemas.openxmlformats.org/drawingml/2006/main">
+            <a:defPPr>
+              <a:defRPr>
+                <a:latin typeface="Arial"/>
+                <a:ea typeface="Arial"/>
+                <a:cs typeface="Arial"/>
+              </a:defRPr>
+            </a:defPPr>
+            <a:lvl1pPr>
+              <a:defRPr>
+                <a:latin typeface="Arial"/>
+                <a:ea typeface="Arial"/>
+                <a:cs typeface="Arial"/>
+              </a:defRPr>
+            </a:lvl1pPr>
+            <a:lvl2pPr>
+              <a:defRPr>
+                <a:latin typeface="Arial"/>
+                <a:ea typeface="Arial"/>
+                <a:cs typeface="Arial"/>
+              </a:defRPr>
+            </a:lvl2pPr>
+            <a:lvl3pPr>
+              <a:defRPr>
+                <a:latin typeface="Arial"/>
+                <a:ea typeface="Arial"/>
+                <a:cs typeface="Arial"/>
+              </a:defRPr>
+            </a:lvl3pPr>
+            <a:lvl4pPr>
+              <a:defRPr>
+                <a:latin typeface="Arial"/>
+                <a:ea typeface="Arial"/>
+                <a:cs typeface="Arial"/>
+              </a:defRPr>
+            </a:lvl4pPr>
+            <a:lvl5pPr>
+              <a:defRPr>
+                <a:latin typeface="Arial"/>
+                <a:ea typeface="Arial"/>
+                <a:cs typeface="Arial"/>
+              </a:defRPr>
+            </a:lvl5pPr>
+            <a:lvl6pPr>
+              <a:defRPr>
+                <a:latin typeface="Arial"/>
+                <a:ea typeface="Arial"/>
+                <a:cs typeface="Arial"/>
+              </a:defRPr>
+            </a:lvl6pPr>
+            <a:lvl7pPr>
+              <a:defRPr>
+                <a:latin typeface="Arial"/>
+                <a:ea typeface="Arial"/>
+                <a:cs typeface="Arial"/>
+              </a:defRPr>
+            </a:lvl7pPr>
+            <a:lvl8pPr>
+              <a:defRPr>
+                <a:latin typeface="Arial"/>
+                <a:ea typeface="Arial"/>
+                <a:cs typeface="Arial"/>
+              </a:defRPr>
+            </a:lvl8pPr>
+            <a:lvl9pPr>
+              <a:defRPr>
+                <a:latin typeface="Arial"/>
+                <a:ea typeface="Arial"/>
+                <a:cs typeface="Arial"/>
+              </a:defRPr>
+            </a:lvl9pPr>
+          </a:lstStyle>
           <a:p xmlns:a="http://schemas.openxmlformats.org/drawingml/2006/main">
             <a:pPr>
+              <a:buNone/>
               <a:defRPr sz="1875" b="0">
                 <a:solidFill>
                   <a:srgbClr val="111827"/>
@@ -3275,6 +3734,7 @@
           </a:p>
           <a:p xmlns:a="http://schemas.openxmlformats.org/drawingml/2006/main">
             <a:pPr>
+              <a:buNone/>
               <a:defRPr sz="1875" b="0">
                 <a:solidFill>
                   <a:srgbClr val="111827"/>
@@ -3298,6 +3758,7 @@
           </a:p>
           <a:p xmlns:a="http://schemas.openxmlformats.org/drawingml/2006/main">
             <a:pPr>
+              <a:buNone/>
               <a:defRPr sz="1875" b="0">
                 <a:solidFill>
                   <a:srgbClr val="111827"/>
@@ -3352,9 +3813,81 @@
           <a:bodyPr xmlns:a="http://schemas.openxmlformats.org/drawingml/2006/main" lIns="0" tIns="0" rIns="0" bIns="0">
             <a:noAutofit/>
           </a:bodyPr>
-          <a:lstStyle xmlns:a="http://schemas.openxmlformats.org/drawingml/2006/main"/>
+          <a:lstStyle xmlns:a="http://schemas.openxmlformats.org/drawingml/2006/main">
+            <a:defPPr>
+              <a:defRPr>
+                <a:latin typeface="Arial"/>
+                <a:ea typeface="Arial"/>
+                <a:cs typeface="Arial"/>
+              </a:defRPr>
+            </a:defPPr>
+            <a:lvl1pPr>
+              <a:defRPr>
+                <a:latin typeface="Arial"/>
+                <a:ea typeface="Arial"/>
+                <a:cs typeface="Arial"/>
+              </a:defRPr>
+            </a:lvl1pPr>
+            <a:lvl2pPr>
+              <a:defRPr>
+                <a:latin typeface="Arial"/>
+                <a:ea typeface="Arial"/>
+                <a:cs typeface="Arial"/>
+              </a:defRPr>
+            </a:lvl2pPr>
+            <a:lvl3pPr>
+              <a:defRPr>
+                <a:latin typeface="Arial"/>
+                <a:ea typeface="Arial"/>
+                <a:cs typeface="Arial"/>
+              </a:defRPr>
+            </a:lvl3pPr>
+            <a:lvl4pPr>
+              <a:defRPr>
+                <a:latin typeface="Arial"/>
+                <a:ea typeface="Arial"/>
+                <a:cs typeface="Arial"/>
+              </a:defRPr>
+            </a:lvl4pPr>
+            <a:lvl5pPr>
+              <a:defRPr>
+                <a:latin typeface="Arial"/>
+                <a:ea typeface="Arial"/>
+                <a:cs typeface="Arial"/>
+              </a:defRPr>
+            </a:lvl5pPr>
+            <a:lvl6pPr>
+              <a:defRPr>
+                <a:latin typeface="Arial"/>
+                <a:ea typeface="Arial"/>
+                <a:cs typeface="Arial"/>
+              </a:defRPr>
+            </a:lvl6pPr>
+            <a:lvl7pPr>
+              <a:defRPr>
+                <a:latin typeface="Arial"/>
+                <a:ea typeface="Arial"/>
+                <a:cs typeface="Arial"/>
+              </a:defRPr>
+            </a:lvl7pPr>
+            <a:lvl8pPr>
+              <a:defRPr>
+                <a:latin typeface="Arial"/>
+                <a:ea typeface="Arial"/>
+                <a:cs typeface="Arial"/>
+              </a:defRPr>
+            </a:lvl8pPr>
+            <a:lvl9pPr>
+              <a:defRPr>
+                <a:latin typeface="Arial"/>
+                <a:ea typeface="Arial"/>
+                <a:cs typeface="Arial"/>
+              </a:defRPr>
+            </a:lvl9pPr>
+          </a:lstStyle>
           <a:p xmlns:a="http://schemas.openxmlformats.org/drawingml/2006/main">
             <a:pPr>
+              <a:buNone/>
               <a:defRPr sz="1425" b="0">
                 <a:solidFill>
                   <a:srgbClr val="6B7280"/>
@@ -3394,7 +3927,7 @@
     <p:bg>
       <p:bgPr>
         <a:solidFill xmlns:a="http://schemas.openxmlformats.org/drawingml/2006/main">
-          <a:srgbClr val="F9FAFB"/>
+          <a:srgbClr val="FFFFFF"/>
         </a:solidFill>
       </p:bgPr>
     </p:bg>
@@ -3438,9 +3971,81 @@
           <a:bodyPr xmlns:a="http://schemas.openxmlformats.org/drawingml/2006/main" lIns="0" tIns="0" rIns="0" bIns="0">
             <a:noAutofit/>
           </a:bodyPr>
-          <a:lstStyle xmlns:a="http://schemas.openxmlformats.org/drawingml/2006/main"/>
+          <a:lstStyle xmlns:a="http://schemas.openxmlformats.org/drawingml/2006/main">
+            <a:defPPr>
+              <a:defRPr>
+                <a:latin typeface="Arial"/>
+                <a:ea typeface="Arial"/>
+                <a:cs typeface="Arial"/>
+              </a:defRPr>
+            </a:defPPr>
+            <a:lvl1pPr>
+              <a:defRPr>
+                <a:latin typeface="Arial"/>
+                <a:ea typeface="Arial"/>
+                <a:cs typeface="Arial"/>
+              </a:defRPr>
+            </a:lvl1pPr>
+            <a:lvl2pPr>
+              <a:defRPr>
+                <a:latin typeface="Arial"/>
+                <a:ea typeface="Arial"/>
+                <a:cs typeface="Arial"/>
+              </a:defRPr>
+            </a:lvl2pPr>
+            <a:lvl3pPr>
+              <a:defRPr>
+                <a:latin typeface="Arial"/>
+                <a:ea typeface="Arial"/>
+                <a:cs typeface="Arial"/>
+              </a:defRPr>
+            </a:lvl3pPr>
+            <a:lvl4pPr>
+              <a:defRPr>
+                <a:latin typeface="Arial"/>
+                <a:ea typeface="Arial"/>
+                <a:cs typeface="Arial"/>
+              </a:defRPr>
+            </a:lvl4pPr>
+            <a:lvl5pPr>
+              <a:defRPr>
+                <a:latin typeface="Arial"/>
+                <a:ea typeface="Arial"/>
+                <a:cs typeface="Arial"/>
+              </a:defRPr>
+            </a:lvl5pPr>
+            <a:lvl6pPr>
+              <a:defRPr>
+                <a:latin typeface="Arial"/>
+                <a:ea typeface="Arial"/>
+                <a:cs typeface="Arial"/>
+              </a:defRPr>
+            </a:lvl6pPr>
+            <a:lvl7pPr>
+              <a:defRPr>
+                <a:latin typeface="Arial"/>
+                <a:ea typeface="Arial"/>
+                <a:cs typeface="Arial"/>
+              </a:defRPr>
+            </a:lvl7pPr>
+            <a:lvl8pPr>
+              <a:defRPr>
+                <a:latin typeface="Arial"/>
+                <a:ea typeface="Arial"/>
+                <a:cs typeface="Arial"/>
+              </a:defRPr>
+            </a:lvl8pPr>
+            <a:lvl9pPr>
+              <a:defRPr>
+                <a:latin typeface="Arial"/>
+                <a:ea typeface="Arial"/>
+                <a:cs typeface="Arial"/>
+              </a:defRPr>
+            </a:lvl9pPr>
+          </a:lstStyle>
           <a:p xmlns:a="http://schemas.openxmlformats.org/drawingml/2006/main">
             <a:pPr>
+              <a:buNone/>
               <a:defRPr sz="1050" b="0">
                 <a:solidFill>
                   <a:srgbClr val="6B7280"/>
@@ -3459,7 +4064,7 @@
                 <a:ea typeface="Arial"/>
                 <a:cs typeface="Arial"/>
               </a:rPr>
-              <a:t>E C O L L A T E R A L   /   C S C I  4 1 5 0  A 2</a:t>
+              <a:t>ECOllateral / CSCI 4150 A2</a:t>
             </a:r>
           </a:p>
         </p:txBody>
@@ -3525,28 +4130,100 @@
           <a:bodyPr xmlns:a="http://schemas.openxmlformats.org/drawingml/2006/main" lIns="0" tIns="0" rIns="0" bIns="0">
             <a:noAutofit/>
           </a:bodyPr>
-          <a:lstStyle xmlns:a="http://schemas.openxmlformats.org/drawingml/2006/main"/>
+          <a:lstStyle xmlns:a="http://schemas.openxmlformats.org/drawingml/2006/main">
+            <a:defPPr>
+              <a:defRPr sz="3150" b="1">
+                <a:latin typeface="Arial"/>
+                <a:ea typeface="Arial"/>
+                <a:cs typeface="Arial"/>
+              </a:defRPr>
+            </a:defPPr>
+            <a:lvl1pPr>
+              <a:defRPr sz="3150" b="1">
+                <a:latin typeface="Arial"/>
+                <a:ea typeface="Arial"/>
+                <a:cs typeface="Arial"/>
+              </a:defRPr>
+            </a:lvl1pPr>
+            <a:lvl2pPr>
+              <a:defRPr sz="3150" b="1">
+                <a:latin typeface="Arial"/>
+                <a:ea typeface="Arial"/>
+                <a:cs typeface="Arial"/>
+              </a:defRPr>
+            </a:lvl2pPr>
+            <a:lvl3pPr>
+              <a:defRPr sz="3150" b="1">
+                <a:latin typeface="Arial"/>
+                <a:ea typeface="Arial"/>
+                <a:cs typeface="Arial"/>
+              </a:defRPr>
+            </a:lvl3pPr>
+            <a:lvl4pPr>
+              <a:defRPr sz="3150" b="1">
+                <a:latin typeface="Arial"/>
+                <a:ea typeface="Arial"/>
+                <a:cs typeface="Arial"/>
+              </a:defRPr>
+            </a:lvl4pPr>
+            <a:lvl5pPr>
+              <a:defRPr sz="3150" b="1">
+                <a:latin typeface="Arial"/>
+                <a:ea typeface="Arial"/>
+                <a:cs typeface="Arial"/>
+              </a:defRPr>
+            </a:lvl5pPr>
+            <a:lvl6pPr>
+              <a:defRPr sz="3150" b="1">
+                <a:latin typeface="Arial"/>
+                <a:ea typeface="Arial"/>
+                <a:cs typeface="Arial"/>
+              </a:defRPr>
+            </a:lvl6pPr>
+            <a:lvl7pPr>
+              <a:defRPr sz="3150" b="1">
+                <a:latin typeface="Arial"/>
+                <a:ea typeface="Arial"/>
+                <a:cs typeface="Arial"/>
+              </a:defRPr>
+            </a:lvl7pPr>
+            <a:lvl8pPr>
+              <a:defRPr sz="3150" b="1">
+                <a:latin typeface="Arial"/>
+                <a:ea typeface="Arial"/>
+                <a:cs typeface="Arial"/>
+              </a:defRPr>
+            </a:lvl8pPr>
+            <a:lvl9pPr>
+              <a:defRPr sz="3150" b="1">
+                <a:latin typeface="Arial"/>
+                <a:ea typeface="Arial"/>
+                <a:cs typeface="Arial"/>
+              </a:defRPr>
+            </a:lvl9pPr>
+          </a:lstStyle>
           <a:p xmlns:a="http://schemas.openxmlformats.org/drawingml/2006/main">
             <a:pPr>
-              <a:defRPr sz="3225" b="0">
+              <a:buNone/>
+              <a:defRPr sz="3150" b="1">
                 <a:solidFill>
                   <a:srgbClr val="111827"/>
                 </a:solidFill>
-                <a:latin typeface="Georgia"/>
-                <a:ea typeface="Georgia"/>
-                <a:cs typeface="Georgia"/>
+                <a:latin typeface="Arial"/>
+                <a:ea typeface="Arial"/>
+                <a:cs typeface="Arial"/>
               </a:defRPr>
             </a:pPr>
             <a:r>
-              <a:rPr sz="3225" b="0">
+              <a:rPr sz="3150" b="1">
                 <a:solidFill>
                   <a:srgbClr val="111827"/>
                 </a:solidFill>
-                <a:latin typeface="Georgia"/>
-                <a:ea typeface="Georgia"/>
-                <a:cs typeface="Georgia"/>
+                <a:latin typeface="Arial"/>
+                <a:ea typeface="Arial"/>
+                <a:cs typeface="Arial"/>
               </a:rPr>
-              <a:t>SEMANTIC MAP: CURRENT SYSTEM</a:t>
+              <a:t>Current system: semantic map</a:t>
             </a:r>
           </a:p>
         </p:txBody>
@@ -3582,9 +4259,81 @@
           <a:bodyPr xmlns:a="http://schemas.openxmlformats.org/drawingml/2006/main" lIns="0" tIns="0" rIns="0" bIns="0">
             <a:noAutofit/>
           </a:bodyPr>
-          <a:lstStyle xmlns:a="http://schemas.openxmlformats.org/drawingml/2006/main"/>
+          <a:lstStyle xmlns:a="http://schemas.openxmlformats.org/drawingml/2006/main">
+            <a:defPPr>
+              <a:defRPr>
+                <a:latin typeface="Arial"/>
+                <a:ea typeface="Arial"/>
+                <a:cs typeface="Arial"/>
+              </a:defRPr>
+            </a:defPPr>
+            <a:lvl1pPr>
+              <a:defRPr>
+                <a:latin typeface="Arial"/>
+                <a:ea typeface="Arial"/>
+                <a:cs typeface="Arial"/>
+              </a:defRPr>
+            </a:lvl1pPr>
+            <a:lvl2pPr>
+              <a:defRPr>
+                <a:latin typeface="Arial"/>
+                <a:ea typeface="Arial"/>
+                <a:cs typeface="Arial"/>
+              </a:defRPr>
+            </a:lvl2pPr>
+            <a:lvl3pPr>
+              <a:defRPr>
+                <a:latin typeface="Arial"/>
+                <a:ea typeface="Arial"/>
+                <a:cs typeface="Arial"/>
+              </a:defRPr>
+            </a:lvl3pPr>
+            <a:lvl4pPr>
+              <a:defRPr>
+                <a:latin typeface="Arial"/>
+                <a:ea typeface="Arial"/>
+                <a:cs typeface="Arial"/>
+              </a:defRPr>
+            </a:lvl4pPr>
+            <a:lvl5pPr>
+              <a:defRPr>
+                <a:latin typeface="Arial"/>
+                <a:ea typeface="Arial"/>
+                <a:cs typeface="Arial"/>
+              </a:defRPr>
+            </a:lvl5pPr>
+            <a:lvl6pPr>
+              <a:defRPr>
+                <a:latin typeface="Arial"/>
+                <a:ea typeface="Arial"/>
+                <a:cs typeface="Arial"/>
+              </a:defRPr>
+            </a:lvl6pPr>
+            <a:lvl7pPr>
+              <a:defRPr>
+                <a:latin typeface="Arial"/>
+                <a:ea typeface="Arial"/>
+                <a:cs typeface="Arial"/>
+              </a:defRPr>
+            </a:lvl7pPr>
+            <a:lvl8pPr>
+              <a:defRPr>
+                <a:latin typeface="Arial"/>
+                <a:ea typeface="Arial"/>
+                <a:cs typeface="Arial"/>
+              </a:defRPr>
+            </a:lvl8pPr>
+            <a:lvl9pPr>
+              <a:defRPr>
+                <a:latin typeface="Arial"/>
+                <a:ea typeface="Arial"/>
+                <a:cs typeface="Arial"/>
+              </a:defRPr>
+            </a:lvl9pPr>
+          </a:lstStyle>
           <a:p xmlns:a="http://schemas.openxmlformats.org/drawingml/2006/main">
             <a:pPr>
+              <a:buNone/>
               <a:defRPr sz="975" b="0">
                 <a:solidFill>
                   <a:srgbClr val="6B7280"/>
@@ -3639,9 +4388,81 @@
           <a:bodyPr xmlns:a="http://schemas.openxmlformats.org/drawingml/2006/main" lIns="0" tIns="0" rIns="0" bIns="0">
             <a:noAutofit/>
           </a:bodyPr>
-          <a:lstStyle xmlns:a="http://schemas.openxmlformats.org/drawingml/2006/main"/>
+          <a:lstStyle xmlns:a="http://schemas.openxmlformats.org/drawingml/2006/main">
+            <a:defPPr>
+              <a:defRPr>
+                <a:latin typeface="Arial"/>
+                <a:ea typeface="Arial"/>
+                <a:cs typeface="Arial"/>
+              </a:defRPr>
+            </a:defPPr>
+            <a:lvl1pPr>
+              <a:defRPr>
+                <a:latin typeface="Arial"/>
+                <a:ea typeface="Arial"/>
+                <a:cs typeface="Arial"/>
+              </a:defRPr>
+            </a:lvl1pPr>
+            <a:lvl2pPr>
+              <a:defRPr>
+                <a:latin typeface="Arial"/>
+                <a:ea typeface="Arial"/>
+                <a:cs typeface="Arial"/>
+              </a:defRPr>
+            </a:lvl2pPr>
+            <a:lvl3pPr>
+              <a:defRPr>
+                <a:latin typeface="Arial"/>
+                <a:ea typeface="Arial"/>
+                <a:cs typeface="Arial"/>
+              </a:defRPr>
+            </a:lvl3pPr>
+            <a:lvl4pPr>
+              <a:defRPr>
+                <a:latin typeface="Arial"/>
+                <a:ea typeface="Arial"/>
+                <a:cs typeface="Arial"/>
+              </a:defRPr>
+            </a:lvl4pPr>
+            <a:lvl5pPr>
+              <a:defRPr>
+                <a:latin typeface="Arial"/>
+                <a:ea typeface="Arial"/>
+                <a:cs typeface="Arial"/>
+              </a:defRPr>
+            </a:lvl5pPr>
+            <a:lvl6pPr>
+              <a:defRPr>
+                <a:latin typeface="Arial"/>
+                <a:ea typeface="Arial"/>
+                <a:cs typeface="Arial"/>
+              </a:defRPr>
+            </a:lvl6pPr>
+            <a:lvl7pPr>
+              <a:defRPr>
+                <a:latin typeface="Arial"/>
+                <a:ea typeface="Arial"/>
+                <a:cs typeface="Arial"/>
+              </a:defRPr>
+            </a:lvl7pPr>
+            <a:lvl8pPr>
+              <a:defRPr>
+                <a:latin typeface="Arial"/>
+                <a:ea typeface="Arial"/>
+                <a:cs typeface="Arial"/>
+              </a:defRPr>
+            </a:lvl8pPr>
+            <a:lvl9pPr>
+              <a:defRPr>
+                <a:latin typeface="Arial"/>
+                <a:ea typeface="Arial"/>
+                <a:cs typeface="Arial"/>
+              </a:defRPr>
+            </a:lvl9pPr>
+          </a:lstStyle>
           <a:p xmlns:a="http://schemas.openxmlformats.org/drawingml/2006/main">
             <a:pPr>
+              <a:buNone/>
               <a:defRPr sz="1050" b="0">
                 <a:solidFill>
                   <a:srgbClr val="6B7280"/>
@@ -3696,9 +4517,81 @@
           <a:bodyPr xmlns:a="http://schemas.openxmlformats.org/drawingml/2006/main" lIns="0" tIns="0" rIns="0" bIns="0">
             <a:noAutofit/>
           </a:bodyPr>
-          <a:lstStyle xmlns:a="http://schemas.openxmlformats.org/drawingml/2006/main"/>
+          <a:lstStyle xmlns:a="http://schemas.openxmlformats.org/drawingml/2006/main">
+            <a:defPPr>
+              <a:defRPr>
+                <a:latin typeface="Arial"/>
+                <a:ea typeface="Arial"/>
+                <a:cs typeface="Arial"/>
+              </a:defRPr>
+            </a:defPPr>
+            <a:lvl1pPr>
+              <a:defRPr>
+                <a:latin typeface="Arial"/>
+                <a:ea typeface="Arial"/>
+                <a:cs typeface="Arial"/>
+              </a:defRPr>
+            </a:lvl1pPr>
+            <a:lvl2pPr>
+              <a:defRPr>
+                <a:latin typeface="Arial"/>
+                <a:ea typeface="Arial"/>
+                <a:cs typeface="Arial"/>
+              </a:defRPr>
+            </a:lvl2pPr>
+            <a:lvl3pPr>
+              <a:defRPr>
+                <a:latin typeface="Arial"/>
+                <a:ea typeface="Arial"/>
+                <a:cs typeface="Arial"/>
+              </a:defRPr>
+            </a:lvl3pPr>
+            <a:lvl4pPr>
+              <a:defRPr>
+                <a:latin typeface="Arial"/>
+                <a:ea typeface="Arial"/>
+                <a:cs typeface="Arial"/>
+              </a:defRPr>
+            </a:lvl4pPr>
+            <a:lvl5pPr>
+              <a:defRPr>
+                <a:latin typeface="Arial"/>
+                <a:ea typeface="Arial"/>
+                <a:cs typeface="Arial"/>
+              </a:defRPr>
+            </a:lvl5pPr>
+            <a:lvl6pPr>
+              <a:defRPr>
+                <a:latin typeface="Arial"/>
+                <a:ea typeface="Arial"/>
+                <a:cs typeface="Arial"/>
+              </a:defRPr>
+            </a:lvl6pPr>
+            <a:lvl7pPr>
+              <a:defRPr>
+                <a:latin typeface="Arial"/>
+                <a:ea typeface="Arial"/>
+                <a:cs typeface="Arial"/>
+              </a:defRPr>
+            </a:lvl7pPr>
+            <a:lvl8pPr>
+              <a:defRPr>
+                <a:latin typeface="Arial"/>
+                <a:ea typeface="Arial"/>
+                <a:cs typeface="Arial"/>
+              </a:defRPr>
+            </a:lvl8pPr>
+            <a:lvl9pPr>
+              <a:defRPr>
+                <a:latin typeface="Arial"/>
+                <a:ea typeface="Arial"/>
+                <a:cs typeface="Arial"/>
+              </a:defRPr>
+            </a:lvl9pPr>
+          </a:lstStyle>
           <a:p xmlns:a="http://schemas.openxmlformats.org/drawingml/2006/main">
             <a:pPr>
+              <a:buNone/>
               <a:defRPr sz="1650" b="0">
                 <a:solidFill>
                   <a:srgbClr val="111827"/>
@@ -3781,9 +4674,81 @@
           <a:bodyPr xmlns:a="http://schemas.openxmlformats.org/drawingml/2006/main" lIns="0" tIns="0" rIns="0" bIns="0">
             <a:noAutofit/>
           </a:bodyPr>
-          <a:lstStyle xmlns:a="http://schemas.openxmlformats.org/drawingml/2006/main"/>
+          <a:lstStyle xmlns:a="http://schemas.openxmlformats.org/drawingml/2006/main">
+            <a:defPPr>
+              <a:defRPr>
+                <a:latin typeface="Arial"/>
+                <a:ea typeface="Arial"/>
+                <a:cs typeface="Arial"/>
+              </a:defRPr>
+            </a:defPPr>
+            <a:lvl1pPr>
+              <a:defRPr>
+                <a:latin typeface="Arial"/>
+                <a:ea typeface="Arial"/>
+                <a:cs typeface="Arial"/>
+              </a:defRPr>
+            </a:lvl1pPr>
+            <a:lvl2pPr>
+              <a:defRPr>
+                <a:latin typeface="Arial"/>
+                <a:ea typeface="Arial"/>
+                <a:cs typeface="Arial"/>
+              </a:defRPr>
+            </a:lvl2pPr>
+            <a:lvl3pPr>
+              <a:defRPr>
+                <a:latin typeface="Arial"/>
+                <a:ea typeface="Arial"/>
+                <a:cs typeface="Arial"/>
+              </a:defRPr>
+            </a:lvl3pPr>
+            <a:lvl4pPr>
+              <a:defRPr>
+                <a:latin typeface="Arial"/>
+                <a:ea typeface="Arial"/>
+                <a:cs typeface="Arial"/>
+              </a:defRPr>
+            </a:lvl4pPr>
+            <a:lvl5pPr>
+              <a:defRPr>
+                <a:latin typeface="Arial"/>
+                <a:ea typeface="Arial"/>
+                <a:cs typeface="Arial"/>
+              </a:defRPr>
+            </a:lvl5pPr>
+            <a:lvl6pPr>
+              <a:defRPr>
+                <a:latin typeface="Arial"/>
+                <a:ea typeface="Arial"/>
+                <a:cs typeface="Arial"/>
+              </a:defRPr>
+            </a:lvl6pPr>
+            <a:lvl7pPr>
+              <a:defRPr>
+                <a:latin typeface="Arial"/>
+                <a:ea typeface="Arial"/>
+                <a:cs typeface="Arial"/>
+              </a:defRPr>
+            </a:lvl7pPr>
+            <a:lvl8pPr>
+              <a:defRPr>
+                <a:latin typeface="Arial"/>
+                <a:ea typeface="Arial"/>
+                <a:cs typeface="Arial"/>
+              </a:defRPr>
+            </a:lvl8pPr>
+            <a:lvl9pPr>
+              <a:defRPr>
+                <a:latin typeface="Arial"/>
+                <a:ea typeface="Arial"/>
+                <a:cs typeface="Arial"/>
+              </a:defRPr>
+            </a:lvl9pPr>
+          </a:lstStyle>
           <a:p xmlns:a="http://schemas.openxmlformats.org/drawingml/2006/main">
             <a:pPr>
+              <a:buNone/>
               <a:defRPr sz="1500" b="0">
                 <a:solidFill>
                   <a:srgbClr val="111827"/>
@@ -3868,9 +4833,81 @@
           <a:bodyPr xmlns:a="http://schemas.openxmlformats.org/drawingml/2006/main" lIns="0" tIns="0" rIns="0" bIns="0">
             <a:noAutofit/>
           </a:bodyPr>
-          <a:lstStyle xmlns:a="http://schemas.openxmlformats.org/drawingml/2006/main"/>
+          <a:lstStyle xmlns:a="http://schemas.openxmlformats.org/drawingml/2006/main">
+            <a:defPPr>
+              <a:defRPr>
+                <a:latin typeface="Arial"/>
+                <a:ea typeface="Arial"/>
+                <a:cs typeface="Arial"/>
+              </a:defRPr>
+            </a:defPPr>
+            <a:lvl1pPr>
+              <a:defRPr>
+                <a:latin typeface="Arial"/>
+                <a:ea typeface="Arial"/>
+                <a:cs typeface="Arial"/>
+              </a:defRPr>
+            </a:lvl1pPr>
+            <a:lvl2pPr>
+              <a:defRPr>
+                <a:latin typeface="Arial"/>
+                <a:ea typeface="Arial"/>
+                <a:cs typeface="Arial"/>
+              </a:defRPr>
+            </a:lvl2pPr>
+            <a:lvl3pPr>
+              <a:defRPr>
+                <a:latin typeface="Arial"/>
+                <a:ea typeface="Arial"/>
+                <a:cs typeface="Arial"/>
+              </a:defRPr>
+            </a:lvl3pPr>
+            <a:lvl4pPr>
+              <a:defRPr>
+                <a:latin typeface="Arial"/>
+                <a:ea typeface="Arial"/>
+                <a:cs typeface="Arial"/>
+              </a:defRPr>
+            </a:lvl4pPr>
+            <a:lvl5pPr>
+              <a:defRPr>
+                <a:latin typeface="Arial"/>
+                <a:ea typeface="Arial"/>
+                <a:cs typeface="Arial"/>
+              </a:defRPr>
+            </a:lvl5pPr>
+            <a:lvl6pPr>
+              <a:defRPr>
+                <a:latin typeface="Arial"/>
+                <a:ea typeface="Arial"/>
+                <a:cs typeface="Arial"/>
+              </a:defRPr>
+            </a:lvl6pPr>
+            <a:lvl7pPr>
+              <a:defRPr>
+                <a:latin typeface="Arial"/>
+                <a:ea typeface="Arial"/>
+                <a:cs typeface="Arial"/>
+              </a:defRPr>
+            </a:lvl7pPr>
+            <a:lvl8pPr>
+              <a:defRPr>
+                <a:latin typeface="Arial"/>
+                <a:ea typeface="Arial"/>
+                <a:cs typeface="Arial"/>
+              </a:defRPr>
+            </a:lvl8pPr>
+            <a:lvl9pPr>
+              <a:defRPr>
+                <a:latin typeface="Arial"/>
+                <a:ea typeface="Arial"/>
+                <a:cs typeface="Arial"/>
+              </a:defRPr>
+            </a:lvl9pPr>
+          </a:lstStyle>
           <a:p xmlns:a="http://schemas.openxmlformats.org/drawingml/2006/main">
             <a:pPr>
+              <a:buNone/>
               <a:defRPr sz="1500" b="0">
                 <a:solidFill>
                   <a:srgbClr val="6B7280"/>
@@ -3894,6 +4931,7 @@
           </a:p>
           <a:p xmlns:a="http://schemas.openxmlformats.org/drawingml/2006/main">
             <a:pPr>
+              <a:buNone/>
               <a:defRPr sz="1500" b="0">
                 <a:solidFill>
                   <a:srgbClr val="6B7280"/>
@@ -3976,9 +5014,81 @@
           <a:bodyPr xmlns:a="http://schemas.openxmlformats.org/drawingml/2006/main" lIns="0" tIns="0" rIns="0" bIns="0">
             <a:noAutofit/>
           </a:bodyPr>
-          <a:lstStyle xmlns:a="http://schemas.openxmlformats.org/drawingml/2006/main"/>
+          <a:lstStyle xmlns:a="http://schemas.openxmlformats.org/drawingml/2006/main">
+            <a:defPPr>
+              <a:defRPr>
+                <a:latin typeface="Arial"/>
+                <a:ea typeface="Arial"/>
+                <a:cs typeface="Arial"/>
+              </a:defRPr>
+            </a:defPPr>
+            <a:lvl1pPr>
+              <a:defRPr>
+                <a:latin typeface="Arial"/>
+                <a:ea typeface="Arial"/>
+                <a:cs typeface="Arial"/>
+              </a:defRPr>
+            </a:lvl1pPr>
+            <a:lvl2pPr>
+              <a:defRPr>
+                <a:latin typeface="Arial"/>
+                <a:ea typeface="Arial"/>
+                <a:cs typeface="Arial"/>
+              </a:defRPr>
+            </a:lvl2pPr>
+            <a:lvl3pPr>
+              <a:defRPr>
+                <a:latin typeface="Arial"/>
+                <a:ea typeface="Arial"/>
+                <a:cs typeface="Arial"/>
+              </a:defRPr>
+            </a:lvl3pPr>
+            <a:lvl4pPr>
+              <a:defRPr>
+                <a:latin typeface="Arial"/>
+                <a:ea typeface="Arial"/>
+                <a:cs typeface="Arial"/>
+              </a:defRPr>
+            </a:lvl4pPr>
+            <a:lvl5pPr>
+              <a:defRPr>
+                <a:latin typeface="Arial"/>
+                <a:ea typeface="Arial"/>
+                <a:cs typeface="Arial"/>
+              </a:defRPr>
+            </a:lvl5pPr>
+            <a:lvl6pPr>
+              <a:defRPr>
+                <a:latin typeface="Arial"/>
+                <a:ea typeface="Arial"/>
+                <a:cs typeface="Arial"/>
+              </a:defRPr>
+            </a:lvl6pPr>
+            <a:lvl7pPr>
+              <a:defRPr>
+                <a:latin typeface="Arial"/>
+                <a:ea typeface="Arial"/>
+                <a:cs typeface="Arial"/>
+              </a:defRPr>
+            </a:lvl7pPr>
+            <a:lvl8pPr>
+              <a:defRPr>
+                <a:latin typeface="Arial"/>
+                <a:ea typeface="Arial"/>
+                <a:cs typeface="Arial"/>
+              </a:defRPr>
+            </a:lvl8pPr>
+            <a:lvl9pPr>
+              <a:defRPr>
+                <a:latin typeface="Arial"/>
+                <a:ea typeface="Arial"/>
+                <a:cs typeface="Arial"/>
+              </a:defRPr>
+            </a:lvl9pPr>
+          </a:lstStyle>
           <a:p xmlns:a="http://schemas.openxmlformats.org/drawingml/2006/main">
             <a:pPr>
+              <a:buNone/>
               <a:defRPr sz="1500" b="0">
                 <a:solidFill>
                   <a:srgbClr val="111827"/>
@@ -4063,9 +5173,81 @@
           <a:bodyPr xmlns:a="http://schemas.openxmlformats.org/drawingml/2006/main" lIns="0" tIns="0" rIns="0" bIns="0">
             <a:noAutofit/>
           </a:bodyPr>
-          <a:lstStyle xmlns:a="http://schemas.openxmlformats.org/drawingml/2006/main"/>
+          <a:lstStyle xmlns:a="http://schemas.openxmlformats.org/drawingml/2006/main">
+            <a:defPPr>
+              <a:defRPr>
+                <a:latin typeface="Arial"/>
+                <a:ea typeface="Arial"/>
+                <a:cs typeface="Arial"/>
+              </a:defRPr>
+            </a:defPPr>
+            <a:lvl1pPr>
+              <a:defRPr>
+                <a:latin typeface="Arial"/>
+                <a:ea typeface="Arial"/>
+                <a:cs typeface="Arial"/>
+              </a:defRPr>
+            </a:lvl1pPr>
+            <a:lvl2pPr>
+              <a:defRPr>
+                <a:latin typeface="Arial"/>
+                <a:ea typeface="Arial"/>
+                <a:cs typeface="Arial"/>
+              </a:defRPr>
+            </a:lvl2pPr>
+            <a:lvl3pPr>
+              <a:defRPr>
+                <a:latin typeface="Arial"/>
+                <a:ea typeface="Arial"/>
+                <a:cs typeface="Arial"/>
+              </a:defRPr>
+            </a:lvl3pPr>
+            <a:lvl4pPr>
+              <a:defRPr>
+                <a:latin typeface="Arial"/>
+                <a:ea typeface="Arial"/>
+                <a:cs typeface="Arial"/>
+              </a:defRPr>
+            </a:lvl4pPr>
+            <a:lvl5pPr>
+              <a:defRPr>
+                <a:latin typeface="Arial"/>
+                <a:ea typeface="Arial"/>
+                <a:cs typeface="Arial"/>
+              </a:defRPr>
+            </a:lvl5pPr>
+            <a:lvl6pPr>
+              <a:defRPr>
+                <a:latin typeface="Arial"/>
+                <a:ea typeface="Arial"/>
+                <a:cs typeface="Arial"/>
+              </a:defRPr>
+            </a:lvl6pPr>
+            <a:lvl7pPr>
+              <a:defRPr>
+                <a:latin typeface="Arial"/>
+                <a:ea typeface="Arial"/>
+                <a:cs typeface="Arial"/>
+              </a:defRPr>
+            </a:lvl7pPr>
+            <a:lvl8pPr>
+              <a:defRPr>
+                <a:latin typeface="Arial"/>
+                <a:ea typeface="Arial"/>
+                <a:cs typeface="Arial"/>
+              </a:defRPr>
+            </a:lvl8pPr>
+            <a:lvl9pPr>
+              <a:defRPr>
+                <a:latin typeface="Arial"/>
+                <a:ea typeface="Arial"/>
+                <a:cs typeface="Arial"/>
+              </a:defRPr>
+            </a:lvl9pPr>
+          </a:lstStyle>
           <a:p xmlns:a="http://schemas.openxmlformats.org/drawingml/2006/main">
             <a:pPr>
+              <a:buNone/>
               <a:defRPr sz="1500" b="0">
                 <a:solidFill>
                   <a:srgbClr val="6B7280"/>
@@ -4089,6 +5271,7 @@
           </a:p>
           <a:p xmlns:a="http://schemas.openxmlformats.org/drawingml/2006/main">
             <a:pPr>
+              <a:buNone/>
               <a:defRPr sz="1500" b="0">
                 <a:solidFill>
                   <a:srgbClr val="6B7280"/>
@@ -4171,9 +5354,81 @@
           <a:bodyPr xmlns:a="http://schemas.openxmlformats.org/drawingml/2006/main" lIns="0" tIns="0" rIns="0" bIns="0">
             <a:noAutofit/>
           </a:bodyPr>
-          <a:lstStyle xmlns:a="http://schemas.openxmlformats.org/drawingml/2006/main"/>
+          <a:lstStyle xmlns:a="http://schemas.openxmlformats.org/drawingml/2006/main">
+            <a:defPPr>
+              <a:defRPr>
+                <a:latin typeface="Arial"/>
+                <a:ea typeface="Arial"/>
+                <a:cs typeface="Arial"/>
+              </a:defRPr>
+            </a:defPPr>
+            <a:lvl1pPr>
+              <a:defRPr>
+                <a:latin typeface="Arial"/>
+                <a:ea typeface="Arial"/>
+                <a:cs typeface="Arial"/>
+              </a:defRPr>
+            </a:lvl1pPr>
+            <a:lvl2pPr>
+              <a:defRPr>
+                <a:latin typeface="Arial"/>
+                <a:ea typeface="Arial"/>
+                <a:cs typeface="Arial"/>
+              </a:defRPr>
+            </a:lvl2pPr>
+            <a:lvl3pPr>
+              <a:defRPr>
+                <a:latin typeface="Arial"/>
+                <a:ea typeface="Arial"/>
+                <a:cs typeface="Arial"/>
+              </a:defRPr>
+            </a:lvl3pPr>
+            <a:lvl4pPr>
+              <a:defRPr>
+                <a:latin typeface="Arial"/>
+                <a:ea typeface="Arial"/>
+                <a:cs typeface="Arial"/>
+              </a:defRPr>
+            </a:lvl4pPr>
+            <a:lvl5pPr>
+              <a:defRPr>
+                <a:latin typeface="Arial"/>
+                <a:ea typeface="Arial"/>
+                <a:cs typeface="Arial"/>
+              </a:defRPr>
+            </a:lvl5pPr>
+            <a:lvl6pPr>
+              <a:defRPr>
+                <a:latin typeface="Arial"/>
+                <a:ea typeface="Arial"/>
+                <a:cs typeface="Arial"/>
+              </a:defRPr>
+            </a:lvl6pPr>
+            <a:lvl7pPr>
+              <a:defRPr>
+                <a:latin typeface="Arial"/>
+                <a:ea typeface="Arial"/>
+                <a:cs typeface="Arial"/>
+              </a:defRPr>
+            </a:lvl7pPr>
+            <a:lvl8pPr>
+              <a:defRPr>
+                <a:latin typeface="Arial"/>
+                <a:ea typeface="Arial"/>
+                <a:cs typeface="Arial"/>
+              </a:defRPr>
+            </a:lvl8pPr>
+            <a:lvl9pPr>
+              <a:defRPr>
+                <a:latin typeface="Arial"/>
+                <a:ea typeface="Arial"/>
+                <a:cs typeface="Arial"/>
+              </a:defRPr>
+            </a:lvl9pPr>
+          </a:lstStyle>
           <a:p xmlns:a="http://schemas.openxmlformats.org/drawingml/2006/main">
             <a:pPr>
+              <a:buNone/>
               <a:defRPr sz="1500" b="0">
                 <a:solidFill>
                   <a:srgbClr val="111827"/>
@@ -4258,9 +5513,81 @@
           <a:bodyPr xmlns:a="http://schemas.openxmlformats.org/drawingml/2006/main" lIns="0" tIns="0" rIns="0" bIns="0">
             <a:noAutofit/>
           </a:bodyPr>
-          <a:lstStyle xmlns:a="http://schemas.openxmlformats.org/drawingml/2006/main"/>
+          <a:lstStyle xmlns:a="http://schemas.openxmlformats.org/drawingml/2006/main">
+            <a:defPPr>
+              <a:defRPr>
+                <a:latin typeface="Arial"/>
+                <a:ea typeface="Arial"/>
+                <a:cs typeface="Arial"/>
+              </a:defRPr>
+            </a:defPPr>
+            <a:lvl1pPr>
+              <a:defRPr>
+                <a:latin typeface="Arial"/>
+                <a:ea typeface="Arial"/>
+                <a:cs typeface="Arial"/>
+              </a:defRPr>
+            </a:lvl1pPr>
+            <a:lvl2pPr>
+              <a:defRPr>
+                <a:latin typeface="Arial"/>
+                <a:ea typeface="Arial"/>
+                <a:cs typeface="Arial"/>
+              </a:defRPr>
+            </a:lvl2pPr>
+            <a:lvl3pPr>
+              <a:defRPr>
+                <a:latin typeface="Arial"/>
+                <a:ea typeface="Arial"/>
+                <a:cs typeface="Arial"/>
+              </a:defRPr>
+            </a:lvl3pPr>
+            <a:lvl4pPr>
+              <a:defRPr>
+                <a:latin typeface="Arial"/>
+                <a:ea typeface="Arial"/>
+                <a:cs typeface="Arial"/>
+              </a:defRPr>
+            </a:lvl4pPr>
+            <a:lvl5pPr>
+              <a:defRPr>
+                <a:latin typeface="Arial"/>
+                <a:ea typeface="Arial"/>
+                <a:cs typeface="Arial"/>
+              </a:defRPr>
+            </a:lvl5pPr>
+            <a:lvl6pPr>
+              <a:defRPr>
+                <a:latin typeface="Arial"/>
+                <a:ea typeface="Arial"/>
+                <a:cs typeface="Arial"/>
+              </a:defRPr>
+            </a:lvl6pPr>
+            <a:lvl7pPr>
+              <a:defRPr>
+                <a:latin typeface="Arial"/>
+                <a:ea typeface="Arial"/>
+                <a:cs typeface="Arial"/>
+              </a:defRPr>
+            </a:lvl7pPr>
+            <a:lvl8pPr>
+              <a:defRPr>
+                <a:latin typeface="Arial"/>
+                <a:ea typeface="Arial"/>
+                <a:cs typeface="Arial"/>
+              </a:defRPr>
+            </a:lvl8pPr>
+            <a:lvl9pPr>
+              <a:defRPr>
+                <a:latin typeface="Arial"/>
+                <a:ea typeface="Arial"/>
+                <a:cs typeface="Arial"/>
+              </a:defRPr>
+            </a:lvl9pPr>
+          </a:lstStyle>
           <a:p xmlns:a="http://schemas.openxmlformats.org/drawingml/2006/main">
             <a:pPr>
+              <a:buNone/>
               <a:defRPr sz="1500" b="0">
                 <a:solidFill>
                   <a:srgbClr val="6B7280"/>
@@ -4284,6 +5611,7 @@
           </a:p>
           <a:p xmlns:a="http://schemas.openxmlformats.org/drawingml/2006/main">
             <a:pPr>
+              <a:buNone/>
               <a:defRPr sz="1500" b="0">
                 <a:solidFill>
                   <a:srgbClr val="6B7280"/>
@@ -4366,9 +5694,81 @@
           <a:bodyPr xmlns:a="http://schemas.openxmlformats.org/drawingml/2006/main" lIns="0" tIns="0" rIns="0" bIns="0">
             <a:noAutofit/>
           </a:bodyPr>
-          <a:lstStyle xmlns:a="http://schemas.openxmlformats.org/drawingml/2006/main"/>
+          <a:lstStyle xmlns:a="http://schemas.openxmlformats.org/drawingml/2006/main">
+            <a:defPPr>
+              <a:defRPr>
+                <a:latin typeface="Arial"/>
+                <a:ea typeface="Arial"/>
+                <a:cs typeface="Arial"/>
+              </a:defRPr>
+            </a:defPPr>
+            <a:lvl1pPr>
+              <a:defRPr>
+                <a:latin typeface="Arial"/>
+                <a:ea typeface="Arial"/>
+                <a:cs typeface="Arial"/>
+              </a:defRPr>
+            </a:lvl1pPr>
+            <a:lvl2pPr>
+              <a:defRPr>
+                <a:latin typeface="Arial"/>
+                <a:ea typeface="Arial"/>
+                <a:cs typeface="Arial"/>
+              </a:defRPr>
+            </a:lvl2pPr>
+            <a:lvl3pPr>
+              <a:defRPr>
+                <a:latin typeface="Arial"/>
+                <a:ea typeface="Arial"/>
+                <a:cs typeface="Arial"/>
+              </a:defRPr>
+            </a:lvl3pPr>
+            <a:lvl4pPr>
+              <a:defRPr>
+                <a:latin typeface="Arial"/>
+                <a:ea typeface="Arial"/>
+                <a:cs typeface="Arial"/>
+              </a:defRPr>
+            </a:lvl4pPr>
+            <a:lvl5pPr>
+              <a:defRPr>
+                <a:latin typeface="Arial"/>
+                <a:ea typeface="Arial"/>
+                <a:cs typeface="Arial"/>
+              </a:defRPr>
+            </a:lvl5pPr>
+            <a:lvl6pPr>
+              <a:defRPr>
+                <a:latin typeface="Arial"/>
+                <a:ea typeface="Arial"/>
+                <a:cs typeface="Arial"/>
+              </a:defRPr>
+            </a:lvl6pPr>
+            <a:lvl7pPr>
+              <a:defRPr>
+                <a:latin typeface="Arial"/>
+                <a:ea typeface="Arial"/>
+                <a:cs typeface="Arial"/>
+              </a:defRPr>
+            </a:lvl7pPr>
+            <a:lvl8pPr>
+              <a:defRPr>
+                <a:latin typeface="Arial"/>
+                <a:ea typeface="Arial"/>
+                <a:cs typeface="Arial"/>
+              </a:defRPr>
+            </a:lvl8pPr>
+            <a:lvl9pPr>
+              <a:defRPr>
+                <a:latin typeface="Arial"/>
+                <a:ea typeface="Arial"/>
+                <a:cs typeface="Arial"/>
+              </a:defRPr>
+            </a:lvl9pPr>
+          </a:lstStyle>
           <a:p xmlns:a="http://schemas.openxmlformats.org/drawingml/2006/main">
             <a:pPr>
+              <a:buNone/>
               <a:defRPr sz="1500" b="0">
                 <a:solidFill>
                   <a:srgbClr val="111827"/>
@@ -4453,9 +5853,81 @@
           <a:bodyPr xmlns:a="http://schemas.openxmlformats.org/drawingml/2006/main" lIns="0" tIns="0" rIns="0" bIns="0">
             <a:noAutofit/>
           </a:bodyPr>
-          <a:lstStyle xmlns:a="http://schemas.openxmlformats.org/drawingml/2006/main"/>
+          <a:lstStyle xmlns:a="http://schemas.openxmlformats.org/drawingml/2006/main">
+            <a:defPPr>
+              <a:defRPr>
+                <a:latin typeface="Arial"/>
+                <a:ea typeface="Arial"/>
+                <a:cs typeface="Arial"/>
+              </a:defRPr>
+            </a:defPPr>
+            <a:lvl1pPr>
+              <a:defRPr>
+                <a:latin typeface="Arial"/>
+                <a:ea typeface="Arial"/>
+                <a:cs typeface="Arial"/>
+              </a:defRPr>
+            </a:lvl1pPr>
+            <a:lvl2pPr>
+              <a:defRPr>
+                <a:latin typeface="Arial"/>
+                <a:ea typeface="Arial"/>
+                <a:cs typeface="Arial"/>
+              </a:defRPr>
+            </a:lvl2pPr>
+            <a:lvl3pPr>
+              <a:defRPr>
+                <a:latin typeface="Arial"/>
+                <a:ea typeface="Arial"/>
+                <a:cs typeface="Arial"/>
+              </a:defRPr>
+            </a:lvl3pPr>
+            <a:lvl4pPr>
+              <a:defRPr>
+                <a:latin typeface="Arial"/>
+                <a:ea typeface="Arial"/>
+                <a:cs typeface="Arial"/>
+              </a:defRPr>
+            </a:lvl4pPr>
+            <a:lvl5pPr>
+              <a:defRPr>
+                <a:latin typeface="Arial"/>
+                <a:ea typeface="Arial"/>
+                <a:cs typeface="Arial"/>
+              </a:defRPr>
+            </a:lvl5pPr>
+            <a:lvl6pPr>
+              <a:defRPr>
+                <a:latin typeface="Arial"/>
+                <a:ea typeface="Arial"/>
+                <a:cs typeface="Arial"/>
+              </a:defRPr>
+            </a:lvl6pPr>
+            <a:lvl7pPr>
+              <a:defRPr>
+                <a:latin typeface="Arial"/>
+                <a:ea typeface="Arial"/>
+                <a:cs typeface="Arial"/>
+              </a:defRPr>
+            </a:lvl7pPr>
+            <a:lvl8pPr>
+              <a:defRPr>
+                <a:latin typeface="Arial"/>
+                <a:ea typeface="Arial"/>
+                <a:cs typeface="Arial"/>
+              </a:defRPr>
+            </a:lvl8pPr>
+            <a:lvl9pPr>
+              <a:defRPr>
+                <a:latin typeface="Arial"/>
+                <a:ea typeface="Arial"/>
+                <a:cs typeface="Arial"/>
+              </a:defRPr>
+            </a:lvl9pPr>
+          </a:lstStyle>
           <a:p xmlns:a="http://schemas.openxmlformats.org/drawingml/2006/main">
             <a:pPr>
+              <a:buNone/>
               <a:defRPr sz="1500" b="0">
                 <a:solidFill>
                   <a:srgbClr val="6B7280"/>
@@ -4479,6 +5951,7 @@
           </a:p>
           <a:p xmlns:a="http://schemas.openxmlformats.org/drawingml/2006/main">
             <a:pPr>
+              <a:buNone/>
               <a:defRPr sz="1500" b="0">
                 <a:solidFill>
                   <a:srgbClr val="6B7280"/>
@@ -4561,9 +6034,81 @@
           <a:bodyPr xmlns:a="http://schemas.openxmlformats.org/drawingml/2006/main" lIns="0" tIns="0" rIns="0" bIns="0">
             <a:noAutofit/>
           </a:bodyPr>
-          <a:lstStyle xmlns:a="http://schemas.openxmlformats.org/drawingml/2006/main"/>
+          <a:lstStyle xmlns:a="http://schemas.openxmlformats.org/drawingml/2006/main">
+            <a:defPPr>
+              <a:defRPr>
+                <a:latin typeface="Arial"/>
+                <a:ea typeface="Arial"/>
+                <a:cs typeface="Arial"/>
+              </a:defRPr>
+            </a:defPPr>
+            <a:lvl1pPr>
+              <a:defRPr>
+                <a:latin typeface="Arial"/>
+                <a:ea typeface="Arial"/>
+                <a:cs typeface="Arial"/>
+              </a:defRPr>
+            </a:lvl1pPr>
+            <a:lvl2pPr>
+              <a:defRPr>
+                <a:latin typeface="Arial"/>
+                <a:ea typeface="Arial"/>
+                <a:cs typeface="Arial"/>
+              </a:defRPr>
+            </a:lvl2pPr>
+            <a:lvl3pPr>
+              <a:defRPr>
+                <a:latin typeface="Arial"/>
+                <a:ea typeface="Arial"/>
+                <a:cs typeface="Arial"/>
+              </a:defRPr>
+            </a:lvl3pPr>
+            <a:lvl4pPr>
+              <a:defRPr>
+                <a:latin typeface="Arial"/>
+                <a:ea typeface="Arial"/>
+                <a:cs typeface="Arial"/>
+              </a:defRPr>
+            </a:lvl4pPr>
+            <a:lvl5pPr>
+              <a:defRPr>
+                <a:latin typeface="Arial"/>
+                <a:ea typeface="Arial"/>
+                <a:cs typeface="Arial"/>
+              </a:defRPr>
+            </a:lvl5pPr>
+            <a:lvl6pPr>
+              <a:defRPr>
+                <a:latin typeface="Arial"/>
+                <a:ea typeface="Arial"/>
+                <a:cs typeface="Arial"/>
+              </a:defRPr>
+            </a:lvl6pPr>
+            <a:lvl7pPr>
+              <a:defRPr>
+                <a:latin typeface="Arial"/>
+                <a:ea typeface="Arial"/>
+                <a:cs typeface="Arial"/>
+              </a:defRPr>
+            </a:lvl7pPr>
+            <a:lvl8pPr>
+              <a:defRPr>
+                <a:latin typeface="Arial"/>
+                <a:ea typeface="Arial"/>
+                <a:cs typeface="Arial"/>
+              </a:defRPr>
+            </a:lvl8pPr>
+            <a:lvl9pPr>
+              <a:defRPr>
+                <a:latin typeface="Arial"/>
+                <a:ea typeface="Arial"/>
+                <a:cs typeface="Arial"/>
+              </a:defRPr>
+            </a:lvl9pPr>
+          </a:lstStyle>
           <a:p xmlns:a="http://schemas.openxmlformats.org/drawingml/2006/main">
             <a:pPr>
+              <a:buNone/>
               <a:defRPr sz="1500" b="0">
                 <a:solidFill>
                   <a:srgbClr val="111827"/>
@@ -4648,9 +6193,81 @@
           <a:bodyPr xmlns:a="http://schemas.openxmlformats.org/drawingml/2006/main" lIns="0" tIns="0" rIns="0" bIns="0">
             <a:noAutofit/>
           </a:bodyPr>
-          <a:lstStyle xmlns:a="http://schemas.openxmlformats.org/drawingml/2006/main"/>
+          <a:lstStyle xmlns:a="http://schemas.openxmlformats.org/drawingml/2006/main">
+            <a:defPPr>
+              <a:defRPr>
+                <a:latin typeface="Arial"/>
+                <a:ea typeface="Arial"/>
+                <a:cs typeface="Arial"/>
+              </a:defRPr>
+            </a:defPPr>
+            <a:lvl1pPr>
+              <a:defRPr>
+                <a:latin typeface="Arial"/>
+                <a:ea typeface="Arial"/>
+                <a:cs typeface="Arial"/>
+              </a:defRPr>
+            </a:lvl1pPr>
+            <a:lvl2pPr>
+              <a:defRPr>
+                <a:latin typeface="Arial"/>
+                <a:ea typeface="Arial"/>
+                <a:cs typeface="Arial"/>
+              </a:defRPr>
+            </a:lvl2pPr>
+            <a:lvl3pPr>
+              <a:defRPr>
+                <a:latin typeface="Arial"/>
+                <a:ea typeface="Arial"/>
+                <a:cs typeface="Arial"/>
+              </a:defRPr>
+            </a:lvl3pPr>
+            <a:lvl4pPr>
+              <a:defRPr>
+                <a:latin typeface="Arial"/>
+                <a:ea typeface="Arial"/>
+                <a:cs typeface="Arial"/>
+              </a:defRPr>
+            </a:lvl4pPr>
+            <a:lvl5pPr>
+              <a:defRPr>
+                <a:latin typeface="Arial"/>
+                <a:ea typeface="Arial"/>
+                <a:cs typeface="Arial"/>
+              </a:defRPr>
+            </a:lvl5pPr>
+            <a:lvl6pPr>
+              <a:defRPr>
+                <a:latin typeface="Arial"/>
+                <a:ea typeface="Arial"/>
+                <a:cs typeface="Arial"/>
+              </a:defRPr>
+            </a:lvl6pPr>
+            <a:lvl7pPr>
+              <a:defRPr>
+                <a:latin typeface="Arial"/>
+                <a:ea typeface="Arial"/>
+                <a:cs typeface="Arial"/>
+              </a:defRPr>
+            </a:lvl7pPr>
+            <a:lvl8pPr>
+              <a:defRPr>
+                <a:latin typeface="Arial"/>
+                <a:ea typeface="Arial"/>
+                <a:cs typeface="Arial"/>
+              </a:defRPr>
+            </a:lvl8pPr>
+            <a:lvl9pPr>
+              <a:defRPr>
+                <a:latin typeface="Arial"/>
+                <a:ea typeface="Arial"/>
+                <a:cs typeface="Arial"/>
+              </a:defRPr>
+            </a:lvl9pPr>
+          </a:lstStyle>
           <a:p xmlns:a="http://schemas.openxmlformats.org/drawingml/2006/main">
             <a:pPr>
+              <a:buNone/>
               <a:defRPr sz="1500" b="0">
                 <a:solidFill>
                   <a:srgbClr val="6B7280"/>
@@ -4674,6 +6291,7 @@
           </a:p>
           <a:p xmlns:a="http://schemas.openxmlformats.org/drawingml/2006/main">
             <a:pPr>
+              <a:buNone/>
               <a:defRPr sz="1500" b="0">
                 <a:solidFill>
                   <a:srgbClr val="6B7280"/>
@@ -4756,9 +6374,81 @@
           <a:bodyPr xmlns:a="http://schemas.openxmlformats.org/drawingml/2006/main" lIns="0" tIns="0" rIns="0" bIns="0">
             <a:noAutofit/>
           </a:bodyPr>
-          <a:lstStyle xmlns:a="http://schemas.openxmlformats.org/drawingml/2006/main"/>
+          <a:lstStyle xmlns:a="http://schemas.openxmlformats.org/drawingml/2006/main">
+            <a:defPPr>
+              <a:defRPr>
+                <a:latin typeface="Arial"/>
+                <a:ea typeface="Arial"/>
+                <a:cs typeface="Arial"/>
+              </a:defRPr>
+            </a:defPPr>
+            <a:lvl1pPr>
+              <a:defRPr>
+                <a:latin typeface="Arial"/>
+                <a:ea typeface="Arial"/>
+                <a:cs typeface="Arial"/>
+              </a:defRPr>
+            </a:lvl1pPr>
+            <a:lvl2pPr>
+              <a:defRPr>
+                <a:latin typeface="Arial"/>
+                <a:ea typeface="Arial"/>
+                <a:cs typeface="Arial"/>
+              </a:defRPr>
+            </a:lvl2pPr>
+            <a:lvl3pPr>
+              <a:defRPr>
+                <a:latin typeface="Arial"/>
+                <a:ea typeface="Arial"/>
+                <a:cs typeface="Arial"/>
+              </a:defRPr>
+            </a:lvl3pPr>
+            <a:lvl4pPr>
+              <a:defRPr>
+                <a:latin typeface="Arial"/>
+                <a:ea typeface="Arial"/>
+                <a:cs typeface="Arial"/>
+              </a:defRPr>
+            </a:lvl4pPr>
+            <a:lvl5pPr>
+              <a:defRPr>
+                <a:latin typeface="Arial"/>
+                <a:ea typeface="Arial"/>
+                <a:cs typeface="Arial"/>
+              </a:defRPr>
+            </a:lvl5pPr>
+            <a:lvl6pPr>
+              <a:defRPr>
+                <a:latin typeface="Arial"/>
+                <a:ea typeface="Arial"/>
+                <a:cs typeface="Arial"/>
+              </a:defRPr>
+            </a:lvl6pPr>
+            <a:lvl7pPr>
+              <a:defRPr>
+                <a:latin typeface="Arial"/>
+                <a:ea typeface="Arial"/>
+                <a:cs typeface="Arial"/>
+              </a:defRPr>
+            </a:lvl7pPr>
+            <a:lvl8pPr>
+              <a:defRPr>
+                <a:latin typeface="Arial"/>
+                <a:ea typeface="Arial"/>
+                <a:cs typeface="Arial"/>
+              </a:defRPr>
+            </a:lvl8pPr>
+            <a:lvl9pPr>
+              <a:defRPr>
+                <a:latin typeface="Arial"/>
+                <a:ea typeface="Arial"/>
+                <a:cs typeface="Arial"/>
+              </a:defRPr>
+            </a:lvl9pPr>
+          </a:lstStyle>
           <a:p xmlns:a="http://schemas.openxmlformats.org/drawingml/2006/main">
             <a:pPr>
+              <a:buNone/>
               <a:defRPr sz="1500" b="0">
                 <a:solidFill>
                   <a:srgbClr val="111827"/>
@@ -4843,9 +6533,81 @@
           <a:bodyPr xmlns:a="http://schemas.openxmlformats.org/drawingml/2006/main" lIns="0" tIns="0" rIns="0" bIns="0">
             <a:noAutofit/>
           </a:bodyPr>
-          <a:lstStyle xmlns:a="http://schemas.openxmlformats.org/drawingml/2006/main"/>
+          <a:lstStyle xmlns:a="http://schemas.openxmlformats.org/drawingml/2006/main">
+            <a:defPPr>
+              <a:defRPr>
+                <a:latin typeface="Arial"/>
+                <a:ea typeface="Arial"/>
+                <a:cs typeface="Arial"/>
+              </a:defRPr>
+            </a:defPPr>
+            <a:lvl1pPr>
+              <a:defRPr>
+                <a:latin typeface="Arial"/>
+                <a:ea typeface="Arial"/>
+                <a:cs typeface="Arial"/>
+              </a:defRPr>
+            </a:lvl1pPr>
+            <a:lvl2pPr>
+              <a:defRPr>
+                <a:latin typeface="Arial"/>
+                <a:ea typeface="Arial"/>
+                <a:cs typeface="Arial"/>
+              </a:defRPr>
+            </a:lvl2pPr>
+            <a:lvl3pPr>
+              <a:defRPr>
+                <a:latin typeface="Arial"/>
+                <a:ea typeface="Arial"/>
+                <a:cs typeface="Arial"/>
+              </a:defRPr>
+            </a:lvl3pPr>
+            <a:lvl4pPr>
+              <a:defRPr>
+                <a:latin typeface="Arial"/>
+                <a:ea typeface="Arial"/>
+                <a:cs typeface="Arial"/>
+              </a:defRPr>
+            </a:lvl4pPr>
+            <a:lvl5pPr>
+              <a:defRPr>
+                <a:latin typeface="Arial"/>
+                <a:ea typeface="Arial"/>
+                <a:cs typeface="Arial"/>
+              </a:defRPr>
+            </a:lvl5pPr>
+            <a:lvl6pPr>
+              <a:defRPr>
+                <a:latin typeface="Arial"/>
+                <a:ea typeface="Arial"/>
+                <a:cs typeface="Arial"/>
+              </a:defRPr>
+            </a:lvl6pPr>
+            <a:lvl7pPr>
+              <a:defRPr>
+                <a:latin typeface="Arial"/>
+                <a:ea typeface="Arial"/>
+                <a:cs typeface="Arial"/>
+              </a:defRPr>
+            </a:lvl7pPr>
+            <a:lvl8pPr>
+              <a:defRPr>
+                <a:latin typeface="Arial"/>
+                <a:ea typeface="Arial"/>
+                <a:cs typeface="Arial"/>
+              </a:defRPr>
+            </a:lvl8pPr>
+            <a:lvl9pPr>
+              <a:defRPr>
+                <a:latin typeface="Arial"/>
+                <a:ea typeface="Arial"/>
+                <a:cs typeface="Arial"/>
+              </a:defRPr>
+            </a:lvl9pPr>
+          </a:lstStyle>
           <a:p xmlns:a="http://schemas.openxmlformats.org/drawingml/2006/main">
             <a:pPr>
+              <a:buNone/>
               <a:defRPr sz="1500" b="0">
                 <a:solidFill>
                   <a:srgbClr val="6B7280"/>
@@ -4869,6 +6631,7 @@
           </a:p>
           <a:p xmlns:a="http://schemas.openxmlformats.org/drawingml/2006/main">
             <a:pPr>
+              <a:buNone/>
               <a:defRPr sz="1500" b="0">
                 <a:solidFill>
                   <a:srgbClr val="6B7280"/>
@@ -4951,9 +6714,81 @@
           <a:bodyPr xmlns:a="http://schemas.openxmlformats.org/drawingml/2006/main" lIns="0" tIns="0" rIns="0" bIns="0">
             <a:noAutofit/>
           </a:bodyPr>
-          <a:lstStyle xmlns:a="http://schemas.openxmlformats.org/drawingml/2006/main"/>
+          <a:lstStyle xmlns:a="http://schemas.openxmlformats.org/drawingml/2006/main">
+            <a:defPPr>
+              <a:defRPr>
+                <a:latin typeface="Arial"/>
+                <a:ea typeface="Arial"/>
+                <a:cs typeface="Arial"/>
+              </a:defRPr>
+            </a:defPPr>
+            <a:lvl1pPr>
+              <a:defRPr>
+                <a:latin typeface="Arial"/>
+                <a:ea typeface="Arial"/>
+                <a:cs typeface="Arial"/>
+              </a:defRPr>
+            </a:lvl1pPr>
+            <a:lvl2pPr>
+              <a:defRPr>
+                <a:latin typeface="Arial"/>
+                <a:ea typeface="Arial"/>
+                <a:cs typeface="Arial"/>
+              </a:defRPr>
+            </a:lvl2pPr>
+            <a:lvl3pPr>
+              <a:defRPr>
+                <a:latin typeface="Arial"/>
+                <a:ea typeface="Arial"/>
+                <a:cs typeface="Arial"/>
+              </a:defRPr>
+            </a:lvl3pPr>
+            <a:lvl4pPr>
+              <a:defRPr>
+                <a:latin typeface="Arial"/>
+                <a:ea typeface="Arial"/>
+                <a:cs typeface="Arial"/>
+              </a:defRPr>
+            </a:lvl4pPr>
+            <a:lvl5pPr>
+              <a:defRPr>
+                <a:latin typeface="Arial"/>
+                <a:ea typeface="Arial"/>
+                <a:cs typeface="Arial"/>
+              </a:defRPr>
+            </a:lvl5pPr>
+            <a:lvl6pPr>
+              <a:defRPr>
+                <a:latin typeface="Arial"/>
+                <a:ea typeface="Arial"/>
+                <a:cs typeface="Arial"/>
+              </a:defRPr>
+            </a:lvl6pPr>
+            <a:lvl7pPr>
+              <a:defRPr>
+                <a:latin typeface="Arial"/>
+                <a:ea typeface="Arial"/>
+                <a:cs typeface="Arial"/>
+              </a:defRPr>
+            </a:lvl7pPr>
+            <a:lvl8pPr>
+              <a:defRPr>
+                <a:latin typeface="Arial"/>
+                <a:ea typeface="Arial"/>
+                <a:cs typeface="Arial"/>
+              </a:defRPr>
+            </a:lvl8pPr>
+            <a:lvl9pPr>
+              <a:defRPr>
+                <a:latin typeface="Arial"/>
+                <a:ea typeface="Arial"/>
+                <a:cs typeface="Arial"/>
+              </a:defRPr>
+            </a:lvl9pPr>
+          </a:lstStyle>
           <a:p xmlns:a="http://schemas.openxmlformats.org/drawingml/2006/main">
             <a:pPr>
+              <a:buNone/>
               <a:defRPr sz="1500" b="0">
                 <a:solidFill>
                   <a:srgbClr val="111827"/>
@@ -5038,9 +6873,81 @@
           <a:bodyPr xmlns:a="http://schemas.openxmlformats.org/drawingml/2006/main" lIns="0" tIns="0" rIns="0" bIns="0">
             <a:noAutofit/>
           </a:bodyPr>
-          <a:lstStyle xmlns:a="http://schemas.openxmlformats.org/drawingml/2006/main"/>
+          <a:lstStyle xmlns:a="http://schemas.openxmlformats.org/drawingml/2006/main">
+            <a:defPPr>
+              <a:defRPr>
+                <a:latin typeface="Arial"/>
+                <a:ea typeface="Arial"/>
+                <a:cs typeface="Arial"/>
+              </a:defRPr>
+            </a:defPPr>
+            <a:lvl1pPr>
+              <a:defRPr>
+                <a:latin typeface="Arial"/>
+                <a:ea typeface="Arial"/>
+                <a:cs typeface="Arial"/>
+              </a:defRPr>
+            </a:lvl1pPr>
+            <a:lvl2pPr>
+              <a:defRPr>
+                <a:latin typeface="Arial"/>
+                <a:ea typeface="Arial"/>
+                <a:cs typeface="Arial"/>
+              </a:defRPr>
+            </a:lvl2pPr>
+            <a:lvl3pPr>
+              <a:defRPr>
+                <a:latin typeface="Arial"/>
+                <a:ea typeface="Arial"/>
+                <a:cs typeface="Arial"/>
+              </a:defRPr>
+            </a:lvl3pPr>
+            <a:lvl4pPr>
+              <a:defRPr>
+                <a:latin typeface="Arial"/>
+                <a:ea typeface="Arial"/>
+                <a:cs typeface="Arial"/>
+              </a:defRPr>
+            </a:lvl4pPr>
+            <a:lvl5pPr>
+              <a:defRPr>
+                <a:latin typeface="Arial"/>
+                <a:ea typeface="Arial"/>
+                <a:cs typeface="Arial"/>
+              </a:defRPr>
+            </a:lvl5pPr>
+            <a:lvl6pPr>
+              <a:defRPr>
+                <a:latin typeface="Arial"/>
+                <a:ea typeface="Arial"/>
+                <a:cs typeface="Arial"/>
+              </a:defRPr>
+            </a:lvl6pPr>
+            <a:lvl7pPr>
+              <a:defRPr>
+                <a:latin typeface="Arial"/>
+                <a:ea typeface="Arial"/>
+                <a:cs typeface="Arial"/>
+              </a:defRPr>
+            </a:lvl7pPr>
+            <a:lvl8pPr>
+              <a:defRPr>
+                <a:latin typeface="Arial"/>
+                <a:ea typeface="Arial"/>
+                <a:cs typeface="Arial"/>
+              </a:defRPr>
+            </a:lvl8pPr>
+            <a:lvl9pPr>
+              <a:defRPr>
+                <a:latin typeface="Arial"/>
+                <a:ea typeface="Arial"/>
+                <a:cs typeface="Arial"/>
+              </a:defRPr>
+            </a:lvl9pPr>
+          </a:lstStyle>
           <a:p xmlns:a="http://schemas.openxmlformats.org/drawingml/2006/main">
             <a:pPr>
+              <a:buNone/>
               <a:defRPr sz="1500" b="0">
                 <a:solidFill>
                   <a:srgbClr val="6B7280"/>
@@ -5064,6 +6971,7 @@
           </a:p>
           <a:p xmlns:a="http://schemas.openxmlformats.org/drawingml/2006/main">
             <a:pPr>
+              <a:buNone/>
               <a:defRPr sz="1500" b="0">
                 <a:solidFill>
                   <a:srgbClr val="6B7280"/>
@@ -5146,9 +7054,81 @@
           <a:bodyPr xmlns:a="http://schemas.openxmlformats.org/drawingml/2006/main" lIns="0" tIns="0" rIns="0" bIns="0">
             <a:noAutofit/>
           </a:bodyPr>
-          <a:lstStyle xmlns:a="http://schemas.openxmlformats.org/drawingml/2006/main"/>
+          <a:lstStyle xmlns:a="http://schemas.openxmlformats.org/drawingml/2006/main">
+            <a:defPPr>
+              <a:defRPr>
+                <a:latin typeface="Arial"/>
+                <a:ea typeface="Arial"/>
+                <a:cs typeface="Arial"/>
+              </a:defRPr>
+            </a:defPPr>
+            <a:lvl1pPr>
+              <a:defRPr>
+                <a:latin typeface="Arial"/>
+                <a:ea typeface="Arial"/>
+                <a:cs typeface="Arial"/>
+              </a:defRPr>
+            </a:lvl1pPr>
+            <a:lvl2pPr>
+              <a:defRPr>
+                <a:latin typeface="Arial"/>
+                <a:ea typeface="Arial"/>
+                <a:cs typeface="Arial"/>
+              </a:defRPr>
+            </a:lvl2pPr>
+            <a:lvl3pPr>
+              <a:defRPr>
+                <a:latin typeface="Arial"/>
+                <a:ea typeface="Arial"/>
+                <a:cs typeface="Arial"/>
+              </a:defRPr>
+            </a:lvl3pPr>
+            <a:lvl4pPr>
+              <a:defRPr>
+                <a:latin typeface="Arial"/>
+                <a:ea typeface="Arial"/>
+                <a:cs typeface="Arial"/>
+              </a:defRPr>
+            </a:lvl4pPr>
+            <a:lvl5pPr>
+              <a:defRPr>
+                <a:latin typeface="Arial"/>
+                <a:ea typeface="Arial"/>
+                <a:cs typeface="Arial"/>
+              </a:defRPr>
+            </a:lvl5pPr>
+            <a:lvl6pPr>
+              <a:defRPr>
+                <a:latin typeface="Arial"/>
+                <a:ea typeface="Arial"/>
+                <a:cs typeface="Arial"/>
+              </a:defRPr>
+            </a:lvl6pPr>
+            <a:lvl7pPr>
+              <a:defRPr>
+                <a:latin typeface="Arial"/>
+                <a:ea typeface="Arial"/>
+                <a:cs typeface="Arial"/>
+              </a:defRPr>
+            </a:lvl7pPr>
+            <a:lvl8pPr>
+              <a:defRPr>
+                <a:latin typeface="Arial"/>
+                <a:ea typeface="Arial"/>
+                <a:cs typeface="Arial"/>
+              </a:defRPr>
+            </a:lvl8pPr>
+            <a:lvl9pPr>
+              <a:defRPr>
+                <a:latin typeface="Arial"/>
+                <a:ea typeface="Arial"/>
+                <a:cs typeface="Arial"/>
+              </a:defRPr>
+            </a:lvl9pPr>
+          </a:lstStyle>
           <a:p xmlns:a="http://schemas.openxmlformats.org/drawingml/2006/main">
             <a:pPr>
+              <a:buNone/>
               <a:defRPr sz="1500" b="0">
                 <a:solidFill>
                   <a:srgbClr val="111827"/>
@@ -5233,9 +7213,81 @@
           <a:bodyPr xmlns:a="http://schemas.openxmlformats.org/drawingml/2006/main" lIns="0" tIns="0" rIns="0" bIns="0">
             <a:noAutofit/>
           </a:bodyPr>
-          <a:lstStyle xmlns:a="http://schemas.openxmlformats.org/drawingml/2006/main"/>
+          <a:lstStyle xmlns:a="http://schemas.openxmlformats.org/drawingml/2006/main">
+            <a:defPPr>
+              <a:defRPr>
+                <a:latin typeface="Arial"/>
+                <a:ea typeface="Arial"/>
+                <a:cs typeface="Arial"/>
+              </a:defRPr>
+            </a:defPPr>
+            <a:lvl1pPr>
+              <a:defRPr>
+                <a:latin typeface="Arial"/>
+                <a:ea typeface="Arial"/>
+                <a:cs typeface="Arial"/>
+              </a:defRPr>
+            </a:lvl1pPr>
+            <a:lvl2pPr>
+              <a:defRPr>
+                <a:latin typeface="Arial"/>
+                <a:ea typeface="Arial"/>
+                <a:cs typeface="Arial"/>
+              </a:defRPr>
+            </a:lvl2pPr>
+            <a:lvl3pPr>
+              <a:defRPr>
+                <a:latin typeface="Arial"/>
+                <a:ea typeface="Arial"/>
+                <a:cs typeface="Arial"/>
+              </a:defRPr>
+            </a:lvl3pPr>
+            <a:lvl4pPr>
+              <a:defRPr>
+                <a:latin typeface="Arial"/>
+                <a:ea typeface="Arial"/>
+                <a:cs typeface="Arial"/>
+              </a:defRPr>
+            </a:lvl4pPr>
+            <a:lvl5pPr>
+              <a:defRPr>
+                <a:latin typeface="Arial"/>
+                <a:ea typeface="Arial"/>
+                <a:cs typeface="Arial"/>
+              </a:defRPr>
+            </a:lvl5pPr>
+            <a:lvl6pPr>
+              <a:defRPr>
+                <a:latin typeface="Arial"/>
+                <a:ea typeface="Arial"/>
+                <a:cs typeface="Arial"/>
+              </a:defRPr>
+            </a:lvl6pPr>
+            <a:lvl7pPr>
+              <a:defRPr>
+                <a:latin typeface="Arial"/>
+                <a:ea typeface="Arial"/>
+                <a:cs typeface="Arial"/>
+              </a:defRPr>
+            </a:lvl7pPr>
+            <a:lvl8pPr>
+              <a:defRPr>
+                <a:latin typeface="Arial"/>
+                <a:ea typeface="Arial"/>
+                <a:cs typeface="Arial"/>
+              </a:defRPr>
+            </a:lvl8pPr>
+            <a:lvl9pPr>
+              <a:defRPr>
+                <a:latin typeface="Arial"/>
+                <a:ea typeface="Arial"/>
+                <a:cs typeface="Arial"/>
+              </a:defRPr>
+            </a:lvl9pPr>
+          </a:lstStyle>
           <a:p xmlns:a="http://schemas.openxmlformats.org/drawingml/2006/main">
             <a:pPr>
+              <a:buNone/>
               <a:defRPr sz="1500" b="0">
                 <a:solidFill>
                   <a:srgbClr val="6B7280"/>
@@ -5259,6 +7311,7 @@
           </a:p>
           <a:p xmlns:a="http://schemas.openxmlformats.org/drawingml/2006/main">
             <a:pPr>
+              <a:buNone/>
               <a:defRPr sz="1500" b="0">
                 <a:solidFill>
                   <a:srgbClr val="6B7280"/>
@@ -5341,9 +7394,81 @@
           <a:bodyPr xmlns:a="http://schemas.openxmlformats.org/drawingml/2006/main" lIns="0" tIns="0" rIns="0" bIns="0">
             <a:noAutofit/>
           </a:bodyPr>
-          <a:lstStyle xmlns:a="http://schemas.openxmlformats.org/drawingml/2006/main"/>
+          <a:lstStyle xmlns:a="http://schemas.openxmlformats.org/drawingml/2006/main">
+            <a:defPPr>
+              <a:defRPr>
+                <a:latin typeface="Arial"/>
+                <a:ea typeface="Arial"/>
+                <a:cs typeface="Arial"/>
+              </a:defRPr>
+            </a:defPPr>
+            <a:lvl1pPr>
+              <a:defRPr>
+                <a:latin typeface="Arial"/>
+                <a:ea typeface="Arial"/>
+                <a:cs typeface="Arial"/>
+              </a:defRPr>
+            </a:lvl1pPr>
+            <a:lvl2pPr>
+              <a:defRPr>
+                <a:latin typeface="Arial"/>
+                <a:ea typeface="Arial"/>
+                <a:cs typeface="Arial"/>
+              </a:defRPr>
+            </a:lvl2pPr>
+            <a:lvl3pPr>
+              <a:defRPr>
+                <a:latin typeface="Arial"/>
+                <a:ea typeface="Arial"/>
+                <a:cs typeface="Arial"/>
+              </a:defRPr>
+            </a:lvl3pPr>
+            <a:lvl4pPr>
+              <a:defRPr>
+                <a:latin typeface="Arial"/>
+                <a:ea typeface="Arial"/>
+                <a:cs typeface="Arial"/>
+              </a:defRPr>
+            </a:lvl4pPr>
+            <a:lvl5pPr>
+              <a:defRPr>
+                <a:latin typeface="Arial"/>
+                <a:ea typeface="Arial"/>
+                <a:cs typeface="Arial"/>
+              </a:defRPr>
+            </a:lvl5pPr>
+            <a:lvl6pPr>
+              <a:defRPr>
+                <a:latin typeface="Arial"/>
+                <a:ea typeface="Arial"/>
+                <a:cs typeface="Arial"/>
+              </a:defRPr>
+            </a:lvl6pPr>
+            <a:lvl7pPr>
+              <a:defRPr>
+                <a:latin typeface="Arial"/>
+                <a:ea typeface="Arial"/>
+                <a:cs typeface="Arial"/>
+              </a:defRPr>
+            </a:lvl7pPr>
+            <a:lvl8pPr>
+              <a:defRPr>
+                <a:latin typeface="Arial"/>
+                <a:ea typeface="Arial"/>
+                <a:cs typeface="Arial"/>
+              </a:defRPr>
+            </a:lvl8pPr>
+            <a:lvl9pPr>
+              <a:defRPr>
+                <a:latin typeface="Arial"/>
+                <a:ea typeface="Arial"/>
+                <a:cs typeface="Arial"/>
+              </a:defRPr>
+            </a:lvl9pPr>
+          </a:lstStyle>
           <a:p xmlns:a="http://schemas.openxmlformats.org/drawingml/2006/main">
             <a:pPr>
+              <a:buNone/>
               <a:defRPr sz="1500" b="0">
                 <a:solidFill>
                   <a:srgbClr val="111827"/>
@@ -5428,9 +7553,81 @@
           <a:bodyPr xmlns:a="http://schemas.openxmlformats.org/drawingml/2006/main" lIns="0" tIns="0" rIns="0" bIns="0">
             <a:noAutofit/>
           </a:bodyPr>
-          <a:lstStyle xmlns:a="http://schemas.openxmlformats.org/drawingml/2006/main"/>
+          <a:lstStyle xmlns:a="http://schemas.openxmlformats.org/drawingml/2006/main">
+            <a:defPPr>
+              <a:defRPr>
+                <a:latin typeface="Arial"/>
+                <a:ea typeface="Arial"/>
+                <a:cs typeface="Arial"/>
+              </a:defRPr>
+            </a:defPPr>
+            <a:lvl1pPr>
+              <a:defRPr>
+                <a:latin typeface="Arial"/>
+                <a:ea typeface="Arial"/>
+                <a:cs typeface="Arial"/>
+              </a:defRPr>
+            </a:lvl1pPr>
+            <a:lvl2pPr>
+              <a:defRPr>
+                <a:latin typeface="Arial"/>
+                <a:ea typeface="Arial"/>
+                <a:cs typeface="Arial"/>
+              </a:defRPr>
+            </a:lvl2pPr>
+            <a:lvl3pPr>
+              <a:defRPr>
+                <a:latin typeface="Arial"/>
+                <a:ea typeface="Arial"/>
+                <a:cs typeface="Arial"/>
+              </a:defRPr>
+            </a:lvl3pPr>
+            <a:lvl4pPr>
+              <a:defRPr>
+                <a:latin typeface="Arial"/>
+                <a:ea typeface="Arial"/>
+                <a:cs typeface="Arial"/>
+              </a:defRPr>
+            </a:lvl4pPr>
+            <a:lvl5pPr>
+              <a:defRPr>
+                <a:latin typeface="Arial"/>
+                <a:ea typeface="Arial"/>
+                <a:cs typeface="Arial"/>
+              </a:defRPr>
+            </a:lvl5pPr>
+            <a:lvl6pPr>
+              <a:defRPr>
+                <a:latin typeface="Arial"/>
+                <a:ea typeface="Arial"/>
+                <a:cs typeface="Arial"/>
+              </a:defRPr>
+            </a:lvl6pPr>
+            <a:lvl7pPr>
+              <a:defRPr>
+                <a:latin typeface="Arial"/>
+                <a:ea typeface="Arial"/>
+                <a:cs typeface="Arial"/>
+              </a:defRPr>
+            </a:lvl7pPr>
+            <a:lvl8pPr>
+              <a:defRPr>
+                <a:latin typeface="Arial"/>
+                <a:ea typeface="Arial"/>
+                <a:cs typeface="Arial"/>
+              </a:defRPr>
+            </a:lvl8pPr>
+            <a:lvl9pPr>
+              <a:defRPr>
+                <a:latin typeface="Arial"/>
+                <a:ea typeface="Arial"/>
+                <a:cs typeface="Arial"/>
+              </a:defRPr>
+            </a:lvl9pPr>
+          </a:lstStyle>
           <a:p xmlns:a="http://schemas.openxmlformats.org/drawingml/2006/main">
             <a:pPr>
+              <a:buNone/>
               <a:defRPr sz="1500" b="0">
                 <a:solidFill>
                   <a:srgbClr val="6B7280"/>
@@ -5454,6 +7651,7 @@
           </a:p>
           <a:p xmlns:a="http://schemas.openxmlformats.org/drawingml/2006/main">
             <a:pPr>
+              <a:buNone/>
               <a:defRPr sz="1500" b="0">
                 <a:solidFill>
                   <a:srgbClr val="6B7280"/>
@@ -5536,9 +7734,81 @@
           <a:bodyPr xmlns:a="http://schemas.openxmlformats.org/drawingml/2006/main" lIns="0" tIns="0" rIns="0" bIns="0">
             <a:noAutofit/>
           </a:bodyPr>
-          <a:lstStyle xmlns:a="http://schemas.openxmlformats.org/drawingml/2006/main"/>
+          <a:lstStyle xmlns:a="http://schemas.openxmlformats.org/drawingml/2006/main">
+            <a:defPPr>
+              <a:defRPr>
+                <a:latin typeface="Arial"/>
+                <a:ea typeface="Arial"/>
+                <a:cs typeface="Arial"/>
+              </a:defRPr>
+            </a:defPPr>
+            <a:lvl1pPr>
+              <a:defRPr>
+                <a:latin typeface="Arial"/>
+                <a:ea typeface="Arial"/>
+                <a:cs typeface="Arial"/>
+              </a:defRPr>
+            </a:lvl1pPr>
+            <a:lvl2pPr>
+              <a:defRPr>
+                <a:latin typeface="Arial"/>
+                <a:ea typeface="Arial"/>
+                <a:cs typeface="Arial"/>
+              </a:defRPr>
+            </a:lvl2pPr>
+            <a:lvl3pPr>
+              <a:defRPr>
+                <a:latin typeface="Arial"/>
+                <a:ea typeface="Arial"/>
+                <a:cs typeface="Arial"/>
+              </a:defRPr>
+            </a:lvl3pPr>
+            <a:lvl4pPr>
+              <a:defRPr>
+                <a:latin typeface="Arial"/>
+                <a:ea typeface="Arial"/>
+                <a:cs typeface="Arial"/>
+              </a:defRPr>
+            </a:lvl4pPr>
+            <a:lvl5pPr>
+              <a:defRPr>
+                <a:latin typeface="Arial"/>
+                <a:ea typeface="Arial"/>
+                <a:cs typeface="Arial"/>
+              </a:defRPr>
+            </a:lvl5pPr>
+            <a:lvl6pPr>
+              <a:defRPr>
+                <a:latin typeface="Arial"/>
+                <a:ea typeface="Arial"/>
+                <a:cs typeface="Arial"/>
+              </a:defRPr>
+            </a:lvl6pPr>
+            <a:lvl7pPr>
+              <a:defRPr>
+                <a:latin typeface="Arial"/>
+                <a:ea typeface="Arial"/>
+                <a:cs typeface="Arial"/>
+              </a:defRPr>
+            </a:lvl7pPr>
+            <a:lvl8pPr>
+              <a:defRPr>
+                <a:latin typeface="Arial"/>
+                <a:ea typeface="Arial"/>
+                <a:cs typeface="Arial"/>
+              </a:defRPr>
+            </a:lvl8pPr>
+            <a:lvl9pPr>
+              <a:defRPr>
+                <a:latin typeface="Arial"/>
+                <a:ea typeface="Arial"/>
+                <a:cs typeface="Arial"/>
+              </a:defRPr>
+            </a:lvl9pPr>
+          </a:lstStyle>
           <a:p xmlns:a="http://schemas.openxmlformats.org/drawingml/2006/main">
             <a:pPr>
+              <a:buNone/>
               <a:defRPr sz="1500" b="0">
                 <a:solidFill>
                   <a:srgbClr val="111827"/>
@@ -5623,9 +7893,81 @@
           <a:bodyPr xmlns:a="http://schemas.openxmlformats.org/drawingml/2006/main" lIns="0" tIns="0" rIns="0" bIns="0">
             <a:noAutofit/>
           </a:bodyPr>
-          <a:lstStyle xmlns:a="http://schemas.openxmlformats.org/drawingml/2006/main"/>
+          <a:lstStyle xmlns:a="http://schemas.openxmlformats.org/drawingml/2006/main">
+            <a:defPPr>
+              <a:defRPr>
+                <a:latin typeface="Arial"/>
+                <a:ea typeface="Arial"/>
+                <a:cs typeface="Arial"/>
+              </a:defRPr>
+            </a:defPPr>
+            <a:lvl1pPr>
+              <a:defRPr>
+                <a:latin typeface="Arial"/>
+                <a:ea typeface="Arial"/>
+                <a:cs typeface="Arial"/>
+              </a:defRPr>
+            </a:lvl1pPr>
+            <a:lvl2pPr>
+              <a:defRPr>
+                <a:latin typeface="Arial"/>
+                <a:ea typeface="Arial"/>
+                <a:cs typeface="Arial"/>
+              </a:defRPr>
+            </a:lvl2pPr>
+            <a:lvl3pPr>
+              <a:defRPr>
+                <a:latin typeface="Arial"/>
+                <a:ea typeface="Arial"/>
+                <a:cs typeface="Arial"/>
+              </a:defRPr>
+            </a:lvl3pPr>
+            <a:lvl4pPr>
+              <a:defRPr>
+                <a:latin typeface="Arial"/>
+                <a:ea typeface="Arial"/>
+                <a:cs typeface="Arial"/>
+              </a:defRPr>
+            </a:lvl4pPr>
+            <a:lvl5pPr>
+              <a:defRPr>
+                <a:latin typeface="Arial"/>
+                <a:ea typeface="Arial"/>
+                <a:cs typeface="Arial"/>
+              </a:defRPr>
+            </a:lvl5pPr>
+            <a:lvl6pPr>
+              <a:defRPr>
+                <a:latin typeface="Arial"/>
+                <a:ea typeface="Arial"/>
+                <a:cs typeface="Arial"/>
+              </a:defRPr>
+            </a:lvl6pPr>
+            <a:lvl7pPr>
+              <a:defRPr>
+                <a:latin typeface="Arial"/>
+                <a:ea typeface="Arial"/>
+                <a:cs typeface="Arial"/>
+              </a:defRPr>
+            </a:lvl7pPr>
+            <a:lvl8pPr>
+              <a:defRPr>
+                <a:latin typeface="Arial"/>
+                <a:ea typeface="Arial"/>
+                <a:cs typeface="Arial"/>
+              </a:defRPr>
+            </a:lvl8pPr>
+            <a:lvl9pPr>
+              <a:defRPr>
+                <a:latin typeface="Arial"/>
+                <a:ea typeface="Arial"/>
+                <a:cs typeface="Arial"/>
+              </a:defRPr>
+            </a:lvl9pPr>
+          </a:lstStyle>
           <a:p xmlns:a="http://schemas.openxmlformats.org/drawingml/2006/main">
             <a:pPr>
+              <a:buNone/>
               <a:defRPr sz="1500" b="0">
                 <a:solidFill>
                   <a:srgbClr val="6B7280"/>
@@ -5649,6 +7991,7 @@
           </a:p>
           <a:p xmlns:a="http://schemas.openxmlformats.org/drawingml/2006/main">
             <a:pPr>
+              <a:buNone/>
               <a:defRPr sz="1500" b="0">
                 <a:solidFill>
                   <a:srgbClr val="6B7280"/>
@@ -5674,7 +8017,13 @@
       </p:sp>
       <p:cxnSp>
         <p:nvCxnSpPr>
-          <p:cNvPr id="104" name=""/>
+          <p:cNvPr id="104" name="">
+            <a:extLst xmlns:a="http://schemas.openxmlformats.org/drawingml/2006/main">
+              <a:ext uri="{FF2B5EF4-FFF2-40B4-BE49-F238E27FC236}">
+                <a16:creationId xmlns:a16="http://schemas.microsoft.com/office/drawing/2014/main" id="{3A8ED379-E20A-4F98-BF3B-629AD9DA8BEB}"/>
+              </a:ext>
+            </a:extLst>
+          </p:cNvPr>
           <p:cNvCxnSpPr>
             <a:stCxn xmlns:a="http://schemas.openxmlformats.org/drawingml/2006/main" id="7" idx="3"/>
             <a:endCxn xmlns:a="http://schemas.openxmlformats.org/drawingml/2006/main" id="11" idx="1"/>
@@ -5699,7 +8048,13 @@
       </p:cxnSp>
       <p:cxnSp>
         <p:nvCxnSpPr>
-          <p:cNvPr id="105" name=""/>
+          <p:cNvPr id="105" name="">
+            <a:extLst xmlns:a="http://schemas.openxmlformats.org/drawingml/2006/main">
+              <a:ext uri="{FF2B5EF4-FFF2-40B4-BE49-F238E27FC236}">
+                <a16:creationId xmlns:a16="http://schemas.microsoft.com/office/drawing/2014/main" id="{32509410-F2E4-47C3-9705-6B36264B2D92}"/>
+              </a:ext>
+            </a:extLst>
+          </p:cNvPr>
           <p:cNvCxnSpPr>
             <a:stCxn xmlns:a="http://schemas.openxmlformats.org/drawingml/2006/main" id="11" idx="3"/>
             <a:endCxn xmlns:a="http://schemas.openxmlformats.org/drawingml/2006/main" id="15" idx="1"/>
@@ -5724,7 +8079,13 @@
       </p:cxnSp>
       <p:cxnSp>
         <p:nvCxnSpPr>
-          <p:cNvPr id="106" name=""/>
+          <p:cNvPr id="106" name="">
+            <a:extLst xmlns:a="http://schemas.openxmlformats.org/drawingml/2006/main">
+              <a:ext uri="{FF2B5EF4-FFF2-40B4-BE49-F238E27FC236}">
+                <a16:creationId xmlns:a16="http://schemas.microsoft.com/office/drawing/2014/main" id="{24DBCC69-6306-4324-AFB4-D7BA33A8A101}"/>
+              </a:ext>
+            </a:extLst>
+          </p:cNvPr>
           <p:cNvCxnSpPr>
             <a:stCxn xmlns:a="http://schemas.openxmlformats.org/drawingml/2006/main" id="15" idx="3"/>
             <a:endCxn xmlns:a="http://schemas.openxmlformats.org/drawingml/2006/main" id="19" idx="1"/>
@@ -5749,7 +8110,13 @@
       </p:cxnSp>
       <p:cxnSp>
         <p:nvCxnSpPr>
-          <p:cNvPr id="107" name=""/>
+          <p:cNvPr id="107" name="">
+            <a:extLst xmlns:a="http://schemas.openxmlformats.org/drawingml/2006/main">
+              <a:ext uri="{FF2B5EF4-FFF2-40B4-BE49-F238E27FC236}">
+                <a16:creationId xmlns:a16="http://schemas.microsoft.com/office/drawing/2014/main" id="{6BA99A67-FFD6-4155-A3DF-EA29EA016B4C}"/>
+              </a:ext>
+            </a:extLst>
+          </p:cNvPr>
           <p:cNvCxnSpPr>
             <a:stCxn xmlns:a="http://schemas.openxmlformats.org/drawingml/2006/main" id="19" idx="3"/>
             <a:endCxn xmlns:a="http://schemas.openxmlformats.org/drawingml/2006/main" id="23" idx="1"/>
@@ -5774,7 +8141,13 @@
       </p:cxnSp>
       <p:cxnSp>
         <p:nvCxnSpPr>
-          <p:cNvPr id="108" name=""/>
+          <p:cNvPr id="108" name="">
+            <a:extLst xmlns:a="http://schemas.openxmlformats.org/drawingml/2006/main">
+              <a:ext uri="{FF2B5EF4-FFF2-40B4-BE49-F238E27FC236}">
+                <a16:creationId xmlns:a16="http://schemas.microsoft.com/office/drawing/2014/main" id="{5683E3CB-4AD7-4CBB-A78E-3C41CFA32115}"/>
+              </a:ext>
+            </a:extLst>
+          </p:cNvPr>
           <p:cNvCxnSpPr>
             <a:stCxn xmlns:a="http://schemas.openxmlformats.org/drawingml/2006/main" id="27" idx="3"/>
             <a:endCxn xmlns:a="http://schemas.openxmlformats.org/drawingml/2006/main" id="31" idx="1"/>
@@ -5799,7 +8172,13 @@
       </p:cxnSp>
       <p:cxnSp>
         <p:nvCxnSpPr>
-          <p:cNvPr id="109" name=""/>
+          <p:cNvPr id="109" name="">
+            <a:extLst xmlns:a="http://schemas.openxmlformats.org/drawingml/2006/main">
+              <a:ext uri="{FF2B5EF4-FFF2-40B4-BE49-F238E27FC236}">
+                <a16:creationId xmlns:a16="http://schemas.microsoft.com/office/drawing/2014/main" id="{836BDC27-01FE-4677-B59B-B13A02B570D8}"/>
+              </a:ext>
+            </a:extLst>
+          </p:cNvPr>
           <p:cNvCxnSpPr>
             <a:stCxn xmlns:a="http://schemas.openxmlformats.org/drawingml/2006/main" id="31" idx="3"/>
             <a:endCxn xmlns:a="http://schemas.openxmlformats.org/drawingml/2006/main" id="35" idx="1"/>
@@ -5824,7 +8203,13 @@
       </p:cxnSp>
       <p:cxnSp>
         <p:nvCxnSpPr>
-          <p:cNvPr id="110" name=""/>
+          <p:cNvPr id="110" name="">
+            <a:extLst xmlns:a="http://schemas.openxmlformats.org/drawingml/2006/main">
+              <a:ext uri="{FF2B5EF4-FFF2-40B4-BE49-F238E27FC236}">
+                <a16:creationId xmlns:a16="http://schemas.microsoft.com/office/drawing/2014/main" id="{1980D935-432B-45A9-B06C-069CDA7611C7}"/>
+              </a:ext>
+            </a:extLst>
+          </p:cNvPr>
           <p:cNvCxnSpPr>
             <a:stCxn xmlns:a="http://schemas.openxmlformats.org/drawingml/2006/main" id="35" idx="3"/>
             <a:endCxn xmlns:a="http://schemas.openxmlformats.org/drawingml/2006/main" id="39" idx="1"/>
@@ -5849,7 +8234,13 @@
       </p:cxnSp>
       <p:cxnSp>
         <p:nvCxnSpPr>
-          <p:cNvPr id="111" name=""/>
+          <p:cNvPr id="111" name="">
+            <a:extLst xmlns:a="http://schemas.openxmlformats.org/drawingml/2006/main">
+              <a:ext uri="{FF2B5EF4-FFF2-40B4-BE49-F238E27FC236}">
+                <a16:creationId xmlns:a16="http://schemas.microsoft.com/office/drawing/2014/main" id="{D4CC81FB-035C-420F-BBCB-C2F30F587E2D}"/>
+              </a:ext>
+            </a:extLst>
+          </p:cNvPr>
           <p:cNvCxnSpPr>
             <a:stCxn xmlns:a="http://schemas.openxmlformats.org/drawingml/2006/main" id="39" idx="3"/>
             <a:endCxn xmlns:a="http://schemas.openxmlformats.org/drawingml/2006/main" id="43" idx="1"/>
@@ -5874,7 +8265,13 @@
       </p:cxnSp>
       <p:cxnSp>
         <p:nvCxnSpPr>
-          <p:cNvPr id="112" name=""/>
+          <p:cNvPr id="112" name="">
+            <a:extLst xmlns:a="http://schemas.openxmlformats.org/drawingml/2006/main">
+              <a:ext uri="{FF2B5EF4-FFF2-40B4-BE49-F238E27FC236}">
+                <a16:creationId xmlns:a16="http://schemas.microsoft.com/office/drawing/2014/main" id="{0EE12B1C-0A33-4EB6-826A-5CB43ED8021F}"/>
+              </a:ext>
+            </a:extLst>
+          </p:cNvPr>
           <p:cNvCxnSpPr>
             <a:stCxn xmlns:a="http://schemas.openxmlformats.org/drawingml/2006/main" id="43" idx="0"/>
             <a:endCxn xmlns:a="http://schemas.openxmlformats.org/drawingml/2006/main" id="23" idx="2"/>
@@ -5928,9 +8325,81 @@
           <a:bodyPr xmlns:a="http://schemas.openxmlformats.org/drawingml/2006/main" lIns="0" tIns="0" rIns="0" bIns="0">
             <a:noAutofit/>
           </a:bodyPr>
-          <a:lstStyle xmlns:a="http://schemas.openxmlformats.org/drawingml/2006/main"/>
+          <a:lstStyle xmlns:a="http://schemas.openxmlformats.org/drawingml/2006/main">
+            <a:defPPr>
+              <a:defRPr>
+                <a:latin typeface="Arial"/>
+                <a:ea typeface="Arial"/>
+                <a:cs typeface="Arial"/>
+              </a:defRPr>
+            </a:defPPr>
+            <a:lvl1pPr>
+              <a:defRPr>
+                <a:latin typeface="Arial"/>
+                <a:ea typeface="Arial"/>
+                <a:cs typeface="Arial"/>
+              </a:defRPr>
+            </a:lvl1pPr>
+            <a:lvl2pPr>
+              <a:defRPr>
+                <a:latin typeface="Arial"/>
+                <a:ea typeface="Arial"/>
+                <a:cs typeface="Arial"/>
+              </a:defRPr>
+            </a:lvl2pPr>
+            <a:lvl3pPr>
+              <a:defRPr>
+                <a:latin typeface="Arial"/>
+                <a:ea typeface="Arial"/>
+                <a:cs typeface="Arial"/>
+              </a:defRPr>
+            </a:lvl3pPr>
+            <a:lvl4pPr>
+              <a:defRPr>
+                <a:latin typeface="Arial"/>
+                <a:ea typeface="Arial"/>
+                <a:cs typeface="Arial"/>
+              </a:defRPr>
+            </a:lvl4pPr>
+            <a:lvl5pPr>
+              <a:defRPr>
+                <a:latin typeface="Arial"/>
+                <a:ea typeface="Arial"/>
+                <a:cs typeface="Arial"/>
+              </a:defRPr>
+            </a:lvl5pPr>
+            <a:lvl6pPr>
+              <a:defRPr>
+                <a:latin typeface="Arial"/>
+                <a:ea typeface="Arial"/>
+                <a:cs typeface="Arial"/>
+              </a:defRPr>
+            </a:lvl6pPr>
+            <a:lvl7pPr>
+              <a:defRPr>
+                <a:latin typeface="Arial"/>
+                <a:ea typeface="Arial"/>
+                <a:cs typeface="Arial"/>
+              </a:defRPr>
+            </a:lvl7pPr>
+            <a:lvl8pPr>
+              <a:defRPr>
+                <a:latin typeface="Arial"/>
+                <a:ea typeface="Arial"/>
+                <a:cs typeface="Arial"/>
+              </a:defRPr>
+            </a:lvl8pPr>
+            <a:lvl9pPr>
+              <a:defRPr>
+                <a:latin typeface="Arial"/>
+                <a:ea typeface="Arial"/>
+                <a:cs typeface="Arial"/>
+              </a:defRPr>
+            </a:lvl9pPr>
+          </a:lstStyle>
           <a:p xmlns:a="http://schemas.openxmlformats.org/drawingml/2006/main">
             <a:pPr>
+              <a:buNone/>
               <a:defRPr sz="1500" b="0">
                 <a:solidFill>
                   <a:srgbClr val="111827"/>
@@ -5985,9 +8454,81 @@
           <a:bodyPr xmlns:a="http://schemas.openxmlformats.org/drawingml/2006/main" lIns="0" tIns="0" rIns="0" bIns="0">
             <a:noAutofit/>
           </a:bodyPr>
-          <a:lstStyle xmlns:a="http://schemas.openxmlformats.org/drawingml/2006/main"/>
+          <a:lstStyle xmlns:a="http://schemas.openxmlformats.org/drawingml/2006/main">
+            <a:defPPr>
+              <a:defRPr>
+                <a:latin typeface="Arial"/>
+                <a:ea typeface="Arial"/>
+                <a:cs typeface="Arial"/>
+              </a:defRPr>
+            </a:defPPr>
+            <a:lvl1pPr>
+              <a:defRPr>
+                <a:latin typeface="Arial"/>
+                <a:ea typeface="Arial"/>
+                <a:cs typeface="Arial"/>
+              </a:defRPr>
+            </a:lvl1pPr>
+            <a:lvl2pPr>
+              <a:defRPr>
+                <a:latin typeface="Arial"/>
+                <a:ea typeface="Arial"/>
+                <a:cs typeface="Arial"/>
+              </a:defRPr>
+            </a:lvl2pPr>
+            <a:lvl3pPr>
+              <a:defRPr>
+                <a:latin typeface="Arial"/>
+                <a:ea typeface="Arial"/>
+                <a:cs typeface="Arial"/>
+              </a:defRPr>
+            </a:lvl3pPr>
+            <a:lvl4pPr>
+              <a:defRPr>
+                <a:latin typeface="Arial"/>
+                <a:ea typeface="Arial"/>
+                <a:cs typeface="Arial"/>
+              </a:defRPr>
+            </a:lvl4pPr>
+            <a:lvl5pPr>
+              <a:defRPr>
+                <a:latin typeface="Arial"/>
+                <a:ea typeface="Arial"/>
+                <a:cs typeface="Arial"/>
+              </a:defRPr>
+            </a:lvl5pPr>
+            <a:lvl6pPr>
+              <a:defRPr>
+                <a:latin typeface="Arial"/>
+                <a:ea typeface="Arial"/>
+                <a:cs typeface="Arial"/>
+              </a:defRPr>
+            </a:lvl6pPr>
+            <a:lvl7pPr>
+              <a:defRPr>
+                <a:latin typeface="Arial"/>
+                <a:ea typeface="Arial"/>
+                <a:cs typeface="Arial"/>
+              </a:defRPr>
+            </a:lvl7pPr>
+            <a:lvl8pPr>
+              <a:defRPr>
+                <a:latin typeface="Arial"/>
+                <a:ea typeface="Arial"/>
+                <a:cs typeface="Arial"/>
+              </a:defRPr>
+            </a:lvl8pPr>
+            <a:lvl9pPr>
+              <a:defRPr>
+                <a:latin typeface="Arial"/>
+                <a:ea typeface="Arial"/>
+                <a:cs typeface="Arial"/>
+              </a:defRPr>
+            </a:lvl9pPr>
+          </a:lstStyle>
           <a:p xmlns:a="http://schemas.openxmlformats.org/drawingml/2006/main">
             <a:pPr>
+              <a:buNone/>
               <a:defRPr sz="1500" b="0">
                 <a:solidFill>
                   <a:srgbClr val="111827"/>
@@ -6027,7 +8568,7 @@
     <p:bg>
       <p:bgPr>
         <a:solidFill xmlns:a="http://schemas.openxmlformats.org/drawingml/2006/main">
-          <a:srgbClr val="F9FAFB"/>
+          <a:srgbClr val="FFFFFF"/>
         </a:solidFill>
       </p:bgPr>
     </p:bg>
@@ -6071,9 +8612,81 @@
           <a:bodyPr xmlns:a="http://schemas.openxmlformats.org/drawingml/2006/main" lIns="0" tIns="0" rIns="0" bIns="0">
             <a:noAutofit/>
           </a:bodyPr>
-          <a:lstStyle xmlns:a="http://schemas.openxmlformats.org/drawingml/2006/main"/>
+          <a:lstStyle xmlns:a="http://schemas.openxmlformats.org/drawingml/2006/main">
+            <a:defPPr>
+              <a:defRPr>
+                <a:latin typeface="Arial"/>
+                <a:ea typeface="Arial"/>
+                <a:cs typeface="Arial"/>
+              </a:defRPr>
+            </a:defPPr>
+            <a:lvl1pPr>
+              <a:defRPr>
+                <a:latin typeface="Arial"/>
+                <a:ea typeface="Arial"/>
+                <a:cs typeface="Arial"/>
+              </a:defRPr>
+            </a:lvl1pPr>
+            <a:lvl2pPr>
+              <a:defRPr>
+                <a:latin typeface="Arial"/>
+                <a:ea typeface="Arial"/>
+                <a:cs typeface="Arial"/>
+              </a:defRPr>
+            </a:lvl2pPr>
+            <a:lvl3pPr>
+              <a:defRPr>
+                <a:latin typeface="Arial"/>
+                <a:ea typeface="Arial"/>
+                <a:cs typeface="Arial"/>
+              </a:defRPr>
+            </a:lvl3pPr>
+            <a:lvl4pPr>
+              <a:defRPr>
+                <a:latin typeface="Arial"/>
+                <a:ea typeface="Arial"/>
+                <a:cs typeface="Arial"/>
+              </a:defRPr>
+            </a:lvl4pPr>
+            <a:lvl5pPr>
+              <a:defRPr>
+                <a:latin typeface="Arial"/>
+                <a:ea typeface="Arial"/>
+                <a:cs typeface="Arial"/>
+              </a:defRPr>
+            </a:lvl5pPr>
+            <a:lvl6pPr>
+              <a:defRPr>
+                <a:latin typeface="Arial"/>
+                <a:ea typeface="Arial"/>
+                <a:cs typeface="Arial"/>
+              </a:defRPr>
+            </a:lvl6pPr>
+            <a:lvl7pPr>
+              <a:defRPr>
+                <a:latin typeface="Arial"/>
+                <a:ea typeface="Arial"/>
+                <a:cs typeface="Arial"/>
+              </a:defRPr>
+            </a:lvl7pPr>
+            <a:lvl8pPr>
+              <a:defRPr>
+                <a:latin typeface="Arial"/>
+                <a:ea typeface="Arial"/>
+                <a:cs typeface="Arial"/>
+              </a:defRPr>
+            </a:lvl8pPr>
+            <a:lvl9pPr>
+              <a:defRPr>
+                <a:latin typeface="Arial"/>
+                <a:ea typeface="Arial"/>
+                <a:cs typeface="Arial"/>
+              </a:defRPr>
+            </a:lvl9pPr>
+          </a:lstStyle>
           <a:p xmlns:a="http://schemas.openxmlformats.org/drawingml/2006/main">
             <a:pPr>
+              <a:buNone/>
               <a:defRPr sz="1050" b="0">
                 <a:solidFill>
                   <a:srgbClr val="6B7280"/>
@@ -6092,7 +8705,7 @@
                 <a:ea typeface="Arial"/>
                 <a:cs typeface="Arial"/>
               </a:rPr>
-              <a:t>E C O L L A T E R A L   /   C S C I  4 1 5 0  A 2</a:t>
+              <a:t>ECOllateral / CSCI 4150 A2</a:t>
             </a:r>
           </a:p>
         </p:txBody>
@@ -6158,28 +8771,100 @@
           <a:bodyPr xmlns:a="http://schemas.openxmlformats.org/drawingml/2006/main" lIns="0" tIns="0" rIns="0" bIns="0">
             <a:noAutofit/>
           </a:bodyPr>
-          <a:lstStyle xmlns:a="http://schemas.openxmlformats.org/drawingml/2006/main"/>
+          <a:lstStyle xmlns:a="http://schemas.openxmlformats.org/drawingml/2006/main">
+            <a:defPPr>
+              <a:defRPr sz="3150" b="1">
+                <a:latin typeface="Arial"/>
+                <a:ea typeface="Arial"/>
+                <a:cs typeface="Arial"/>
+              </a:defRPr>
+            </a:defPPr>
+            <a:lvl1pPr>
+              <a:defRPr sz="3150" b="1">
+                <a:latin typeface="Arial"/>
+                <a:ea typeface="Arial"/>
+                <a:cs typeface="Arial"/>
+              </a:defRPr>
+            </a:lvl1pPr>
+            <a:lvl2pPr>
+              <a:defRPr sz="3150" b="1">
+                <a:latin typeface="Arial"/>
+                <a:ea typeface="Arial"/>
+                <a:cs typeface="Arial"/>
+              </a:defRPr>
+            </a:lvl2pPr>
+            <a:lvl3pPr>
+              <a:defRPr sz="3150" b="1">
+                <a:latin typeface="Arial"/>
+                <a:ea typeface="Arial"/>
+                <a:cs typeface="Arial"/>
+              </a:defRPr>
+            </a:lvl3pPr>
+            <a:lvl4pPr>
+              <a:defRPr sz="3150" b="1">
+                <a:latin typeface="Arial"/>
+                <a:ea typeface="Arial"/>
+                <a:cs typeface="Arial"/>
+              </a:defRPr>
+            </a:lvl4pPr>
+            <a:lvl5pPr>
+              <a:defRPr sz="3150" b="1">
+                <a:latin typeface="Arial"/>
+                <a:ea typeface="Arial"/>
+                <a:cs typeface="Arial"/>
+              </a:defRPr>
+            </a:lvl5pPr>
+            <a:lvl6pPr>
+              <a:defRPr sz="3150" b="1">
+                <a:latin typeface="Arial"/>
+                <a:ea typeface="Arial"/>
+                <a:cs typeface="Arial"/>
+              </a:defRPr>
+            </a:lvl6pPr>
+            <a:lvl7pPr>
+              <a:defRPr sz="3150" b="1">
+                <a:latin typeface="Arial"/>
+                <a:ea typeface="Arial"/>
+                <a:cs typeface="Arial"/>
+              </a:defRPr>
+            </a:lvl7pPr>
+            <a:lvl8pPr>
+              <a:defRPr sz="3150" b="1">
+                <a:latin typeface="Arial"/>
+                <a:ea typeface="Arial"/>
+                <a:cs typeface="Arial"/>
+              </a:defRPr>
+            </a:lvl8pPr>
+            <a:lvl9pPr>
+              <a:defRPr sz="3150" b="1">
+                <a:latin typeface="Arial"/>
+                <a:ea typeface="Arial"/>
+                <a:cs typeface="Arial"/>
+              </a:defRPr>
+            </a:lvl9pPr>
+          </a:lstStyle>
           <a:p xmlns:a="http://schemas.openxmlformats.org/drawingml/2006/main">
             <a:pPr>
-              <a:defRPr sz="3225" b="0">
+              <a:buNone/>
+              <a:defRPr sz="3150" b="1">
                 <a:solidFill>
                   <a:srgbClr val="111827"/>
                 </a:solidFill>
-                <a:latin typeface="Georgia"/>
-                <a:ea typeface="Georgia"/>
-                <a:cs typeface="Georgia"/>
+                <a:latin typeface="Arial"/>
+                <a:ea typeface="Arial"/>
+                <a:cs typeface="Arial"/>
               </a:defRPr>
             </a:pPr>
             <a:r>
-              <a:rPr sz="3225" b="0">
+              <a:rPr sz="3150" b="1">
                 <a:solidFill>
                   <a:srgbClr val="111827"/>
                 </a:solidFill>
-                <a:latin typeface="Georgia"/>
-                <a:ea typeface="Georgia"/>
-                <a:cs typeface="Georgia"/>
+                <a:latin typeface="Arial"/>
+                <a:ea typeface="Arial"/>
+                <a:cs typeface="Arial"/>
               </a:rPr>
-              <a:t>EXPERIMENT E1: COMPARING AI MODELS</a:t>
+              <a:t>E1: Model comparison</a:t>
             </a:r>
           </a:p>
         </p:txBody>
@@ -6215,9 +8900,81 @@
           <a:bodyPr xmlns:a="http://schemas.openxmlformats.org/drawingml/2006/main" lIns="0" tIns="0" rIns="0" bIns="0">
             <a:noAutofit/>
           </a:bodyPr>
-          <a:lstStyle xmlns:a="http://schemas.openxmlformats.org/drawingml/2006/main"/>
+          <a:lstStyle xmlns:a="http://schemas.openxmlformats.org/drawingml/2006/main">
+            <a:defPPr>
+              <a:defRPr>
+                <a:latin typeface="Arial"/>
+                <a:ea typeface="Arial"/>
+                <a:cs typeface="Arial"/>
+              </a:defRPr>
+            </a:defPPr>
+            <a:lvl1pPr>
+              <a:defRPr>
+                <a:latin typeface="Arial"/>
+                <a:ea typeface="Arial"/>
+                <a:cs typeface="Arial"/>
+              </a:defRPr>
+            </a:lvl1pPr>
+            <a:lvl2pPr>
+              <a:defRPr>
+                <a:latin typeface="Arial"/>
+                <a:ea typeface="Arial"/>
+                <a:cs typeface="Arial"/>
+              </a:defRPr>
+            </a:lvl2pPr>
+            <a:lvl3pPr>
+              <a:defRPr>
+                <a:latin typeface="Arial"/>
+                <a:ea typeface="Arial"/>
+                <a:cs typeface="Arial"/>
+              </a:defRPr>
+            </a:lvl3pPr>
+            <a:lvl4pPr>
+              <a:defRPr>
+                <a:latin typeface="Arial"/>
+                <a:ea typeface="Arial"/>
+                <a:cs typeface="Arial"/>
+              </a:defRPr>
+            </a:lvl4pPr>
+            <a:lvl5pPr>
+              <a:defRPr>
+                <a:latin typeface="Arial"/>
+                <a:ea typeface="Arial"/>
+                <a:cs typeface="Arial"/>
+              </a:defRPr>
+            </a:lvl5pPr>
+            <a:lvl6pPr>
+              <a:defRPr>
+                <a:latin typeface="Arial"/>
+                <a:ea typeface="Arial"/>
+                <a:cs typeface="Arial"/>
+              </a:defRPr>
+            </a:lvl6pPr>
+            <a:lvl7pPr>
+              <a:defRPr>
+                <a:latin typeface="Arial"/>
+                <a:ea typeface="Arial"/>
+                <a:cs typeface="Arial"/>
+              </a:defRPr>
+            </a:lvl7pPr>
+            <a:lvl8pPr>
+              <a:defRPr>
+                <a:latin typeface="Arial"/>
+                <a:ea typeface="Arial"/>
+                <a:cs typeface="Arial"/>
+              </a:defRPr>
+            </a:lvl8pPr>
+            <a:lvl9pPr>
+              <a:defRPr>
+                <a:latin typeface="Arial"/>
+                <a:ea typeface="Arial"/>
+                <a:cs typeface="Arial"/>
+              </a:defRPr>
+            </a:lvl9pPr>
+          </a:lstStyle>
           <a:p xmlns:a="http://schemas.openxmlformats.org/drawingml/2006/main">
             <a:pPr>
+              <a:buNone/>
               <a:defRPr sz="975" b="0">
                 <a:solidFill>
                   <a:srgbClr val="6B7280"/>
@@ -6272,9 +9029,81 @@
           <a:bodyPr xmlns:a="http://schemas.openxmlformats.org/drawingml/2006/main" lIns="0" tIns="0" rIns="0" bIns="0">
             <a:noAutofit/>
           </a:bodyPr>
-          <a:lstStyle xmlns:a="http://schemas.openxmlformats.org/drawingml/2006/main"/>
+          <a:lstStyle xmlns:a="http://schemas.openxmlformats.org/drawingml/2006/main">
+            <a:defPPr>
+              <a:defRPr>
+                <a:latin typeface="Arial"/>
+                <a:ea typeface="Arial"/>
+                <a:cs typeface="Arial"/>
+              </a:defRPr>
+            </a:defPPr>
+            <a:lvl1pPr>
+              <a:defRPr>
+                <a:latin typeface="Arial"/>
+                <a:ea typeface="Arial"/>
+                <a:cs typeface="Arial"/>
+              </a:defRPr>
+            </a:lvl1pPr>
+            <a:lvl2pPr>
+              <a:defRPr>
+                <a:latin typeface="Arial"/>
+                <a:ea typeface="Arial"/>
+                <a:cs typeface="Arial"/>
+              </a:defRPr>
+            </a:lvl2pPr>
+            <a:lvl3pPr>
+              <a:defRPr>
+                <a:latin typeface="Arial"/>
+                <a:ea typeface="Arial"/>
+                <a:cs typeface="Arial"/>
+              </a:defRPr>
+            </a:lvl3pPr>
+            <a:lvl4pPr>
+              <a:defRPr>
+                <a:latin typeface="Arial"/>
+                <a:ea typeface="Arial"/>
+                <a:cs typeface="Arial"/>
+              </a:defRPr>
+            </a:lvl4pPr>
+            <a:lvl5pPr>
+              <a:defRPr>
+                <a:latin typeface="Arial"/>
+                <a:ea typeface="Arial"/>
+                <a:cs typeface="Arial"/>
+              </a:defRPr>
+            </a:lvl5pPr>
+            <a:lvl6pPr>
+              <a:defRPr>
+                <a:latin typeface="Arial"/>
+                <a:ea typeface="Arial"/>
+                <a:cs typeface="Arial"/>
+              </a:defRPr>
+            </a:lvl6pPr>
+            <a:lvl7pPr>
+              <a:defRPr>
+                <a:latin typeface="Arial"/>
+                <a:ea typeface="Arial"/>
+                <a:cs typeface="Arial"/>
+              </a:defRPr>
+            </a:lvl7pPr>
+            <a:lvl8pPr>
+              <a:defRPr>
+                <a:latin typeface="Arial"/>
+                <a:ea typeface="Arial"/>
+                <a:cs typeface="Arial"/>
+              </a:defRPr>
+            </a:lvl8pPr>
+            <a:lvl9pPr>
+              <a:defRPr>
+                <a:latin typeface="Arial"/>
+                <a:ea typeface="Arial"/>
+                <a:cs typeface="Arial"/>
+              </a:defRPr>
+            </a:lvl9pPr>
+          </a:lstStyle>
           <a:p xmlns:a="http://schemas.openxmlformats.org/drawingml/2006/main">
             <a:pPr>
+              <a:buNone/>
               <a:defRPr sz="1050" b="0">
                 <a:solidFill>
                   <a:srgbClr val="6B7280"/>
@@ -6300,7 +9129,13 @@
       </p:sp>
       <p:graphicFrame>
         <p:nvGraphicFramePr>
-          <p:cNvPr id="17" name="Chart"/>
+          <p:cNvPr id="17" name="Chart">
+            <a:extLst xmlns:a="http://schemas.openxmlformats.org/drawingml/2006/main">
+              <a:ext uri="{FF2B5EF4-FFF2-40B4-BE49-F238E27FC236}">
+                <a16:creationId xmlns:a16="http://schemas.microsoft.com/office/drawing/2014/main" id="{A7D7FDAD-C67B-4085-A091-449EE00AED29}"/>
+              </a:ext>
+            </a:extLst>
+          </p:cNvPr>
           <p:cNvGraphicFramePr/>
           <p:nvPr/>
         </p:nvGraphicFramePr>
@@ -6310,7 +9145,7 @@
         </p:xfrm>
         <a:graphic xmlns:a="http://schemas.openxmlformats.org/drawingml/2006/main">
           <a:graphicData uri="http://schemas.openxmlformats.org/drawingml/2006/chart">
-            <c:chart xmlns:r="http://schemas.openxmlformats.org/officeDocument/2006/relationships" xmlns:c="http://schemas.openxmlformats.org/drawingml/2006/chart" r:id="R4d59c7667ec2488b"/>
+            <c:chart xmlns:r="http://schemas.openxmlformats.org/officeDocument/2006/relationships" xmlns:c="http://schemas.openxmlformats.org/drawingml/2006/chart" r:id="R1589d25e5bf343c8"/>
           </a:graphicData>
         </a:graphic>
       </p:graphicFrame>
@@ -6345,9 +9180,81 @@
           <a:bodyPr xmlns:a="http://schemas.openxmlformats.org/drawingml/2006/main" lIns="0" tIns="0" rIns="0" bIns="0">
             <a:noAutofit/>
           </a:bodyPr>
-          <a:lstStyle xmlns:a="http://schemas.openxmlformats.org/drawingml/2006/main"/>
+          <a:lstStyle xmlns:a="http://schemas.openxmlformats.org/drawingml/2006/main">
+            <a:defPPr>
+              <a:defRPr>
+                <a:latin typeface="Arial"/>
+                <a:ea typeface="Arial"/>
+                <a:cs typeface="Arial"/>
+              </a:defRPr>
+            </a:defPPr>
+            <a:lvl1pPr>
+              <a:defRPr>
+                <a:latin typeface="Arial"/>
+                <a:ea typeface="Arial"/>
+                <a:cs typeface="Arial"/>
+              </a:defRPr>
+            </a:lvl1pPr>
+            <a:lvl2pPr>
+              <a:defRPr>
+                <a:latin typeface="Arial"/>
+                <a:ea typeface="Arial"/>
+                <a:cs typeface="Arial"/>
+              </a:defRPr>
+            </a:lvl2pPr>
+            <a:lvl3pPr>
+              <a:defRPr>
+                <a:latin typeface="Arial"/>
+                <a:ea typeface="Arial"/>
+                <a:cs typeface="Arial"/>
+              </a:defRPr>
+            </a:lvl3pPr>
+            <a:lvl4pPr>
+              <a:defRPr>
+                <a:latin typeface="Arial"/>
+                <a:ea typeface="Arial"/>
+                <a:cs typeface="Arial"/>
+              </a:defRPr>
+            </a:lvl4pPr>
+            <a:lvl5pPr>
+              <a:defRPr>
+                <a:latin typeface="Arial"/>
+                <a:ea typeface="Arial"/>
+                <a:cs typeface="Arial"/>
+              </a:defRPr>
+            </a:lvl5pPr>
+            <a:lvl6pPr>
+              <a:defRPr>
+                <a:latin typeface="Arial"/>
+                <a:ea typeface="Arial"/>
+                <a:cs typeface="Arial"/>
+              </a:defRPr>
+            </a:lvl6pPr>
+            <a:lvl7pPr>
+              <a:defRPr>
+                <a:latin typeface="Arial"/>
+                <a:ea typeface="Arial"/>
+                <a:cs typeface="Arial"/>
+              </a:defRPr>
+            </a:lvl7pPr>
+            <a:lvl8pPr>
+              <a:defRPr>
+                <a:latin typeface="Arial"/>
+                <a:ea typeface="Arial"/>
+                <a:cs typeface="Arial"/>
+              </a:defRPr>
+            </a:lvl8pPr>
+            <a:lvl9pPr>
+              <a:defRPr>
+                <a:latin typeface="Arial"/>
+                <a:ea typeface="Arial"/>
+                <a:cs typeface="Arial"/>
+              </a:defRPr>
+            </a:lvl9pPr>
+          </a:lstStyle>
           <a:p xmlns:a="http://schemas.openxmlformats.org/drawingml/2006/main">
             <a:pPr>
+              <a:buNone/>
               <a:defRPr sz="1800" b="0">
                 <a:solidFill>
                   <a:srgbClr val="111827"/>
@@ -6432,9 +9339,81 @@
           <a:bodyPr xmlns:a="http://schemas.openxmlformats.org/drawingml/2006/main" lIns="0" tIns="0" rIns="0" bIns="0">
             <a:noAutofit/>
           </a:bodyPr>
-          <a:lstStyle xmlns:a="http://schemas.openxmlformats.org/drawingml/2006/main"/>
+          <a:lstStyle xmlns:a="http://schemas.openxmlformats.org/drawingml/2006/main">
+            <a:defPPr>
+              <a:defRPr>
+                <a:latin typeface="Arial"/>
+                <a:ea typeface="Arial"/>
+                <a:cs typeface="Arial"/>
+              </a:defRPr>
+            </a:defPPr>
+            <a:lvl1pPr>
+              <a:defRPr>
+                <a:latin typeface="Arial"/>
+                <a:ea typeface="Arial"/>
+                <a:cs typeface="Arial"/>
+              </a:defRPr>
+            </a:lvl1pPr>
+            <a:lvl2pPr>
+              <a:defRPr>
+                <a:latin typeface="Arial"/>
+                <a:ea typeface="Arial"/>
+                <a:cs typeface="Arial"/>
+              </a:defRPr>
+            </a:lvl2pPr>
+            <a:lvl3pPr>
+              <a:defRPr>
+                <a:latin typeface="Arial"/>
+                <a:ea typeface="Arial"/>
+                <a:cs typeface="Arial"/>
+              </a:defRPr>
+            </a:lvl3pPr>
+            <a:lvl4pPr>
+              <a:defRPr>
+                <a:latin typeface="Arial"/>
+                <a:ea typeface="Arial"/>
+                <a:cs typeface="Arial"/>
+              </a:defRPr>
+            </a:lvl4pPr>
+            <a:lvl5pPr>
+              <a:defRPr>
+                <a:latin typeface="Arial"/>
+                <a:ea typeface="Arial"/>
+                <a:cs typeface="Arial"/>
+              </a:defRPr>
+            </a:lvl5pPr>
+            <a:lvl6pPr>
+              <a:defRPr>
+                <a:latin typeface="Arial"/>
+                <a:ea typeface="Arial"/>
+                <a:cs typeface="Arial"/>
+              </a:defRPr>
+            </a:lvl6pPr>
+            <a:lvl7pPr>
+              <a:defRPr>
+                <a:latin typeface="Arial"/>
+                <a:ea typeface="Arial"/>
+                <a:cs typeface="Arial"/>
+              </a:defRPr>
+            </a:lvl7pPr>
+            <a:lvl8pPr>
+              <a:defRPr>
+                <a:latin typeface="Arial"/>
+                <a:ea typeface="Arial"/>
+                <a:cs typeface="Arial"/>
+              </a:defRPr>
+            </a:lvl8pPr>
+            <a:lvl9pPr>
+              <a:defRPr>
+                <a:latin typeface="Arial"/>
+                <a:ea typeface="Arial"/>
+                <a:cs typeface="Arial"/>
+              </a:defRPr>
+            </a:lvl9pPr>
+          </a:lstStyle>
           <a:p xmlns:a="http://schemas.openxmlformats.org/drawingml/2006/main">
             <a:pPr>
+              <a:buNone/>
               <a:defRPr sz="2025" b="0">
                 <a:solidFill>
                   <a:srgbClr val="111827"/>
@@ -6458,6 +9437,7 @@
           </a:p>
           <a:p xmlns:a="http://schemas.openxmlformats.org/drawingml/2006/main">
             <a:pPr>
+              <a:buNone/>
               <a:defRPr sz="2025" b="0">
                 <a:solidFill>
                   <a:srgbClr val="111827"/>
@@ -6481,6 +9461,7 @@
           </a:p>
           <a:p xmlns:a="http://schemas.openxmlformats.org/drawingml/2006/main">
             <a:pPr>
+              <a:buNone/>
               <a:defRPr sz="2025" b="0">
                 <a:solidFill>
                   <a:srgbClr val="111827"/>
@@ -6535,9 +9516,81 @@
           <a:bodyPr xmlns:a="http://schemas.openxmlformats.org/drawingml/2006/main" lIns="0" tIns="0" rIns="0" bIns="0">
             <a:noAutofit/>
           </a:bodyPr>
-          <a:lstStyle xmlns:a="http://schemas.openxmlformats.org/drawingml/2006/main"/>
+          <a:lstStyle xmlns:a="http://schemas.openxmlformats.org/drawingml/2006/main">
+            <a:defPPr>
+              <a:defRPr>
+                <a:latin typeface="Arial"/>
+                <a:ea typeface="Arial"/>
+                <a:cs typeface="Arial"/>
+              </a:defRPr>
+            </a:defPPr>
+            <a:lvl1pPr>
+              <a:defRPr>
+                <a:latin typeface="Arial"/>
+                <a:ea typeface="Arial"/>
+                <a:cs typeface="Arial"/>
+              </a:defRPr>
+            </a:lvl1pPr>
+            <a:lvl2pPr>
+              <a:defRPr>
+                <a:latin typeface="Arial"/>
+                <a:ea typeface="Arial"/>
+                <a:cs typeface="Arial"/>
+              </a:defRPr>
+            </a:lvl2pPr>
+            <a:lvl3pPr>
+              <a:defRPr>
+                <a:latin typeface="Arial"/>
+                <a:ea typeface="Arial"/>
+                <a:cs typeface="Arial"/>
+              </a:defRPr>
+            </a:lvl3pPr>
+            <a:lvl4pPr>
+              <a:defRPr>
+                <a:latin typeface="Arial"/>
+                <a:ea typeface="Arial"/>
+                <a:cs typeface="Arial"/>
+              </a:defRPr>
+            </a:lvl4pPr>
+            <a:lvl5pPr>
+              <a:defRPr>
+                <a:latin typeface="Arial"/>
+                <a:ea typeface="Arial"/>
+                <a:cs typeface="Arial"/>
+              </a:defRPr>
+            </a:lvl5pPr>
+            <a:lvl6pPr>
+              <a:defRPr>
+                <a:latin typeface="Arial"/>
+                <a:ea typeface="Arial"/>
+                <a:cs typeface="Arial"/>
+              </a:defRPr>
+            </a:lvl6pPr>
+            <a:lvl7pPr>
+              <a:defRPr>
+                <a:latin typeface="Arial"/>
+                <a:ea typeface="Arial"/>
+                <a:cs typeface="Arial"/>
+              </a:defRPr>
+            </a:lvl7pPr>
+            <a:lvl8pPr>
+              <a:defRPr>
+                <a:latin typeface="Arial"/>
+                <a:ea typeface="Arial"/>
+                <a:cs typeface="Arial"/>
+              </a:defRPr>
+            </a:lvl8pPr>
+            <a:lvl9pPr>
+              <a:defRPr>
+                <a:latin typeface="Arial"/>
+                <a:ea typeface="Arial"/>
+                <a:cs typeface="Arial"/>
+              </a:defRPr>
+            </a:lvl9pPr>
+          </a:lstStyle>
           <a:p xmlns:a="http://schemas.openxmlformats.org/drawingml/2006/main">
             <a:pPr>
+              <a:buNone/>
               <a:defRPr sz="1875" b="0">
                 <a:solidFill>
                   <a:srgbClr val="111827"/>
@@ -6561,6 +9614,7 @@
           </a:p>
           <a:p xmlns:a="http://schemas.openxmlformats.org/drawingml/2006/main">
             <a:pPr>
+              <a:buNone/>
               <a:defRPr sz="1875" b="0">
                 <a:solidFill>
                   <a:srgbClr val="111827"/>
@@ -6615,9 +9669,81 @@
           <a:bodyPr xmlns:a="http://schemas.openxmlformats.org/drawingml/2006/main" lIns="0" tIns="0" rIns="0" bIns="0">
             <a:noAutofit/>
           </a:bodyPr>
-          <a:lstStyle xmlns:a="http://schemas.openxmlformats.org/drawingml/2006/main"/>
+          <a:lstStyle xmlns:a="http://schemas.openxmlformats.org/drawingml/2006/main">
+            <a:defPPr>
+              <a:defRPr>
+                <a:latin typeface="Arial"/>
+                <a:ea typeface="Arial"/>
+                <a:cs typeface="Arial"/>
+              </a:defRPr>
+            </a:defPPr>
+            <a:lvl1pPr>
+              <a:defRPr>
+                <a:latin typeface="Arial"/>
+                <a:ea typeface="Arial"/>
+                <a:cs typeface="Arial"/>
+              </a:defRPr>
+            </a:lvl1pPr>
+            <a:lvl2pPr>
+              <a:defRPr>
+                <a:latin typeface="Arial"/>
+                <a:ea typeface="Arial"/>
+                <a:cs typeface="Arial"/>
+              </a:defRPr>
+            </a:lvl2pPr>
+            <a:lvl3pPr>
+              <a:defRPr>
+                <a:latin typeface="Arial"/>
+                <a:ea typeface="Arial"/>
+                <a:cs typeface="Arial"/>
+              </a:defRPr>
+            </a:lvl3pPr>
+            <a:lvl4pPr>
+              <a:defRPr>
+                <a:latin typeface="Arial"/>
+                <a:ea typeface="Arial"/>
+                <a:cs typeface="Arial"/>
+              </a:defRPr>
+            </a:lvl4pPr>
+            <a:lvl5pPr>
+              <a:defRPr>
+                <a:latin typeface="Arial"/>
+                <a:ea typeface="Arial"/>
+                <a:cs typeface="Arial"/>
+              </a:defRPr>
+            </a:lvl5pPr>
+            <a:lvl6pPr>
+              <a:defRPr>
+                <a:latin typeface="Arial"/>
+                <a:ea typeface="Arial"/>
+                <a:cs typeface="Arial"/>
+              </a:defRPr>
+            </a:lvl6pPr>
+            <a:lvl7pPr>
+              <a:defRPr>
+                <a:latin typeface="Arial"/>
+                <a:ea typeface="Arial"/>
+                <a:cs typeface="Arial"/>
+              </a:defRPr>
+            </a:lvl7pPr>
+            <a:lvl8pPr>
+              <a:defRPr>
+                <a:latin typeface="Arial"/>
+                <a:ea typeface="Arial"/>
+                <a:cs typeface="Arial"/>
+              </a:defRPr>
+            </a:lvl8pPr>
+            <a:lvl9pPr>
+              <a:defRPr>
+                <a:latin typeface="Arial"/>
+                <a:ea typeface="Arial"/>
+                <a:cs typeface="Arial"/>
+              </a:defRPr>
+            </a:lvl9pPr>
+          </a:lstStyle>
           <a:p xmlns:a="http://schemas.openxmlformats.org/drawingml/2006/main">
             <a:pPr>
+              <a:buNone/>
               <a:defRPr sz="1575" b="0">
                 <a:solidFill>
                   <a:srgbClr val="111827"/>
@@ -6641,6 +9767,7 @@
           </a:p>
           <a:p xmlns:a="http://schemas.openxmlformats.org/drawingml/2006/main">
             <a:pPr>
+              <a:buNone/>
               <a:defRPr sz="1575" b="0">
                 <a:solidFill>
                   <a:srgbClr val="111827"/>
@@ -6680,7 +9807,7 @@
     <p:bg>
       <p:bgPr>
         <a:solidFill xmlns:a="http://schemas.openxmlformats.org/drawingml/2006/main">
-          <a:srgbClr val="F9FAFB"/>
+          <a:srgbClr val="FFFFFF"/>
         </a:solidFill>
       </p:bgPr>
     </p:bg>
@@ -6724,9 +9851,81 @@
           <a:bodyPr xmlns:a="http://schemas.openxmlformats.org/drawingml/2006/main" lIns="0" tIns="0" rIns="0" bIns="0">
             <a:noAutofit/>
           </a:bodyPr>
-          <a:lstStyle xmlns:a="http://schemas.openxmlformats.org/drawingml/2006/main"/>
+          <a:lstStyle xmlns:a="http://schemas.openxmlformats.org/drawingml/2006/main">
+            <a:defPPr>
+              <a:defRPr>
+                <a:latin typeface="Arial"/>
+                <a:ea typeface="Arial"/>
+                <a:cs typeface="Arial"/>
+              </a:defRPr>
+            </a:defPPr>
+            <a:lvl1pPr>
+              <a:defRPr>
+                <a:latin typeface="Arial"/>
+                <a:ea typeface="Arial"/>
+                <a:cs typeface="Arial"/>
+              </a:defRPr>
+            </a:lvl1pPr>
+            <a:lvl2pPr>
+              <a:defRPr>
+                <a:latin typeface="Arial"/>
+                <a:ea typeface="Arial"/>
+                <a:cs typeface="Arial"/>
+              </a:defRPr>
+            </a:lvl2pPr>
+            <a:lvl3pPr>
+              <a:defRPr>
+                <a:latin typeface="Arial"/>
+                <a:ea typeface="Arial"/>
+                <a:cs typeface="Arial"/>
+              </a:defRPr>
+            </a:lvl3pPr>
+            <a:lvl4pPr>
+              <a:defRPr>
+                <a:latin typeface="Arial"/>
+                <a:ea typeface="Arial"/>
+                <a:cs typeface="Arial"/>
+              </a:defRPr>
+            </a:lvl4pPr>
+            <a:lvl5pPr>
+              <a:defRPr>
+                <a:latin typeface="Arial"/>
+                <a:ea typeface="Arial"/>
+                <a:cs typeface="Arial"/>
+              </a:defRPr>
+            </a:lvl5pPr>
+            <a:lvl6pPr>
+              <a:defRPr>
+                <a:latin typeface="Arial"/>
+                <a:ea typeface="Arial"/>
+                <a:cs typeface="Arial"/>
+              </a:defRPr>
+            </a:lvl6pPr>
+            <a:lvl7pPr>
+              <a:defRPr>
+                <a:latin typeface="Arial"/>
+                <a:ea typeface="Arial"/>
+                <a:cs typeface="Arial"/>
+              </a:defRPr>
+            </a:lvl7pPr>
+            <a:lvl8pPr>
+              <a:defRPr>
+                <a:latin typeface="Arial"/>
+                <a:ea typeface="Arial"/>
+                <a:cs typeface="Arial"/>
+              </a:defRPr>
+            </a:lvl8pPr>
+            <a:lvl9pPr>
+              <a:defRPr>
+                <a:latin typeface="Arial"/>
+                <a:ea typeface="Arial"/>
+                <a:cs typeface="Arial"/>
+              </a:defRPr>
+            </a:lvl9pPr>
+          </a:lstStyle>
           <a:p xmlns:a="http://schemas.openxmlformats.org/drawingml/2006/main">
             <a:pPr>
+              <a:buNone/>
               <a:defRPr sz="1050" b="0">
                 <a:solidFill>
                   <a:srgbClr val="6B7280"/>
@@ -6745,7 +9944,7 @@
                 <a:ea typeface="Arial"/>
                 <a:cs typeface="Arial"/>
               </a:rPr>
-              <a:t>E C O L L A T E R A L   /   C S C I  4 1 5 0  A 2</a:t>
+              <a:t>ECOllateral / CSCI 4150 A2</a:t>
             </a:r>
           </a:p>
         </p:txBody>
@@ -6811,28 +10010,100 @@
           <a:bodyPr xmlns:a="http://schemas.openxmlformats.org/drawingml/2006/main" lIns="0" tIns="0" rIns="0" bIns="0">
             <a:noAutofit/>
           </a:bodyPr>
-          <a:lstStyle xmlns:a="http://schemas.openxmlformats.org/drawingml/2006/main"/>
+          <a:lstStyle xmlns:a="http://schemas.openxmlformats.org/drawingml/2006/main">
+            <a:defPPr>
+              <a:defRPr sz="3150" b="1">
+                <a:latin typeface="Arial"/>
+                <a:ea typeface="Arial"/>
+                <a:cs typeface="Arial"/>
+              </a:defRPr>
+            </a:defPPr>
+            <a:lvl1pPr>
+              <a:defRPr sz="3150" b="1">
+                <a:latin typeface="Arial"/>
+                <a:ea typeface="Arial"/>
+                <a:cs typeface="Arial"/>
+              </a:defRPr>
+            </a:lvl1pPr>
+            <a:lvl2pPr>
+              <a:defRPr sz="3150" b="1">
+                <a:latin typeface="Arial"/>
+                <a:ea typeface="Arial"/>
+                <a:cs typeface="Arial"/>
+              </a:defRPr>
+            </a:lvl2pPr>
+            <a:lvl3pPr>
+              <a:defRPr sz="3150" b="1">
+                <a:latin typeface="Arial"/>
+                <a:ea typeface="Arial"/>
+                <a:cs typeface="Arial"/>
+              </a:defRPr>
+            </a:lvl3pPr>
+            <a:lvl4pPr>
+              <a:defRPr sz="3150" b="1">
+                <a:latin typeface="Arial"/>
+                <a:ea typeface="Arial"/>
+                <a:cs typeface="Arial"/>
+              </a:defRPr>
+            </a:lvl4pPr>
+            <a:lvl5pPr>
+              <a:defRPr sz="3150" b="1">
+                <a:latin typeface="Arial"/>
+                <a:ea typeface="Arial"/>
+                <a:cs typeface="Arial"/>
+              </a:defRPr>
+            </a:lvl5pPr>
+            <a:lvl6pPr>
+              <a:defRPr sz="3150" b="1">
+                <a:latin typeface="Arial"/>
+                <a:ea typeface="Arial"/>
+                <a:cs typeface="Arial"/>
+              </a:defRPr>
+            </a:lvl6pPr>
+            <a:lvl7pPr>
+              <a:defRPr sz="3150" b="1">
+                <a:latin typeface="Arial"/>
+                <a:ea typeface="Arial"/>
+                <a:cs typeface="Arial"/>
+              </a:defRPr>
+            </a:lvl7pPr>
+            <a:lvl8pPr>
+              <a:defRPr sz="3150" b="1">
+                <a:latin typeface="Arial"/>
+                <a:ea typeface="Arial"/>
+                <a:cs typeface="Arial"/>
+              </a:defRPr>
+            </a:lvl8pPr>
+            <a:lvl9pPr>
+              <a:defRPr sz="3150" b="1">
+                <a:latin typeface="Arial"/>
+                <a:ea typeface="Arial"/>
+                <a:cs typeface="Arial"/>
+              </a:defRPr>
+            </a:lvl9pPr>
+          </a:lstStyle>
           <a:p xmlns:a="http://schemas.openxmlformats.org/drawingml/2006/main">
             <a:pPr>
-              <a:defRPr sz="3225" b="0">
+              <a:buNone/>
+              <a:defRPr sz="3150" b="1">
                 <a:solidFill>
                   <a:srgbClr val="111827"/>
                 </a:solidFill>
-                <a:latin typeface="Georgia"/>
-                <a:ea typeface="Georgia"/>
-                <a:cs typeface="Georgia"/>
+                <a:latin typeface="Arial"/>
+                <a:ea typeface="Arial"/>
+                <a:cs typeface="Arial"/>
               </a:defRPr>
             </a:pPr>
             <a:r>
-              <a:rPr sz="3225" b="0">
+              <a:rPr sz="3150" b="1">
                 <a:solidFill>
                   <a:srgbClr val="111827"/>
                 </a:solidFill>
-                <a:latin typeface="Georgia"/>
-                <a:ea typeface="Georgia"/>
-                <a:cs typeface="Georgia"/>
+                <a:latin typeface="Arial"/>
+                <a:ea typeface="Arial"/>
+                <a:cs typeface="Arial"/>
               </a:rPr>
-              <a:t>EXPERIMENT E2: MISSING READINGS</a:t>
+              <a:t>E2: Missing drought readings</a:t>
             </a:r>
           </a:p>
         </p:txBody>
@@ -6868,9 +10139,81 @@
           <a:bodyPr xmlns:a="http://schemas.openxmlformats.org/drawingml/2006/main" lIns="0" tIns="0" rIns="0" bIns="0">
             <a:noAutofit/>
           </a:bodyPr>
-          <a:lstStyle xmlns:a="http://schemas.openxmlformats.org/drawingml/2006/main"/>
+          <a:lstStyle xmlns:a="http://schemas.openxmlformats.org/drawingml/2006/main">
+            <a:defPPr>
+              <a:defRPr>
+                <a:latin typeface="Arial"/>
+                <a:ea typeface="Arial"/>
+                <a:cs typeface="Arial"/>
+              </a:defRPr>
+            </a:defPPr>
+            <a:lvl1pPr>
+              <a:defRPr>
+                <a:latin typeface="Arial"/>
+                <a:ea typeface="Arial"/>
+                <a:cs typeface="Arial"/>
+              </a:defRPr>
+            </a:lvl1pPr>
+            <a:lvl2pPr>
+              <a:defRPr>
+                <a:latin typeface="Arial"/>
+                <a:ea typeface="Arial"/>
+                <a:cs typeface="Arial"/>
+              </a:defRPr>
+            </a:lvl2pPr>
+            <a:lvl3pPr>
+              <a:defRPr>
+                <a:latin typeface="Arial"/>
+                <a:ea typeface="Arial"/>
+                <a:cs typeface="Arial"/>
+              </a:defRPr>
+            </a:lvl3pPr>
+            <a:lvl4pPr>
+              <a:defRPr>
+                <a:latin typeface="Arial"/>
+                <a:ea typeface="Arial"/>
+                <a:cs typeface="Arial"/>
+              </a:defRPr>
+            </a:lvl4pPr>
+            <a:lvl5pPr>
+              <a:defRPr>
+                <a:latin typeface="Arial"/>
+                <a:ea typeface="Arial"/>
+                <a:cs typeface="Arial"/>
+              </a:defRPr>
+            </a:lvl5pPr>
+            <a:lvl6pPr>
+              <a:defRPr>
+                <a:latin typeface="Arial"/>
+                <a:ea typeface="Arial"/>
+                <a:cs typeface="Arial"/>
+              </a:defRPr>
+            </a:lvl6pPr>
+            <a:lvl7pPr>
+              <a:defRPr>
+                <a:latin typeface="Arial"/>
+                <a:ea typeface="Arial"/>
+                <a:cs typeface="Arial"/>
+              </a:defRPr>
+            </a:lvl7pPr>
+            <a:lvl8pPr>
+              <a:defRPr>
+                <a:latin typeface="Arial"/>
+                <a:ea typeface="Arial"/>
+                <a:cs typeface="Arial"/>
+              </a:defRPr>
+            </a:lvl8pPr>
+            <a:lvl9pPr>
+              <a:defRPr>
+                <a:latin typeface="Arial"/>
+                <a:ea typeface="Arial"/>
+                <a:cs typeface="Arial"/>
+              </a:defRPr>
+            </a:lvl9pPr>
+          </a:lstStyle>
           <a:p xmlns:a="http://schemas.openxmlformats.org/drawingml/2006/main">
             <a:pPr>
+              <a:buNone/>
               <a:defRPr sz="975" b="0">
                 <a:solidFill>
                   <a:srgbClr val="6B7280"/>
@@ -6925,9 +10268,81 @@
           <a:bodyPr xmlns:a="http://schemas.openxmlformats.org/drawingml/2006/main" lIns="0" tIns="0" rIns="0" bIns="0">
             <a:noAutofit/>
           </a:bodyPr>
-          <a:lstStyle xmlns:a="http://schemas.openxmlformats.org/drawingml/2006/main"/>
+          <a:lstStyle xmlns:a="http://schemas.openxmlformats.org/drawingml/2006/main">
+            <a:defPPr>
+              <a:defRPr>
+                <a:latin typeface="Arial"/>
+                <a:ea typeface="Arial"/>
+                <a:cs typeface="Arial"/>
+              </a:defRPr>
+            </a:defPPr>
+            <a:lvl1pPr>
+              <a:defRPr>
+                <a:latin typeface="Arial"/>
+                <a:ea typeface="Arial"/>
+                <a:cs typeface="Arial"/>
+              </a:defRPr>
+            </a:lvl1pPr>
+            <a:lvl2pPr>
+              <a:defRPr>
+                <a:latin typeface="Arial"/>
+                <a:ea typeface="Arial"/>
+                <a:cs typeface="Arial"/>
+              </a:defRPr>
+            </a:lvl2pPr>
+            <a:lvl3pPr>
+              <a:defRPr>
+                <a:latin typeface="Arial"/>
+                <a:ea typeface="Arial"/>
+                <a:cs typeface="Arial"/>
+              </a:defRPr>
+            </a:lvl3pPr>
+            <a:lvl4pPr>
+              <a:defRPr>
+                <a:latin typeface="Arial"/>
+                <a:ea typeface="Arial"/>
+                <a:cs typeface="Arial"/>
+              </a:defRPr>
+            </a:lvl4pPr>
+            <a:lvl5pPr>
+              <a:defRPr>
+                <a:latin typeface="Arial"/>
+                <a:ea typeface="Arial"/>
+                <a:cs typeface="Arial"/>
+              </a:defRPr>
+            </a:lvl5pPr>
+            <a:lvl6pPr>
+              <a:defRPr>
+                <a:latin typeface="Arial"/>
+                <a:ea typeface="Arial"/>
+                <a:cs typeface="Arial"/>
+              </a:defRPr>
+            </a:lvl6pPr>
+            <a:lvl7pPr>
+              <a:defRPr>
+                <a:latin typeface="Arial"/>
+                <a:ea typeface="Arial"/>
+                <a:cs typeface="Arial"/>
+              </a:defRPr>
+            </a:lvl7pPr>
+            <a:lvl8pPr>
+              <a:defRPr>
+                <a:latin typeface="Arial"/>
+                <a:ea typeface="Arial"/>
+                <a:cs typeface="Arial"/>
+              </a:defRPr>
+            </a:lvl8pPr>
+            <a:lvl9pPr>
+              <a:defRPr>
+                <a:latin typeface="Arial"/>
+                <a:ea typeface="Arial"/>
+                <a:cs typeface="Arial"/>
+              </a:defRPr>
+            </a:lvl9pPr>
+          </a:lstStyle>
           <a:p xmlns:a="http://schemas.openxmlformats.org/drawingml/2006/main">
             <a:pPr>
+              <a:buNone/>
               <a:defRPr sz="1050" b="0">
                 <a:solidFill>
                   <a:srgbClr val="6B7280"/>
@@ -6953,7 +10368,13 @@
       </p:sp>
       <p:graphicFrame>
         <p:nvGraphicFramePr>
-          <p:cNvPr id="19" name="Chart"/>
+          <p:cNvPr id="19" name="Chart">
+            <a:extLst xmlns:a="http://schemas.openxmlformats.org/drawingml/2006/main">
+              <a:ext uri="{FF2B5EF4-FFF2-40B4-BE49-F238E27FC236}">
+                <a16:creationId xmlns:a16="http://schemas.microsoft.com/office/drawing/2014/main" id="{7308A8E4-6F40-4E43-9ACA-00F5B225A800}"/>
+              </a:ext>
+            </a:extLst>
+          </p:cNvPr>
           <p:cNvGraphicFramePr/>
           <p:nvPr/>
         </p:nvGraphicFramePr>
@@ -6963,7 +10384,7 @@
         </p:xfrm>
         <a:graphic xmlns:a="http://schemas.openxmlformats.org/drawingml/2006/main">
           <a:graphicData uri="http://schemas.openxmlformats.org/drawingml/2006/chart">
-            <c:chart xmlns:r="http://schemas.openxmlformats.org/officeDocument/2006/relationships" xmlns:c="http://schemas.openxmlformats.org/drawingml/2006/chart" r:id="R0812704257764b22"/>
+            <c:chart xmlns:r="http://schemas.openxmlformats.org/officeDocument/2006/relationships" xmlns:c="http://schemas.openxmlformats.org/drawingml/2006/chart" r:id="R44baba174ff54eb7"/>
           </a:graphicData>
         </a:graphic>
       </p:graphicFrame>
@@ -6998,10 +10419,82 @@
           <a:bodyPr xmlns:a="http://schemas.openxmlformats.org/drawingml/2006/main" lIns="0" tIns="0" rIns="0" bIns="0">
             <a:noAutofit/>
           </a:bodyPr>
-          <a:lstStyle xmlns:a="http://schemas.openxmlformats.org/drawingml/2006/main"/>
+          <a:lstStyle xmlns:a="http://schemas.openxmlformats.org/drawingml/2006/main">
+            <a:defPPr>
+              <a:defRPr sz="3150" b="1">
+                <a:latin typeface="Arial"/>
+                <a:ea typeface="Arial"/>
+                <a:cs typeface="Arial"/>
+              </a:defRPr>
+            </a:defPPr>
+            <a:lvl1pPr>
+              <a:defRPr sz="3150" b="1">
+                <a:latin typeface="Arial"/>
+                <a:ea typeface="Arial"/>
+                <a:cs typeface="Arial"/>
+              </a:defRPr>
+            </a:lvl1pPr>
+            <a:lvl2pPr>
+              <a:defRPr sz="3150" b="1">
+                <a:latin typeface="Arial"/>
+                <a:ea typeface="Arial"/>
+                <a:cs typeface="Arial"/>
+              </a:defRPr>
+            </a:lvl2pPr>
+            <a:lvl3pPr>
+              <a:defRPr sz="3150" b="1">
+                <a:latin typeface="Arial"/>
+                <a:ea typeface="Arial"/>
+                <a:cs typeface="Arial"/>
+              </a:defRPr>
+            </a:lvl3pPr>
+            <a:lvl4pPr>
+              <a:defRPr sz="3150" b="1">
+                <a:latin typeface="Arial"/>
+                <a:ea typeface="Arial"/>
+                <a:cs typeface="Arial"/>
+              </a:defRPr>
+            </a:lvl4pPr>
+            <a:lvl5pPr>
+              <a:defRPr sz="3150" b="1">
+                <a:latin typeface="Arial"/>
+                <a:ea typeface="Arial"/>
+                <a:cs typeface="Arial"/>
+              </a:defRPr>
+            </a:lvl5pPr>
+            <a:lvl6pPr>
+              <a:defRPr sz="3150" b="1">
+                <a:latin typeface="Arial"/>
+                <a:ea typeface="Arial"/>
+                <a:cs typeface="Arial"/>
+              </a:defRPr>
+            </a:lvl6pPr>
+            <a:lvl7pPr>
+              <a:defRPr sz="3150" b="1">
+                <a:latin typeface="Arial"/>
+                <a:ea typeface="Arial"/>
+                <a:cs typeface="Arial"/>
+              </a:defRPr>
+            </a:lvl7pPr>
+            <a:lvl8pPr>
+              <a:defRPr sz="3150" b="1">
+                <a:latin typeface="Arial"/>
+                <a:ea typeface="Arial"/>
+                <a:cs typeface="Arial"/>
+              </a:defRPr>
+            </a:lvl8pPr>
+            <a:lvl9pPr>
+              <a:defRPr sz="3150" b="1">
+                <a:latin typeface="Arial"/>
+                <a:ea typeface="Arial"/>
+                <a:cs typeface="Arial"/>
+              </a:defRPr>
+            </a:lvl9pPr>
+          </a:lstStyle>
           <a:p xmlns:a="http://schemas.openxmlformats.org/drawingml/2006/main">
             <a:pPr>
-              <a:defRPr sz="6300" b="0">
+              <a:buNone/>
+              <a:defRPr sz="3150" b="1">
                 <a:solidFill>
                   <a:srgbClr val="111827"/>
                 </a:solidFill>
@@ -7011,7 +10504,7 @@
               </a:defRPr>
             </a:pPr>
             <a:r>
-              <a:rPr sz="6300" b="0">
+              <a:rPr sz="3150" b="1">
                 <a:solidFill>
                   <a:srgbClr val="111827"/>
                 </a:solidFill>
@@ -7085,9 +10578,81 @@
           <a:bodyPr xmlns:a="http://schemas.openxmlformats.org/drawingml/2006/main" lIns="0" tIns="0" rIns="0" bIns="0">
             <a:noAutofit/>
           </a:bodyPr>
-          <a:lstStyle xmlns:a="http://schemas.openxmlformats.org/drawingml/2006/main"/>
+          <a:lstStyle xmlns:a="http://schemas.openxmlformats.org/drawingml/2006/main">
+            <a:defPPr>
+              <a:defRPr>
+                <a:latin typeface="Arial"/>
+                <a:ea typeface="Arial"/>
+                <a:cs typeface="Arial"/>
+              </a:defRPr>
+            </a:defPPr>
+            <a:lvl1pPr>
+              <a:defRPr>
+                <a:latin typeface="Arial"/>
+                <a:ea typeface="Arial"/>
+                <a:cs typeface="Arial"/>
+              </a:defRPr>
+            </a:lvl1pPr>
+            <a:lvl2pPr>
+              <a:defRPr>
+                <a:latin typeface="Arial"/>
+                <a:ea typeface="Arial"/>
+                <a:cs typeface="Arial"/>
+              </a:defRPr>
+            </a:lvl2pPr>
+            <a:lvl3pPr>
+              <a:defRPr>
+                <a:latin typeface="Arial"/>
+                <a:ea typeface="Arial"/>
+                <a:cs typeface="Arial"/>
+              </a:defRPr>
+            </a:lvl3pPr>
+            <a:lvl4pPr>
+              <a:defRPr>
+                <a:latin typeface="Arial"/>
+                <a:ea typeface="Arial"/>
+                <a:cs typeface="Arial"/>
+              </a:defRPr>
+            </a:lvl4pPr>
+            <a:lvl5pPr>
+              <a:defRPr>
+                <a:latin typeface="Arial"/>
+                <a:ea typeface="Arial"/>
+                <a:cs typeface="Arial"/>
+              </a:defRPr>
+            </a:lvl5pPr>
+            <a:lvl6pPr>
+              <a:defRPr>
+                <a:latin typeface="Arial"/>
+                <a:ea typeface="Arial"/>
+                <a:cs typeface="Arial"/>
+              </a:defRPr>
+            </a:lvl6pPr>
+            <a:lvl7pPr>
+              <a:defRPr>
+                <a:latin typeface="Arial"/>
+                <a:ea typeface="Arial"/>
+                <a:cs typeface="Arial"/>
+              </a:defRPr>
+            </a:lvl7pPr>
+            <a:lvl8pPr>
+              <a:defRPr>
+                <a:latin typeface="Arial"/>
+                <a:ea typeface="Arial"/>
+                <a:cs typeface="Arial"/>
+              </a:defRPr>
+            </a:lvl8pPr>
+            <a:lvl9pPr>
+              <a:defRPr>
+                <a:latin typeface="Arial"/>
+                <a:ea typeface="Arial"/>
+                <a:cs typeface="Arial"/>
+              </a:defRPr>
+            </a:lvl9pPr>
+          </a:lstStyle>
           <a:p xmlns:a="http://schemas.openxmlformats.org/drawingml/2006/main">
             <a:pPr>
+              <a:buNone/>
               <a:defRPr sz="1875" b="0">
                 <a:solidFill>
                   <a:srgbClr val="111827"/>
@@ -7142,9 +10707,81 @@
           <a:bodyPr xmlns:a="http://schemas.openxmlformats.org/drawingml/2006/main" lIns="0" tIns="0" rIns="0" bIns="0">
             <a:noAutofit/>
           </a:bodyPr>
-          <a:lstStyle xmlns:a="http://schemas.openxmlformats.org/drawingml/2006/main"/>
+          <a:lstStyle xmlns:a="http://schemas.openxmlformats.org/drawingml/2006/main">
+            <a:defPPr>
+              <a:defRPr>
+                <a:latin typeface="Arial"/>
+                <a:ea typeface="Arial"/>
+                <a:cs typeface="Arial"/>
+              </a:defRPr>
+            </a:defPPr>
+            <a:lvl1pPr>
+              <a:defRPr>
+                <a:latin typeface="Arial"/>
+                <a:ea typeface="Arial"/>
+                <a:cs typeface="Arial"/>
+              </a:defRPr>
+            </a:lvl1pPr>
+            <a:lvl2pPr>
+              <a:defRPr>
+                <a:latin typeface="Arial"/>
+                <a:ea typeface="Arial"/>
+                <a:cs typeface="Arial"/>
+              </a:defRPr>
+            </a:lvl2pPr>
+            <a:lvl3pPr>
+              <a:defRPr>
+                <a:latin typeface="Arial"/>
+                <a:ea typeface="Arial"/>
+                <a:cs typeface="Arial"/>
+              </a:defRPr>
+            </a:lvl3pPr>
+            <a:lvl4pPr>
+              <a:defRPr>
+                <a:latin typeface="Arial"/>
+                <a:ea typeface="Arial"/>
+                <a:cs typeface="Arial"/>
+              </a:defRPr>
+            </a:lvl4pPr>
+            <a:lvl5pPr>
+              <a:defRPr>
+                <a:latin typeface="Arial"/>
+                <a:ea typeface="Arial"/>
+                <a:cs typeface="Arial"/>
+              </a:defRPr>
+            </a:lvl5pPr>
+            <a:lvl6pPr>
+              <a:defRPr>
+                <a:latin typeface="Arial"/>
+                <a:ea typeface="Arial"/>
+                <a:cs typeface="Arial"/>
+              </a:defRPr>
+            </a:lvl6pPr>
+            <a:lvl7pPr>
+              <a:defRPr>
+                <a:latin typeface="Arial"/>
+                <a:ea typeface="Arial"/>
+                <a:cs typeface="Arial"/>
+              </a:defRPr>
+            </a:lvl7pPr>
+            <a:lvl8pPr>
+              <a:defRPr>
+                <a:latin typeface="Arial"/>
+                <a:ea typeface="Arial"/>
+                <a:cs typeface="Arial"/>
+              </a:defRPr>
+            </a:lvl8pPr>
+            <a:lvl9pPr>
+              <a:defRPr>
+                <a:latin typeface="Arial"/>
+                <a:ea typeface="Arial"/>
+                <a:cs typeface="Arial"/>
+              </a:defRPr>
+            </a:lvl9pPr>
+          </a:lstStyle>
           <a:p xmlns:a="http://schemas.openxmlformats.org/drawingml/2006/main">
             <a:pPr>
+              <a:buNone/>
               <a:defRPr sz="1650" b="0">
                 <a:solidFill>
                   <a:srgbClr val="6B7280"/>
@@ -7168,6 +10805,7 @@
           </a:p>
           <a:p xmlns:a="http://schemas.openxmlformats.org/drawingml/2006/main">
             <a:pPr>
+              <a:buNone/>
               <a:defRPr sz="1650" b="0">
                 <a:solidFill>
                   <a:srgbClr val="6B7280"/>
@@ -7252,9 +10890,81 @@
           <a:bodyPr xmlns:a="http://schemas.openxmlformats.org/drawingml/2006/main" lIns="0" tIns="0" rIns="0" bIns="0">
             <a:noAutofit/>
           </a:bodyPr>
-          <a:lstStyle xmlns:a="http://schemas.openxmlformats.org/drawingml/2006/main"/>
+          <a:lstStyle xmlns:a="http://schemas.openxmlformats.org/drawingml/2006/main">
+            <a:defPPr>
+              <a:defRPr>
+                <a:latin typeface="Arial"/>
+                <a:ea typeface="Arial"/>
+                <a:cs typeface="Arial"/>
+              </a:defRPr>
+            </a:defPPr>
+            <a:lvl1pPr>
+              <a:defRPr>
+                <a:latin typeface="Arial"/>
+                <a:ea typeface="Arial"/>
+                <a:cs typeface="Arial"/>
+              </a:defRPr>
+            </a:lvl1pPr>
+            <a:lvl2pPr>
+              <a:defRPr>
+                <a:latin typeface="Arial"/>
+                <a:ea typeface="Arial"/>
+                <a:cs typeface="Arial"/>
+              </a:defRPr>
+            </a:lvl2pPr>
+            <a:lvl3pPr>
+              <a:defRPr>
+                <a:latin typeface="Arial"/>
+                <a:ea typeface="Arial"/>
+                <a:cs typeface="Arial"/>
+              </a:defRPr>
+            </a:lvl3pPr>
+            <a:lvl4pPr>
+              <a:defRPr>
+                <a:latin typeface="Arial"/>
+                <a:ea typeface="Arial"/>
+                <a:cs typeface="Arial"/>
+              </a:defRPr>
+            </a:lvl4pPr>
+            <a:lvl5pPr>
+              <a:defRPr>
+                <a:latin typeface="Arial"/>
+                <a:ea typeface="Arial"/>
+                <a:cs typeface="Arial"/>
+              </a:defRPr>
+            </a:lvl5pPr>
+            <a:lvl6pPr>
+              <a:defRPr>
+                <a:latin typeface="Arial"/>
+                <a:ea typeface="Arial"/>
+                <a:cs typeface="Arial"/>
+              </a:defRPr>
+            </a:lvl6pPr>
+            <a:lvl7pPr>
+              <a:defRPr>
+                <a:latin typeface="Arial"/>
+                <a:ea typeface="Arial"/>
+                <a:cs typeface="Arial"/>
+              </a:defRPr>
+            </a:lvl7pPr>
+            <a:lvl8pPr>
+              <a:defRPr>
+                <a:latin typeface="Arial"/>
+                <a:ea typeface="Arial"/>
+                <a:cs typeface="Arial"/>
+              </a:defRPr>
+            </a:lvl8pPr>
+            <a:lvl9pPr>
+              <a:defRPr>
+                <a:latin typeface="Arial"/>
+                <a:ea typeface="Arial"/>
+                <a:cs typeface="Arial"/>
+              </a:defRPr>
+            </a:lvl9pPr>
+          </a:lstStyle>
           <a:p xmlns:a="http://schemas.openxmlformats.org/drawingml/2006/main">
             <a:pPr>
+              <a:buNone/>
               <a:defRPr sz="1800" b="0">
                 <a:solidFill>
                   <a:srgbClr val="111827"/>
@@ -7273,11 +10983,12 @@
                 <a:ea typeface="Arial"/>
                 <a:cs typeface="Arial"/>
               </a:rPr>
-              <a:t>FAILURE: high readings</a:t>
+              <a:t>Failure: biased donors</a:t>
             </a:r>
           </a:p>
           <a:p xmlns:a="http://schemas.openxmlformats.org/drawingml/2006/main">
             <a:pPr>
+              <a:buNone/>
               <a:defRPr sz="1800" b="0">
                 <a:solidFill>
                   <a:srgbClr val="111827"/>
@@ -7332,9 +11043,81 @@
           <a:bodyPr xmlns:a="http://schemas.openxmlformats.org/drawingml/2006/main" lIns="0" tIns="0" rIns="0" bIns="0">
             <a:noAutofit/>
           </a:bodyPr>
-          <a:lstStyle xmlns:a="http://schemas.openxmlformats.org/drawingml/2006/main"/>
+          <a:lstStyle xmlns:a="http://schemas.openxmlformats.org/drawingml/2006/main">
+            <a:defPPr>
+              <a:defRPr>
+                <a:latin typeface="Arial"/>
+                <a:ea typeface="Arial"/>
+                <a:cs typeface="Arial"/>
+              </a:defRPr>
+            </a:defPPr>
+            <a:lvl1pPr>
+              <a:defRPr>
+                <a:latin typeface="Arial"/>
+                <a:ea typeface="Arial"/>
+                <a:cs typeface="Arial"/>
+              </a:defRPr>
+            </a:lvl1pPr>
+            <a:lvl2pPr>
+              <a:defRPr>
+                <a:latin typeface="Arial"/>
+                <a:ea typeface="Arial"/>
+                <a:cs typeface="Arial"/>
+              </a:defRPr>
+            </a:lvl2pPr>
+            <a:lvl3pPr>
+              <a:defRPr>
+                <a:latin typeface="Arial"/>
+                <a:ea typeface="Arial"/>
+                <a:cs typeface="Arial"/>
+              </a:defRPr>
+            </a:lvl3pPr>
+            <a:lvl4pPr>
+              <a:defRPr>
+                <a:latin typeface="Arial"/>
+                <a:ea typeface="Arial"/>
+                <a:cs typeface="Arial"/>
+              </a:defRPr>
+            </a:lvl4pPr>
+            <a:lvl5pPr>
+              <a:defRPr>
+                <a:latin typeface="Arial"/>
+                <a:ea typeface="Arial"/>
+                <a:cs typeface="Arial"/>
+              </a:defRPr>
+            </a:lvl5pPr>
+            <a:lvl6pPr>
+              <a:defRPr>
+                <a:latin typeface="Arial"/>
+                <a:ea typeface="Arial"/>
+                <a:cs typeface="Arial"/>
+              </a:defRPr>
+            </a:lvl6pPr>
+            <a:lvl7pPr>
+              <a:defRPr>
+                <a:latin typeface="Arial"/>
+                <a:ea typeface="Arial"/>
+                <a:cs typeface="Arial"/>
+              </a:defRPr>
+            </a:lvl7pPr>
+            <a:lvl8pPr>
+              <a:defRPr>
+                <a:latin typeface="Arial"/>
+                <a:ea typeface="Arial"/>
+                <a:cs typeface="Arial"/>
+              </a:defRPr>
+            </a:lvl8pPr>
+            <a:lvl9pPr>
+              <a:defRPr>
+                <a:latin typeface="Arial"/>
+                <a:ea typeface="Arial"/>
+                <a:cs typeface="Arial"/>
+              </a:defRPr>
+            </a:lvl9pPr>
+          </a:lstStyle>
           <a:p xmlns:a="http://schemas.openxmlformats.org/drawingml/2006/main">
             <a:pPr>
+              <a:buNone/>
               <a:defRPr sz="1575" b="0">
                 <a:solidFill>
                   <a:srgbClr val="111827"/>
@@ -7374,7 +11157,7 @@
     <p:bg>
       <p:bgPr>
         <a:solidFill xmlns:a="http://schemas.openxmlformats.org/drawingml/2006/main">
-          <a:srgbClr val="F9FAFB"/>
+          <a:srgbClr val="FFFFFF"/>
         </a:solidFill>
       </p:bgPr>
     </p:bg>
@@ -7418,9 +11201,81 @@
           <a:bodyPr xmlns:a="http://schemas.openxmlformats.org/drawingml/2006/main" lIns="0" tIns="0" rIns="0" bIns="0">
             <a:noAutofit/>
           </a:bodyPr>
-          <a:lstStyle xmlns:a="http://schemas.openxmlformats.org/drawingml/2006/main"/>
+          <a:lstStyle xmlns:a="http://schemas.openxmlformats.org/drawingml/2006/main">
+            <a:defPPr>
+              <a:defRPr>
+                <a:latin typeface="Arial"/>
+                <a:ea typeface="Arial"/>
+                <a:cs typeface="Arial"/>
+              </a:defRPr>
+            </a:defPPr>
+            <a:lvl1pPr>
+              <a:defRPr>
+                <a:latin typeface="Arial"/>
+                <a:ea typeface="Arial"/>
+                <a:cs typeface="Arial"/>
+              </a:defRPr>
+            </a:lvl1pPr>
+            <a:lvl2pPr>
+              <a:defRPr>
+                <a:latin typeface="Arial"/>
+                <a:ea typeface="Arial"/>
+                <a:cs typeface="Arial"/>
+              </a:defRPr>
+            </a:lvl2pPr>
+            <a:lvl3pPr>
+              <a:defRPr>
+                <a:latin typeface="Arial"/>
+                <a:ea typeface="Arial"/>
+                <a:cs typeface="Arial"/>
+              </a:defRPr>
+            </a:lvl3pPr>
+            <a:lvl4pPr>
+              <a:defRPr>
+                <a:latin typeface="Arial"/>
+                <a:ea typeface="Arial"/>
+                <a:cs typeface="Arial"/>
+              </a:defRPr>
+            </a:lvl4pPr>
+            <a:lvl5pPr>
+              <a:defRPr>
+                <a:latin typeface="Arial"/>
+                <a:ea typeface="Arial"/>
+                <a:cs typeface="Arial"/>
+              </a:defRPr>
+            </a:lvl5pPr>
+            <a:lvl6pPr>
+              <a:defRPr>
+                <a:latin typeface="Arial"/>
+                <a:ea typeface="Arial"/>
+                <a:cs typeface="Arial"/>
+              </a:defRPr>
+            </a:lvl6pPr>
+            <a:lvl7pPr>
+              <a:defRPr>
+                <a:latin typeface="Arial"/>
+                <a:ea typeface="Arial"/>
+                <a:cs typeface="Arial"/>
+              </a:defRPr>
+            </a:lvl7pPr>
+            <a:lvl8pPr>
+              <a:defRPr>
+                <a:latin typeface="Arial"/>
+                <a:ea typeface="Arial"/>
+                <a:cs typeface="Arial"/>
+              </a:defRPr>
+            </a:lvl8pPr>
+            <a:lvl9pPr>
+              <a:defRPr>
+                <a:latin typeface="Arial"/>
+                <a:ea typeface="Arial"/>
+                <a:cs typeface="Arial"/>
+              </a:defRPr>
+            </a:lvl9pPr>
+          </a:lstStyle>
           <a:p xmlns:a="http://schemas.openxmlformats.org/drawingml/2006/main">
             <a:pPr>
+              <a:buNone/>
               <a:defRPr sz="1050" b="0">
                 <a:solidFill>
                   <a:srgbClr val="6B7280"/>
@@ -7439,7 +11294,7 @@
                 <a:ea typeface="Arial"/>
                 <a:cs typeface="Arial"/>
               </a:rPr>
-              <a:t>E C O L L A T E R A L   /   C S C I  4 1 5 0  A 2</a:t>
+              <a:t>ECOllateral / CSCI 4150 A2</a:t>
             </a:r>
           </a:p>
         </p:txBody>
@@ -7505,28 +11360,100 @@
           <a:bodyPr xmlns:a="http://schemas.openxmlformats.org/drawingml/2006/main" lIns="0" tIns="0" rIns="0" bIns="0">
             <a:noAutofit/>
           </a:bodyPr>
-          <a:lstStyle xmlns:a="http://schemas.openxmlformats.org/drawingml/2006/main"/>
+          <a:lstStyle xmlns:a="http://schemas.openxmlformats.org/drawingml/2006/main">
+            <a:defPPr>
+              <a:defRPr sz="3150" b="1">
+                <a:latin typeface="Arial"/>
+                <a:ea typeface="Arial"/>
+                <a:cs typeface="Arial"/>
+              </a:defRPr>
+            </a:defPPr>
+            <a:lvl1pPr>
+              <a:defRPr sz="3150" b="1">
+                <a:latin typeface="Arial"/>
+                <a:ea typeface="Arial"/>
+                <a:cs typeface="Arial"/>
+              </a:defRPr>
+            </a:lvl1pPr>
+            <a:lvl2pPr>
+              <a:defRPr sz="3150" b="1">
+                <a:latin typeface="Arial"/>
+                <a:ea typeface="Arial"/>
+                <a:cs typeface="Arial"/>
+              </a:defRPr>
+            </a:lvl2pPr>
+            <a:lvl3pPr>
+              <a:defRPr sz="3150" b="1">
+                <a:latin typeface="Arial"/>
+                <a:ea typeface="Arial"/>
+                <a:cs typeface="Arial"/>
+              </a:defRPr>
+            </a:lvl3pPr>
+            <a:lvl4pPr>
+              <a:defRPr sz="3150" b="1">
+                <a:latin typeface="Arial"/>
+                <a:ea typeface="Arial"/>
+                <a:cs typeface="Arial"/>
+              </a:defRPr>
+            </a:lvl4pPr>
+            <a:lvl5pPr>
+              <a:defRPr sz="3150" b="1">
+                <a:latin typeface="Arial"/>
+                <a:ea typeface="Arial"/>
+                <a:cs typeface="Arial"/>
+              </a:defRPr>
+            </a:lvl5pPr>
+            <a:lvl6pPr>
+              <a:defRPr sz="3150" b="1">
+                <a:latin typeface="Arial"/>
+                <a:ea typeface="Arial"/>
+                <a:cs typeface="Arial"/>
+              </a:defRPr>
+            </a:lvl6pPr>
+            <a:lvl7pPr>
+              <a:defRPr sz="3150" b="1">
+                <a:latin typeface="Arial"/>
+                <a:ea typeface="Arial"/>
+                <a:cs typeface="Arial"/>
+              </a:defRPr>
+            </a:lvl7pPr>
+            <a:lvl8pPr>
+              <a:defRPr sz="3150" b="1">
+                <a:latin typeface="Arial"/>
+                <a:ea typeface="Arial"/>
+                <a:cs typeface="Arial"/>
+              </a:defRPr>
+            </a:lvl8pPr>
+            <a:lvl9pPr>
+              <a:defRPr sz="3150" b="1">
+                <a:latin typeface="Arial"/>
+                <a:ea typeface="Arial"/>
+                <a:cs typeface="Arial"/>
+              </a:defRPr>
+            </a:lvl9pPr>
+          </a:lstStyle>
           <a:p xmlns:a="http://schemas.openxmlformats.org/drawingml/2006/main">
             <a:pPr>
-              <a:defRPr sz="3225" b="0">
+              <a:buNone/>
+              <a:defRPr sz="3150" b="1">
                 <a:solidFill>
                   <a:srgbClr val="111827"/>
                 </a:solidFill>
-                <a:latin typeface="Georgia"/>
-                <a:ea typeface="Georgia"/>
-                <a:cs typeface="Georgia"/>
+                <a:latin typeface="Arial"/>
+                <a:ea typeface="Arial"/>
+                <a:cs typeface="Arial"/>
               </a:defRPr>
             </a:pPr>
             <a:r>
-              <a:rPr sz="3225" b="0">
+              <a:rPr sz="3150" b="1">
                 <a:solidFill>
                   <a:srgbClr val="111827"/>
                 </a:solidFill>
-                <a:latin typeface="Georgia"/>
-                <a:ea typeface="Georgia"/>
-                <a:cs typeface="Georgia"/>
+                <a:latin typeface="Arial"/>
+                <a:ea typeface="Arial"/>
+                <a:cs typeface="Arial"/>
               </a:rPr>
-              <a:t>EXPERIMENT E5: PREDICTION RANGES</a:t>
+              <a:t>E5: Prediction ranges</a:t>
             </a:r>
           </a:p>
         </p:txBody>
@@ -7562,9 +11489,81 @@
           <a:bodyPr xmlns:a="http://schemas.openxmlformats.org/drawingml/2006/main" lIns="0" tIns="0" rIns="0" bIns="0">
             <a:noAutofit/>
           </a:bodyPr>
-          <a:lstStyle xmlns:a="http://schemas.openxmlformats.org/drawingml/2006/main"/>
+          <a:lstStyle xmlns:a="http://schemas.openxmlformats.org/drawingml/2006/main">
+            <a:defPPr>
+              <a:defRPr>
+                <a:latin typeface="Arial"/>
+                <a:ea typeface="Arial"/>
+                <a:cs typeface="Arial"/>
+              </a:defRPr>
+            </a:defPPr>
+            <a:lvl1pPr>
+              <a:defRPr>
+                <a:latin typeface="Arial"/>
+                <a:ea typeface="Arial"/>
+                <a:cs typeface="Arial"/>
+              </a:defRPr>
+            </a:lvl1pPr>
+            <a:lvl2pPr>
+              <a:defRPr>
+                <a:latin typeface="Arial"/>
+                <a:ea typeface="Arial"/>
+                <a:cs typeface="Arial"/>
+              </a:defRPr>
+            </a:lvl2pPr>
+            <a:lvl3pPr>
+              <a:defRPr>
+                <a:latin typeface="Arial"/>
+                <a:ea typeface="Arial"/>
+                <a:cs typeface="Arial"/>
+              </a:defRPr>
+            </a:lvl3pPr>
+            <a:lvl4pPr>
+              <a:defRPr>
+                <a:latin typeface="Arial"/>
+                <a:ea typeface="Arial"/>
+                <a:cs typeface="Arial"/>
+              </a:defRPr>
+            </a:lvl4pPr>
+            <a:lvl5pPr>
+              <a:defRPr>
+                <a:latin typeface="Arial"/>
+                <a:ea typeface="Arial"/>
+                <a:cs typeface="Arial"/>
+              </a:defRPr>
+            </a:lvl5pPr>
+            <a:lvl6pPr>
+              <a:defRPr>
+                <a:latin typeface="Arial"/>
+                <a:ea typeface="Arial"/>
+                <a:cs typeface="Arial"/>
+              </a:defRPr>
+            </a:lvl6pPr>
+            <a:lvl7pPr>
+              <a:defRPr>
+                <a:latin typeface="Arial"/>
+                <a:ea typeface="Arial"/>
+                <a:cs typeface="Arial"/>
+              </a:defRPr>
+            </a:lvl7pPr>
+            <a:lvl8pPr>
+              <a:defRPr>
+                <a:latin typeface="Arial"/>
+                <a:ea typeface="Arial"/>
+                <a:cs typeface="Arial"/>
+              </a:defRPr>
+            </a:lvl8pPr>
+            <a:lvl9pPr>
+              <a:defRPr>
+                <a:latin typeface="Arial"/>
+                <a:ea typeface="Arial"/>
+                <a:cs typeface="Arial"/>
+              </a:defRPr>
+            </a:lvl9pPr>
+          </a:lstStyle>
           <a:p xmlns:a="http://schemas.openxmlformats.org/drawingml/2006/main">
             <a:pPr>
+              <a:buNone/>
               <a:defRPr sz="975" b="0">
                 <a:solidFill>
                   <a:srgbClr val="6B7280"/>
@@ -7619,9 +11618,81 @@
           <a:bodyPr xmlns:a="http://schemas.openxmlformats.org/drawingml/2006/main" lIns="0" tIns="0" rIns="0" bIns="0">
             <a:noAutofit/>
           </a:bodyPr>
-          <a:lstStyle xmlns:a="http://schemas.openxmlformats.org/drawingml/2006/main"/>
+          <a:lstStyle xmlns:a="http://schemas.openxmlformats.org/drawingml/2006/main">
+            <a:defPPr>
+              <a:defRPr>
+                <a:latin typeface="Arial"/>
+                <a:ea typeface="Arial"/>
+                <a:cs typeface="Arial"/>
+              </a:defRPr>
+            </a:defPPr>
+            <a:lvl1pPr>
+              <a:defRPr>
+                <a:latin typeface="Arial"/>
+                <a:ea typeface="Arial"/>
+                <a:cs typeface="Arial"/>
+              </a:defRPr>
+            </a:lvl1pPr>
+            <a:lvl2pPr>
+              <a:defRPr>
+                <a:latin typeface="Arial"/>
+                <a:ea typeface="Arial"/>
+                <a:cs typeface="Arial"/>
+              </a:defRPr>
+            </a:lvl2pPr>
+            <a:lvl3pPr>
+              <a:defRPr>
+                <a:latin typeface="Arial"/>
+                <a:ea typeface="Arial"/>
+                <a:cs typeface="Arial"/>
+              </a:defRPr>
+            </a:lvl3pPr>
+            <a:lvl4pPr>
+              <a:defRPr>
+                <a:latin typeface="Arial"/>
+                <a:ea typeface="Arial"/>
+                <a:cs typeface="Arial"/>
+              </a:defRPr>
+            </a:lvl4pPr>
+            <a:lvl5pPr>
+              <a:defRPr>
+                <a:latin typeface="Arial"/>
+                <a:ea typeface="Arial"/>
+                <a:cs typeface="Arial"/>
+              </a:defRPr>
+            </a:lvl5pPr>
+            <a:lvl6pPr>
+              <a:defRPr>
+                <a:latin typeface="Arial"/>
+                <a:ea typeface="Arial"/>
+                <a:cs typeface="Arial"/>
+              </a:defRPr>
+            </a:lvl6pPr>
+            <a:lvl7pPr>
+              <a:defRPr>
+                <a:latin typeface="Arial"/>
+                <a:ea typeface="Arial"/>
+                <a:cs typeface="Arial"/>
+              </a:defRPr>
+            </a:lvl7pPr>
+            <a:lvl8pPr>
+              <a:defRPr>
+                <a:latin typeface="Arial"/>
+                <a:ea typeface="Arial"/>
+                <a:cs typeface="Arial"/>
+              </a:defRPr>
+            </a:lvl8pPr>
+            <a:lvl9pPr>
+              <a:defRPr>
+                <a:latin typeface="Arial"/>
+                <a:ea typeface="Arial"/>
+                <a:cs typeface="Arial"/>
+              </a:defRPr>
+            </a:lvl9pPr>
+          </a:lstStyle>
           <a:p xmlns:a="http://schemas.openxmlformats.org/drawingml/2006/main">
             <a:pPr>
+              <a:buNone/>
               <a:defRPr sz="1050" b="0">
                 <a:solidFill>
                   <a:srgbClr val="6B7280"/>
@@ -7647,7 +11718,13 @@
       </p:sp>
       <p:graphicFrame>
         <p:nvGraphicFramePr>
-          <p:cNvPr id="19" name="Chart"/>
+          <p:cNvPr id="19" name="Chart">
+            <a:extLst xmlns:a="http://schemas.openxmlformats.org/drawingml/2006/main">
+              <a:ext uri="{FF2B5EF4-FFF2-40B4-BE49-F238E27FC236}">
+                <a16:creationId xmlns:a16="http://schemas.microsoft.com/office/drawing/2014/main" id="{8593A9E7-B014-434B-8532-1D750A14D2E9}"/>
+              </a:ext>
+            </a:extLst>
+          </p:cNvPr>
           <p:cNvGraphicFramePr/>
           <p:nvPr/>
         </p:nvGraphicFramePr>
@@ -7657,7 +11734,7 @@
         </p:xfrm>
         <a:graphic xmlns:a="http://schemas.openxmlformats.org/drawingml/2006/main">
           <a:graphicData uri="http://schemas.openxmlformats.org/drawingml/2006/chart">
-            <c:chart xmlns:r="http://schemas.openxmlformats.org/officeDocument/2006/relationships" xmlns:c="http://schemas.openxmlformats.org/drawingml/2006/chart" r:id="R86980e3acb5b4595"/>
+            <c:chart xmlns:r="http://schemas.openxmlformats.org/officeDocument/2006/relationships" xmlns:c="http://schemas.openxmlformats.org/drawingml/2006/chart" r:id="R1fc3405d976a4174"/>
           </a:graphicData>
         </a:graphic>
       </p:graphicFrame>
@@ -7692,10 +11769,82 @@
           <a:bodyPr xmlns:a="http://schemas.openxmlformats.org/drawingml/2006/main" lIns="0" tIns="0" rIns="0" bIns="0">
             <a:noAutofit/>
           </a:bodyPr>
-          <a:lstStyle xmlns:a="http://schemas.openxmlformats.org/drawingml/2006/main"/>
+          <a:lstStyle xmlns:a="http://schemas.openxmlformats.org/drawingml/2006/main">
+            <a:defPPr>
+              <a:defRPr sz="3150" b="1">
+                <a:latin typeface="Arial"/>
+                <a:ea typeface="Arial"/>
+                <a:cs typeface="Arial"/>
+              </a:defRPr>
+            </a:defPPr>
+            <a:lvl1pPr>
+              <a:defRPr sz="3150" b="1">
+                <a:latin typeface="Arial"/>
+                <a:ea typeface="Arial"/>
+                <a:cs typeface="Arial"/>
+              </a:defRPr>
+            </a:lvl1pPr>
+            <a:lvl2pPr>
+              <a:defRPr sz="3150" b="1">
+                <a:latin typeface="Arial"/>
+                <a:ea typeface="Arial"/>
+                <a:cs typeface="Arial"/>
+              </a:defRPr>
+            </a:lvl2pPr>
+            <a:lvl3pPr>
+              <a:defRPr sz="3150" b="1">
+                <a:latin typeface="Arial"/>
+                <a:ea typeface="Arial"/>
+                <a:cs typeface="Arial"/>
+              </a:defRPr>
+            </a:lvl3pPr>
+            <a:lvl4pPr>
+              <a:defRPr sz="3150" b="1">
+                <a:latin typeface="Arial"/>
+                <a:ea typeface="Arial"/>
+                <a:cs typeface="Arial"/>
+              </a:defRPr>
+            </a:lvl4pPr>
+            <a:lvl5pPr>
+              <a:defRPr sz="3150" b="1">
+                <a:latin typeface="Arial"/>
+                <a:ea typeface="Arial"/>
+                <a:cs typeface="Arial"/>
+              </a:defRPr>
+            </a:lvl5pPr>
+            <a:lvl6pPr>
+              <a:defRPr sz="3150" b="1">
+                <a:latin typeface="Arial"/>
+                <a:ea typeface="Arial"/>
+                <a:cs typeface="Arial"/>
+              </a:defRPr>
+            </a:lvl6pPr>
+            <a:lvl7pPr>
+              <a:defRPr sz="3150" b="1">
+                <a:latin typeface="Arial"/>
+                <a:ea typeface="Arial"/>
+                <a:cs typeface="Arial"/>
+              </a:defRPr>
+            </a:lvl7pPr>
+            <a:lvl8pPr>
+              <a:defRPr sz="3150" b="1">
+                <a:latin typeface="Arial"/>
+                <a:ea typeface="Arial"/>
+                <a:cs typeface="Arial"/>
+              </a:defRPr>
+            </a:lvl8pPr>
+            <a:lvl9pPr>
+              <a:defRPr sz="3150" b="1">
+                <a:latin typeface="Arial"/>
+                <a:ea typeface="Arial"/>
+                <a:cs typeface="Arial"/>
+              </a:defRPr>
+            </a:lvl9pPr>
+          </a:lstStyle>
           <a:p xmlns:a="http://schemas.openxmlformats.org/drawingml/2006/main">
             <a:pPr>
-              <a:defRPr sz="5475" b="0">
+              <a:buNone/>
+              <a:defRPr sz="3150" b="1">
                 <a:solidFill>
                   <a:srgbClr val="111827"/>
                 </a:solidFill>
@@ -7705,7 +11854,7 @@
               </a:defRPr>
             </a:pPr>
             <a:r>
-              <a:rPr sz="5475" b="0">
+              <a:rPr sz="3150" b="1">
                 <a:solidFill>
                   <a:srgbClr val="111827"/>
                 </a:solidFill>
@@ -7779,9 +11928,81 @@
           <a:bodyPr xmlns:a="http://schemas.openxmlformats.org/drawingml/2006/main" lIns="0" tIns="0" rIns="0" bIns="0">
             <a:noAutofit/>
           </a:bodyPr>
-          <a:lstStyle xmlns:a="http://schemas.openxmlformats.org/drawingml/2006/main"/>
+          <a:lstStyle xmlns:a="http://schemas.openxmlformats.org/drawingml/2006/main">
+            <a:defPPr>
+              <a:defRPr>
+                <a:latin typeface="Arial"/>
+                <a:ea typeface="Arial"/>
+                <a:cs typeface="Arial"/>
+              </a:defRPr>
+            </a:defPPr>
+            <a:lvl1pPr>
+              <a:defRPr>
+                <a:latin typeface="Arial"/>
+                <a:ea typeface="Arial"/>
+                <a:cs typeface="Arial"/>
+              </a:defRPr>
+            </a:lvl1pPr>
+            <a:lvl2pPr>
+              <a:defRPr>
+                <a:latin typeface="Arial"/>
+                <a:ea typeface="Arial"/>
+                <a:cs typeface="Arial"/>
+              </a:defRPr>
+            </a:lvl2pPr>
+            <a:lvl3pPr>
+              <a:defRPr>
+                <a:latin typeface="Arial"/>
+                <a:ea typeface="Arial"/>
+                <a:cs typeface="Arial"/>
+              </a:defRPr>
+            </a:lvl3pPr>
+            <a:lvl4pPr>
+              <a:defRPr>
+                <a:latin typeface="Arial"/>
+                <a:ea typeface="Arial"/>
+                <a:cs typeface="Arial"/>
+              </a:defRPr>
+            </a:lvl4pPr>
+            <a:lvl5pPr>
+              <a:defRPr>
+                <a:latin typeface="Arial"/>
+                <a:ea typeface="Arial"/>
+                <a:cs typeface="Arial"/>
+              </a:defRPr>
+            </a:lvl5pPr>
+            <a:lvl6pPr>
+              <a:defRPr>
+                <a:latin typeface="Arial"/>
+                <a:ea typeface="Arial"/>
+                <a:cs typeface="Arial"/>
+              </a:defRPr>
+            </a:lvl6pPr>
+            <a:lvl7pPr>
+              <a:defRPr>
+                <a:latin typeface="Arial"/>
+                <a:ea typeface="Arial"/>
+                <a:cs typeface="Arial"/>
+              </a:defRPr>
+            </a:lvl7pPr>
+            <a:lvl8pPr>
+              <a:defRPr>
+                <a:latin typeface="Arial"/>
+                <a:ea typeface="Arial"/>
+                <a:cs typeface="Arial"/>
+              </a:defRPr>
+            </a:lvl8pPr>
+            <a:lvl9pPr>
+              <a:defRPr>
+                <a:latin typeface="Arial"/>
+                <a:ea typeface="Arial"/>
+                <a:cs typeface="Arial"/>
+              </a:defRPr>
+            </a:lvl9pPr>
+          </a:lstStyle>
           <a:p xmlns:a="http://schemas.openxmlformats.org/drawingml/2006/main">
             <a:pPr>
+              <a:buNone/>
               <a:defRPr sz="1725" b="0">
                 <a:solidFill>
                   <a:srgbClr val="6B7280"/>
@@ -7800,7 +12021,7 @@
                 <a:ea typeface="Arial"/>
                 <a:cs typeface="Arial"/>
               </a:rPr>
-              <a:t>RELIABILITY ISSUE: below the 90% goal</a:t>
+              <a:t>Coverage below the 90% goal</a:t>
             </a:r>
           </a:p>
         </p:txBody>
@@ -7836,9 +12057,81 @@
           <a:bodyPr xmlns:a="http://schemas.openxmlformats.org/drawingml/2006/main" lIns="0" tIns="0" rIns="0" bIns="0">
             <a:noAutofit/>
           </a:bodyPr>
-          <a:lstStyle xmlns:a="http://schemas.openxmlformats.org/drawingml/2006/main"/>
+          <a:lstStyle xmlns:a="http://schemas.openxmlformats.org/drawingml/2006/main">
+            <a:defPPr>
+              <a:defRPr>
+                <a:latin typeface="Arial"/>
+                <a:ea typeface="Arial"/>
+                <a:cs typeface="Arial"/>
+              </a:defRPr>
+            </a:defPPr>
+            <a:lvl1pPr>
+              <a:defRPr>
+                <a:latin typeface="Arial"/>
+                <a:ea typeface="Arial"/>
+                <a:cs typeface="Arial"/>
+              </a:defRPr>
+            </a:lvl1pPr>
+            <a:lvl2pPr>
+              <a:defRPr>
+                <a:latin typeface="Arial"/>
+                <a:ea typeface="Arial"/>
+                <a:cs typeface="Arial"/>
+              </a:defRPr>
+            </a:lvl2pPr>
+            <a:lvl3pPr>
+              <a:defRPr>
+                <a:latin typeface="Arial"/>
+                <a:ea typeface="Arial"/>
+                <a:cs typeface="Arial"/>
+              </a:defRPr>
+            </a:lvl3pPr>
+            <a:lvl4pPr>
+              <a:defRPr>
+                <a:latin typeface="Arial"/>
+                <a:ea typeface="Arial"/>
+                <a:cs typeface="Arial"/>
+              </a:defRPr>
+            </a:lvl4pPr>
+            <a:lvl5pPr>
+              <a:defRPr>
+                <a:latin typeface="Arial"/>
+                <a:ea typeface="Arial"/>
+                <a:cs typeface="Arial"/>
+              </a:defRPr>
+            </a:lvl5pPr>
+            <a:lvl6pPr>
+              <a:defRPr>
+                <a:latin typeface="Arial"/>
+                <a:ea typeface="Arial"/>
+                <a:cs typeface="Arial"/>
+              </a:defRPr>
+            </a:lvl6pPr>
+            <a:lvl7pPr>
+              <a:defRPr>
+                <a:latin typeface="Arial"/>
+                <a:ea typeface="Arial"/>
+                <a:cs typeface="Arial"/>
+              </a:defRPr>
+            </a:lvl7pPr>
+            <a:lvl8pPr>
+              <a:defRPr>
+                <a:latin typeface="Arial"/>
+                <a:ea typeface="Arial"/>
+                <a:cs typeface="Arial"/>
+              </a:defRPr>
+            </a:lvl8pPr>
+            <a:lvl9pPr>
+              <a:defRPr>
+                <a:latin typeface="Arial"/>
+                <a:ea typeface="Arial"/>
+                <a:cs typeface="Arial"/>
+              </a:defRPr>
+            </a:lvl9pPr>
+          </a:lstStyle>
           <a:p xmlns:a="http://schemas.openxmlformats.org/drawingml/2006/main">
             <a:pPr>
+              <a:buNone/>
               <a:defRPr sz="1950" b="0">
                 <a:solidFill>
                   <a:srgbClr val="111827"/>
@@ -7862,6 +12155,7 @@
           </a:p>
           <a:p xmlns:a="http://schemas.openxmlformats.org/drawingml/2006/main">
             <a:pPr>
+              <a:buNone/>
               <a:defRPr sz="1950" b="0">
                 <a:solidFill>
                   <a:srgbClr val="111827"/>
@@ -7880,7 +12174,7 @@
                 <a:ea typeface="Arial"/>
                 <a:cs typeface="Arial"/>
               </a:rPr>
-              <a:t>A high score cannot promise a useful range.</a:t>
+              <a:t>R2 measures fit. Coverage tests the range.</a:t>
             </a:r>
           </a:p>
         </p:txBody>
@@ -7946,9 +12240,81 @@
           <a:bodyPr xmlns:a="http://schemas.openxmlformats.org/drawingml/2006/main" lIns="0" tIns="0" rIns="0" bIns="0">
             <a:noAutofit/>
           </a:bodyPr>
-          <a:lstStyle xmlns:a="http://schemas.openxmlformats.org/drawingml/2006/main"/>
+          <a:lstStyle xmlns:a="http://schemas.openxmlformats.org/drawingml/2006/main">
+            <a:defPPr>
+              <a:defRPr>
+                <a:latin typeface="Arial"/>
+                <a:ea typeface="Arial"/>
+                <a:cs typeface="Arial"/>
+              </a:defRPr>
+            </a:defPPr>
+            <a:lvl1pPr>
+              <a:defRPr>
+                <a:latin typeface="Arial"/>
+                <a:ea typeface="Arial"/>
+                <a:cs typeface="Arial"/>
+              </a:defRPr>
+            </a:lvl1pPr>
+            <a:lvl2pPr>
+              <a:defRPr>
+                <a:latin typeface="Arial"/>
+                <a:ea typeface="Arial"/>
+                <a:cs typeface="Arial"/>
+              </a:defRPr>
+            </a:lvl2pPr>
+            <a:lvl3pPr>
+              <a:defRPr>
+                <a:latin typeface="Arial"/>
+                <a:ea typeface="Arial"/>
+                <a:cs typeface="Arial"/>
+              </a:defRPr>
+            </a:lvl3pPr>
+            <a:lvl4pPr>
+              <a:defRPr>
+                <a:latin typeface="Arial"/>
+                <a:ea typeface="Arial"/>
+                <a:cs typeface="Arial"/>
+              </a:defRPr>
+            </a:lvl4pPr>
+            <a:lvl5pPr>
+              <a:defRPr>
+                <a:latin typeface="Arial"/>
+                <a:ea typeface="Arial"/>
+                <a:cs typeface="Arial"/>
+              </a:defRPr>
+            </a:lvl5pPr>
+            <a:lvl6pPr>
+              <a:defRPr>
+                <a:latin typeface="Arial"/>
+                <a:ea typeface="Arial"/>
+                <a:cs typeface="Arial"/>
+              </a:defRPr>
+            </a:lvl6pPr>
+            <a:lvl7pPr>
+              <a:defRPr>
+                <a:latin typeface="Arial"/>
+                <a:ea typeface="Arial"/>
+                <a:cs typeface="Arial"/>
+              </a:defRPr>
+            </a:lvl7pPr>
+            <a:lvl8pPr>
+              <a:defRPr>
+                <a:latin typeface="Arial"/>
+                <a:ea typeface="Arial"/>
+                <a:cs typeface="Arial"/>
+              </a:defRPr>
+            </a:lvl8pPr>
+            <a:lvl9pPr>
+              <a:defRPr>
+                <a:latin typeface="Arial"/>
+                <a:ea typeface="Arial"/>
+                <a:cs typeface="Arial"/>
+              </a:defRPr>
+            </a:lvl9pPr>
+          </a:lstStyle>
           <a:p xmlns:a="http://schemas.openxmlformats.org/drawingml/2006/main">
             <a:pPr>
+              <a:buNone/>
               <a:defRPr sz="1800" b="0">
                 <a:solidFill>
                   <a:srgbClr val="111827"/>
@@ -8003,9 +12369,81 @@
           <a:bodyPr xmlns:a="http://schemas.openxmlformats.org/drawingml/2006/main" lIns="0" tIns="0" rIns="0" bIns="0">
             <a:noAutofit/>
           </a:bodyPr>
-          <a:lstStyle xmlns:a="http://schemas.openxmlformats.org/drawingml/2006/main"/>
+          <a:lstStyle xmlns:a="http://schemas.openxmlformats.org/drawingml/2006/main">
+            <a:defPPr>
+              <a:defRPr>
+                <a:latin typeface="Arial"/>
+                <a:ea typeface="Arial"/>
+                <a:cs typeface="Arial"/>
+              </a:defRPr>
+            </a:defPPr>
+            <a:lvl1pPr>
+              <a:defRPr>
+                <a:latin typeface="Arial"/>
+                <a:ea typeface="Arial"/>
+                <a:cs typeface="Arial"/>
+              </a:defRPr>
+            </a:lvl1pPr>
+            <a:lvl2pPr>
+              <a:defRPr>
+                <a:latin typeface="Arial"/>
+                <a:ea typeface="Arial"/>
+                <a:cs typeface="Arial"/>
+              </a:defRPr>
+            </a:lvl2pPr>
+            <a:lvl3pPr>
+              <a:defRPr>
+                <a:latin typeface="Arial"/>
+                <a:ea typeface="Arial"/>
+                <a:cs typeface="Arial"/>
+              </a:defRPr>
+            </a:lvl3pPr>
+            <a:lvl4pPr>
+              <a:defRPr>
+                <a:latin typeface="Arial"/>
+                <a:ea typeface="Arial"/>
+                <a:cs typeface="Arial"/>
+              </a:defRPr>
+            </a:lvl4pPr>
+            <a:lvl5pPr>
+              <a:defRPr>
+                <a:latin typeface="Arial"/>
+                <a:ea typeface="Arial"/>
+                <a:cs typeface="Arial"/>
+              </a:defRPr>
+            </a:lvl5pPr>
+            <a:lvl6pPr>
+              <a:defRPr>
+                <a:latin typeface="Arial"/>
+                <a:ea typeface="Arial"/>
+                <a:cs typeface="Arial"/>
+              </a:defRPr>
+            </a:lvl6pPr>
+            <a:lvl7pPr>
+              <a:defRPr>
+                <a:latin typeface="Arial"/>
+                <a:ea typeface="Arial"/>
+                <a:cs typeface="Arial"/>
+              </a:defRPr>
+            </a:lvl7pPr>
+            <a:lvl8pPr>
+              <a:defRPr>
+                <a:latin typeface="Arial"/>
+                <a:ea typeface="Arial"/>
+                <a:cs typeface="Arial"/>
+              </a:defRPr>
+            </a:lvl8pPr>
+            <a:lvl9pPr>
+              <a:defRPr>
+                <a:latin typeface="Arial"/>
+                <a:ea typeface="Arial"/>
+                <a:cs typeface="Arial"/>
+              </a:defRPr>
+            </a:lvl9pPr>
+          </a:lstStyle>
           <a:p xmlns:a="http://schemas.openxmlformats.org/drawingml/2006/main">
             <a:pPr>
+              <a:buNone/>
               <a:defRPr sz="1425" b="0">
                 <a:solidFill>
                   <a:srgbClr val="6B7280"/>
@@ -8045,7 +12483,7 @@
     <p:bg>
       <p:bgPr>
         <a:solidFill xmlns:a="http://schemas.openxmlformats.org/drawingml/2006/main">
-          <a:srgbClr val="F9FAFB"/>
+          <a:srgbClr val="FFFFFF"/>
         </a:solidFill>
       </p:bgPr>
     </p:bg>
@@ -8089,9 +12527,81 @@
           <a:bodyPr xmlns:a="http://schemas.openxmlformats.org/drawingml/2006/main" lIns="0" tIns="0" rIns="0" bIns="0">
             <a:noAutofit/>
           </a:bodyPr>
-          <a:lstStyle xmlns:a="http://schemas.openxmlformats.org/drawingml/2006/main"/>
+          <a:lstStyle xmlns:a="http://schemas.openxmlformats.org/drawingml/2006/main">
+            <a:defPPr>
+              <a:defRPr>
+                <a:latin typeface="Arial"/>
+                <a:ea typeface="Arial"/>
+                <a:cs typeface="Arial"/>
+              </a:defRPr>
+            </a:defPPr>
+            <a:lvl1pPr>
+              <a:defRPr>
+                <a:latin typeface="Arial"/>
+                <a:ea typeface="Arial"/>
+                <a:cs typeface="Arial"/>
+              </a:defRPr>
+            </a:lvl1pPr>
+            <a:lvl2pPr>
+              <a:defRPr>
+                <a:latin typeface="Arial"/>
+                <a:ea typeface="Arial"/>
+                <a:cs typeface="Arial"/>
+              </a:defRPr>
+            </a:lvl2pPr>
+            <a:lvl3pPr>
+              <a:defRPr>
+                <a:latin typeface="Arial"/>
+                <a:ea typeface="Arial"/>
+                <a:cs typeface="Arial"/>
+              </a:defRPr>
+            </a:lvl3pPr>
+            <a:lvl4pPr>
+              <a:defRPr>
+                <a:latin typeface="Arial"/>
+                <a:ea typeface="Arial"/>
+                <a:cs typeface="Arial"/>
+              </a:defRPr>
+            </a:lvl4pPr>
+            <a:lvl5pPr>
+              <a:defRPr>
+                <a:latin typeface="Arial"/>
+                <a:ea typeface="Arial"/>
+                <a:cs typeface="Arial"/>
+              </a:defRPr>
+            </a:lvl5pPr>
+            <a:lvl6pPr>
+              <a:defRPr>
+                <a:latin typeface="Arial"/>
+                <a:ea typeface="Arial"/>
+                <a:cs typeface="Arial"/>
+              </a:defRPr>
+            </a:lvl6pPr>
+            <a:lvl7pPr>
+              <a:defRPr>
+                <a:latin typeface="Arial"/>
+                <a:ea typeface="Arial"/>
+                <a:cs typeface="Arial"/>
+              </a:defRPr>
+            </a:lvl7pPr>
+            <a:lvl8pPr>
+              <a:defRPr>
+                <a:latin typeface="Arial"/>
+                <a:ea typeface="Arial"/>
+                <a:cs typeface="Arial"/>
+              </a:defRPr>
+            </a:lvl8pPr>
+            <a:lvl9pPr>
+              <a:defRPr>
+                <a:latin typeface="Arial"/>
+                <a:ea typeface="Arial"/>
+                <a:cs typeface="Arial"/>
+              </a:defRPr>
+            </a:lvl9pPr>
+          </a:lstStyle>
           <a:p xmlns:a="http://schemas.openxmlformats.org/drawingml/2006/main">
             <a:pPr>
+              <a:buNone/>
               <a:defRPr sz="1050" b="0">
                 <a:solidFill>
                   <a:srgbClr val="6B7280"/>
@@ -8110,7 +12620,7 @@
                 <a:ea typeface="Arial"/>
                 <a:cs typeface="Arial"/>
               </a:rPr>
-              <a:t>E C O L L A T E R A L   /   C S C I  4 1 5 0  A 2</a:t>
+              <a:t>ECOllateral / CSCI 4150 A2</a:t>
             </a:r>
           </a:p>
         </p:txBody>
@@ -8176,28 +12686,100 @@
           <a:bodyPr xmlns:a="http://schemas.openxmlformats.org/drawingml/2006/main" lIns="0" tIns="0" rIns="0" bIns="0">
             <a:noAutofit/>
           </a:bodyPr>
-          <a:lstStyle xmlns:a="http://schemas.openxmlformats.org/drawingml/2006/main"/>
+          <a:lstStyle xmlns:a="http://schemas.openxmlformats.org/drawingml/2006/main">
+            <a:defPPr>
+              <a:defRPr sz="3150" b="1">
+                <a:latin typeface="Arial"/>
+                <a:ea typeface="Arial"/>
+                <a:cs typeface="Arial"/>
+              </a:defRPr>
+            </a:defPPr>
+            <a:lvl1pPr>
+              <a:defRPr sz="3150" b="1">
+                <a:latin typeface="Arial"/>
+                <a:ea typeface="Arial"/>
+                <a:cs typeface="Arial"/>
+              </a:defRPr>
+            </a:lvl1pPr>
+            <a:lvl2pPr>
+              <a:defRPr sz="3150" b="1">
+                <a:latin typeface="Arial"/>
+                <a:ea typeface="Arial"/>
+                <a:cs typeface="Arial"/>
+              </a:defRPr>
+            </a:lvl2pPr>
+            <a:lvl3pPr>
+              <a:defRPr sz="3150" b="1">
+                <a:latin typeface="Arial"/>
+                <a:ea typeface="Arial"/>
+                <a:cs typeface="Arial"/>
+              </a:defRPr>
+            </a:lvl3pPr>
+            <a:lvl4pPr>
+              <a:defRPr sz="3150" b="1">
+                <a:latin typeface="Arial"/>
+                <a:ea typeface="Arial"/>
+                <a:cs typeface="Arial"/>
+              </a:defRPr>
+            </a:lvl4pPr>
+            <a:lvl5pPr>
+              <a:defRPr sz="3150" b="1">
+                <a:latin typeface="Arial"/>
+                <a:ea typeface="Arial"/>
+                <a:cs typeface="Arial"/>
+              </a:defRPr>
+            </a:lvl5pPr>
+            <a:lvl6pPr>
+              <a:defRPr sz="3150" b="1">
+                <a:latin typeface="Arial"/>
+                <a:ea typeface="Arial"/>
+                <a:cs typeface="Arial"/>
+              </a:defRPr>
+            </a:lvl6pPr>
+            <a:lvl7pPr>
+              <a:defRPr sz="3150" b="1">
+                <a:latin typeface="Arial"/>
+                <a:ea typeface="Arial"/>
+                <a:cs typeface="Arial"/>
+              </a:defRPr>
+            </a:lvl7pPr>
+            <a:lvl8pPr>
+              <a:defRPr sz="3150" b="1">
+                <a:latin typeface="Arial"/>
+                <a:ea typeface="Arial"/>
+                <a:cs typeface="Arial"/>
+              </a:defRPr>
+            </a:lvl8pPr>
+            <a:lvl9pPr>
+              <a:defRPr sz="3150" b="1">
+                <a:latin typeface="Arial"/>
+                <a:ea typeface="Arial"/>
+                <a:cs typeface="Arial"/>
+              </a:defRPr>
+            </a:lvl9pPr>
+          </a:lstStyle>
           <a:p xmlns:a="http://schemas.openxmlformats.org/drawingml/2006/main">
             <a:pPr>
-              <a:defRPr sz="3225" b="0">
+              <a:buNone/>
+              <a:defRPr sz="3150" b="1">
                 <a:solidFill>
                   <a:srgbClr val="111827"/>
                 </a:solidFill>
-                <a:latin typeface="Georgia"/>
-                <a:ea typeface="Georgia"/>
-                <a:cs typeface="Georgia"/>
+                <a:latin typeface="Arial"/>
+                <a:ea typeface="Arial"/>
+                <a:cs typeface="Arial"/>
               </a:defRPr>
             </a:pPr>
             <a:r>
-              <a:rPr sz="3225" b="0">
+              <a:rPr sz="3150" b="1">
                 <a:solidFill>
                   <a:srgbClr val="111827"/>
                 </a:solidFill>
-                <a:latin typeface="Georgia"/>
-                <a:ea typeface="Georgia"/>
-                <a:cs typeface="Georgia"/>
+                <a:latin typeface="Arial"/>
+                <a:ea typeface="Arial"/>
+                <a:cs typeface="Arial"/>
               </a:rPr>
-              <a:t>DECISIONS &amp; NEXT QUESTION</a:t>
+              <a:t>Decisions and next question</a:t>
             </a:r>
           </a:p>
         </p:txBody>
@@ -8233,9 +12815,81 @@
           <a:bodyPr xmlns:a="http://schemas.openxmlformats.org/drawingml/2006/main" lIns="0" tIns="0" rIns="0" bIns="0">
             <a:noAutofit/>
           </a:bodyPr>
-          <a:lstStyle xmlns:a="http://schemas.openxmlformats.org/drawingml/2006/main"/>
+          <a:lstStyle xmlns:a="http://schemas.openxmlformats.org/drawingml/2006/main">
+            <a:defPPr>
+              <a:defRPr>
+                <a:latin typeface="Arial"/>
+                <a:ea typeface="Arial"/>
+                <a:cs typeface="Arial"/>
+              </a:defRPr>
+            </a:defPPr>
+            <a:lvl1pPr>
+              <a:defRPr>
+                <a:latin typeface="Arial"/>
+                <a:ea typeface="Arial"/>
+                <a:cs typeface="Arial"/>
+              </a:defRPr>
+            </a:lvl1pPr>
+            <a:lvl2pPr>
+              <a:defRPr>
+                <a:latin typeface="Arial"/>
+                <a:ea typeface="Arial"/>
+                <a:cs typeface="Arial"/>
+              </a:defRPr>
+            </a:lvl2pPr>
+            <a:lvl3pPr>
+              <a:defRPr>
+                <a:latin typeface="Arial"/>
+                <a:ea typeface="Arial"/>
+                <a:cs typeface="Arial"/>
+              </a:defRPr>
+            </a:lvl3pPr>
+            <a:lvl4pPr>
+              <a:defRPr>
+                <a:latin typeface="Arial"/>
+                <a:ea typeface="Arial"/>
+                <a:cs typeface="Arial"/>
+              </a:defRPr>
+            </a:lvl4pPr>
+            <a:lvl5pPr>
+              <a:defRPr>
+                <a:latin typeface="Arial"/>
+                <a:ea typeface="Arial"/>
+                <a:cs typeface="Arial"/>
+              </a:defRPr>
+            </a:lvl5pPr>
+            <a:lvl6pPr>
+              <a:defRPr>
+                <a:latin typeface="Arial"/>
+                <a:ea typeface="Arial"/>
+                <a:cs typeface="Arial"/>
+              </a:defRPr>
+            </a:lvl6pPr>
+            <a:lvl7pPr>
+              <a:defRPr>
+                <a:latin typeface="Arial"/>
+                <a:ea typeface="Arial"/>
+                <a:cs typeface="Arial"/>
+              </a:defRPr>
+            </a:lvl7pPr>
+            <a:lvl8pPr>
+              <a:defRPr>
+                <a:latin typeface="Arial"/>
+                <a:ea typeface="Arial"/>
+                <a:cs typeface="Arial"/>
+              </a:defRPr>
+            </a:lvl8pPr>
+            <a:lvl9pPr>
+              <a:defRPr>
+                <a:latin typeface="Arial"/>
+                <a:ea typeface="Arial"/>
+                <a:cs typeface="Arial"/>
+              </a:defRPr>
+            </a:lvl9pPr>
+          </a:lstStyle>
           <a:p xmlns:a="http://schemas.openxmlformats.org/drawingml/2006/main">
             <a:pPr>
+              <a:buNone/>
               <a:defRPr sz="975" b="0">
                 <a:solidFill>
                   <a:srgbClr val="6B7280"/>
@@ -8254,7 +12908,7 @@
                 <a:ea typeface="Arial"/>
                 <a:cs typeface="Arial"/>
               </a:rPr>
-              <a:t>Decisions: E1-E5 | Proposed responsibilities: Shaun / Troy / Scott | Presentation day pending</a:t>
+              <a:t>Evidence: E1-E5. Assigned roles: Shaun, Troy, Scott.</a:t>
             </a:r>
           </a:p>
         </p:txBody>
@@ -8290,9 +12944,81 @@
           <a:bodyPr xmlns:a="http://schemas.openxmlformats.org/drawingml/2006/main" lIns="0" tIns="0" rIns="0" bIns="0">
             <a:noAutofit/>
           </a:bodyPr>
-          <a:lstStyle xmlns:a="http://schemas.openxmlformats.org/drawingml/2006/main"/>
+          <a:lstStyle xmlns:a="http://schemas.openxmlformats.org/drawingml/2006/main">
+            <a:defPPr>
+              <a:defRPr>
+                <a:latin typeface="Arial"/>
+                <a:ea typeface="Arial"/>
+                <a:cs typeface="Arial"/>
+              </a:defRPr>
+            </a:defPPr>
+            <a:lvl1pPr>
+              <a:defRPr>
+                <a:latin typeface="Arial"/>
+                <a:ea typeface="Arial"/>
+                <a:cs typeface="Arial"/>
+              </a:defRPr>
+            </a:lvl1pPr>
+            <a:lvl2pPr>
+              <a:defRPr>
+                <a:latin typeface="Arial"/>
+                <a:ea typeface="Arial"/>
+                <a:cs typeface="Arial"/>
+              </a:defRPr>
+            </a:lvl2pPr>
+            <a:lvl3pPr>
+              <a:defRPr>
+                <a:latin typeface="Arial"/>
+                <a:ea typeface="Arial"/>
+                <a:cs typeface="Arial"/>
+              </a:defRPr>
+            </a:lvl3pPr>
+            <a:lvl4pPr>
+              <a:defRPr>
+                <a:latin typeface="Arial"/>
+                <a:ea typeface="Arial"/>
+                <a:cs typeface="Arial"/>
+              </a:defRPr>
+            </a:lvl4pPr>
+            <a:lvl5pPr>
+              <a:defRPr>
+                <a:latin typeface="Arial"/>
+                <a:ea typeface="Arial"/>
+                <a:cs typeface="Arial"/>
+              </a:defRPr>
+            </a:lvl5pPr>
+            <a:lvl6pPr>
+              <a:defRPr>
+                <a:latin typeface="Arial"/>
+                <a:ea typeface="Arial"/>
+                <a:cs typeface="Arial"/>
+              </a:defRPr>
+            </a:lvl6pPr>
+            <a:lvl7pPr>
+              <a:defRPr>
+                <a:latin typeface="Arial"/>
+                <a:ea typeface="Arial"/>
+                <a:cs typeface="Arial"/>
+              </a:defRPr>
+            </a:lvl7pPr>
+            <a:lvl8pPr>
+              <a:defRPr>
+                <a:latin typeface="Arial"/>
+                <a:ea typeface="Arial"/>
+                <a:cs typeface="Arial"/>
+              </a:defRPr>
+            </a:lvl8pPr>
+            <a:lvl9pPr>
+              <a:defRPr>
+                <a:latin typeface="Arial"/>
+                <a:ea typeface="Arial"/>
+                <a:cs typeface="Arial"/>
+              </a:defRPr>
+            </a:lvl9pPr>
+          </a:lstStyle>
           <a:p xmlns:a="http://schemas.openxmlformats.org/drawingml/2006/main">
             <a:pPr>
+              <a:buNone/>
               <a:defRPr sz="1050" b="0">
                 <a:solidFill>
                   <a:srgbClr val="6B7280"/>
@@ -8347,9 +13073,81 @@
           <a:bodyPr xmlns:a="http://schemas.openxmlformats.org/drawingml/2006/main" lIns="0" tIns="0" rIns="0" bIns="0">
             <a:noAutofit/>
           </a:bodyPr>
-          <a:lstStyle xmlns:a="http://schemas.openxmlformats.org/drawingml/2006/main"/>
+          <a:lstStyle xmlns:a="http://schemas.openxmlformats.org/drawingml/2006/main">
+            <a:defPPr>
+              <a:defRPr>
+                <a:latin typeface="Arial"/>
+                <a:ea typeface="Arial"/>
+                <a:cs typeface="Arial"/>
+              </a:defRPr>
+            </a:defPPr>
+            <a:lvl1pPr>
+              <a:defRPr>
+                <a:latin typeface="Arial"/>
+                <a:ea typeface="Arial"/>
+                <a:cs typeface="Arial"/>
+              </a:defRPr>
+            </a:lvl1pPr>
+            <a:lvl2pPr>
+              <a:defRPr>
+                <a:latin typeface="Arial"/>
+                <a:ea typeface="Arial"/>
+                <a:cs typeface="Arial"/>
+              </a:defRPr>
+            </a:lvl2pPr>
+            <a:lvl3pPr>
+              <a:defRPr>
+                <a:latin typeface="Arial"/>
+                <a:ea typeface="Arial"/>
+                <a:cs typeface="Arial"/>
+              </a:defRPr>
+            </a:lvl3pPr>
+            <a:lvl4pPr>
+              <a:defRPr>
+                <a:latin typeface="Arial"/>
+                <a:ea typeface="Arial"/>
+                <a:cs typeface="Arial"/>
+              </a:defRPr>
+            </a:lvl4pPr>
+            <a:lvl5pPr>
+              <a:defRPr>
+                <a:latin typeface="Arial"/>
+                <a:ea typeface="Arial"/>
+                <a:cs typeface="Arial"/>
+              </a:defRPr>
+            </a:lvl5pPr>
+            <a:lvl6pPr>
+              <a:defRPr>
+                <a:latin typeface="Arial"/>
+                <a:ea typeface="Arial"/>
+                <a:cs typeface="Arial"/>
+              </a:defRPr>
+            </a:lvl6pPr>
+            <a:lvl7pPr>
+              <a:defRPr>
+                <a:latin typeface="Arial"/>
+                <a:ea typeface="Arial"/>
+                <a:cs typeface="Arial"/>
+              </a:defRPr>
+            </a:lvl7pPr>
+            <a:lvl8pPr>
+              <a:defRPr>
+                <a:latin typeface="Arial"/>
+                <a:ea typeface="Arial"/>
+                <a:cs typeface="Arial"/>
+              </a:defRPr>
+            </a:lvl8pPr>
+            <a:lvl9pPr>
+              <a:defRPr>
+                <a:latin typeface="Arial"/>
+                <a:ea typeface="Arial"/>
+                <a:cs typeface="Arial"/>
+              </a:defRPr>
+            </a:lvl9pPr>
+          </a:lstStyle>
           <a:p xmlns:a="http://schemas.openxmlformats.org/drawingml/2006/main">
             <a:pPr>
+              <a:buNone/>
               <a:defRPr sz="1275" b="0">
                 <a:solidFill>
                   <a:srgbClr val="6B7280"/>
@@ -8368,7 +13166,7 @@
                 <a:ea typeface="Arial"/>
                 <a:cs typeface="Arial"/>
               </a:rPr>
-              <a:t>KEEP (ADOPT)</a:t>
+              <a:t>Adopt</a:t>
             </a:r>
           </a:p>
         </p:txBody>
@@ -8434,9 +13232,81 @@
           <a:bodyPr xmlns:a="http://schemas.openxmlformats.org/drawingml/2006/main" lIns="0" tIns="0" rIns="0" bIns="0">
             <a:noAutofit/>
           </a:bodyPr>
-          <a:lstStyle xmlns:a="http://schemas.openxmlformats.org/drawingml/2006/main"/>
+          <a:lstStyle xmlns:a="http://schemas.openxmlformats.org/drawingml/2006/main">
+            <a:defPPr>
+              <a:defRPr>
+                <a:latin typeface="Arial"/>
+                <a:ea typeface="Arial"/>
+                <a:cs typeface="Arial"/>
+              </a:defRPr>
+            </a:defPPr>
+            <a:lvl1pPr>
+              <a:defRPr>
+                <a:latin typeface="Arial"/>
+                <a:ea typeface="Arial"/>
+                <a:cs typeface="Arial"/>
+              </a:defRPr>
+            </a:lvl1pPr>
+            <a:lvl2pPr>
+              <a:defRPr>
+                <a:latin typeface="Arial"/>
+                <a:ea typeface="Arial"/>
+                <a:cs typeface="Arial"/>
+              </a:defRPr>
+            </a:lvl2pPr>
+            <a:lvl3pPr>
+              <a:defRPr>
+                <a:latin typeface="Arial"/>
+                <a:ea typeface="Arial"/>
+                <a:cs typeface="Arial"/>
+              </a:defRPr>
+            </a:lvl3pPr>
+            <a:lvl4pPr>
+              <a:defRPr>
+                <a:latin typeface="Arial"/>
+                <a:ea typeface="Arial"/>
+                <a:cs typeface="Arial"/>
+              </a:defRPr>
+            </a:lvl4pPr>
+            <a:lvl5pPr>
+              <a:defRPr>
+                <a:latin typeface="Arial"/>
+                <a:ea typeface="Arial"/>
+                <a:cs typeface="Arial"/>
+              </a:defRPr>
+            </a:lvl5pPr>
+            <a:lvl6pPr>
+              <a:defRPr>
+                <a:latin typeface="Arial"/>
+                <a:ea typeface="Arial"/>
+                <a:cs typeface="Arial"/>
+              </a:defRPr>
+            </a:lvl6pPr>
+            <a:lvl7pPr>
+              <a:defRPr>
+                <a:latin typeface="Arial"/>
+                <a:ea typeface="Arial"/>
+                <a:cs typeface="Arial"/>
+              </a:defRPr>
+            </a:lvl7pPr>
+            <a:lvl8pPr>
+              <a:defRPr>
+                <a:latin typeface="Arial"/>
+                <a:ea typeface="Arial"/>
+                <a:cs typeface="Arial"/>
+              </a:defRPr>
+            </a:lvl8pPr>
+            <a:lvl9pPr>
+              <a:defRPr>
+                <a:latin typeface="Arial"/>
+                <a:ea typeface="Arial"/>
+                <a:cs typeface="Arial"/>
+              </a:defRPr>
+            </a:lvl9pPr>
+          </a:lstStyle>
           <a:p xmlns:a="http://schemas.openxmlformats.org/drawingml/2006/main">
             <a:pPr>
+              <a:buNone/>
               <a:defRPr sz="1650" b="0">
                 <a:solidFill>
                   <a:srgbClr val="111827"/>
@@ -8460,6 +13330,7 @@
           </a:p>
           <a:p xmlns:a="http://schemas.openxmlformats.org/drawingml/2006/main">
             <a:pPr>
+              <a:buNone/>
               <a:defRPr sz="1650" b="0">
                 <a:solidFill>
                   <a:srgbClr val="111827"/>
@@ -8514,9 +13385,81 @@
           <a:bodyPr xmlns:a="http://schemas.openxmlformats.org/drawingml/2006/main" lIns="0" tIns="0" rIns="0" bIns="0">
             <a:noAutofit/>
           </a:bodyPr>
-          <a:lstStyle xmlns:a="http://schemas.openxmlformats.org/drawingml/2006/main"/>
+          <a:lstStyle xmlns:a="http://schemas.openxmlformats.org/drawingml/2006/main">
+            <a:defPPr>
+              <a:defRPr>
+                <a:latin typeface="Arial"/>
+                <a:ea typeface="Arial"/>
+                <a:cs typeface="Arial"/>
+              </a:defRPr>
+            </a:defPPr>
+            <a:lvl1pPr>
+              <a:defRPr>
+                <a:latin typeface="Arial"/>
+                <a:ea typeface="Arial"/>
+                <a:cs typeface="Arial"/>
+              </a:defRPr>
+            </a:lvl1pPr>
+            <a:lvl2pPr>
+              <a:defRPr>
+                <a:latin typeface="Arial"/>
+                <a:ea typeface="Arial"/>
+                <a:cs typeface="Arial"/>
+              </a:defRPr>
+            </a:lvl2pPr>
+            <a:lvl3pPr>
+              <a:defRPr>
+                <a:latin typeface="Arial"/>
+                <a:ea typeface="Arial"/>
+                <a:cs typeface="Arial"/>
+              </a:defRPr>
+            </a:lvl3pPr>
+            <a:lvl4pPr>
+              <a:defRPr>
+                <a:latin typeface="Arial"/>
+                <a:ea typeface="Arial"/>
+                <a:cs typeface="Arial"/>
+              </a:defRPr>
+            </a:lvl4pPr>
+            <a:lvl5pPr>
+              <a:defRPr>
+                <a:latin typeface="Arial"/>
+                <a:ea typeface="Arial"/>
+                <a:cs typeface="Arial"/>
+              </a:defRPr>
+            </a:lvl5pPr>
+            <a:lvl6pPr>
+              <a:defRPr>
+                <a:latin typeface="Arial"/>
+                <a:ea typeface="Arial"/>
+                <a:cs typeface="Arial"/>
+              </a:defRPr>
+            </a:lvl6pPr>
+            <a:lvl7pPr>
+              <a:defRPr>
+                <a:latin typeface="Arial"/>
+                <a:ea typeface="Arial"/>
+                <a:cs typeface="Arial"/>
+              </a:defRPr>
+            </a:lvl7pPr>
+            <a:lvl8pPr>
+              <a:defRPr>
+                <a:latin typeface="Arial"/>
+                <a:ea typeface="Arial"/>
+                <a:cs typeface="Arial"/>
+              </a:defRPr>
+            </a:lvl8pPr>
+            <a:lvl9pPr>
+              <a:defRPr>
+                <a:latin typeface="Arial"/>
+                <a:ea typeface="Arial"/>
+                <a:cs typeface="Arial"/>
+              </a:defRPr>
+            </a:lvl9pPr>
+          </a:lstStyle>
           <a:p xmlns:a="http://schemas.openxmlformats.org/drawingml/2006/main">
             <a:pPr>
+              <a:buNone/>
               <a:defRPr sz="1275" b="0">
                 <a:solidFill>
                   <a:srgbClr val="6B7280"/>
@@ -8535,7 +13478,7 @@
                 <a:ea typeface="Arial"/>
                 <a:cs typeface="Arial"/>
               </a:rPr>
-              <a:t>CHANGE (MODIFY)</a:t>
+              <a:t>Modify</a:t>
             </a:r>
           </a:p>
         </p:txBody>
@@ -8601,9 +13544,81 @@
           <a:bodyPr xmlns:a="http://schemas.openxmlformats.org/drawingml/2006/main" lIns="0" tIns="0" rIns="0" bIns="0">
             <a:noAutofit/>
           </a:bodyPr>
-          <a:lstStyle xmlns:a="http://schemas.openxmlformats.org/drawingml/2006/main"/>
+          <a:lstStyle xmlns:a="http://schemas.openxmlformats.org/drawingml/2006/main">
+            <a:defPPr>
+              <a:defRPr>
+                <a:latin typeface="Arial"/>
+                <a:ea typeface="Arial"/>
+                <a:cs typeface="Arial"/>
+              </a:defRPr>
+            </a:defPPr>
+            <a:lvl1pPr>
+              <a:defRPr>
+                <a:latin typeface="Arial"/>
+                <a:ea typeface="Arial"/>
+                <a:cs typeface="Arial"/>
+              </a:defRPr>
+            </a:lvl1pPr>
+            <a:lvl2pPr>
+              <a:defRPr>
+                <a:latin typeface="Arial"/>
+                <a:ea typeface="Arial"/>
+                <a:cs typeface="Arial"/>
+              </a:defRPr>
+            </a:lvl2pPr>
+            <a:lvl3pPr>
+              <a:defRPr>
+                <a:latin typeface="Arial"/>
+                <a:ea typeface="Arial"/>
+                <a:cs typeface="Arial"/>
+              </a:defRPr>
+            </a:lvl3pPr>
+            <a:lvl4pPr>
+              <a:defRPr>
+                <a:latin typeface="Arial"/>
+                <a:ea typeface="Arial"/>
+                <a:cs typeface="Arial"/>
+              </a:defRPr>
+            </a:lvl4pPr>
+            <a:lvl5pPr>
+              <a:defRPr>
+                <a:latin typeface="Arial"/>
+                <a:ea typeface="Arial"/>
+                <a:cs typeface="Arial"/>
+              </a:defRPr>
+            </a:lvl5pPr>
+            <a:lvl6pPr>
+              <a:defRPr>
+                <a:latin typeface="Arial"/>
+                <a:ea typeface="Arial"/>
+                <a:cs typeface="Arial"/>
+              </a:defRPr>
+            </a:lvl6pPr>
+            <a:lvl7pPr>
+              <a:defRPr>
+                <a:latin typeface="Arial"/>
+                <a:ea typeface="Arial"/>
+                <a:cs typeface="Arial"/>
+              </a:defRPr>
+            </a:lvl7pPr>
+            <a:lvl8pPr>
+              <a:defRPr>
+                <a:latin typeface="Arial"/>
+                <a:ea typeface="Arial"/>
+                <a:cs typeface="Arial"/>
+              </a:defRPr>
+            </a:lvl8pPr>
+            <a:lvl9pPr>
+              <a:defRPr>
+                <a:latin typeface="Arial"/>
+                <a:ea typeface="Arial"/>
+                <a:cs typeface="Arial"/>
+              </a:defRPr>
+            </a:lvl9pPr>
+          </a:lstStyle>
           <a:p xmlns:a="http://schemas.openxmlformats.org/drawingml/2006/main">
             <a:pPr>
+              <a:buNone/>
               <a:defRPr sz="1650" b="0">
                 <a:solidFill>
                   <a:srgbClr val="111827"/>
@@ -8627,6 +13642,7 @@
           </a:p>
           <a:p xmlns:a="http://schemas.openxmlformats.org/drawingml/2006/main">
             <a:pPr>
+              <a:buNone/>
               <a:defRPr sz="1650" b="0">
                 <a:solidFill>
                   <a:srgbClr val="111827"/>
@@ -8681,9 +13697,81 @@
           <a:bodyPr xmlns:a="http://schemas.openxmlformats.org/drawingml/2006/main" lIns="0" tIns="0" rIns="0" bIns="0">
             <a:noAutofit/>
           </a:bodyPr>
-          <a:lstStyle xmlns:a="http://schemas.openxmlformats.org/drawingml/2006/main"/>
+          <a:lstStyle xmlns:a="http://schemas.openxmlformats.org/drawingml/2006/main">
+            <a:defPPr>
+              <a:defRPr>
+                <a:latin typeface="Arial"/>
+                <a:ea typeface="Arial"/>
+                <a:cs typeface="Arial"/>
+              </a:defRPr>
+            </a:defPPr>
+            <a:lvl1pPr>
+              <a:defRPr>
+                <a:latin typeface="Arial"/>
+                <a:ea typeface="Arial"/>
+                <a:cs typeface="Arial"/>
+              </a:defRPr>
+            </a:lvl1pPr>
+            <a:lvl2pPr>
+              <a:defRPr>
+                <a:latin typeface="Arial"/>
+                <a:ea typeface="Arial"/>
+                <a:cs typeface="Arial"/>
+              </a:defRPr>
+            </a:lvl2pPr>
+            <a:lvl3pPr>
+              <a:defRPr>
+                <a:latin typeface="Arial"/>
+                <a:ea typeface="Arial"/>
+                <a:cs typeface="Arial"/>
+              </a:defRPr>
+            </a:lvl3pPr>
+            <a:lvl4pPr>
+              <a:defRPr>
+                <a:latin typeface="Arial"/>
+                <a:ea typeface="Arial"/>
+                <a:cs typeface="Arial"/>
+              </a:defRPr>
+            </a:lvl4pPr>
+            <a:lvl5pPr>
+              <a:defRPr>
+                <a:latin typeface="Arial"/>
+                <a:ea typeface="Arial"/>
+                <a:cs typeface="Arial"/>
+              </a:defRPr>
+            </a:lvl5pPr>
+            <a:lvl6pPr>
+              <a:defRPr>
+                <a:latin typeface="Arial"/>
+                <a:ea typeface="Arial"/>
+                <a:cs typeface="Arial"/>
+              </a:defRPr>
+            </a:lvl6pPr>
+            <a:lvl7pPr>
+              <a:defRPr>
+                <a:latin typeface="Arial"/>
+                <a:ea typeface="Arial"/>
+                <a:cs typeface="Arial"/>
+              </a:defRPr>
+            </a:lvl7pPr>
+            <a:lvl8pPr>
+              <a:defRPr>
+                <a:latin typeface="Arial"/>
+                <a:ea typeface="Arial"/>
+                <a:cs typeface="Arial"/>
+              </a:defRPr>
+            </a:lvl8pPr>
+            <a:lvl9pPr>
+              <a:defRPr>
+                <a:latin typeface="Arial"/>
+                <a:ea typeface="Arial"/>
+                <a:cs typeface="Arial"/>
+              </a:defRPr>
+            </a:lvl9pPr>
+          </a:lstStyle>
           <a:p xmlns:a="http://schemas.openxmlformats.org/drawingml/2006/main">
             <a:pPr>
+              <a:buNone/>
               <a:defRPr sz="1275" b="0">
                 <a:solidFill>
                   <a:srgbClr val="6B7280"/>
@@ -8702,7 +13790,7 @@
                 <a:ea typeface="Arial"/>
                 <a:cs typeface="Arial"/>
               </a:rPr>
-              <a:t>DO NOT USE (REJECT)</a:t>
+              <a:t>Reject</a:t>
             </a:r>
           </a:p>
         </p:txBody>
@@ -8768,9 +13856,81 @@
           <a:bodyPr xmlns:a="http://schemas.openxmlformats.org/drawingml/2006/main" lIns="0" tIns="0" rIns="0" bIns="0">
             <a:noAutofit/>
           </a:bodyPr>
-          <a:lstStyle xmlns:a="http://schemas.openxmlformats.org/drawingml/2006/main"/>
+          <a:lstStyle xmlns:a="http://schemas.openxmlformats.org/drawingml/2006/main">
+            <a:defPPr>
+              <a:defRPr>
+                <a:latin typeface="Arial"/>
+                <a:ea typeface="Arial"/>
+                <a:cs typeface="Arial"/>
+              </a:defRPr>
+            </a:defPPr>
+            <a:lvl1pPr>
+              <a:defRPr>
+                <a:latin typeface="Arial"/>
+                <a:ea typeface="Arial"/>
+                <a:cs typeface="Arial"/>
+              </a:defRPr>
+            </a:lvl1pPr>
+            <a:lvl2pPr>
+              <a:defRPr>
+                <a:latin typeface="Arial"/>
+                <a:ea typeface="Arial"/>
+                <a:cs typeface="Arial"/>
+              </a:defRPr>
+            </a:lvl2pPr>
+            <a:lvl3pPr>
+              <a:defRPr>
+                <a:latin typeface="Arial"/>
+                <a:ea typeface="Arial"/>
+                <a:cs typeface="Arial"/>
+              </a:defRPr>
+            </a:lvl3pPr>
+            <a:lvl4pPr>
+              <a:defRPr>
+                <a:latin typeface="Arial"/>
+                <a:ea typeface="Arial"/>
+                <a:cs typeface="Arial"/>
+              </a:defRPr>
+            </a:lvl4pPr>
+            <a:lvl5pPr>
+              <a:defRPr>
+                <a:latin typeface="Arial"/>
+                <a:ea typeface="Arial"/>
+                <a:cs typeface="Arial"/>
+              </a:defRPr>
+            </a:lvl5pPr>
+            <a:lvl6pPr>
+              <a:defRPr>
+                <a:latin typeface="Arial"/>
+                <a:ea typeface="Arial"/>
+                <a:cs typeface="Arial"/>
+              </a:defRPr>
+            </a:lvl6pPr>
+            <a:lvl7pPr>
+              <a:defRPr>
+                <a:latin typeface="Arial"/>
+                <a:ea typeface="Arial"/>
+                <a:cs typeface="Arial"/>
+              </a:defRPr>
+            </a:lvl7pPr>
+            <a:lvl8pPr>
+              <a:defRPr>
+                <a:latin typeface="Arial"/>
+                <a:ea typeface="Arial"/>
+                <a:cs typeface="Arial"/>
+              </a:defRPr>
+            </a:lvl8pPr>
+            <a:lvl9pPr>
+              <a:defRPr>
+                <a:latin typeface="Arial"/>
+                <a:ea typeface="Arial"/>
+                <a:cs typeface="Arial"/>
+              </a:defRPr>
+            </a:lvl9pPr>
+          </a:lstStyle>
           <a:p xmlns:a="http://schemas.openxmlformats.org/drawingml/2006/main">
             <a:pPr>
+              <a:buNone/>
               <a:defRPr sz="1650" b="0">
                 <a:solidFill>
                   <a:srgbClr val="111827"/>
@@ -8794,6 +13954,7 @@
           </a:p>
           <a:p xmlns:a="http://schemas.openxmlformats.org/drawingml/2006/main">
             <a:pPr>
+              <a:buNone/>
               <a:defRPr sz="1650" b="0">
                 <a:solidFill>
                   <a:srgbClr val="111827"/>
@@ -8848,9 +14009,81 @@
           <a:bodyPr xmlns:a="http://schemas.openxmlformats.org/drawingml/2006/main" lIns="0" tIns="0" rIns="0" bIns="0">
             <a:noAutofit/>
           </a:bodyPr>
-          <a:lstStyle xmlns:a="http://schemas.openxmlformats.org/drawingml/2006/main"/>
+          <a:lstStyle xmlns:a="http://schemas.openxmlformats.org/drawingml/2006/main">
+            <a:defPPr>
+              <a:defRPr>
+                <a:latin typeface="Arial"/>
+                <a:ea typeface="Arial"/>
+                <a:cs typeface="Arial"/>
+              </a:defRPr>
+            </a:defPPr>
+            <a:lvl1pPr>
+              <a:defRPr>
+                <a:latin typeface="Arial"/>
+                <a:ea typeface="Arial"/>
+                <a:cs typeface="Arial"/>
+              </a:defRPr>
+            </a:lvl1pPr>
+            <a:lvl2pPr>
+              <a:defRPr>
+                <a:latin typeface="Arial"/>
+                <a:ea typeface="Arial"/>
+                <a:cs typeface="Arial"/>
+              </a:defRPr>
+            </a:lvl2pPr>
+            <a:lvl3pPr>
+              <a:defRPr>
+                <a:latin typeface="Arial"/>
+                <a:ea typeface="Arial"/>
+                <a:cs typeface="Arial"/>
+              </a:defRPr>
+            </a:lvl3pPr>
+            <a:lvl4pPr>
+              <a:defRPr>
+                <a:latin typeface="Arial"/>
+                <a:ea typeface="Arial"/>
+                <a:cs typeface="Arial"/>
+              </a:defRPr>
+            </a:lvl4pPr>
+            <a:lvl5pPr>
+              <a:defRPr>
+                <a:latin typeface="Arial"/>
+                <a:ea typeface="Arial"/>
+                <a:cs typeface="Arial"/>
+              </a:defRPr>
+            </a:lvl5pPr>
+            <a:lvl6pPr>
+              <a:defRPr>
+                <a:latin typeface="Arial"/>
+                <a:ea typeface="Arial"/>
+                <a:cs typeface="Arial"/>
+              </a:defRPr>
+            </a:lvl6pPr>
+            <a:lvl7pPr>
+              <a:defRPr>
+                <a:latin typeface="Arial"/>
+                <a:ea typeface="Arial"/>
+                <a:cs typeface="Arial"/>
+              </a:defRPr>
+            </a:lvl7pPr>
+            <a:lvl8pPr>
+              <a:defRPr>
+                <a:latin typeface="Arial"/>
+                <a:ea typeface="Arial"/>
+                <a:cs typeface="Arial"/>
+              </a:defRPr>
+            </a:lvl8pPr>
+            <a:lvl9pPr>
+              <a:defRPr>
+                <a:latin typeface="Arial"/>
+                <a:ea typeface="Arial"/>
+                <a:cs typeface="Arial"/>
+              </a:defRPr>
+            </a:lvl9pPr>
+          </a:lstStyle>
           <a:p xmlns:a="http://schemas.openxmlformats.org/drawingml/2006/main">
             <a:pPr>
+              <a:buNone/>
               <a:defRPr sz="1275" b="0">
                 <a:solidFill>
                   <a:srgbClr val="6B7280"/>
@@ -8869,7 +14102,7 @@
                 <a:ea typeface="Arial"/>
                 <a:cs typeface="Arial"/>
               </a:rPr>
-              <a:t>WAIT (DEFER)</a:t>
+              <a:t>Defer</a:t>
             </a:r>
           </a:p>
         </p:txBody>
@@ -8935,9 +14168,81 @@
           <a:bodyPr xmlns:a="http://schemas.openxmlformats.org/drawingml/2006/main" lIns="0" tIns="0" rIns="0" bIns="0">
             <a:noAutofit/>
           </a:bodyPr>
-          <a:lstStyle xmlns:a="http://schemas.openxmlformats.org/drawingml/2006/main"/>
+          <a:lstStyle xmlns:a="http://schemas.openxmlformats.org/drawingml/2006/main">
+            <a:defPPr>
+              <a:defRPr>
+                <a:latin typeface="Arial"/>
+                <a:ea typeface="Arial"/>
+                <a:cs typeface="Arial"/>
+              </a:defRPr>
+            </a:defPPr>
+            <a:lvl1pPr>
+              <a:defRPr>
+                <a:latin typeface="Arial"/>
+                <a:ea typeface="Arial"/>
+                <a:cs typeface="Arial"/>
+              </a:defRPr>
+            </a:lvl1pPr>
+            <a:lvl2pPr>
+              <a:defRPr>
+                <a:latin typeface="Arial"/>
+                <a:ea typeface="Arial"/>
+                <a:cs typeface="Arial"/>
+              </a:defRPr>
+            </a:lvl2pPr>
+            <a:lvl3pPr>
+              <a:defRPr>
+                <a:latin typeface="Arial"/>
+                <a:ea typeface="Arial"/>
+                <a:cs typeface="Arial"/>
+              </a:defRPr>
+            </a:lvl3pPr>
+            <a:lvl4pPr>
+              <a:defRPr>
+                <a:latin typeface="Arial"/>
+                <a:ea typeface="Arial"/>
+                <a:cs typeface="Arial"/>
+              </a:defRPr>
+            </a:lvl4pPr>
+            <a:lvl5pPr>
+              <a:defRPr>
+                <a:latin typeface="Arial"/>
+                <a:ea typeface="Arial"/>
+                <a:cs typeface="Arial"/>
+              </a:defRPr>
+            </a:lvl5pPr>
+            <a:lvl6pPr>
+              <a:defRPr>
+                <a:latin typeface="Arial"/>
+                <a:ea typeface="Arial"/>
+                <a:cs typeface="Arial"/>
+              </a:defRPr>
+            </a:lvl6pPr>
+            <a:lvl7pPr>
+              <a:defRPr>
+                <a:latin typeface="Arial"/>
+                <a:ea typeface="Arial"/>
+                <a:cs typeface="Arial"/>
+              </a:defRPr>
+            </a:lvl7pPr>
+            <a:lvl8pPr>
+              <a:defRPr>
+                <a:latin typeface="Arial"/>
+                <a:ea typeface="Arial"/>
+                <a:cs typeface="Arial"/>
+              </a:defRPr>
+            </a:lvl8pPr>
+            <a:lvl9pPr>
+              <a:defRPr>
+                <a:latin typeface="Arial"/>
+                <a:ea typeface="Arial"/>
+                <a:cs typeface="Arial"/>
+              </a:defRPr>
+            </a:lvl9pPr>
+          </a:lstStyle>
           <a:p xmlns:a="http://schemas.openxmlformats.org/drawingml/2006/main">
             <a:pPr>
+              <a:buNone/>
               <a:defRPr sz="1650" b="0">
                 <a:solidFill>
                   <a:srgbClr val="111827"/>
@@ -8992,9 +14297,81 @@
           <a:bodyPr xmlns:a="http://schemas.openxmlformats.org/drawingml/2006/main" lIns="0" tIns="0" rIns="0" bIns="0">
             <a:noAutofit/>
           </a:bodyPr>
-          <a:lstStyle xmlns:a="http://schemas.openxmlformats.org/drawingml/2006/main"/>
+          <a:lstStyle xmlns:a="http://schemas.openxmlformats.org/drawingml/2006/main">
+            <a:defPPr>
+              <a:defRPr>
+                <a:latin typeface="Arial"/>
+                <a:ea typeface="Arial"/>
+                <a:cs typeface="Arial"/>
+              </a:defRPr>
+            </a:defPPr>
+            <a:lvl1pPr>
+              <a:defRPr>
+                <a:latin typeface="Arial"/>
+                <a:ea typeface="Arial"/>
+                <a:cs typeface="Arial"/>
+              </a:defRPr>
+            </a:lvl1pPr>
+            <a:lvl2pPr>
+              <a:defRPr>
+                <a:latin typeface="Arial"/>
+                <a:ea typeface="Arial"/>
+                <a:cs typeface="Arial"/>
+              </a:defRPr>
+            </a:lvl2pPr>
+            <a:lvl3pPr>
+              <a:defRPr>
+                <a:latin typeface="Arial"/>
+                <a:ea typeface="Arial"/>
+                <a:cs typeface="Arial"/>
+              </a:defRPr>
+            </a:lvl3pPr>
+            <a:lvl4pPr>
+              <a:defRPr>
+                <a:latin typeface="Arial"/>
+                <a:ea typeface="Arial"/>
+                <a:cs typeface="Arial"/>
+              </a:defRPr>
+            </a:lvl4pPr>
+            <a:lvl5pPr>
+              <a:defRPr>
+                <a:latin typeface="Arial"/>
+                <a:ea typeface="Arial"/>
+                <a:cs typeface="Arial"/>
+              </a:defRPr>
+            </a:lvl5pPr>
+            <a:lvl6pPr>
+              <a:defRPr>
+                <a:latin typeface="Arial"/>
+                <a:ea typeface="Arial"/>
+                <a:cs typeface="Arial"/>
+              </a:defRPr>
+            </a:lvl6pPr>
+            <a:lvl7pPr>
+              <a:defRPr>
+                <a:latin typeface="Arial"/>
+                <a:ea typeface="Arial"/>
+                <a:cs typeface="Arial"/>
+              </a:defRPr>
+            </a:lvl7pPr>
+            <a:lvl8pPr>
+              <a:defRPr>
+                <a:latin typeface="Arial"/>
+                <a:ea typeface="Arial"/>
+                <a:cs typeface="Arial"/>
+              </a:defRPr>
+            </a:lvl8pPr>
+            <a:lvl9pPr>
+              <a:defRPr>
+                <a:latin typeface="Arial"/>
+                <a:ea typeface="Arial"/>
+                <a:cs typeface="Arial"/>
+              </a:defRPr>
+            </a:lvl9pPr>
+          </a:lstStyle>
           <a:p xmlns:a="http://schemas.openxmlformats.org/drawingml/2006/main">
             <a:pPr>
+              <a:buNone/>
               <a:defRPr sz="1800" b="0">
                 <a:solidFill>
                   <a:srgbClr val="111827"/>
@@ -9049,9 +14426,81 @@
           <a:bodyPr xmlns:a="http://schemas.openxmlformats.org/drawingml/2006/main" lIns="0" tIns="0" rIns="0" bIns="0">
             <a:noAutofit/>
           </a:bodyPr>
-          <a:lstStyle xmlns:a="http://schemas.openxmlformats.org/drawingml/2006/main"/>
+          <a:lstStyle xmlns:a="http://schemas.openxmlformats.org/drawingml/2006/main">
+            <a:defPPr>
+              <a:defRPr>
+                <a:latin typeface="Arial"/>
+                <a:ea typeface="Arial"/>
+                <a:cs typeface="Arial"/>
+              </a:defRPr>
+            </a:defPPr>
+            <a:lvl1pPr>
+              <a:defRPr>
+                <a:latin typeface="Arial"/>
+                <a:ea typeface="Arial"/>
+                <a:cs typeface="Arial"/>
+              </a:defRPr>
+            </a:lvl1pPr>
+            <a:lvl2pPr>
+              <a:defRPr>
+                <a:latin typeface="Arial"/>
+                <a:ea typeface="Arial"/>
+                <a:cs typeface="Arial"/>
+              </a:defRPr>
+            </a:lvl2pPr>
+            <a:lvl3pPr>
+              <a:defRPr>
+                <a:latin typeface="Arial"/>
+                <a:ea typeface="Arial"/>
+                <a:cs typeface="Arial"/>
+              </a:defRPr>
+            </a:lvl3pPr>
+            <a:lvl4pPr>
+              <a:defRPr>
+                <a:latin typeface="Arial"/>
+                <a:ea typeface="Arial"/>
+                <a:cs typeface="Arial"/>
+              </a:defRPr>
+            </a:lvl4pPr>
+            <a:lvl5pPr>
+              <a:defRPr>
+                <a:latin typeface="Arial"/>
+                <a:ea typeface="Arial"/>
+                <a:cs typeface="Arial"/>
+              </a:defRPr>
+            </a:lvl5pPr>
+            <a:lvl6pPr>
+              <a:defRPr>
+                <a:latin typeface="Arial"/>
+                <a:ea typeface="Arial"/>
+                <a:cs typeface="Arial"/>
+              </a:defRPr>
+            </a:lvl6pPr>
+            <a:lvl7pPr>
+              <a:defRPr>
+                <a:latin typeface="Arial"/>
+                <a:ea typeface="Arial"/>
+                <a:cs typeface="Arial"/>
+              </a:defRPr>
+            </a:lvl7pPr>
+            <a:lvl8pPr>
+              <a:defRPr>
+                <a:latin typeface="Arial"/>
+                <a:ea typeface="Arial"/>
+                <a:cs typeface="Arial"/>
+              </a:defRPr>
+            </a:lvl8pPr>
+            <a:lvl9pPr>
+              <a:defRPr>
+                <a:latin typeface="Arial"/>
+                <a:ea typeface="Arial"/>
+                <a:cs typeface="Arial"/>
+              </a:defRPr>
+            </a:lvl9pPr>
+          </a:lstStyle>
           <a:p xmlns:a="http://schemas.openxmlformats.org/drawingml/2006/main">
             <a:pPr>
+              <a:buNone/>
               <a:defRPr sz="1275" b="0">
                 <a:solidFill>
                   <a:srgbClr val="6B7280"/>
@@ -9075,6 +14524,7 @@
           </a:p>
           <a:p xmlns:a="http://schemas.openxmlformats.org/drawingml/2006/main">
             <a:pPr>
+              <a:buNone/>
               <a:defRPr sz="1275" b="0">
                 <a:solidFill>
                   <a:srgbClr val="6B7280"/>
@@ -9098,6 +14548,7 @@
           </a:p>
           <a:p xmlns:a="http://schemas.openxmlformats.org/drawingml/2006/main">
             <a:pPr>
+              <a:buNone/>
               <a:defRPr sz="1275" b="0">
                 <a:solidFill>
                   <a:srgbClr val="6B7280"/>

--- a/docs/a2/review-slides-simplified.pptx
+++ b/docs/a2/review-slides-simplified.pptx
@@ -2,18 +2,18 @@
 <file path=ppt/presentation.xml><?xml version="1.0" encoding="utf-8"?>
 <p:presentation xmlns:p="http://schemas.openxmlformats.org/presentationml/2006/main">
   <p:sldMasterIdLst>
-    <p:sldMasterId xmlns:r="http://schemas.openxmlformats.org/officeDocument/2006/relationships" id="2147483648" r:id="R66ad39ae78404312"/>
+    <p:sldMasterId xmlns:r="http://schemas.openxmlformats.org/officeDocument/2006/relationships" id="2147483648" r:id="R539233bcbc9d4aea"/>
   </p:sldMasterIdLst>
   <p:notesMasterIdLst>
-    <p:notesMasterId xmlns:r="http://schemas.openxmlformats.org/officeDocument/2006/relationships" r:id="R79ba2b42aac84a41"/>
+    <p:notesMasterId xmlns:r="http://schemas.openxmlformats.org/officeDocument/2006/relationships" r:id="R228caf06a9504cde"/>
   </p:notesMasterIdLst>
   <p:sldIdLst>
-    <p:sldId xmlns:r="http://schemas.openxmlformats.org/officeDocument/2006/relationships" id="256" r:id="R088a165417c0478c"/>
-    <p:sldId xmlns:r="http://schemas.openxmlformats.org/officeDocument/2006/relationships" id="257" r:id="R292639d2542747ec"/>
-    <p:sldId xmlns:r="http://schemas.openxmlformats.org/officeDocument/2006/relationships" id="258" r:id="R2402ff76b36d4cbd"/>
-    <p:sldId xmlns:r="http://schemas.openxmlformats.org/officeDocument/2006/relationships" id="259" r:id="Ra87606e89edc431b"/>
-    <p:sldId xmlns:r="http://schemas.openxmlformats.org/officeDocument/2006/relationships" id="260" r:id="R946e4983c95f474a"/>
-    <p:sldId xmlns:r="http://schemas.openxmlformats.org/officeDocument/2006/relationships" id="261" r:id="Rffd038b6caa34d2a"/>
+    <p:sldId xmlns:r="http://schemas.openxmlformats.org/officeDocument/2006/relationships" id="256" r:id="R50cbe7f12d464241"/>
+    <p:sldId xmlns:r="http://schemas.openxmlformats.org/officeDocument/2006/relationships" id="257" r:id="Rea7c1eac02f448b7"/>
+    <p:sldId xmlns:r="http://schemas.openxmlformats.org/officeDocument/2006/relationships" id="258" r:id="R1880096fe1f543f9"/>
+    <p:sldId xmlns:r="http://schemas.openxmlformats.org/officeDocument/2006/relationships" id="259" r:id="R25b956174a224ec3"/>
+    <p:sldId xmlns:r="http://schemas.openxmlformats.org/officeDocument/2006/relationships" id="260" r:id="R657290c31d14482b"/>
+    <p:sldId xmlns:r="http://schemas.openxmlformats.org/officeDocument/2006/relationships" id="261" r:id="Re4f35d773e8a4ec8"/>
   </p:sldIdLst>
   <p:sldSz cx="12192000" cy="6858000"/>
   <p:notesSz cx="6858000" cy="9144000"/>
@@ -540,6 +540,11 @@
               <a:t>Sources: src/models/regression.py; src/rules/thermodynamic.py; src/grounding/store.py; docs/a2/evidence/constraint-failure-cases.json; retrieval-cases.json.</a:t>
             </a:r>
           </a:p>
+          <a:p xmlns:a="http://schemas.openxmlformats.org/drawingml/2006/main">
+            <a:r>
+              <a:t>Semantic representations and inspectable checks: see docs/a2/source/dossier.md and evidence/constraint-failure-cases.json, evidence/retrieval-cases.json. Six features: facility_mw, dry_bulb_c, wet_bulb_c, historical_streamflow_mgd, pdsi, month. Cooling method selects the model; location filters permits.</a:t>
+            </a:r>
+          </a:p>
         </p:txBody>
       </p:sp>
       <p:sp>
@@ -695,6 +700,11 @@
               <a:t>Sources: docs/a2/evidence/missingness-summary.csv; biased-donor-diagnostic.csv.</a:t>
             </a:r>
           </a:p>
+          <a:p xmlns:a="http://schemas.openxmlformats.org/drawingml/2006/main">
+            <a:r>
+              <a:t>E2 masks drought readings, not river flow. The 60% versus 99% comparison is the separate biased-donor formula diagnostic, not the fitted model. Interpolation uses later observations and suits historical gaps.</a:t>
+            </a:r>
+          </a:p>
         </p:txBody>
       </p:sp>
       <p:sp>
@@ -845,6 +855,11 @@
               <a:t>Sources: docs/a2/evidence-summary.csv; team-contributions.md; source/dossier.md.</a:t>
             </a:r>
           </a:p>
+          <a:p xmlns:a="http://schemas.openxmlformats.org/drawingml/2006/main">
+            <a:r>
+              <a:t>E1: adopt XGBoost based on lower synthetic MAE. E3: adopt bounds with raw values/warnings. E4: adopt geographic retrieval with real-permit testing pending. E2: modify donor checks; E5: separate selection and calibration. Reject fit as an accuracy guarantee; defer neural/LLM comparisons until measured targets and permit evaluation data support a fair test.</a:t>
+            </a:r>
+          </a:p>
         </p:txBody>
       </p:sp>
       <p:sp>
@@ -3285,12 +3300,12 @@
   </p:cSld>
   <p:clrMap bg1="lt1" tx1="dk1" bg2="lt2" tx2="dk2" accent1="accent1" accent2="accent2" accent3="accent3" accent4="accent4" accent5="accent5" accent6="accent6" hlink="hlink" folHlink="folHlink"/>
   <p:sldLayoutIdLst>
-    <p:sldLayoutId xmlns:r="http://schemas.openxmlformats.org/officeDocument/2006/relationships" id="2147483649" r:id="R534eb2b4221f4de4"/>
-    <p:sldLayoutId xmlns:r="http://schemas.openxmlformats.org/officeDocument/2006/relationships" id="2147483650" r:id="R914cb96f711f48dc"/>
-    <p:sldLayoutId xmlns:r="http://schemas.openxmlformats.org/officeDocument/2006/relationships" id="2147483651" r:id="Rb582bc50cf7246e5"/>
-    <p:sldLayoutId xmlns:r="http://schemas.openxmlformats.org/officeDocument/2006/relationships" id="2147483652" r:id="R57db67b51ef44e5f"/>
-    <p:sldLayoutId xmlns:r="http://schemas.openxmlformats.org/officeDocument/2006/relationships" id="2147483653" r:id="Re86d31a3cc7748d6"/>
-    <p:sldLayoutId xmlns:r="http://schemas.openxmlformats.org/officeDocument/2006/relationships" id="2147483654" r:id="R26f857334308427a"/>
+    <p:sldLayoutId xmlns:r="http://schemas.openxmlformats.org/officeDocument/2006/relationships" id="2147483649" r:id="Rc12f8cd8fa24475f"/>
+    <p:sldLayoutId xmlns:r="http://schemas.openxmlformats.org/officeDocument/2006/relationships" id="2147483650" r:id="Rad2fc7f6ee834a6d"/>
+    <p:sldLayoutId xmlns:r="http://schemas.openxmlformats.org/officeDocument/2006/relationships" id="2147483651" r:id="Ra6c1aeed5ec24991"/>
+    <p:sldLayoutId xmlns:r="http://schemas.openxmlformats.org/officeDocument/2006/relationships" id="2147483652" r:id="Raaa8cf8cbc194620"/>
+    <p:sldLayoutId xmlns:r="http://schemas.openxmlformats.org/officeDocument/2006/relationships" id="2147483653" r:id="R7fa4cc9dce564d99"/>
+    <p:sldLayoutId xmlns:r="http://schemas.openxmlformats.org/officeDocument/2006/relationships" id="2147483654" r:id="R243b83edc1ca4bb3"/>
   </p:sldLayoutIdLst>
   <p:txStyles>
     <p:titleStyle>
@@ -4536,6 +4551,7 @@
               </a:defRPr>
             </a:defPPr>
             <a:lvl1pPr>
+              <a:buNone/>
               <a:defRPr sz="3300" b="1">
                 <a:solidFill>
                   <a:srgbClr val="171717"/>
@@ -4546,6 +4562,7 @@
               </a:defRPr>
             </a:lvl1pPr>
             <a:lvl2pPr>
+              <a:buNone/>
               <a:defRPr sz="3300" b="1">
                 <a:solidFill>
                   <a:srgbClr val="171717"/>
@@ -4556,6 +4573,7 @@
               </a:defRPr>
             </a:lvl2pPr>
             <a:lvl3pPr>
+              <a:buNone/>
               <a:defRPr sz="3300" b="1">
                 <a:solidFill>
                   <a:srgbClr val="171717"/>
@@ -4566,6 +4584,7 @@
               </a:defRPr>
             </a:lvl3pPr>
             <a:lvl4pPr>
+              <a:buNone/>
               <a:defRPr sz="3300" b="1">
                 <a:solidFill>
                   <a:srgbClr val="171717"/>
@@ -4576,6 +4595,7 @@
               </a:defRPr>
             </a:lvl4pPr>
             <a:lvl5pPr>
+              <a:buNone/>
               <a:defRPr sz="3300" b="1">
                 <a:solidFill>
                   <a:srgbClr val="171717"/>
@@ -4586,6 +4606,7 @@
               </a:defRPr>
             </a:lvl5pPr>
             <a:lvl6pPr>
+              <a:buNone/>
               <a:defRPr sz="3300" b="1">
                 <a:solidFill>
                   <a:srgbClr val="171717"/>
@@ -4596,6 +4617,7 @@
               </a:defRPr>
             </a:lvl6pPr>
             <a:lvl7pPr>
+              <a:buNone/>
               <a:defRPr sz="3300" b="1">
                 <a:solidFill>
                   <a:srgbClr val="171717"/>
@@ -4606,6 +4628,7 @@
               </a:defRPr>
             </a:lvl7pPr>
             <a:lvl8pPr>
+              <a:buNone/>
               <a:defRPr sz="3300" b="1">
                 <a:solidFill>
                   <a:srgbClr val="171717"/>
@@ -4616,6 +4639,7 @@
               </a:defRPr>
             </a:lvl8pPr>
             <a:lvl9pPr>
+              <a:buNone/>
               <a:defRPr sz="3300" b="1">
                 <a:solidFill>
                   <a:srgbClr val="171717"/>
@@ -4628,6 +4652,7 @@
           </a:lstStyle>
           <a:p xmlns:a="http://schemas.openxmlformats.org/drawingml/2006/main">
             <a:pPr>
+              <a:buNone/>
               <a:defRPr sz="3300" b="1">
                 <a:solidFill>
                   <a:srgbClr val="171717"/>
@@ -4692,6 +4717,7 @@
               </a:defRPr>
             </a:defPPr>
             <a:lvl1pPr>
+              <a:buNone/>
               <a:defRPr sz="1275" b="0">
                 <a:solidFill>
                   <a:srgbClr val="555555"/>
@@ -4702,6 +4728,7 @@
               </a:defRPr>
             </a:lvl1pPr>
             <a:lvl2pPr>
+              <a:buNone/>
               <a:defRPr sz="1275" b="0">
                 <a:solidFill>
                   <a:srgbClr val="555555"/>
@@ -4712,6 +4739,7 @@
               </a:defRPr>
             </a:lvl2pPr>
             <a:lvl3pPr>
+              <a:buNone/>
               <a:defRPr sz="1275" b="0">
                 <a:solidFill>
                   <a:srgbClr val="555555"/>
@@ -4722,6 +4750,7 @@
               </a:defRPr>
             </a:lvl3pPr>
             <a:lvl4pPr>
+              <a:buNone/>
               <a:defRPr sz="1275" b="0">
                 <a:solidFill>
                   <a:srgbClr val="555555"/>
@@ -4732,6 +4761,7 @@
               </a:defRPr>
             </a:lvl4pPr>
             <a:lvl5pPr>
+              <a:buNone/>
               <a:defRPr sz="1275" b="0">
                 <a:solidFill>
                   <a:srgbClr val="555555"/>
@@ -4742,6 +4772,7 @@
               </a:defRPr>
             </a:lvl5pPr>
             <a:lvl6pPr>
+              <a:buNone/>
               <a:defRPr sz="1275" b="0">
                 <a:solidFill>
                   <a:srgbClr val="555555"/>
@@ -4752,6 +4783,7 @@
               </a:defRPr>
             </a:lvl6pPr>
             <a:lvl7pPr>
+              <a:buNone/>
               <a:defRPr sz="1275" b="0">
                 <a:solidFill>
                   <a:srgbClr val="555555"/>
@@ -4762,6 +4794,7 @@
               </a:defRPr>
             </a:lvl7pPr>
             <a:lvl8pPr>
+              <a:buNone/>
               <a:defRPr sz="1275" b="0">
                 <a:solidFill>
                   <a:srgbClr val="555555"/>
@@ -4772,6 +4805,7 @@
               </a:defRPr>
             </a:lvl8pPr>
             <a:lvl9pPr>
+              <a:buNone/>
               <a:defRPr sz="1275" b="0">
                 <a:solidFill>
                   <a:srgbClr val="555555"/>
@@ -4784,6 +4818,7 @@
           </a:lstStyle>
           <a:p xmlns:a="http://schemas.openxmlformats.org/drawingml/2006/main">
             <a:pPr>
+              <a:buNone/>
               <a:defRPr sz="1275" b="0">
                 <a:solidFill>
                   <a:srgbClr val="555555"/>
@@ -4848,6 +4883,7 @@
               </a:defRPr>
             </a:defPPr>
             <a:lvl1pPr>
+              <a:buNone/>
               <a:defRPr sz="1275" b="0">
                 <a:solidFill>
                   <a:srgbClr val="555555"/>
@@ -4858,6 +4894,7 @@
               </a:defRPr>
             </a:lvl1pPr>
             <a:lvl2pPr>
+              <a:buNone/>
               <a:defRPr sz="1275" b="0">
                 <a:solidFill>
                   <a:srgbClr val="555555"/>
@@ -4868,6 +4905,7 @@
               </a:defRPr>
             </a:lvl2pPr>
             <a:lvl3pPr>
+              <a:buNone/>
               <a:defRPr sz="1275" b="0">
                 <a:solidFill>
                   <a:srgbClr val="555555"/>
@@ -4878,6 +4916,7 @@
               </a:defRPr>
             </a:lvl3pPr>
             <a:lvl4pPr>
+              <a:buNone/>
               <a:defRPr sz="1275" b="0">
                 <a:solidFill>
                   <a:srgbClr val="555555"/>
@@ -4888,6 +4927,7 @@
               </a:defRPr>
             </a:lvl4pPr>
             <a:lvl5pPr>
+              <a:buNone/>
               <a:defRPr sz="1275" b="0">
                 <a:solidFill>
                   <a:srgbClr val="555555"/>
@@ -4898,6 +4938,7 @@
               </a:defRPr>
             </a:lvl5pPr>
             <a:lvl6pPr>
+              <a:buNone/>
               <a:defRPr sz="1275" b="0">
                 <a:solidFill>
                   <a:srgbClr val="555555"/>
@@ -4908,6 +4949,7 @@
               </a:defRPr>
             </a:lvl6pPr>
             <a:lvl7pPr>
+              <a:buNone/>
               <a:defRPr sz="1275" b="0">
                 <a:solidFill>
                   <a:srgbClr val="555555"/>
@@ -4918,6 +4960,7 @@
               </a:defRPr>
             </a:lvl7pPr>
             <a:lvl8pPr>
+              <a:buNone/>
               <a:defRPr sz="1275" b="0">
                 <a:solidFill>
                   <a:srgbClr val="555555"/>
@@ -4928,6 +4971,7 @@
               </a:defRPr>
             </a:lvl8pPr>
             <a:lvl9pPr>
+              <a:buNone/>
               <a:defRPr sz="1275" b="0">
                 <a:solidFill>
                   <a:srgbClr val="555555"/>
@@ -4940,6 +4984,7 @@
           </a:lstStyle>
           <a:p xmlns:a="http://schemas.openxmlformats.org/drawingml/2006/main">
             <a:pPr>
+              <a:buNone/>
               <a:defRPr sz="1275" b="0">
                 <a:solidFill>
                   <a:srgbClr val="555555"/>
@@ -5004,6 +5049,7 @@
               </a:defRPr>
             </a:defPPr>
             <a:lvl1pPr>
+              <a:buNone/>
               <a:defRPr sz="2400" b="0">
                 <a:solidFill>
                   <a:srgbClr val="171717"/>
@@ -5014,6 +5060,7 @@
               </a:defRPr>
             </a:lvl1pPr>
             <a:lvl2pPr>
+              <a:buNone/>
               <a:defRPr sz="2400" b="0">
                 <a:solidFill>
                   <a:srgbClr val="171717"/>
@@ -5024,6 +5071,7 @@
               </a:defRPr>
             </a:lvl2pPr>
             <a:lvl3pPr>
+              <a:buNone/>
               <a:defRPr sz="2400" b="0">
                 <a:solidFill>
                   <a:srgbClr val="171717"/>
@@ -5034,6 +5082,7 @@
               </a:defRPr>
             </a:lvl3pPr>
             <a:lvl4pPr>
+              <a:buNone/>
               <a:defRPr sz="2400" b="0">
                 <a:solidFill>
                   <a:srgbClr val="171717"/>
@@ -5044,6 +5093,7 @@
               </a:defRPr>
             </a:lvl4pPr>
             <a:lvl5pPr>
+              <a:buNone/>
               <a:defRPr sz="2400" b="0">
                 <a:solidFill>
                   <a:srgbClr val="171717"/>
@@ -5054,6 +5104,7 @@
               </a:defRPr>
             </a:lvl5pPr>
             <a:lvl6pPr>
+              <a:buNone/>
               <a:defRPr sz="2400" b="0">
                 <a:solidFill>
                   <a:srgbClr val="171717"/>
@@ -5064,6 +5115,7 @@
               </a:defRPr>
             </a:lvl6pPr>
             <a:lvl7pPr>
+              <a:buNone/>
               <a:defRPr sz="2400" b="0">
                 <a:solidFill>
                   <a:srgbClr val="171717"/>
@@ -5074,6 +5126,7 @@
               </a:defRPr>
             </a:lvl7pPr>
             <a:lvl8pPr>
+              <a:buNone/>
               <a:defRPr sz="2400" b="0">
                 <a:solidFill>
                   <a:srgbClr val="171717"/>
@@ -5084,6 +5137,7 @@
               </a:defRPr>
             </a:lvl8pPr>
             <a:lvl9pPr>
+              <a:buNone/>
               <a:defRPr sz="2400" b="0">
                 <a:solidFill>
                   <a:srgbClr val="171717"/>
@@ -5096,6 +5150,7 @@
           </a:lstStyle>
           <a:p xmlns:a="http://schemas.openxmlformats.org/drawingml/2006/main">
             <a:pPr>
+              <a:buNone/>
               <a:defRPr sz="2400" b="0">
                 <a:solidFill>
                   <a:srgbClr val="171717"/>
@@ -5160,6 +5215,7 @@
               </a:defRPr>
             </a:defPPr>
             <a:lvl1pPr>
+              <a:buNone/>
               <a:defRPr sz="2400" b="1">
                 <a:solidFill>
                   <a:srgbClr val="171717"/>
@@ -5170,6 +5226,7 @@
               </a:defRPr>
             </a:lvl1pPr>
             <a:lvl2pPr>
+              <a:buNone/>
               <a:defRPr sz="2400" b="1">
                 <a:solidFill>
                   <a:srgbClr val="171717"/>
@@ -5180,6 +5237,7 @@
               </a:defRPr>
             </a:lvl2pPr>
             <a:lvl3pPr>
+              <a:buNone/>
               <a:defRPr sz="2400" b="1">
                 <a:solidFill>
                   <a:srgbClr val="171717"/>
@@ -5190,6 +5248,7 @@
               </a:defRPr>
             </a:lvl3pPr>
             <a:lvl4pPr>
+              <a:buNone/>
               <a:defRPr sz="2400" b="1">
                 <a:solidFill>
                   <a:srgbClr val="171717"/>
@@ -5200,6 +5259,7 @@
               </a:defRPr>
             </a:lvl4pPr>
             <a:lvl5pPr>
+              <a:buNone/>
               <a:defRPr sz="2400" b="1">
                 <a:solidFill>
                   <a:srgbClr val="171717"/>
@@ -5210,6 +5270,7 @@
               </a:defRPr>
             </a:lvl5pPr>
             <a:lvl6pPr>
+              <a:buNone/>
               <a:defRPr sz="2400" b="1">
                 <a:solidFill>
                   <a:srgbClr val="171717"/>
@@ -5220,6 +5281,7 @@
               </a:defRPr>
             </a:lvl6pPr>
             <a:lvl7pPr>
+              <a:buNone/>
               <a:defRPr sz="2400" b="1">
                 <a:solidFill>
                   <a:srgbClr val="171717"/>
@@ -5230,6 +5292,7 @@
               </a:defRPr>
             </a:lvl7pPr>
             <a:lvl8pPr>
+              <a:buNone/>
               <a:defRPr sz="2400" b="1">
                 <a:solidFill>
                   <a:srgbClr val="171717"/>
@@ -5240,6 +5303,7 @@
               </a:defRPr>
             </a:lvl8pPr>
             <a:lvl9pPr>
+              <a:buNone/>
               <a:defRPr sz="2400" b="1">
                 <a:solidFill>
                   <a:srgbClr val="171717"/>
@@ -5252,6 +5316,7 @@
           </a:lstStyle>
           <a:p xmlns:a="http://schemas.openxmlformats.org/drawingml/2006/main">
             <a:pPr>
+              <a:buNone/>
               <a:defRPr sz="2400" b="1">
                 <a:solidFill>
                   <a:srgbClr val="171717"/>
@@ -5316,6 +5381,7 @@
               </a:defRPr>
             </a:defPPr>
             <a:lvl1pPr>
+              <a:buNone/>
               <a:defRPr sz="2100" b="0">
                 <a:solidFill>
                   <a:srgbClr val="171717"/>
@@ -5326,6 +5392,7 @@
               </a:defRPr>
             </a:lvl1pPr>
             <a:lvl2pPr>
+              <a:buNone/>
               <a:defRPr sz="2100" b="0">
                 <a:solidFill>
                   <a:srgbClr val="171717"/>
@@ -5336,6 +5403,7 @@
               </a:defRPr>
             </a:lvl2pPr>
             <a:lvl3pPr>
+              <a:buNone/>
               <a:defRPr sz="2100" b="0">
                 <a:solidFill>
                   <a:srgbClr val="171717"/>
@@ -5346,6 +5414,7 @@
               </a:defRPr>
             </a:lvl3pPr>
             <a:lvl4pPr>
+              <a:buNone/>
               <a:defRPr sz="2100" b="0">
                 <a:solidFill>
                   <a:srgbClr val="171717"/>
@@ -5356,6 +5425,7 @@
               </a:defRPr>
             </a:lvl4pPr>
             <a:lvl5pPr>
+              <a:buNone/>
               <a:defRPr sz="2100" b="0">
                 <a:solidFill>
                   <a:srgbClr val="171717"/>
@@ -5366,6 +5436,7 @@
               </a:defRPr>
             </a:lvl5pPr>
             <a:lvl6pPr>
+              <a:buNone/>
               <a:defRPr sz="2100" b="0">
                 <a:solidFill>
                   <a:srgbClr val="171717"/>
@@ -5376,6 +5447,7 @@
               </a:defRPr>
             </a:lvl6pPr>
             <a:lvl7pPr>
+              <a:buNone/>
               <a:defRPr sz="2100" b="0">
                 <a:solidFill>
                   <a:srgbClr val="171717"/>
@@ -5386,6 +5458,7 @@
               </a:defRPr>
             </a:lvl7pPr>
             <a:lvl8pPr>
+              <a:buNone/>
               <a:defRPr sz="2100" b="0">
                 <a:solidFill>
                   <a:srgbClr val="171717"/>
@@ -5396,6 +5469,7 @@
               </a:defRPr>
             </a:lvl8pPr>
             <a:lvl9pPr>
+              <a:buNone/>
               <a:defRPr sz="2100" b="0">
                 <a:solidFill>
                   <a:srgbClr val="171717"/>
@@ -5408,6 +5482,7 @@
           </a:lstStyle>
           <a:p xmlns:a="http://schemas.openxmlformats.org/drawingml/2006/main">
             <a:pPr>
+              <a:buNone/>
               <a:defRPr sz="2100" b="0">
                 <a:solidFill>
                   <a:srgbClr val="171717"/>
@@ -5472,6 +5547,7 @@
               </a:defRPr>
             </a:defPPr>
             <a:lvl1pPr>
+              <a:buNone/>
               <a:defRPr sz="2100" b="0">
                 <a:solidFill>
                   <a:srgbClr val="171717"/>
@@ -5482,6 +5558,7 @@
               </a:defRPr>
             </a:lvl1pPr>
             <a:lvl2pPr>
+              <a:buNone/>
               <a:defRPr sz="2100" b="0">
                 <a:solidFill>
                   <a:srgbClr val="171717"/>
@@ -5492,6 +5569,7 @@
               </a:defRPr>
             </a:lvl2pPr>
             <a:lvl3pPr>
+              <a:buNone/>
               <a:defRPr sz="2100" b="0">
                 <a:solidFill>
                   <a:srgbClr val="171717"/>
@@ -5502,6 +5580,7 @@
               </a:defRPr>
             </a:lvl3pPr>
             <a:lvl4pPr>
+              <a:buNone/>
               <a:defRPr sz="2100" b="0">
                 <a:solidFill>
                   <a:srgbClr val="171717"/>
@@ -5512,6 +5591,7 @@
               </a:defRPr>
             </a:lvl4pPr>
             <a:lvl5pPr>
+              <a:buNone/>
               <a:defRPr sz="2100" b="0">
                 <a:solidFill>
                   <a:srgbClr val="171717"/>
@@ -5522,6 +5602,7 @@
               </a:defRPr>
             </a:lvl5pPr>
             <a:lvl6pPr>
+              <a:buNone/>
               <a:defRPr sz="2100" b="0">
                 <a:solidFill>
                   <a:srgbClr val="171717"/>
@@ -5532,6 +5613,7 @@
               </a:defRPr>
             </a:lvl6pPr>
             <a:lvl7pPr>
+              <a:buNone/>
               <a:defRPr sz="2100" b="0">
                 <a:solidFill>
                   <a:srgbClr val="171717"/>
@@ -5542,6 +5624,7 @@
               </a:defRPr>
             </a:lvl7pPr>
             <a:lvl8pPr>
+              <a:buNone/>
               <a:defRPr sz="2100" b="0">
                 <a:solidFill>
                   <a:srgbClr val="171717"/>
@@ -5552,6 +5635,7 @@
               </a:defRPr>
             </a:lvl8pPr>
             <a:lvl9pPr>
+              <a:buNone/>
               <a:defRPr sz="2100" b="0">
                 <a:solidFill>
                   <a:srgbClr val="171717"/>
@@ -5564,6 +5648,7 @@
           </a:lstStyle>
           <a:p xmlns:a="http://schemas.openxmlformats.org/drawingml/2006/main">
             <a:pPr>
+              <a:buNone/>
               <a:defRPr sz="2100" b="0">
                 <a:solidFill>
                   <a:srgbClr val="171717"/>
@@ -5587,6 +5672,7 @@
           </a:p>
           <a:p xmlns:a="http://schemas.openxmlformats.org/drawingml/2006/main">
             <a:pPr>
+              <a:buNone/>
               <a:defRPr sz="2100" b="0">
                 <a:solidFill>
                   <a:srgbClr val="171717"/>
@@ -5680,6 +5766,7 @@
               </a:defRPr>
             </a:defPPr>
             <a:lvl1pPr>
+              <a:buNone/>
               <a:defRPr sz="3300" b="1">
                 <a:solidFill>
                   <a:srgbClr val="171717"/>
@@ -5690,6 +5777,7 @@
               </a:defRPr>
             </a:lvl1pPr>
             <a:lvl2pPr>
+              <a:buNone/>
               <a:defRPr sz="3300" b="1">
                 <a:solidFill>
                   <a:srgbClr val="171717"/>
@@ -5700,6 +5788,7 @@
               </a:defRPr>
             </a:lvl2pPr>
             <a:lvl3pPr>
+              <a:buNone/>
               <a:defRPr sz="3300" b="1">
                 <a:solidFill>
                   <a:srgbClr val="171717"/>
@@ -5710,6 +5799,7 @@
               </a:defRPr>
             </a:lvl3pPr>
             <a:lvl4pPr>
+              <a:buNone/>
               <a:defRPr sz="3300" b="1">
                 <a:solidFill>
                   <a:srgbClr val="171717"/>
@@ -5720,6 +5810,7 @@
               </a:defRPr>
             </a:lvl4pPr>
             <a:lvl5pPr>
+              <a:buNone/>
               <a:defRPr sz="3300" b="1">
                 <a:solidFill>
                   <a:srgbClr val="171717"/>
@@ -5730,6 +5821,7 @@
               </a:defRPr>
             </a:lvl5pPr>
             <a:lvl6pPr>
+              <a:buNone/>
               <a:defRPr sz="3300" b="1">
                 <a:solidFill>
                   <a:srgbClr val="171717"/>
@@ -5740,6 +5832,7 @@
               </a:defRPr>
             </a:lvl6pPr>
             <a:lvl7pPr>
+              <a:buNone/>
               <a:defRPr sz="3300" b="1">
                 <a:solidFill>
                   <a:srgbClr val="171717"/>
@@ -5750,6 +5843,7 @@
               </a:defRPr>
             </a:lvl7pPr>
             <a:lvl8pPr>
+              <a:buNone/>
               <a:defRPr sz="3300" b="1">
                 <a:solidFill>
                   <a:srgbClr val="171717"/>
@@ -5760,6 +5854,7 @@
               </a:defRPr>
             </a:lvl8pPr>
             <a:lvl9pPr>
+              <a:buNone/>
               <a:defRPr sz="3300" b="1">
                 <a:solidFill>
                   <a:srgbClr val="171717"/>
@@ -5772,6 +5867,7 @@
           </a:lstStyle>
           <a:p xmlns:a="http://schemas.openxmlformats.org/drawingml/2006/main">
             <a:pPr>
+              <a:buNone/>
               <a:defRPr sz="3300" b="1">
                 <a:solidFill>
                   <a:srgbClr val="171717"/>
@@ -5836,6 +5932,7 @@
               </a:defRPr>
             </a:defPPr>
             <a:lvl1pPr>
+              <a:buNone/>
               <a:defRPr sz="1275" b="0">
                 <a:solidFill>
                   <a:srgbClr val="555555"/>
@@ -5846,6 +5943,7 @@
               </a:defRPr>
             </a:lvl1pPr>
             <a:lvl2pPr>
+              <a:buNone/>
               <a:defRPr sz="1275" b="0">
                 <a:solidFill>
                   <a:srgbClr val="555555"/>
@@ -5856,6 +5954,7 @@
               </a:defRPr>
             </a:lvl2pPr>
             <a:lvl3pPr>
+              <a:buNone/>
               <a:defRPr sz="1275" b="0">
                 <a:solidFill>
                   <a:srgbClr val="555555"/>
@@ -5866,6 +5965,7 @@
               </a:defRPr>
             </a:lvl3pPr>
             <a:lvl4pPr>
+              <a:buNone/>
               <a:defRPr sz="1275" b="0">
                 <a:solidFill>
                   <a:srgbClr val="555555"/>
@@ -5876,6 +5976,7 @@
               </a:defRPr>
             </a:lvl4pPr>
             <a:lvl5pPr>
+              <a:buNone/>
               <a:defRPr sz="1275" b="0">
                 <a:solidFill>
                   <a:srgbClr val="555555"/>
@@ -5886,6 +5987,7 @@
               </a:defRPr>
             </a:lvl5pPr>
             <a:lvl6pPr>
+              <a:buNone/>
               <a:defRPr sz="1275" b="0">
                 <a:solidFill>
                   <a:srgbClr val="555555"/>
@@ -5896,6 +5998,7 @@
               </a:defRPr>
             </a:lvl6pPr>
             <a:lvl7pPr>
+              <a:buNone/>
               <a:defRPr sz="1275" b="0">
                 <a:solidFill>
                   <a:srgbClr val="555555"/>
@@ -5906,6 +6009,7 @@
               </a:defRPr>
             </a:lvl7pPr>
             <a:lvl8pPr>
+              <a:buNone/>
               <a:defRPr sz="1275" b="0">
                 <a:solidFill>
                   <a:srgbClr val="555555"/>
@@ -5916,6 +6020,7 @@
               </a:defRPr>
             </a:lvl8pPr>
             <a:lvl9pPr>
+              <a:buNone/>
               <a:defRPr sz="1275" b="0">
                 <a:solidFill>
                   <a:srgbClr val="555555"/>
@@ -5928,6 +6033,7 @@
           </a:lstStyle>
           <a:p xmlns:a="http://schemas.openxmlformats.org/drawingml/2006/main">
             <a:pPr>
+              <a:buNone/>
               <a:defRPr sz="1275" b="0">
                 <a:solidFill>
                   <a:srgbClr val="555555"/>
@@ -5992,6 +6098,7 @@
               </a:defRPr>
             </a:defPPr>
             <a:lvl1pPr>
+              <a:buNone/>
               <a:defRPr sz="1275" b="0">
                 <a:solidFill>
                   <a:srgbClr val="555555"/>
@@ -6002,6 +6109,7 @@
               </a:defRPr>
             </a:lvl1pPr>
             <a:lvl2pPr>
+              <a:buNone/>
               <a:defRPr sz="1275" b="0">
                 <a:solidFill>
                   <a:srgbClr val="555555"/>
@@ -6012,6 +6120,7 @@
               </a:defRPr>
             </a:lvl2pPr>
             <a:lvl3pPr>
+              <a:buNone/>
               <a:defRPr sz="1275" b="0">
                 <a:solidFill>
                   <a:srgbClr val="555555"/>
@@ -6022,6 +6131,7 @@
               </a:defRPr>
             </a:lvl3pPr>
             <a:lvl4pPr>
+              <a:buNone/>
               <a:defRPr sz="1275" b="0">
                 <a:solidFill>
                   <a:srgbClr val="555555"/>
@@ -6032,6 +6142,7 @@
               </a:defRPr>
             </a:lvl4pPr>
             <a:lvl5pPr>
+              <a:buNone/>
               <a:defRPr sz="1275" b="0">
                 <a:solidFill>
                   <a:srgbClr val="555555"/>
@@ -6042,6 +6153,7 @@
               </a:defRPr>
             </a:lvl5pPr>
             <a:lvl6pPr>
+              <a:buNone/>
               <a:defRPr sz="1275" b="0">
                 <a:solidFill>
                   <a:srgbClr val="555555"/>
@@ -6052,6 +6164,7 @@
               </a:defRPr>
             </a:lvl6pPr>
             <a:lvl7pPr>
+              <a:buNone/>
               <a:defRPr sz="1275" b="0">
                 <a:solidFill>
                   <a:srgbClr val="555555"/>
@@ -6062,6 +6175,7 @@
               </a:defRPr>
             </a:lvl7pPr>
             <a:lvl8pPr>
+              <a:buNone/>
               <a:defRPr sz="1275" b="0">
                 <a:solidFill>
                   <a:srgbClr val="555555"/>
@@ -6072,6 +6186,7 @@
               </a:defRPr>
             </a:lvl8pPr>
             <a:lvl9pPr>
+              <a:buNone/>
               <a:defRPr sz="1275" b="0">
                 <a:solidFill>
                   <a:srgbClr val="555555"/>
@@ -6084,6 +6199,7 @@
           </a:lstStyle>
           <a:p xmlns:a="http://schemas.openxmlformats.org/drawingml/2006/main">
             <a:pPr>
+              <a:buNone/>
               <a:defRPr sz="1275" b="0">
                 <a:solidFill>
                   <a:srgbClr val="555555"/>
@@ -6148,6 +6264,7 @@
               </a:defRPr>
             </a:defPPr>
             <a:lvl1pPr>
+              <a:buNone/>
               <a:defRPr sz="2400" b="1">
                 <a:solidFill>
                   <a:srgbClr val="171717"/>
@@ -6158,6 +6275,7 @@
               </a:defRPr>
             </a:lvl1pPr>
             <a:lvl2pPr>
+              <a:buNone/>
               <a:defRPr sz="2400" b="1">
                 <a:solidFill>
                   <a:srgbClr val="171717"/>
@@ -6168,6 +6286,7 @@
               </a:defRPr>
             </a:lvl2pPr>
             <a:lvl3pPr>
+              <a:buNone/>
               <a:defRPr sz="2400" b="1">
                 <a:solidFill>
                   <a:srgbClr val="171717"/>
@@ -6178,6 +6297,7 @@
               </a:defRPr>
             </a:lvl3pPr>
             <a:lvl4pPr>
+              <a:buNone/>
               <a:defRPr sz="2400" b="1">
                 <a:solidFill>
                   <a:srgbClr val="171717"/>
@@ -6188,6 +6308,7 @@
               </a:defRPr>
             </a:lvl4pPr>
             <a:lvl5pPr>
+              <a:buNone/>
               <a:defRPr sz="2400" b="1">
                 <a:solidFill>
                   <a:srgbClr val="171717"/>
@@ -6198,6 +6319,7 @@
               </a:defRPr>
             </a:lvl5pPr>
             <a:lvl6pPr>
+              <a:buNone/>
               <a:defRPr sz="2400" b="1">
                 <a:solidFill>
                   <a:srgbClr val="171717"/>
@@ -6208,6 +6330,7 @@
               </a:defRPr>
             </a:lvl6pPr>
             <a:lvl7pPr>
+              <a:buNone/>
               <a:defRPr sz="2400" b="1">
                 <a:solidFill>
                   <a:srgbClr val="171717"/>
@@ -6218,6 +6341,7 @@
               </a:defRPr>
             </a:lvl7pPr>
             <a:lvl8pPr>
+              <a:buNone/>
               <a:defRPr sz="2400" b="1">
                 <a:solidFill>
                   <a:srgbClr val="171717"/>
@@ -6228,6 +6352,7 @@
               </a:defRPr>
             </a:lvl8pPr>
             <a:lvl9pPr>
+              <a:buNone/>
               <a:defRPr sz="2400" b="1">
                 <a:solidFill>
                   <a:srgbClr val="171717"/>
@@ -6240,6 +6365,7 @@
           </a:lstStyle>
           <a:p xmlns:a="http://schemas.openxmlformats.org/drawingml/2006/main">
             <a:pPr>
+              <a:buNone/>
               <a:defRPr sz="2400" b="1">
                 <a:solidFill>
                   <a:srgbClr val="171717"/>
@@ -6304,6 +6430,7 @@
               </a:defRPr>
             </a:defPPr>
             <a:lvl1pPr>
+              <a:buNone/>
               <a:defRPr sz="1875" b="0">
                 <a:solidFill>
                   <a:srgbClr val="171717"/>
@@ -6314,6 +6441,7 @@
               </a:defRPr>
             </a:lvl1pPr>
             <a:lvl2pPr>
+              <a:buNone/>
               <a:defRPr sz="1875" b="0">
                 <a:solidFill>
                   <a:srgbClr val="171717"/>
@@ -6324,6 +6452,7 @@
               </a:defRPr>
             </a:lvl2pPr>
             <a:lvl3pPr>
+              <a:buNone/>
               <a:defRPr sz="1875" b="0">
                 <a:solidFill>
                   <a:srgbClr val="171717"/>
@@ -6334,6 +6463,7 @@
               </a:defRPr>
             </a:lvl3pPr>
             <a:lvl4pPr>
+              <a:buNone/>
               <a:defRPr sz="1875" b="0">
                 <a:solidFill>
                   <a:srgbClr val="171717"/>
@@ -6344,6 +6474,7 @@
               </a:defRPr>
             </a:lvl4pPr>
             <a:lvl5pPr>
+              <a:buNone/>
               <a:defRPr sz="1875" b="0">
                 <a:solidFill>
                   <a:srgbClr val="171717"/>
@@ -6354,6 +6485,7 @@
               </a:defRPr>
             </a:lvl5pPr>
             <a:lvl6pPr>
+              <a:buNone/>
               <a:defRPr sz="1875" b="0">
                 <a:solidFill>
                   <a:srgbClr val="171717"/>
@@ -6364,6 +6496,7 @@
               </a:defRPr>
             </a:lvl6pPr>
             <a:lvl7pPr>
+              <a:buNone/>
               <a:defRPr sz="1875" b="0">
                 <a:solidFill>
                   <a:srgbClr val="171717"/>
@@ -6374,6 +6507,7 @@
               </a:defRPr>
             </a:lvl7pPr>
             <a:lvl8pPr>
+              <a:buNone/>
               <a:defRPr sz="1875" b="0">
                 <a:solidFill>
                   <a:srgbClr val="171717"/>
@@ -6384,6 +6518,7 @@
               </a:defRPr>
             </a:lvl8pPr>
             <a:lvl9pPr>
+              <a:buNone/>
               <a:defRPr sz="1875" b="0">
                 <a:solidFill>
                   <a:srgbClr val="171717"/>
@@ -6396,6 +6531,7 @@
           </a:lstStyle>
           <a:p xmlns:a="http://schemas.openxmlformats.org/drawingml/2006/main">
             <a:pPr>
+              <a:buNone/>
               <a:defRPr sz="1875" b="0">
                 <a:solidFill>
                   <a:srgbClr val="171717"/>
@@ -6414,11 +6550,12 @@
                 <a:ea typeface="Arial"/>
                 <a:cs typeface="Arial"/>
               </a:rPr>
-              <a:t>Equipment + place</a:t>
+              <a:t>Six numeric features</a:t>
             </a:r>
           </a:p>
           <a:p xmlns:a="http://schemas.openxmlformats.org/drawingml/2006/main">
             <a:pPr>
+              <a:buNone/>
               <a:defRPr sz="1875" b="0">
                 <a:solidFill>
                   <a:srgbClr val="171717"/>
@@ -6437,7 +6574,7 @@
                 <a:ea typeface="Arial"/>
                 <a:cs typeface="Arial"/>
               </a:rPr>
-              <a:t>Weather + river</a:t>
+              <a:t>Method + location</a:t>
             </a:r>
           </a:p>
         </p:txBody>
@@ -6483,6 +6620,7 @@
               </a:defRPr>
             </a:defPPr>
             <a:lvl1pPr>
+              <a:buNone/>
               <a:defRPr sz="2400" b="1">
                 <a:solidFill>
                   <a:srgbClr val="171717"/>
@@ -6493,6 +6631,7 @@
               </a:defRPr>
             </a:lvl1pPr>
             <a:lvl2pPr>
+              <a:buNone/>
               <a:defRPr sz="2400" b="1">
                 <a:solidFill>
                   <a:srgbClr val="171717"/>
@@ -6503,6 +6642,7 @@
               </a:defRPr>
             </a:lvl2pPr>
             <a:lvl3pPr>
+              <a:buNone/>
               <a:defRPr sz="2400" b="1">
                 <a:solidFill>
                   <a:srgbClr val="171717"/>
@@ -6513,6 +6653,7 @@
               </a:defRPr>
             </a:lvl3pPr>
             <a:lvl4pPr>
+              <a:buNone/>
               <a:defRPr sz="2400" b="1">
                 <a:solidFill>
                   <a:srgbClr val="171717"/>
@@ -6523,6 +6664,7 @@
               </a:defRPr>
             </a:lvl4pPr>
             <a:lvl5pPr>
+              <a:buNone/>
               <a:defRPr sz="2400" b="1">
                 <a:solidFill>
                   <a:srgbClr val="171717"/>
@@ -6533,6 +6675,7 @@
               </a:defRPr>
             </a:lvl5pPr>
             <a:lvl6pPr>
+              <a:buNone/>
               <a:defRPr sz="2400" b="1">
                 <a:solidFill>
                   <a:srgbClr val="171717"/>
@@ -6543,6 +6686,7 @@
               </a:defRPr>
             </a:lvl6pPr>
             <a:lvl7pPr>
+              <a:buNone/>
               <a:defRPr sz="2400" b="1">
                 <a:solidFill>
                   <a:srgbClr val="171717"/>
@@ -6553,6 +6697,7 @@
               </a:defRPr>
             </a:lvl7pPr>
             <a:lvl8pPr>
+              <a:buNone/>
               <a:defRPr sz="2400" b="1">
                 <a:solidFill>
                   <a:srgbClr val="171717"/>
@@ -6563,6 +6708,7 @@
               </a:defRPr>
             </a:lvl8pPr>
             <a:lvl9pPr>
+              <a:buNone/>
               <a:defRPr sz="2400" b="1">
                 <a:solidFill>
                   <a:srgbClr val="171717"/>
@@ -6575,6 +6721,7 @@
           </a:lstStyle>
           <a:p xmlns:a="http://schemas.openxmlformats.org/drawingml/2006/main">
             <a:pPr>
+              <a:buNone/>
               <a:defRPr sz="2400" b="1">
                 <a:solidFill>
                   <a:srgbClr val="171717"/>
@@ -6639,6 +6786,7 @@
               </a:defRPr>
             </a:defPPr>
             <a:lvl1pPr>
+              <a:buNone/>
               <a:defRPr sz="1875" b="0">
                 <a:solidFill>
                   <a:srgbClr val="171717"/>
@@ -6649,6 +6797,7 @@
               </a:defRPr>
             </a:lvl1pPr>
             <a:lvl2pPr>
+              <a:buNone/>
               <a:defRPr sz="1875" b="0">
                 <a:solidFill>
                   <a:srgbClr val="171717"/>
@@ -6659,6 +6808,7 @@
               </a:defRPr>
             </a:lvl2pPr>
             <a:lvl3pPr>
+              <a:buNone/>
               <a:defRPr sz="1875" b="0">
                 <a:solidFill>
                   <a:srgbClr val="171717"/>
@@ -6669,6 +6819,7 @@
               </a:defRPr>
             </a:lvl3pPr>
             <a:lvl4pPr>
+              <a:buNone/>
               <a:defRPr sz="1875" b="0">
                 <a:solidFill>
                   <a:srgbClr val="171717"/>
@@ -6679,6 +6830,7 @@
               </a:defRPr>
             </a:lvl4pPr>
             <a:lvl5pPr>
+              <a:buNone/>
               <a:defRPr sz="1875" b="0">
                 <a:solidFill>
                   <a:srgbClr val="171717"/>
@@ -6689,6 +6841,7 @@
               </a:defRPr>
             </a:lvl5pPr>
             <a:lvl6pPr>
+              <a:buNone/>
               <a:defRPr sz="1875" b="0">
                 <a:solidFill>
                   <a:srgbClr val="171717"/>
@@ -6699,6 +6852,7 @@
               </a:defRPr>
             </a:lvl6pPr>
             <a:lvl7pPr>
+              <a:buNone/>
               <a:defRPr sz="1875" b="0">
                 <a:solidFill>
                   <a:srgbClr val="171717"/>
@@ -6709,6 +6863,7 @@
               </a:defRPr>
             </a:lvl7pPr>
             <a:lvl8pPr>
+              <a:buNone/>
               <a:defRPr sz="1875" b="0">
                 <a:solidFill>
                   <a:srgbClr val="171717"/>
@@ -6719,6 +6874,7 @@
               </a:defRPr>
             </a:lvl8pPr>
             <a:lvl9pPr>
+              <a:buNone/>
               <a:defRPr sz="1875" b="0">
                 <a:solidFill>
                   <a:srgbClr val="171717"/>
@@ -6731,6 +6887,7 @@
           </a:lstStyle>
           <a:p xmlns:a="http://schemas.openxmlformats.org/drawingml/2006/main">
             <a:pPr>
+              <a:buNone/>
               <a:defRPr sz="1875" b="0">
                 <a:solidFill>
                   <a:srgbClr val="171717"/>
@@ -6749,11 +6906,12 @@
                 <a:ea typeface="Arial"/>
                 <a:cs typeface="Arial"/>
               </a:rPr>
-              <a:t>Learn from examples</a:t>
+              <a:t>XGBoost learned trees</a:t>
             </a:r>
           </a:p>
           <a:p xmlns:a="http://schemas.openxmlformats.org/drawingml/2006/main">
             <a:pPr>
+              <a:buNone/>
               <a:defRPr sz="1875" b="0">
                 <a:solidFill>
                   <a:srgbClr val="171717"/>
@@ -6772,7 +6930,7 @@
                 <a:ea typeface="Arial"/>
                 <a:cs typeface="Arial"/>
               </a:rPr>
-              <a:t>Predict daily water use</a:t>
+              <a:t>Daily water use (MGD)</a:t>
             </a:r>
           </a:p>
         </p:txBody>
@@ -6818,6 +6976,7 @@
               </a:defRPr>
             </a:defPPr>
             <a:lvl1pPr>
+              <a:buNone/>
               <a:defRPr sz="2400" b="1">
                 <a:solidFill>
                   <a:srgbClr val="171717"/>
@@ -6828,6 +6987,7 @@
               </a:defRPr>
             </a:lvl1pPr>
             <a:lvl2pPr>
+              <a:buNone/>
               <a:defRPr sz="2400" b="1">
                 <a:solidFill>
                   <a:srgbClr val="171717"/>
@@ -6838,6 +6998,7 @@
               </a:defRPr>
             </a:lvl2pPr>
             <a:lvl3pPr>
+              <a:buNone/>
               <a:defRPr sz="2400" b="1">
                 <a:solidFill>
                   <a:srgbClr val="171717"/>
@@ -6848,6 +7009,7 @@
               </a:defRPr>
             </a:lvl3pPr>
             <a:lvl4pPr>
+              <a:buNone/>
               <a:defRPr sz="2400" b="1">
                 <a:solidFill>
                   <a:srgbClr val="171717"/>
@@ -6858,6 +7020,7 @@
               </a:defRPr>
             </a:lvl4pPr>
             <a:lvl5pPr>
+              <a:buNone/>
               <a:defRPr sz="2400" b="1">
                 <a:solidFill>
                   <a:srgbClr val="171717"/>
@@ -6868,6 +7031,7 @@
               </a:defRPr>
             </a:lvl5pPr>
             <a:lvl6pPr>
+              <a:buNone/>
               <a:defRPr sz="2400" b="1">
                 <a:solidFill>
                   <a:srgbClr val="171717"/>
@@ -6878,6 +7042,7 @@
               </a:defRPr>
             </a:lvl6pPr>
             <a:lvl7pPr>
+              <a:buNone/>
               <a:defRPr sz="2400" b="1">
                 <a:solidFill>
                   <a:srgbClr val="171717"/>
@@ -6888,6 +7053,7 @@
               </a:defRPr>
             </a:lvl7pPr>
             <a:lvl8pPr>
+              <a:buNone/>
               <a:defRPr sz="2400" b="1">
                 <a:solidFill>
                   <a:srgbClr val="171717"/>
@@ -6898,6 +7064,7 @@
               </a:defRPr>
             </a:lvl8pPr>
             <a:lvl9pPr>
+              <a:buNone/>
               <a:defRPr sz="2400" b="1">
                 <a:solidFill>
                   <a:srgbClr val="171717"/>
@@ -6910,6 +7077,7 @@
           </a:lstStyle>
           <a:p xmlns:a="http://schemas.openxmlformats.org/drawingml/2006/main">
             <a:pPr>
+              <a:buNone/>
               <a:defRPr sz="2400" b="1">
                 <a:solidFill>
                   <a:srgbClr val="171717"/>
@@ -6974,6 +7142,7 @@
               </a:defRPr>
             </a:defPPr>
             <a:lvl1pPr>
+              <a:buNone/>
               <a:defRPr sz="1875" b="0">
                 <a:solidFill>
                   <a:srgbClr val="171717"/>
@@ -6984,6 +7153,7 @@
               </a:defRPr>
             </a:lvl1pPr>
             <a:lvl2pPr>
+              <a:buNone/>
               <a:defRPr sz="1875" b="0">
                 <a:solidFill>
                   <a:srgbClr val="171717"/>
@@ -6994,6 +7164,7 @@
               </a:defRPr>
             </a:lvl2pPr>
             <a:lvl3pPr>
+              <a:buNone/>
               <a:defRPr sz="1875" b="0">
                 <a:solidFill>
                   <a:srgbClr val="171717"/>
@@ -7004,6 +7175,7 @@
               </a:defRPr>
             </a:lvl3pPr>
             <a:lvl4pPr>
+              <a:buNone/>
               <a:defRPr sz="1875" b="0">
                 <a:solidFill>
                   <a:srgbClr val="171717"/>
@@ -7014,6 +7186,7 @@
               </a:defRPr>
             </a:lvl4pPr>
             <a:lvl5pPr>
+              <a:buNone/>
               <a:defRPr sz="1875" b="0">
                 <a:solidFill>
                   <a:srgbClr val="171717"/>
@@ -7024,6 +7197,7 @@
               </a:defRPr>
             </a:lvl5pPr>
             <a:lvl6pPr>
+              <a:buNone/>
               <a:defRPr sz="1875" b="0">
                 <a:solidFill>
                   <a:srgbClr val="171717"/>
@@ -7034,6 +7208,7 @@
               </a:defRPr>
             </a:lvl6pPr>
             <a:lvl7pPr>
+              <a:buNone/>
               <a:defRPr sz="1875" b="0">
                 <a:solidFill>
                   <a:srgbClr val="171717"/>
@@ -7044,6 +7219,7 @@
               </a:defRPr>
             </a:lvl7pPr>
             <a:lvl8pPr>
+              <a:buNone/>
               <a:defRPr sz="1875" b="0">
                 <a:solidFill>
                   <a:srgbClr val="171717"/>
@@ -7054,6 +7230,7 @@
               </a:defRPr>
             </a:lvl8pPr>
             <a:lvl9pPr>
+              <a:buNone/>
               <a:defRPr sz="1875" b="0">
                 <a:solidFill>
                   <a:srgbClr val="171717"/>
@@ -7066,6 +7243,7 @@
           </a:lstStyle>
           <a:p xmlns:a="http://schemas.openxmlformats.org/drawingml/2006/main">
             <a:pPr>
+              <a:buNone/>
               <a:defRPr sz="1875" b="0">
                 <a:solidFill>
                   <a:srgbClr val="171717"/>
@@ -7084,11 +7262,12 @@
                 <a:ea typeface="Arial"/>
                 <a:cs typeface="Arial"/>
               </a:rPr>
-              <a:t>Cooling limits</a:t>
+              <a:t>Symbolic energy rules</a:t>
             </a:r>
           </a:p>
           <a:p xmlns:a="http://schemas.openxmlformats.org/drawingml/2006/main">
             <a:pPr>
+              <a:buNone/>
               <a:defRPr sz="1875" b="0">
                 <a:solidFill>
                   <a:srgbClr val="171717"/>
@@ -7107,7 +7286,7 @@
                 <a:ea typeface="Arial"/>
                 <a:cs typeface="Arial"/>
               </a:rPr>
-              <a:t>Local permit quotes</a:t>
+              <a:t>Constrain + flag (E3)</a:t>
             </a:r>
           </a:p>
         </p:txBody>
@@ -7153,6 +7332,7 @@
               </a:defRPr>
             </a:defPPr>
             <a:lvl1pPr>
+              <a:buNone/>
               <a:defRPr sz="2400" b="1">
                 <a:solidFill>
                   <a:srgbClr val="171717"/>
@@ -7163,6 +7343,7 @@
               </a:defRPr>
             </a:lvl1pPr>
             <a:lvl2pPr>
+              <a:buNone/>
               <a:defRPr sz="2400" b="1">
                 <a:solidFill>
                   <a:srgbClr val="171717"/>
@@ -7173,6 +7354,7 @@
               </a:defRPr>
             </a:lvl2pPr>
             <a:lvl3pPr>
+              <a:buNone/>
               <a:defRPr sz="2400" b="1">
                 <a:solidFill>
                   <a:srgbClr val="171717"/>
@@ -7183,6 +7365,7 @@
               </a:defRPr>
             </a:lvl3pPr>
             <a:lvl4pPr>
+              <a:buNone/>
               <a:defRPr sz="2400" b="1">
                 <a:solidFill>
                   <a:srgbClr val="171717"/>
@@ -7193,6 +7376,7 @@
               </a:defRPr>
             </a:lvl4pPr>
             <a:lvl5pPr>
+              <a:buNone/>
               <a:defRPr sz="2400" b="1">
                 <a:solidFill>
                   <a:srgbClr val="171717"/>
@@ -7203,6 +7387,7 @@
               </a:defRPr>
             </a:lvl5pPr>
             <a:lvl6pPr>
+              <a:buNone/>
               <a:defRPr sz="2400" b="1">
                 <a:solidFill>
                   <a:srgbClr val="171717"/>
@@ -7213,6 +7398,7 @@
               </a:defRPr>
             </a:lvl6pPr>
             <a:lvl7pPr>
+              <a:buNone/>
               <a:defRPr sz="2400" b="1">
                 <a:solidFill>
                   <a:srgbClr val="171717"/>
@@ -7223,6 +7409,7 @@
               </a:defRPr>
             </a:lvl7pPr>
             <a:lvl8pPr>
+              <a:buNone/>
               <a:defRPr sz="2400" b="1">
                 <a:solidFill>
                   <a:srgbClr val="171717"/>
@@ -7233,6 +7420,7 @@
               </a:defRPr>
             </a:lvl8pPr>
             <a:lvl9pPr>
+              <a:buNone/>
               <a:defRPr sz="2400" b="1">
                 <a:solidFill>
                   <a:srgbClr val="171717"/>
@@ -7245,6 +7433,7 @@
           </a:lstStyle>
           <a:p xmlns:a="http://schemas.openxmlformats.org/drawingml/2006/main">
             <a:pPr>
+              <a:buNone/>
               <a:defRPr sz="2400" b="1">
                 <a:solidFill>
                   <a:srgbClr val="171717"/>
@@ -7309,6 +7498,7 @@
               </a:defRPr>
             </a:defPPr>
             <a:lvl1pPr>
+              <a:buNone/>
               <a:defRPr sz="1875" b="0">
                 <a:solidFill>
                   <a:srgbClr val="171717"/>
@@ -7319,6 +7509,7 @@
               </a:defRPr>
             </a:lvl1pPr>
             <a:lvl2pPr>
+              <a:buNone/>
               <a:defRPr sz="1875" b="0">
                 <a:solidFill>
                   <a:srgbClr val="171717"/>
@@ -7329,6 +7520,7 @@
               </a:defRPr>
             </a:lvl2pPr>
             <a:lvl3pPr>
+              <a:buNone/>
               <a:defRPr sz="1875" b="0">
                 <a:solidFill>
                   <a:srgbClr val="171717"/>
@@ -7339,6 +7531,7 @@
               </a:defRPr>
             </a:lvl3pPr>
             <a:lvl4pPr>
+              <a:buNone/>
               <a:defRPr sz="1875" b="0">
                 <a:solidFill>
                   <a:srgbClr val="171717"/>
@@ -7349,6 +7542,7 @@
               </a:defRPr>
             </a:lvl4pPr>
             <a:lvl5pPr>
+              <a:buNone/>
               <a:defRPr sz="1875" b="0">
                 <a:solidFill>
                   <a:srgbClr val="171717"/>
@@ -7359,6 +7553,7 @@
               </a:defRPr>
             </a:lvl5pPr>
             <a:lvl6pPr>
+              <a:buNone/>
               <a:defRPr sz="1875" b="0">
                 <a:solidFill>
                   <a:srgbClr val="171717"/>
@@ -7369,6 +7564,7 @@
               </a:defRPr>
             </a:lvl6pPr>
             <a:lvl7pPr>
+              <a:buNone/>
               <a:defRPr sz="1875" b="0">
                 <a:solidFill>
                   <a:srgbClr val="171717"/>
@@ -7379,6 +7575,7 @@
               </a:defRPr>
             </a:lvl7pPr>
             <a:lvl8pPr>
+              <a:buNone/>
               <a:defRPr sz="1875" b="0">
                 <a:solidFill>
                   <a:srgbClr val="171717"/>
@@ -7389,6 +7586,7 @@
               </a:defRPr>
             </a:lvl8pPr>
             <a:lvl9pPr>
+              <a:buNone/>
               <a:defRPr sz="1875" b="0">
                 <a:solidFill>
                   <a:srgbClr val="171717"/>
@@ -7401,6 +7599,7 @@
           </a:lstStyle>
           <a:p xmlns:a="http://schemas.openxmlformats.org/drawingml/2006/main">
             <a:pPr>
+              <a:buNone/>
               <a:defRPr sz="1875" b="0">
                 <a:solidFill>
                   <a:srgbClr val="171717"/>
@@ -7424,6 +7623,7 @@
           </a:p>
           <a:p xmlns:a="http://schemas.openxmlformats.org/drawingml/2006/main">
             <a:pPr>
+              <a:buNone/>
               <a:defRPr sz="1875" b="0">
                 <a:solidFill>
                   <a:srgbClr val="171717"/>
@@ -7463,8 +7663,8 @@
         </p:nvSpPr>
         <p:spPr>
           <a:xfrm xmlns:a="http://schemas.openxmlformats.org/drawingml/2006/main">
-            <a:off x="609600" y="4381500"/>
-            <a:ext cx="10953750" cy="619125"/>
+            <a:off x="609600" y="4095750"/>
+            <a:ext cx="10953750" cy="476250"/>
           </a:xfrm>
           <a:prstGeom xmlns:a="http://schemas.openxmlformats.org/drawingml/2006/main" prst="rect">
             <a:avLst/>
@@ -7478,7 +7678,7 @@
           <a:bodyPr xmlns:a="http://schemas.openxmlformats.org/drawingml/2006/main" wrap="none" lIns="0" tIns="0" rIns="0" bIns="0"/>
           <a:lstStyle xmlns:a="http://schemas.openxmlformats.org/drawingml/2006/main">
             <a:defPPr>
-              <a:defRPr sz="2100" b="0">
+              <a:defRPr sz="1875" b="0">
                 <a:solidFill>
                   <a:srgbClr val="171717"/>
                 </a:solidFill>
@@ -7488,6 +7688,7 @@
               </a:defRPr>
             </a:defPPr>
             <a:lvl1pPr>
+              <a:buNone/>
               <a:defRPr sz="2100" b="0">
                 <a:solidFill>
                   <a:srgbClr val="171717"/>
@@ -7498,6 +7699,7 @@
               </a:defRPr>
             </a:lvl1pPr>
             <a:lvl2pPr>
+              <a:buNone/>
               <a:defRPr sz="2100" b="0">
                 <a:solidFill>
                   <a:srgbClr val="171717"/>
@@ -7508,6 +7710,7 @@
               </a:defRPr>
             </a:lvl2pPr>
             <a:lvl3pPr>
+              <a:buNone/>
               <a:defRPr sz="2100" b="0">
                 <a:solidFill>
                   <a:srgbClr val="171717"/>
@@ -7518,6 +7721,7 @@
               </a:defRPr>
             </a:lvl3pPr>
             <a:lvl4pPr>
+              <a:buNone/>
               <a:defRPr sz="2100" b="0">
                 <a:solidFill>
                   <a:srgbClr val="171717"/>
@@ -7528,6 +7732,7 @@
               </a:defRPr>
             </a:lvl4pPr>
             <a:lvl5pPr>
+              <a:buNone/>
               <a:defRPr sz="2100" b="0">
                 <a:solidFill>
                   <a:srgbClr val="171717"/>
@@ -7538,6 +7743,7 @@
               </a:defRPr>
             </a:lvl5pPr>
             <a:lvl6pPr>
+              <a:buNone/>
               <a:defRPr sz="2100" b="0">
                 <a:solidFill>
                   <a:srgbClr val="171717"/>
@@ -7548,6 +7754,7 @@
               </a:defRPr>
             </a:lvl6pPr>
             <a:lvl7pPr>
+              <a:buNone/>
               <a:defRPr sz="2100" b="0">
                 <a:solidFill>
                   <a:srgbClr val="171717"/>
@@ -7558,6 +7765,7 @@
               </a:defRPr>
             </a:lvl7pPr>
             <a:lvl8pPr>
+              <a:buNone/>
               <a:defRPr sz="2100" b="0">
                 <a:solidFill>
                   <a:srgbClr val="171717"/>
@@ -7568,6 +7776,7 @@
               </a:defRPr>
             </a:lvl8pPr>
             <a:lvl9pPr>
+              <a:buNone/>
               <a:defRPr sz="2100" b="0">
                 <a:solidFill>
                   <a:srgbClr val="171717"/>
@@ -7580,7 +7789,8 @@
           </a:lstStyle>
           <a:p xmlns:a="http://schemas.openxmlformats.org/drawingml/2006/main">
             <a:pPr>
-              <a:defRPr sz="2100" b="0">
+              <a:buNone/>
+              <a:defRPr sz="1875" b="0">
                 <a:solidFill>
                   <a:srgbClr val="171717"/>
                 </a:solidFill>
@@ -7590,7 +7800,7 @@
               </a:defRPr>
             </a:pPr>
             <a:r>
-              <a:rPr sz="2100" b="0">
+              <a:rPr sz="1875" b="0">
                 <a:solidFill>
                   <a:srgbClr val="171717"/>
                 </a:solidFill>
@@ -7598,7 +7808,7 @@
                 <a:ea typeface="Arial"/>
                 <a:cs typeface="Arial"/>
               </a:rPr>
-              <a:t>The model learns patterns. Permit search compares words and checks place.</a:t>
+              <a:t>Features: MW, air/wet-bulb temperature, river flow, PDSI drought, month.</a:t>
             </a:r>
           </a:p>
         </p:txBody>
@@ -7619,8 +7829,8 @@
         </p:nvSpPr>
         <p:spPr>
           <a:xfrm xmlns:a="http://schemas.openxmlformats.org/drawingml/2006/main">
-            <a:off x="609600" y="5191125"/>
-            <a:ext cx="10953750" cy="571500"/>
+            <a:off x="609600" y="4714875"/>
+            <a:ext cx="10953750" cy="476250"/>
           </a:xfrm>
           <a:prstGeom xmlns:a="http://schemas.openxmlformats.org/drawingml/2006/main" prst="rect">
             <a:avLst/>
@@ -7634,7 +7844,7 @@
           <a:bodyPr xmlns:a="http://schemas.openxmlformats.org/drawingml/2006/main" wrap="none" lIns="0" tIns="0" rIns="0" bIns="0"/>
           <a:lstStyle xmlns:a="http://schemas.openxmlformats.org/drawingml/2006/main">
             <a:defPPr>
-              <a:defRPr sz="2100" b="0">
+              <a:defRPr sz="1875" b="0">
                 <a:solidFill>
                   <a:srgbClr val="171717"/>
                 </a:solidFill>
@@ -7644,6 +7854,7 @@
               </a:defRPr>
             </a:defPPr>
             <a:lvl1pPr>
+              <a:buNone/>
               <a:defRPr sz="2100" b="0">
                 <a:solidFill>
                   <a:srgbClr val="171717"/>
@@ -7654,6 +7865,7 @@
               </a:defRPr>
             </a:lvl1pPr>
             <a:lvl2pPr>
+              <a:buNone/>
               <a:defRPr sz="2100" b="0">
                 <a:solidFill>
                   <a:srgbClr val="171717"/>
@@ -7664,6 +7876,7 @@
               </a:defRPr>
             </a:lvl2pPr>
             <a:lvl3pPr>
+              <a:buNone/>
               <a:defRPr sz="2100" b="0">
                 <a:solidFill>
                   <a:srgbClr val="171717"/>
@@ -7674,6 +7887,7 @@
               </a:defRPr>
             </a:lvl3pPr>
             <a:lvl4pPr>
+              <a:buNone/>
               <a:defRPr sz="2100" b="0">
                 <a:solidFill>
                   <a:srgbClr val="171717"/>
@@ -7684,6 +7898,7 @@
               </a:defRPr>
             </a:lvl4pPr>
             <a:lvl5pPr>
+              <a:buNone/>
               <a:defRPr sz="2100" b="0">
                 <a:solidFill>
                   <a:srgbClr val="171717"/>
@@ -7694,6 +7909,7 @@
               </a:defRPr>
             </a:lvl5pPr>
             <a:lvl6pPr>
+              <a:buNone/>
               <a:defRPr sz="2100" b="0">
                 <a:solidFill>
                   <a:srgbClr val="171717"/>
@@ -7704,6 +7920,7 @@
               </a:defRPr>
             </a:lvl6pPr>
             <a:lvl7pPr>
+              <a:buNone/>
               <a:defRPr sz="2100" b="0">
                 <a:solidFill>
                   <a:srgbClr val="171717"/>
@@ -7714,6 +7931,7 @@
               </a:defRPr>
             </a:lvl7pPr>
             <a:lvl8pPr>
+              <a:buNone/>
               <a:defRPr sz="2100" b="0">
                 <a:solidFill>
                   <a:srgbClr val="171717"/>
@@ -7724,6 +7942,7 @@
               </a:defRPr>
             </a:lvl8pPr>
             <a:lvl9pPr>
+              <a:buNone/>
               <a:defRPr sz="2100" b="0">
                 <a:solidFill>
                   <a:srgbClr val="171717"/>
@@ -7736,7 +7955,8 @@
           </a:lstStyle>
           <a:p xmlns:a="http://schemas.openxmlformats.org/drawingml/2006/main">
             <a:pPr>
-              <a:defRPr sz="2100" b="0">
+              <a:buNone/>
+              <a:defRPr sz="1875" b="0">
                 <a:solidFill>
                   <a:srgbClr val="171717"/>
                 </a:solidFill>
@@ -7746,7 +7966,7 @@
               </a:defRPr>
             </a:pPr>
             <a:r>
-              <a:rPr sz="2100" b="0">
+              <a:rPr sz="1875" b="0">
                 <a:solidFill>
                   <a:srgbClr val="171717"/>
                 </a:solidFill>
@@ -7754,7 +7974,163 @@
                 <a:ea typeface="Arial"/>
                 <a:cs typeface="Arial"/>
               </a:rPr>
-              <a:t>The program returns quotes. A person decides how a permit applies.</a:t>
+              <a:t>Permit path: text -&gt; TF-IDF vectors + HUC/location filter -&gt; exact quotes (E4).</a:t>
+            </a:r>
+          </a:p>
+        </p:txBody>
+      </p:sp>
+      <p:sp>
+        <p:nvSpPr>
+          <p:cNvPr id="15" name="">
+            <a:extLst xmlns:a="http://schemas.openxmlformats.org/drawingml/2006/main">
+              <a:ext uri="{FF2B5EF4-FFF2-40B4-BE49-F238E27FC236}">
+                <a16:creationId xmlns:a16="http://schemas.microsoft.com/office/drawing/2014/main" id="{EA9F03A0-50D3-436D-A400-73F6AC0B2460}"/>
+              </a:ext>
+            </a:extLst>
+          </p:cNvPr>
+          <p:cNvSpPr>
+            <a:spLocks xmlns:a="http://schemas.openxmlformats.org/drawingml/2006/main" noGrp="1"/>
+          </p:cNvSpPr>
+          <p:nvPr/>
+        </p:nvSpPr>
+        <p:spPr>
+          <a:xfrm xmlns:a="http://schemas.openxmlformats.org/drawingml/2006/main">
+            <a:off x="609600" y="5381625"/>
+            <a:ext cx="10953750" cy="476250"/>
+          </a:xfrm>
+          <a:prstGeom xmlns:a="http://schemas.openxmlformats.org/drawingml/2006/main" prst="rect">
+            <a:avLst/>
+          </a:prstGeom>
+          <a:noFill xmlns:a="http://schemas.openxmlformats.org/drawingml/2006/main"/>
+          <a:ln xmlns:a="http://schemas.openxmlformats.org/drawingml/2006/main" w="0">
+            <a:noFill/>
+          </a:ln>
+        </p:spPr>
+        <p:txBody>
+          <a:bodyPr xmlns:a="http://schemas.openxmlformats.org/drawingml/2006/main"/>
+          <a:lstStyle xmlns:a="http://schemas.openxmlformats.org/drawingml/2006/main">
+            <a:defPPr>
+              <a:defRPr sz="1800">
+                <a:solidFill>
+                  <a:srgbClr val="171717"/>
+                </a:solidFill>
+                <a:latin typeface="Arial"/>
+                <a:ea typeface="Arial"/>
+                <a:cs typeface="Arial"/>
+              </a:defRPr>
+            </a:defPPr>
+            <a:lvl1pPr>
+              <a:defRPr sz="1800">
+                <a:solidFill>
+                  <a:srgbClr val="171717"/>
+                </a:solidFill>
+                <a:latin typeface="Arial"/>
+                <a:ea typeface="Arial"/>
+                <a:cs typeface="Arial"/>
+              </a:defRPr>
+            </a:lvl1pPr>
+            <a:lvl2pPr>
+              <a:defRPr sz="1800">
+                <a:solidFill>
+                  <a:srgbClr val="171717"/>
+                </a:solidFill>
+                <a:latin typeface="Arial"/>
+                <a:ea typeface="Arial"/>
+                <a:cs typeface="Arial"/>
+              </a:defRPr>
+            </a:lvl2pPr>
+            <a:lvl3pPr>
+              <a:defRPr sz="1800">
+                <a:solidFill>
+                  <a:srgbClr val="171717"/>
+                </a:solidFill>
+                <a:latin typeface="Arial"/>
+                <a:ea typeface="Arial"/>
+                <a:cs typeface="Arial"/>
+              </a:defRPr>
+            </a:lvl3pPr>
+            <a:lvl4pPr>
+              <a:defRPr sz="1800">
+                <a:solidFill>
+                  <a:srgbClr val="171717"/>
+                </a:solidFill>
+                <a:latin typeface="Arial"/>
+                <a:ea typeface="Arial"/>
+                <a:cs typeface="Arial"/>
+              </a:defRPr>
+            </a:lvl4pPr>
+            <a:lvl5pPr>
+              <a:defRPr sz="1800">
+                <a:solidFill>
+                  <a:srgbClr val="171717"/>
+                </a:solidFill>
+                <a:latin typeface="Arial"/>
+                <a:ea typeface="Arial"/>
+                <a:cs typeface="Arial"/>
+              </a:defRPr>
+            </a:lvl5pPr>
+            <a:lvl6pPr>
+              <a:defRPr sz="1800">
+                <a:solidFill>
+                  <a:srgbClr val="171717"/>
+                </a:solidFill>
+                <a:latin typeface="Arial"/>
+                <a:ea typeface="Arial"/>
+                <a:cs typeface="Arial"/>
+              </a:defRPr>
+            </a:lvl6pPr>
+            <a:lvl7pPr>
+              <a:defRPr sz="1800">
+                <a:solidFill>
+                  <a:srgbClr val="171717"/>
+                </a:solidFill>
+                <a:latin typeface="Arial"/>
+                <a:ea typeface="Arial"/>
+                <a:cs typeface="Arial"/>
+              </a:defRPr>
+            </a:lvl7pPr>
+            <a:lvl8pPr>
+              <a:defRPr sz="1800">
+                <a:solidFill>
+                  <a:srgbClr val="171717"/>
+                </a:solidFill>
+                <a:latin typeface="Arial"/>
+                <a:ea typeface="Arial"/>
+                <a:cs typeface="Arial"/>
+              </a:defRPr>
+            </a:lvl8pPr>
+            <a:lvl9pPr>
+              <a:defRPr sz="1800">
+                <a:solidFill>
+                  <a:srgbClr val="171717"/>
+                </a:solidFill>
+                <a:latin typeface="Arial"/>
+                <a:ea typeface="Arial"/>
+                <a:cs typeface="Arial"/>
+              </a:defRPr>
+            </a:lvl9pPr>
+          </a:lstStyle>
+          <a:p xmlns:a="http://schemas.openxmlformats.org/drawingml/2006/main">
+            <a:pPr>
+              <a:defRPr sz="1800">
+                <a:solidFill>
+                  <a:srgbClr val="171717"/>
+                </a:solidFill>
+                <a:latin typeface="Arial"/>
+                <a:ea typeface="Arial"/>
+                <a:cs typeface="Arial"/>
+              </a:defRPr>
+            </a:pPr>
+            <a:r>
+              <a:rPr sz="1800">
+                <a:solidFill>
+                  <a:srgbClr val="171717"/>
+                </a:solidFill>
+                <a:latin typeface="Arial"/>
+                <a:ea typeface="Arial"/>
+                <a:cs typeface="Arial"/>
+              </a:rPr>
+              <a:t>E3: -1 MGD -&gt; 0 + warning. E4: wrong watershed -&gt; no permit passage.</a:t>
             </a:r>
           </a:p>
         </p:txBody>
@@ -7829,6 +8205,7 @@
               </a:defRPr>
             </a:defPPr>
             <a:lvl1pPr>
+              <a:buNone/>
               <a:defRPr sz="3300" b="1">
                 <a:solidFill>
                   <a:srgbClr val="171717"/>
@@ -7839,6 +8216,7 @@
               </a:defRPr>
             </a:lvl1pPr>
             <a:lvl2pPr>
+              <a:buNone/>
               <a:defRPr sz="3300" b="1">
                 <a:solidFill>
                   <a:srgbClr val="171717"/>
@@ -7849,6 +8227,7 @@
               </a:defRPr>
             </a:lvl2pPr>
             <a:lvl3pPr>
+              <a:buNone/>
               <a:defRPr sz="3300" b="1">
                 <a:solidFill>
                   <a:srgbClr val="171717"/>
@@ -7859,6 +8238,7 @@
               </a:defRPr>
             </a:lvl3pPr>
             <a:lvl4pPr>
+              <a:buNone/>
               <a:defRPr sz="3300" b="1">
                 <a:solidFill>
                   <a:srgbClr val="171717"/>
@@ -7869,6 +8249,7 @@
               </a:defRPr>
             </a:lvl4pPr>
             <a:lvl5pPr>
+              <a:buNone/>
               <a:defRPr sz="3300" b="1">
                 <a:solidFill>
                   <a:srgbClr val="171717"/>
@@ -7879,6 +8260,7 @@
               </a:defRPr>
             </a:lvl5pPr>
             <a:lvl6pPr>
+              <a:buNone/>
               <a:defRPr sz="3300" b="1">
                 <a:solidFill>
                   <a:srgbClr val="171717"/>
@@ -7889,6 +8271,7 @@
               </a:defRPr>
             </a:lvl6pPr>
             <a:lvl7pPr>
+              <a:buNone/>
               <a:defRPr sz="3300" b="1">
                 <a:solidFill>
                   <a:srgbClr val="171717"/>
@@ -7899,6 +8282,7 @@
               </a:defRPr>
             </a:lvl7pPr>
             <a:lvl8pPr>
+              <a:buNone/>
               <a:defRPr sz="3300" b="1">
                 <a:solidFill>
                   <a:srgbClr val="171717"/>
@@ -7909,6 +8293,7 @@
               </a:defRPr>
             </a:lvl8pPr>
             <a:lvl9pPr>
+              <a:buNone/>
               <a:defRPr sz="3300" b="1">
                 <a:solidFill>
                   <a:srgbClr val="171717"/>
@@ -7921,6 +8306,7 @@
           </a:lstStyle>
           <a:p xmlns:a="http://schemas.openxmlformats.org/drawingml/2006/main">
             <a:pPr>
+              <a:buNone/>
               <a:defRPr sz="3300" b="1">
                 <a:solidFill>
                   <a:srgbClr val="171717"/>
@@ -7985,6 +8371,7 @@
               </a:defRPr>
             </a:defPPr>
             <a:lvl1pPr>
+              <a:buNone/>
               <a:defRPr sz="1275" b="0">
                 <a:solidFill>
                   <a:srgbClr val="555555"/>
@@ -7995,6 +8382,7 @@
               </a:defRPr>
             </a:lvl1pPr>
             <a:lvl2pPr>
+              <a:buNone/>
               <a:defRPr sz="1275" b="0">
                 <a:solidFill>
                   <a:srgbClr val="555555"/>
@@ -8005,6 +8393,7 @@
               </a:defRPr>
             </a:lvl2pPr>
             <a:lvl3pPr>
+              <a:buNone/>
               <a:defRPr sz="1275" b="0">
                 <a:solidFill>
                   <a:srgbClr val="555555"/>
@@ -8015,6 +8404,7 @@
               </a:defRPr>
             </a:lvl3pPr>
             <a:lvl4pPr>
+              <a:buNone/>
               <a:defRPr sz="1275" b="0">
                 <a:solidFill>
                   <a:srgbClr val="555555"/>
@@ -8025,6 +8415,7 @@
               </a:defRPr>
             </a:lvl4pPr>
             <a:lvl5pPr>
+              <a:buNone/>
               <a:defRPr sz="1275" b="0">
                 <a:solidFill>
                   <a:srgbClr val="555555"/>
@@ -8035,6 +8426,7 @@
               </a:defRPr>
             </a:lvl5pPr>
             <a:lvl6pPr>
+              <a:buNone/>
               <a:defRPr sz="1275" b="0">
                 <a:solidFill>
                   <a:srgbClr val="555555"/>
@@ -8045,6 +8437,7 @@
               </a:defRPr>
             </a:lvl6pPr>
             <a:lvl7pPr>
+              <a:buNone/>
               <a:defRPr sz="1275" b="0">
                 <a:solidFill>
                   <a:srgbClr val="555555"/>
@@ -8055,6 +8448,7 @@
               </a:defRPr>
             </a:lvl7pPr>
             <a:lvl8pPr>
+              <a:buNone/>
               <a:defRPr sz="1275" b="0">
                 <a:solidFill>
                   <a:srgbClr val="555555"/>
@@ -8065,6 +8459,7 @@
               </a:defRPr>
             </a:lvl8pPr>
             <a:lvl9pPr>
+              <a:buNone/>
               <a:defRPr sz="1275" b="0">
                 <a:solidFill>
                   <a:srgbClr val="555555"/>
@@ -8077,6 +8472,7 @@
           </a:lstStyle>
           <a:p xmlns:a="http://schemas.openxmlformats.org/drawingml/2006/main">
             <a:pPr>
+              <a:buNone/>
               <a:defRPr sz="1275" b="0">
                 <a:solidFill>
                   <a:srgbClr val="555555"/>
@@ -8141,6 +8537,7 @@
               </a:defRPr>
             </a:defPPr>
             <a:lvl1pPr>
+              <a:buNone/>
               <a:defRPr sz="1275" b="0">
                 <a:solidFill>
                   <a:srgbClr val="555555"/>
@@ -8151,6 +8548,7 @@
               </a:defRPr>
             </a:lvl1pPr>
             <a:lvl2pPr>
+              <a:buNone/>
               <a:defRPr sz="1275" b="0">
                 <a:solidFill>
                   <a:srgbClr val="555555"/>
@@ -8161,6 +8559,7 @@
               </a:defRPr>
             </a:lvl2pPr>
             <a:lvl3pPr>
+              <a:buNone/>
               <a:defRPr sz="1275" b="0">
                 <a:solidFill>
                   <a:srgbClr val="555555"/>
@@ -8171,6 +8570,7 @@
               </a:defRPr>
             </a:lvl3pPr>
             <a:lvl4pPr>
+              <a:buNone/>
               <a:defRPr sz="1275" b="0">
                 <a:solidFill>
                   <a:srgbClr val="555555"/>
@@ -8181,6 +8581,7 @@
               </a:defRPr>
             </a:lvl4pPr>
             <a:lvl5pPr>
+              <a:buNone/>
               <a:defRPr sz="1275" b="0">
                 <a:solidFill>
                   <a:srgbClr val="555555"/>
@@ -8191,6 +8592,7 @@
               </a:defRPr>
             </a:lvl5pPr>
             <a:lvl6pPr>
+              <a:buNone/>
               <a:defRPr sz="1275" b="0">
                 <a:solidFill>
                   <a:srgbClr val="555555"/>
@@ -8201,6 +8603,7 @@
               </a:defRPr>
             </a:lvl6pPr>
             <a:lvl7pPr>
+              <a:buNone/>
               <a:defRPr sz="1275" b="0">
                 <a:solidFill>
                   <a:srgbClr val="555555"/>
@@ -8211,6 +8614,7 @@
               </a:defRPr>
             </a:lvl7pPr>
             <a:lvl8pPr>
+              <a:buNone/>
               <a:defRPr sz="1275" b="0">
                 <a:solidFill>
                   <a:srgbClr val="555555"/>
@@ -8221,6 +8625,7 @@
               </a:defRPr>
             </a:lvl8pPr>
             <a:lvl9pPr>
+              <a:buNone/>
               <a:defRPr sz="1275" b="0">
                 <a:solidFill>
                   <a:srgbClr val="555555"/>
@@ -8233,6 +8638,7 @@
           </a:lstStyle>
           <a:p xmlns:a="http://schemas.openxmlformats.org/drawingml/2006/main">
             <a:pPr>
+              <a:buNone/>
               <a:defRPr sz="1275" b="0">
                 <a:solidFill>
                   <a:srgbClr val="555555"/>
@@ -8297,6 +8703,7 @@
               </a:defRPr>
             </a:defPPr>
             <a:lvl1pPr>
+              <a:buNone/>
               <a:defRPr sz="2100" b="0">
                 <a:solidFill>
                   <a:srgbClr val="171717"/>
@@ -8307,6 +8714,7 @@
               </a:defRPr>
             </a:lvl1pPr>
             <a:lvl2pPr>
+              <a:buNone/>
               <a:defRPr sz="2100" b="0">
                 <a:solidFill>
                   <a:srgbClr val="171717"/>
@@ -8317,6 +8725,7 @@
               </a:defRPr>
             </a:lvl2pPr>
             <a:lvl3pPr>
+              <a:buNone/>
               <a:defRPr sz="2100" b="0">
                 <a:solidFill>
                   <a:srgbClr val="171717"/>
@@ -8327,6 +8736,7 @@
               </a:defRPr>
             </a:lvl3pPr>
             <a:lvl4pPr>
+              <a:buNone/>
               <a:defRPr sz="2100" b="0">
                 <a:solidFill>
                   <a:srgbClr val="171717"/>
@@ -8337,6 +8747,7 @@
               </a:defRPr>
             </a:lvl4pPr>
             <a:lvl5pPr>
+              <a:buNone/>
               <a:defRPr sz="2100" b="0">
                 <a:solidFill>
                   <a:srgbClr val="171717"/>
@@ -8347,6 +8758,7 @@
               </a:defRPr>
             </a:lvl5pPr>
             <a:lvl6pPr>
+              <a:buNone/>
               <a:defRPr sz="2100" b="0">
                 <a:solidFill>
                   <a:srgbClr val="171717"/>
@@ -8357,6 +8769,7 @@
               </a:defRPr>
             </a:lvl6pPr>
             <a:lvl7pPr>
+              <a:buNone/>
               <a:defRPr sz="2100" b="0">
                 <a:solidFill>
                   <a:srgbClr val="171717"/>
@@ -8367,6 +8780,7 @@
               </a:defRPr>
             </a:lvl7pPr>
             <a:lvl8pPr>
+              <a:buNone/>
               <a:defRPr sz="2100" b="0">
                 <a:solidFill>
                   <a:srgbClr val="171717"/>
@@ -8377,6 +8791,7 @@
               </a:defRPr>
             </a:lvl8pPr>
             <a:lvl9pPr>
+              <a:buNone/>
               <a:defRPr sz="2100" b="0">
                 <a:solidFill>
                   <a:srgbClr val="171717"/>
@@ -8389,6 +8804,7 @@
           </a:lstStyle>
           <a:p xmlns:a="http://schemas.openxmlformats.org/drawingml/2006/main">
             <a:pPr>
+              <a:buNone/>
               <a:defRPr sz="2100" b="0">
                 <a:solidFill>
                   <a:srgbClr val="171717"/>
@@ -8417,7 +8833,7 @@
           <p:cNvPr id="5" name="Chart">
             <a:extLst xmlns:a="http://schemas.openxmlformats.org/drawingml/2006/main">
               <a:ext uri="{FF2B5EF4-FFF2-40B4-BE49-F238E27FC236}">
-                <a16:creationId xmlns:a16="http://schemas.microsoft.com/office/drawing/2014/main" id="{6AA4F3BA-BDBF-4669-B31A-9A82C6977CD6}"/>
+                <a16:creationId xmlns:a16="http://schemas.microsoft.com/office/drawing/2014/main" id="{4EAE0968-DBF4-4458-A58A-7CF1ADC634CE}"/>
               </a:ext>
             </a:extLst>
           </p:cNvPr>
@@ -8430,7 +8846,7 @@
         </p:xfrm>
         <a:graphic xmlns:a="http://schemas.openxmlformats.org/drawingml/2006/main">
           <a:graphicData uri="http://schemas.openxmlformats.org/drawingml/2006/chart">
-            <c:chart xmlns:r="http://schemas.openxmlformats.org/officeDocument/2006/relationships" xmlns:c="http://schemas.openxmlformats.org/drawingml/2006/chart" r:id="R80f5d5fa6fe54af4"/>
+            <c:chart xmlns:r="http://schemas.openxmlformats.org/officeDocument/2006/relationships" xmlns:c="http://schemas.openxmlformats.org/drawingml/2006/chart" r:id="R8c2d02ee6cc44f4b"/>
           </a:graphicData>
         </a:graphic>
       </p:graphicFrame>
@@ -8475,6 +8891,7 @@
               </a:defRPr>
             </a:defPPr>
             <a:lvl1pPr>
+              <a:buNone/>
               <a:defRPr sz="2175" b="0">
                 <a:solidFill>
                   <a:srgbClr val="171717"/>
@@ -8485,6 +8902,7 @@
               </a:defRPr>
             </a:lvl1pPr>
             <a:lvl2pPr>
+              <a:buNone/>
               <a:defRPr sz="2175" b="0">
                 <a:solidFill>
                   <a:srgbClr val="171717"/>
@@ -8495,6 +8913,7 @@
               </a:defRPr>
             </a:lvl2pPr>
             <a:lvl3pPr>
+              <a:buNone/>
               <a:defRPr sz="2175" b="0">
                 <a:solidFill>
                   <a:srgbClr val="171717"/>
@@ -8505,6 +8924,7 @@
               </a:defRPr>
             </a:lvl3pPr>
             <a:lvl4pPr>
+              <a:buNone/>
               <a:defRPr sz="2175" b="0">
                 <a:solidFill>
                   <a:srgbClr val="171717"/>
@@ -8515,6 +8935,7 @@
               </a:defRPr>
             </a:lvl4pPr>
             <a:lvl5pPr>
+              <a:buNone/>
               <a:defRPr sz="2175" b="0">
                 <a:solidFill>
                   <a:srgbClr val="171717"/>
@@ -8525,6 +8946,7 @@
               </a:defRPr>
             </a:lvl5pPr>
             <a:lvl6pPr>
+              <a:buNone/>
               <a:defRPr sz="2175" b="0">
                 <a:solidFill>
                   <a:srgbClr val="171717"/>
@@ -8535,6 +8957,7 @@
               </a:defRPr>
             </a:lvl6pPr>
             <a:lvl7pPr>
+              <a:buNone/>
               <a:defRPr sz="2175" b="0">
                 <a:solidFill>
                   <a:srgbClr val="171717"/>
@@ -8545,6 +8968,7 @@
               </a:defRPr>
             </a:lvl7pPr>
             <a:lvl8pPr>
+              <a:buNone/>
               <a:defRPr sz="2175" b="0">
                 <a:solidFill>
                   <a:srgbClr val="171717"/>
@@ -8555,6 +8979,7 @@
               </a:defRPr>
             </a:lvl8pPr>
             <a:lvl9pPr>
+              <a:buNone/>
               <a:defRPr sz="2175" b="0">
                 <a:solidFill>
                   <a:srgbClr val="171717"/>
@@ -8567,6 +8992,7 @@
           </a:lstStyle>
           <a:p xmlns:a="http://schemas.openxmlformats.org/drawingml/2006/main">
             <a:pPr>
+              <a:buNone/>
               <a:defRPr sz="2175" b="0">
                 <a:solidFill>
                   <a:srgbClr val="171717"/>
@@ -8590,6 +9016,7 @@
           </a:p>
           <a:p xmlns:a="http://schemas.openxmlformats.org/drawingml/2006/main">
             <a:pPr>
+              <a:buNone/>
               <a:defRPr sz="2175" b="0">
                 <a:solidFill>
                   <a:srgbClr val="171717"/>
@@ -8654,6 +9081,7 @@
               </a:defRPr>
             </a:defPPr>
             <a:lvl1pPr>
+              <a:buNone/>
               <a:defRPr sz="2250" b="1">
                 <a:solidFill>
                   <a:srgbClr val="171717"/>
@@ -8664,6 +9092,7 @@
               </a:defRPr>
             </a:lvl1pPr>
             <a:lvl2pPr>
+              <a:buNone/>
               <a:defRPr sz="2250" b="1">
                 <a:solidFill>
                   <a:srgbClr val="171717"/>
@@ -8674,6 +9103,7 @@
               </a:defRPr>
             </a:lvl2pPr>
             <a:lvl3pPr>
+              <a:buNone/>
               <a:defRPr sz="2250" b="1">
                 <a:solidFill>
                   <a:srgbClr val="171717"/>
@@ -8684,6 +9114,7 @@
               </a:defRPr>
             </a:lvl3pPr>
             <a:lvl4pPr>
+              <a:buNone/>
               <a:defRPr sz="2250" b="1">
                 <a:solidFill>
                   <a:srgbClr val="171717"/>
@@ -8694,6 +9125,7 @@
               </a:defRPr>
             </a:lvl4pPr>
             <a:lvl5pPr>
+              <a:buNone/>
               <a:defRPr sz="2250" b="1">
                 <a:solidFill>
                   <a:srgbClr val="171717"/>
@@ -8704,6 +9136,7 @@
               </a:defRPr>
             </a:lvl5pPr>
             <a:lvl6pPr>
+              <a:buNone/>
               <a:defRPr sz="2250" b="1">
                 <a:solidFill>
                   <a:srgbClr val="171717"/>
@@ -8714,6 +9147,7 @@
               </a:defRPr>
             </a:lvl6pPr>
             <a:lvl7pPr>
+              <a:buNone/>
               <a:defRPr sz="2250" b="1">
                 <a:solidFill>
                   <a:srgbClr val="171717"/>
@@ -8724,6 +9158,7 @@
               </a:defRPr>
             </a:lvl7pPr>
             <a:lvl8pPr>
+              <a:buNone/>
               <a:defRPr sz="2250" b="1">
                 <a:solidFill>
                   <a:srgbClr val="171717"/>
@@ -8734,6 +9169,7 @@
               </a:defRPr>
             </a:lvl8pPr>
             <a:lvl9pPr>
+              <a:buNone/>
               <a:defRPr sz="2250" b="1">
                 <a:solidFill>
                   <a:srgbClr val="171717"/>
@@ -8746,6 +9182,7 @@
           </a:lstStyle>
           <a:p xmlns:a="http://schemas.openxmlformats.org/drawingml/2006/main">
             <a:pPr>
+              <a:buNone/>
               <a:defRPr sz="2250" b="1">
                 <a:solidFill>
                   <a:srgbClr val="171717"/>
@@ -8769,6 +9206,7 @@
           </a:p>
           <a:p xmlns:a="http://schemas.openxmlformats.org/drawingml/2006/main">
             <a:pPr>
+              <a:buNone/>
               <a:defRPr sz="2250" b="1">
                 <a:solidFill>
                   <a:srgbClr val="171717"/>
@@ -8792,6 +9230,7 @@
           </a:p>
           <a:p xmlns:a="http://schemas.openxmlformats.org/drawingml/2006/main">
             <a:pPr>
+              <a:buNone/>
               <a:defRPr sz="2250" b="1">
                 <a:solidFill>
                   <a:srgbClr val="171717"/>
@@ -8885,6 +9324,7 @@
               </a:defRPr>
             </a:defPPr>
             <a:lvl1pPr>
+              <a:buNone/>
               <a:defRPr sz="3300" b="1">
                 <a:solidFill>
                   <a:srgbClr val="171717"/>
@@ -8895,6 +9335,7 @@
               </a:defRPr>
             </a:lvl1pPr>
             <a:lvl2pPr>
+              <a:buNone/>
               <a:defRPr sz="3300" b="1">
                 <a:solidFill>
                   <a:srgbClr val="171717"/>
@@ -8905,6 +9346,7 @@
               </a:defRPr>
             </a:lvl2pPr>
             <a:lvl3pPr>
+              <a:buNone/>
               <a:defRPr sz="3300" b="1">
                 <a:solidFill>
                   <a:srgbClr val="171717"/>
@@ -8915,6 +9357,7 @@
               </a:defRPr>
             </a:lvl3pPr>
             <a:lvl4pPr>
+              <a:buNone/>
               <a:defRPr sz="3300" b="1">
                 <a:solidFill>
                   <a:srgbClr val="171717"/>
@@ -8925,6 +9368,7 @@
               </a:defRPr>
             </a:lvl4pPr>
             <a:lvl5pPr>
+              <a:buNone/>
               <a:defRPr sz="3300" b="1">
                 <a:solidFill>
                   <a:srgbClr val="171717"/>
@@ -8935,6 +9379,7 @@
               </a:defRPr>
             </a:lvl5pPr>
             <a:lvl6pPr>
+              <a:buNone/>
               <a:defRPr sz="3300" b="1">
                 <a:solidFill>
                   <a:srgbClr val="171717"/>
@@ -8945,6 +9390,7 @@
               </a:defRPr>
             </a:lvl6pPr>
             <a:lvl7pPr>
+              <a:buNone/>
               <a:defRPr sz="3300" b="1">
                 <a:solidFill>
                   <a:srgbClr val="171717"/>
@@ -8955,6 +9401,7 @@
               </a:defRPr>
             </a:lvl7pPr>
             <a:lvl8pPr>
+              <a:buNone/>
               <a:defRPr sz="3300" b="1">
                 <a:solidFill>
                   <a:srgbClr val="171717"/>
@@ -8965,6 +9412,7 @@
               </a:defRPr>
             </a:lvl8pPr>
             <a:lvl9pPr>
+              <a:buNone/>
               <a:defRPr sz="3300" b="1">
                 <a:solidFill>
                   <a:srgbClr val="171717"/>
@@ -8977,6 +9425,7 @@
           </a:lstStyle>
           <a:p xmlns:a="http://schemas.openxmlformats.org/drawingml/2006/main">
             <a:pPr>
+              <a:buNone/>
               <a:defRPr sz="3300" b="1">
                 <a:solidFill>
                   <a:srgbClr val="171717"/>
@@ -8995,7 +9444,7 @@
                 <a:ea typeface="Arial"/>
                 <a:cs typeface="Arial"/>
               </a:rPr>
-              <a:t>Test 2: What if river readings are missing?</a:t>
+              <a:t>Test 2: What if drought readings are missing?</a:t>
             </a:r>
           </a:p>
         </p:txBody>
@@ -9041,6 +9490,7 @@
               </a:defRPr>
             </a:defPPr>
             <a:lvl1pPr>
+              <a:buNone/>
               <a:defRPr sz="1275" b="0">
                 <a:solidFill>
                   <a:srgbClr val="555555"/>
@@ -9051,6 +9501,7 @@
               </a:defRPr>
             </a:lvl1pPr>
             <a:lvl2pPr>
+              <a:buNone/>
               <a:defRPr sz="1275" b="0">
                 <a:solidFill>
                   <a:srgbClr val="555555"/>
@@ -9061,6 +9512,7 @@
               </a:defRPr>
             </a:lvl2pPr>
             <a:lvl3pPr>
+              <a:buNone/>
               <a:defRPr sz="1275" b="0">
                 <a:solidFill>
                   <a:srgbClr val="555555"/>
@@ -9071,6 +9523,7 @@
               </a:defRPr>
             </a:lvl3pPr>
             <a:lvl4pPr>
+              <a:buNone/>
               <a:defRPr sz="1275" b="0">
                 <a:solidFill>
                   <a:srgbClr val="555555"/>
@@ -9081,6 +9534,7 @@
               </a:defRPr>
             </a:lvl4pPr>
             <a:lvl5pPr>
+              <a:buNone/>
               <a:defRPr sz="1275" b="0">
                 <a:solidFill>
                   <a:srgbClr val="555555"/>
@@ -9091,6 +9545,7 @@
               </a:defRPr>
             </a:lvl5pPr>
             <a:lvl6pPr>
+              <a:buNone/>
               <a:defRPr sz="1275" b="0">
                 <a:solidFill>
                   <a:srgbClr val="555555"/>
@@ -9101,6 +9556,7 @@
               </a:defRPr>
             </a:lvl6pPr>
             <a:lvl7pPr>
+              <a:buNone/>
               <a:defRPr sz="1275" b="0">
                 <a:solidFill>
                   <a:srgbClr val="555555"/>
@@ -9111,6 +9567,7 @@
               </a:defRPr>
             </a:lvl7pPr>
             <a:lvl8pPr>
+              <a:buNone/>
               <a:defRPr sz="1275" b="0">
                 <a:solidFill>
                   <a:srgbClr val="555555"/>
@@ -9121,6 +9578,7 @@
               </a:defRPr>
             </a:lvl8pPr>
             <a:lvl9pPr>
+              <a:buNone/>
               <a:defRPr sz="1275" b="0">
                 <a:solidFill>
                   <a:srgbClr val="555555"/>
@@ -9133,6 +9591,7 @@
           </a:lstStyle>
           <a:p xmlns:a="http://schemas.openxmlformats.org/drawingml/2006/main">
             <a:pPr>
+              <a:buNone/>
               <a:defRPr sz="1275" b="0">
                 <a:solidFill>
                   <a:srgbClr val="555555"/>
@@ -9197,6 +9656,7 @@
               </a:defRPr>
             </a:defPPr>
             <a:lvl1pPr>
+              <a:buNone/>
               <a:defRPr sz="1275" b="0">
                 <a:solidFill>
                   <a:srgbClr val="555555"/>
@@ -9207,6 +9667,7 @@
               </a:defRPr>
             </a:lvl1pPr>
             <a:lvl2pPr>
+              <a:buNone/>
               <a:defRPr sz="1275" b="0">
                 <a:solidFill>
                   <a:srgbClr val="555555"/>
@@ -9217,6 +9678,7 @@
               </a:defRPr>
             </a:lvl2pPr>
             <a:lvl3pPr>
+              <a:buNone/>
               <a:defRPr sz="1275" b="0">
                 <a:solidFill>
                   <a:srgbClr val="555555"/>
@@ -9227,6 +9689,7 @@
               </a:defRPr>
             </a:lvl3pPr>
             <a:lvl4pPr>
+              <a:buNone/>
               <a:defRPr sz="1275" b="0">
                 <a:solidFill>
                   <a:srgbClr val="555555"/>
@@ -9237,6 +9700,7 @@
               </a:defRPr>
             </a:lvl4pPr>
             <a:lvl5pPr>
+              <a:buNone/>
               <a:defRPr sz="1275" b="0">
                 <a:solidFill>
                   <a:srgbClr val="555555"/>
@@ -9247,6 +9711,7 @@
               </a:defRPr>
             </a:lvl5pPr>
             <a:lvl6pPr>
+              <a:buNone/>
               <a:defRPr sz="1275" b="0">
                 <a:solidFill>
                   <a:srgbClr val="555555"/>
@@ -9257,6 +9722,7 @@
               </a:defRPr>
             </a:lvl6pPr>
             <a:lvl7pPr>
+              <a:buNone/>
               <a:defRPr sz="1275" b="0">
                 <a:solidFill>
                   <a:srgbClr val="555555"/>
@@ -9267,6 +9733,7 @@
               </a:defRPr>
             </a:lvl7pPr>
             <a:lvl8pPr>
+              <a:buNone/>
               <a:defRPr sz="1275" b="0">
                 <a:solidFill>
                   <a:srgbClr val="555555"/>
@@ -9277,6 +9744,7 @@
               </a:defRPr>
             </a:lvl8pPr>
             <a:lvl9pPr>
+              <a:buNone/>
               <a:defRPr sz="1275" b="0">
                 <a:solidFill>
                   <a:srgbClr val="555555"/>
@@ -9289,6 +9757,7 @@
           </a:lstStyle>
           <a:p xmlns:a="http://schemas.openxmlformats.org/drawingml/2006/main">
             <a:pPr>
+              <a:buNone/>
               <a:defRPr sz="1275" b="0">
                 <a:solidFill>
                   <a:srgbClr val="555555"/>
@@ -9353,6 +9822,7 @@
               </a:defRPr>
             </a:defPPr>
             <a:lvl1pPr>
+              <a:buNone/>
               <a:defRPr sz="2100" b="0">
                 <a:solidFill>
                   <a:srgbClr val="171717"/>
@@ -9363,6 +9833,7 @@
               </a:defRPr>
             </a:lvl1pPr>
             <a:lvl2pPr>
+              <a:buNone/>
               <a:defRPr sz="2100" b="0">
                 <a:solidFill>
                   <a:srgbClr val="171717"/>
@@ -9373,6 +9844,7 @@
               </a:defRPr>
             </a:lvl2pPr>
             <a:lvl3pPr>
+              <a:buNone/>
               <a:defRPr sz="2100" b="0">
                 <a:solidFill>
                   <a:srgbClr val="171717"/>
@@ -9383,6 +9855,7 @@
               </a:defRPr>
             </a:lvl3pPr>
             <a:lvl4pPr>
+              <a:buNone/>
               <a:defRPr sz="2100" b="0">
                 <a:solidFill>
                   <a:srgbClr val="171717"/>
@@ -9393,6 +9866,7 @@
               </a:defRPr>
             </a:lvl4pPr>
             <a:lvl5pPr>
+              <a:buNone/>
               <a:defRPr sz="2100" b="0">
                 <a:solidFill>
                   <a:srgbClr val="171717"/>
@@ -9403,6 +9877,7 @@
               </a:defRPr>
             </a:lvl5pPr>
             <a:lvl6pPr>
+              <a:buNone/>
               <a:defRPr sz="2100" b="0">
                 <a:solidFill>
                   <a:srgbClr val="171717"/>
@@ -9413,6 +9888,7 @@
               </a:defRPr>
             </a:lvl6pPr>
             <a:lvl7pPr>
+              <a:buNone/>
               <a:defRPr sz="2100" b="0">
                 <a:solidFill>
                   <a:srgbClr val="171717"/>
@@ -9423,6 +9899,7 @@
               </a:defRPr>
             </a:lvl7pPr>
             <a:lvl8pPr>
+              <a:buNone/>
               <a:defRPr sz="2100" b="0">
                 <a:solidFill>
                   <a:srgbClr val="171717"/>
@@ -9433,6 +9910,7 @@
               </a:defRPr>
             </a:lvl8pPr>
             <a:lvl9pPr>
+              <a:buNone/>
               <a:defRPr sz="2100" b="0">
                 <a:solidFill>
                   <a:srgbClr val="171717"/>
@@ -9445,6 +9923,7 @@
           </a:lstStyle>
           <a:p xmlns:a="http://schemas.openxmlformats.org/drawingml/2006/main">
             <a:pPr>
+              <a:buNone/>
               <a:defRPr sz="2100" b="0">
                 <a:solidFill>
                   <a:srgbClr val="171717"/>
@@ -9473,7 +9952,7 @@
           <p:cNvPr id="5" name="Chart">
             <a:extLst xmlns:a="http://schemas.openxmlformats.org/drawingml/2006/main">
               <a:ext uri="{FF2B5EF4-FFF2-40B4-BE49-F238E27FC236}">
-                <a16:creationId xmlns:a16="http://schemas.microsoft.com/office/drawing/2014/main" id="{6AE498DE-9649-42F6-8E78-4F1F2CE5B65F}"/>
+                <a16:creationId xmlns:a16="http://schemas.microsoft.com/office/drawing/2014/main" id="{1D7D8C70-23E5-4E59-8ECA-147CBDFCB455}"/>
               </a:ext>
             </a:extLst>
           </p:cNvPr>
@@ -9486,7 +9965,7 @@
         </p:xfrm>
         <a:graphic xmlns:a="http://schemas.openxmlformats.org/drawingml/2006/main">
           <a:graphicData uri="http://schemas.openxmlformats.org/drawingml/2006/chart">
-            <c:chart xmlns:r="http://schemas.openxmlformats.org/officeDocument/2006/relationships" xmlns:c="http://schemas.openxmlformats.org/drawingml/2006/chart" r:id="R3730c450aa5a47a3"/>
+            <c:chart xmlns:r="http://schemas.openxmlformats.org/officeDocument/2006/relationships" xmlns:c="http://schemas.openxmlformats.org/drawingml/2006/chart" r:id="Rb2e30c592bce4d31"/>
           </a:graphicData>
         </a:graphic>
       </p:graphicFrame>
@@ -9531,6 +10010,7 @@
               </a:defRPr>
             </a:defPPr>
             <a:lvl1pPr>
+              <a:buNone/>
               <a:defRPr sz="2100" b="0">
                 <a:solidFill>
                   <a:srgbClr val="171717"/>
@@ -9541,6 +10021,7 @@
               </a:defRPr>
             </a:lvl1pPr>
             <a:lvl2pPr>
+              <a:buNone/>
               <a:defRPr sz="2100" b="0">
                 <a:solidFill>
                   <a:srgbClr val="171717"/>
@@ -9551,6 +10032,7 @@
               </a:defRPr>
             </a:lvl2pPr>
             <a:lvl3pPr>
+              <a:buNone/>
               <a:defRPr sz="2100" b="0">
                 <a:solidFill>
                   <a:srgbClr val="171717"/>
@@ -9561,6 +10043,7 @@
               </a:defRPr>
             </a:lvl3pPr>
             <a:lvl4pPr>
+              <a:buNone/>
               <a:defRPr sz="2100" b="0">
                 <a:solidFill>
                   <a:srgbClr val="171717"/>
@@ -9571,6 +10054,7 @@
               </a:defRPr>
             </a:lvl4pPr>
             <a:lvl5pPr>
+              <a:buNone/>
               <a:defRPr sz="2100" b="0">
                 <a:solidFill>
                   <a:srgbClr val="171717"/>
@@ -9581,6 +10065,7 @@
               </a:defRPr>
             </a:lvl5pPr>
             <a:lvl6pPr>
+              <a:buNone/>
               <a:defRPr sz="2100" b="0">
                 <a:solidFill>
                   <a:srgbClr val="171717"/>
@@ -9591,6 +10076,7 @@
               </a:defRPr>
             </a:lvl6pPr>
             <a:lvl7pPr>
+              <a:buNone/>
               <a:defRPr sz="2100" b="0">
                 <a:solidFill>
                   <a:srgbClr val="171717"/>
@@ -9601,6 +10087,7 @@
               </a:defRPr>
             </a:lvl7pPr>
             <a:lvl8pPr>
+              <a:buNone/>
               <a:defRPr sz="2100" b="0">
                 <a:solidFill>
                   <a:srgbClr val="171717"/>
@@ -9611,6 +10098,7 @@
               </a:defRPr>
             </a:lvl8pPr>
             <a:lvl9pPr>
+              <a:buNone/>
               <a:defRPr sz="2100" b="0">
                 <a:solidFill>
                   <a:srgbClr val="171717"/>
@@ -9623,6 +10111,7 @@
           </a:lstStyle>
           <a:p xmlns:a="http://schemas.openxmlformats.org/drawingml/2006/main">
             <a:pPr>
+              <a:buNone/>
               <a:defRPr sz="2100" b="0">
                 <a:solidFill>
                   <a:srgbClr val="171717"/>
@@ -9646,6 +10135,7 @@
           </a:p>
           <a:p xmlns:a="http://schemas.openxmlformats.org/drawingml/2006/main">
             <a:pPr>
+              <a:buNone/>
               <a:defRPr sz="2100" b="0">
                 <a:solidFill>
                   <a:srgbClr val="171717"/>
@@ -9669,6 +10159,7 @@
           </a:p>
           <a:p xmlns:a="http://schemas.openxmlformats.org/drawingml/2006/main">
             <a:pPr>
+              <a:buNone/>
               <a:defRPr sz="2100" b="0">
                 <a:solidFill>
                   <a:srgbClr val="171717"/>
@@ -9733,6 +10224,7 @@
               </a:defRPr>
             </a:defPPr>
             <a:lvl1pPr>
+              <a:buNone/>
               <a:defRPr sz="2175" b="1">
                 <a:solidFill>
                   <a:srgbClr val="171717"/>
@@ -9743,6 +10235,7 @@
               </a:defRPr>
             </a:lvl1pPr>
             <a:lvl2pPr>
+              <a:buNone/>
               <a:defRPr sz="2175" b="1">
                 <a:solidFill>
                   <a:srgbClr val="171717"/>
@@ -9753,6 +10246,7 @@
               </a:defRPr>
             </a:lvl2pPr>
             <a:lvl3pPr>
+              <a:buNone/>
               <a:defRPr sz="2175" b="1">
                 <a:solidFill>
                   <a:srgbClr val="171717"/>
@@ -9763,6 +10257,7 @@
               </a:defRPr>
             </a:lvl3pPr>
             <a:lvl4pPr>
+              <a:buNone/>
               <a:defRPr sz="2175" b="1">
                 <a:solidFill>
                   <a:srgbClr val="171717"/>
@@ -9773,6 +10268,7 @@
               </a:defRPr>
             </a:lvl4pPr>
             <a:lvl5pPr>
+              <a:buNone/>
               <a:defRPr sz="2175" b="1">
                 <a:solidFill>
                   <a:srgbClr val="171717"/>
@@ -9783,6 +10279,7 @@
               </a:defRPr>
             </a:lvl5pPr>
             <a:lvl6pPr>
+              <a:buNone/>
               <a:defRPr sz="2175" b="1">
                 <a:solidFill>
                   <a:srgbClr val="171717"/>
@@ -9793,6 +10290,7 @@
               </a:defRPr>
             </a:lvl6pPr>
             <a:lvl7pPr>
+              <a:buNone/>
               <a:defRPr sz="2175" b="1">
                 <a:solidFill>
                   <a:srgbClr val="171717"/>
@@ -9803,6 +10301,7 @@
               </a:defRPr>
             </a:lvl7pPr>
             <a:lvl8pPr>
+              <a:buNone/>
               <a:defRPr sz="2175" b="1">
                 <a:solidFill>
                   <a:srgbClr val="171717"/>
@@ -9813,6 +10312,7 @@
               </a:defRPr>
             </a:lvl8pPr>
             <a:lvl9pPr>
+              <a:buNone/>
               <a:defRPr sz="2175" b="1">
                 <a:solidFill>
                   <a:srgbClr val="171717"/>
@@ -9825,6 +10325,7 @@
           </a:lstStyle>
           <a:p xmlns:a="http://schemas.openxmlformats.org/drawingml/2006/main">
             <a:pPr>
+              <a:buNone/>
               <a:defRPr sz="2175" b="1">
                 <a:solidFill>
                   <a:srgbClr val="171717"/>
@@ -9848,6 +10349,7 @@
           </a:p>
           <a:p xmlns:a="http://schemas.openxmlformats.org/drawingml/2006/main">
             <a:pPr>
+              <a:buNone/>
               <a:defRPr sz="2175" b="1">
                 <a:solidFill>
                   <a:srgbClr val="171717"/>
@@ -9871,6 +10373,7 @@
           </a:p>
           <a:p xmlns:a="http://schemas.openxmlformats.org/drawingml/2006/main">
             <a:pPr>
+              <a:buNone/>
               <a:defRPr sz="2175" b="1">
                 <a:solidFill>
                   <a:srgbClr val="171717"/>
@@ -9935,6 +10438,7 @@
               </a:defRPr>
             </a:defPPr>
             <a:lvl1pPr>
+              <a:buNone/>
               <a:defRPr sz="1950" b="0">
                 <a:solidFill>
                   <a:srgbClr val="171717"/>
@@ -9945,6 +10449,7 @@
               </a:defRPr>
             </a:lvl1pPr>
             <a:lvl2pPr>
+              <a:buNone/>
               <a:defRPr sz="1950" b="0">
                 <a:solidFill>
                   <a:srgbClr val="171717"/>
@@ -9955,6 +10460,7 @@
               </a:defRPr>
             </a:lvl2pPr>
             <a:lvl3pPr>
+              <a:buNone/>
               <a:defRPr sz="1950" b="0">
                 <a:solidFill>
                   <a:srgbClr val="171717"/>
@@ -9965,6 +10471,7 @@
               </a:defRPr>
             </a:lvl3pPr>
             <a:lvl4pPr>
+              <a:buNone/>
               <a:defRPr sz="1950" b="0">
                 <a:solidFill>
                   <a:srgbClr val="171717"/>
@@ -9975,6 +10482,7 @@
               </a:defRPr>
             </a:lvl4pPr>
             <a:lvl5pPr>
+              <a:buNone/>
               <a:defRPr sz="1950" b="0">
                 <a:solidFill>
                   <a:srgbClr val="171717"/>
@@ -9985,6 +10493,7 @@
               </a:defRPr>
             </a:lvl5pPr>
             <a:lvl6pPr>
+              <a:buNone/>
               <a:defRPr sz="1950" b="0">
                 <a:solidFill>
                   <a:srgbClr val="171717"/>
@@ -9995,6 +10504,7 @@
               </a:defRPr>
             </a:lvl6pPr>
             <a:lvl7pPr>
+              <a:buNone/>
               <a:defRPr sz="1950" b="0">
                 <a:solidFill>
                   <a:srgbClr val="171717"/>
@@ -10005,6 +10515,7 @@
               </a:defRPr>
             </a:lvl7pPr>
             <a:lvl8pPr>
+              <a:buNone/>
               <a:defRPr sz="1950" b="0">
                 <a:solidFill>
                   <a:srgbClr val="171717"/>
@@ -10015,6 +10526,7 @@
               </a:defRPr>
             </a:lvl8pPr>
             <a:lvl9pPr>
+              <a:buNone/>
               <a:defRPr sz="1950" b="0">
                 <a:solidFill>
                   <a:srgbClr val="171717"/>
@@ -10027,6 +10539,7 @@
           </a:lstStyle>
           <a:p xmlns:a="http://schemas.openxmlformats.org/drawingml/2006/main">
             <a:pPr>
+              <a:buNone/>
               <a:defRPr sz="1950" b="0">
                 <a:solidFill>
                   <a:srgbClr val="171717"/>
@@ -10045,7 +10558,7 @@
                 <a:ea typeface="Arial"/>
                 <a:cs typeface="Arial"/>
               </a:rPr>
-              <a:t>With similar stations, both methods stayed close in the main test.</a:t>
+              <a:t>Between-date filling needs later readings; use it for historical gaps.</a:t>
             </a:r>
           </a:p>
         </p:txBody>
@@ -10120,6 +10633,7 @@
               </a:defRPr>
             </a:defPPr>
             <a:lvl1pPr>
+              <a:buNone/>
               <a:defRPr sz="3300" b="1">
                 <a:solidFill>
                   <a:srgbClr val="171717"/>
@@ -10130,6 +10644,7 @@
               </a:defRPr>
             </a:lvl1pPr>
             <a:lvl2pPr>
+              <a:buNone/>
               <a:defRPr sz="3300" b="1">
                 <a:solidFill>
                   <a:srgbClr val="171717"/>
@@ -10140,6 +10655,7 @@
               </a:defRPr>
             </a:lvl2pPr>
             <a:lvl3pPr>
+              <a:buNone/>
               <a:defRPr sz="3300" b="1">
                 <a:solidFill>
                   <a:srgbClr val="171717"/>
@@ -10150,6 +10666,7 @@
               </a:defRPr>
             </a:lvl3pPr>
             <a:lvl4pPr>
+              <a:buNone/>
               <a:defRPr sz="3300" b="1">
                 <a:solidFill>
                   <a:srgbClr val="171717"/>
@@ -10160,6 +10677,7 @@
               </a:defRPr>
             </a:lvl4pPr>
             <a:lvl5pPr>
+              <a:buNone/>
               <a:defRPr sz="3300" b="1">
                 <a:solidFill>
                   <a:srgbClr val="171717"/>
@@ -10170,6 +10688,7 @@
               </a:defRPr>
             </a:lvl5pPr>
             <a:lvl6pPr>
+              <a:buNone/>
               <a:defRPr sz="3300" b="1">
                 <a:solidFill>
                   <a:srgbClr val="171717"/>
@@ -10180,6 +10699,7 @@
               </a:defRPr>
             </a:lvl6pPr>
             <a:lvl7pPr>
+              <a:buNone/>
               <a:defRPr sz="3300" b="1">
                 <a:solidFill>
                   <a:srgbClr val="171717"/>
@@ -10190,6 +10710,7 @@
               </a:defRPr>
             </a:lvl7pPr>
             <a:lvl8pPr>
+              <a:buNone/>
               <a:defRPr sz="3300" b="1">
                 <a:solidFill>
                   <a:srgbClr val="171717"/>
@@ -10200,6 +10721,7 @@
               </a:defRPr>
             </a:lvl8pPr>
             <a:lvl9pPr>
+              <a:buNone/>
               <a:defRPr sz="3300" b="1">
                 <a:solidFill>
                   <a:srgbClr val="171717"/>
@@ -10212,6 +10734,7 @@
           </a:lstStyle>
           <a:p xmlns:a="http://schemas.openxmlformats.org/drawingml/2006/main">
             <a:pPr>
+              <a:buNone/>
               <a:defRPr sz="3300" b="1">
                 <a:solidFill>
                   <a:srgbClr val="171717"/>
@@ -10276,6 +10799,7 @@
               </a:defRPr>
             </a:defPPr>
             <a:lvl1pPr>
+              <a:buNone/>
               <a:defRPr sz="1275" b="0">
                 <a:solidFill>
                   <a:srgbClr val="555555"/>
@@ -10286,6 +10810,7 @@
               </a:defRPr>
             </a:lvl1pPr>
             <a:lvl2pPr>
+              <a:buNone/>
               <a:defRPr sz="1275" b="0">
                 <a:solidFill>
                   <a:srgbClr val="555555"/>
@@ -10296,6 +10821,7 @@
               </a:defRPr>
             </a:lvl2pPr>
             <a:lvl3pPr>
+              <a:buNone/>
               <a:defRPr sz="1275" b="0">
                 <a:solidFill>
                   <a:srgbClr val="555555"/>
@@ -10306,6 +10832,7 @@
               </a:defRPr>
             </a:lvl3pPr>
             <a:lvl4pPr>
+              <a:buNone/>
               <a:defRPr sz="1275" b="0">
                 <a:solidFill>
                   <a:srgbClr val="555555"/>
@@ -10316,6 +10843,7 @@
               </a:defRPr>
             </a:lvl4pPr>
             <a:lvl5pPr>
+              <a:buNone/>
               <a:defRPr sz="1275" b="0">
                 <a:solidFill>
                   <a:srgbClr val="555555"/>
@@ -10326,6 +10854,7 @@
               </a:defRPr>
             </a:lvl5pPr>
             <a:lvl6pPr>
+              <a:buNone/>
               <a:defRPr sz="1275" b="0">
                 <a:solidFill>
                   <a:srgbClr val="555555"/>
@@ -10336,6 +10865,7 @@
               </a:defRPr>
             </a:lvl6pPr>
             <a:lvl7pPr>
+              <a:buNone/>
               <a:defRPr sz="1275" b="0">
                 <a:solidFill>
                   <a:srgbClr val="555555"/>
@@ -10346,6 +10876,7 @@
               </a:defRPr>
             </a:lvl7pPr>
             <a:lvl8pPr>
+              <a:buNone/>
               <a:defRPr sz="1275" b="0">
                 <a:solidFill>
                   <a:srgbClr val="555555"/>
@@ -10356,6 +10887,7 @@
               </a:defRPr>
             </a:lvl8pPr>
             <a:lvl9pPr>
+              <a:buNone/>
               <a:defRPr sz="1275" b="0">
                 <a:solidFill>
                   <a:srgbClr val="555555"/>
@@ -10368,6 +10900,7 @@
           </a:lstStyle>
           <a:p xmlns:a="http://schemas.openxmlformats.org/drawingml/2006/main">
             <a:pPr>
+              <a:buNone/>
               <a:defRPr sz="1275" b="0">
                 <a:solidFill>
                   <a:srgbClr val="555555"/>
@@ -10432,6 +10965,7 @@
               </a:defRPr>
             </a:defPPr>
             <a:lvl1pPr>
+              <a:buNone/>
               <a:defRPr sz="1275" b="0">
                 <a:solidFill>
                   <a:srgbClr val="555555"/>
@@ -10442,6 +10976,7 @@
               </a:defRPr>
             </a:lvl1pPr>
             <a:lvl2pPr>
+              <a:buNone/>
               <a:defRPr sz="1275" b="0">
                 <a:solidFill>
                   <a:srgbClr val="555555"/>
@@ -10452,6 +10987,7 @@
               </a:defRPr>
             </a:lvl2pPr>
             <a:lvl3pPr>
+              <a:buNone/>
               <a:defRPr sz="1275" b="0">
                 <a:solidFill>
                   <a:srgbClr val="555555"/>
@@ -10462,6 +10998,7 @@
               </a:defRPr>
             </a:lvl3pPr>
             <a:lvl4pPr>
+              <a:buNone/>
               <a:defRPr sz="1275" b="0">
                 <a:solidFill>
                   <a:srgbClr val="555555"/>
@@ -10472,6 +11009,7 @@
               </a:defRPr>
             </a:lvl4pPr>
             <a:lvl5pPr>
+              <a:buNone/>
               <a:defRPr sz="1275" b="0">
                 <a:solidFill>
                   <a:srgbClr val="555555"/>
@@ -10482,6 +11020,7 @@
               </a:defRPr>
             </a:lvl5pPr>
             <a:lvl6pPr>
+              <a:buNone/>
               <a:defRPr sz="1275" b="0">
                 <a:solidFill>
                   <a:srgbClr val="555555"/>
@@ -10492,6 +11031,7 @@
               </a:defRPr>
             </a:lvl6pPr>
             <a:lvl7pPr>
+              <a:buNone/>
               <a:defRPr sz="1275" b="0">
                 <a:solidFill>
                   <a:srgbClr val="555555"/>
@@ -10502,6 +11042,7 @@
               </a:defRPr>
             </a:lvl7pPr>
             <a:lvl8pPr>
+              <a:buNone/>
               <a:defRPr sz="1275" b="0">
                 <a:solidFill>
                   <a:srgbClr val="555555"/>
@@ -10512,6 +11053,7 @@
               </a:defRPr>
             </a:lvl8pPr>
             <a:lvl9pPr>
+              <a:buNone/>
               <a:defRPr sz="1275" b="0">
                 <a:solidFill>
                   <a:srgbClr val="555555"/>
@@ -10524,6 +11066,7 @@
           </a:lstStyle>
           <a:p xmlns:a="http://schemas.openxmlformats.org/drawingml/2006/main">
             <a:pPr>
+              <a:buNone/>
               <a:defRPr sz="1275" b="0">
                 <a:solidFill>
                   <a:srgbClr val="555555"/>
@@ -10588,6 +11131,7 @@
               </a:defRPr>
             </a:defPPr>
             <a:lvl1pPr>
+              <a:buNone/>
               <a:defRPr sz="2100" b="0">
                 <a:solidFill>
                   <a:srgbClr val="171717"/>
@@ -10598,6 +11142,7 @@
               </a:defRPr>
             </a:lvl1pPr>
             <a:lvl2pPr>
+              <a:buNone/>
               <a:defRPr sz="2100" b="0">
                 <a:solidFill>
                   <a:srgbClr val="171717"/>
@@ -10608,6 +11153,7 @@
               </a:defRPr>
             </a:lvl2pPr>
             <a:lvl3pPr>
+              <a:buNone/>
               <a:defRPr sz="2100" b="0">
                 <a:solidFill>
                   <a:srgbClr val="171717"/>
@@ -10618,6 +11164,7 @@
               </a:defRPr>
             </a:lvl3pPr>
             <a:lvl4pPr>
+              <a:buNone/>
               <a:defRPr sz="2100" b="0">
                 <a:solidFill>
                   <a:srgbClr val="171717"/>
@@ -10628,6 +11175,7 @@
               </a:defRPr>
             </a:lvl4pPr>
             <a:lvl5pPr>
+              <a:buNone/>
               <a:defRPr sz="2100" b="0">
                 <a:solidFill>
                   <a:srgbClr val="171717"/>
@@ -10638,6 +11186,7 @@
               </a:defRPr>
             </a:lvl5pPr>
             <a:lvl6pPr>
+              <a:buNone/>
               <a:defRPr sz="2100" b="0">
                 <a:solidFill>
                   <a:srgbClr val="171717"/>
@@ -10648,6 +11197,7 @@
               </a:defRPr>
             </a:lvl6pPr>
             <a:lvl7pPr>
+              <a:buNone/>
               <a:defRPr sz="2100" b="0">
                 <a:solidFill>
                   <a:srgbClr val="171717"/>
@@ -10658,6 +11208,7 @@
               </a:defRPr>
             </a:lvl7pPr>
             <a:lvl8pPr>
+              <a:buNone/>
               <a:defRPr sz="2100" b="0">
                 <a:solidFill>
                   <a:srgbClr val="171717"/>
@@ -10668,6 +11219,7 @@
               </a:defRPr>
             </a:lvl8pPr>
             <a:lvl9pPr>
+              <a:buNone/>
               <a:defRPr sz="2100" b="0">
                 <a:solidFill>
                   <a:srgbClr val="171717"/>
@@ -10680,6 +11232,7 @@
           </a:lstStyle>
           <a:p xmlns:a="http://schemas.openxmlformats.org/drawingml/2006/main">
             <a:pPr>
+              <a:buNone/>
               <a:defRPr sz="2100" b="0">
                 <a:solidFill>
                   <a:srgbClr val="171717"/>
@@ -10708,7 +11261,7 @@
           <p:cNvPr id="5" name="Chart">
             <a:extLst xmlns:a="http://schemas.openxmlformats.org/drawingml/2006/main">
               <a:ext uri="{FF2B5EF4-FFF2-40B4-BE49-F238E27FC236}">
-                <a16:creationId xmlns:a16="http://schemas.microsoft.com/office/drawing/2014/main" id="{6DC5B79A-0B0E-43DB-BE9A-75F272F2337C}"/>
+                <a16:creationId xmlns:a16="http://schemas.microsoft.com/office/drawing/2014/main" id="{9C890FEA-02C0-41D0-A3CF-969AFA7D588F}"/>
               </a:ext>
             </a:extLst>
           </p:cNvPr>
@@ -10721,7 +11274,7 @@
         </p:xfrm>
         <a:graphic xmlns:a="http://schemas.openxmlformats.org/drawingml/2006/main">
           <a:graphicData uri="http://schemas.openxmlformats.org/drawingml/2006/chart">
-            <c:chart xmlns:r="http://schemas.openxmlformats.org/officeDocument/2006/relationships" xmlns:c="http://schemas.openxmlformats.org/drawingml/2006/chart" r:id="Reca4c99812bb4984"/>
+            <c:chart xmlns:r="http://schemas.openxmlformats.org/officeDocument/2006/relationships" xmlns:c="http://schemas.openxmlformats.org/drawingml/2006/chart" r:id="R3363875fc54c4f10"/>
           </a:graphicData>
         </a:graphic>
       </p:graphicFrame>
@@ -10766,6 +11319,7 @@
               </a:defRPr>
             </a:defPPr>
             <a:lvl1pPr>
+              <a:buNone/>
               <a:defRPr sz="2250" b="1">
                 <a:solidFill>
                   <a:srgbClr val="171717"/>
@@ -10776,6 +11330,7 @@
               </a:defRPr>
             </a:lvl1pPr>
             <a:lvl2pPr>
+              <a:buNone/>
               <a:defRPr sz="2250" b="1">
                 <a:solidFill>
                   <a:srgbClr val="171717"/>
@@ -10786,6 +11341,7 @@
               </a:defRPr>
             </a:lvl2pPr>
             <a:lvl3pPr>
+              <a:buNone/>
               <a:defRPr sz="2250" b="1">
                 <a:solidFill>
                   <a:srgbClr val="171717"/>
@@ -10796,6 +11352,7 @@
               </a:defRPr>
             </a:lvl3pPr>
             <a:lvl4pPr>
+              <a:buNone/>
               <a:defRPr sz="2250" b="1">
                 <a:solidFill>
                   <a:srgbClr val="171717"/>
@@ -10806,6 +11363,7 @@
               </a:defRPr>
             </a:lvl4pPr>
             <a:lvl5pPr>
+              <a:buNone/>
               <a:defRPr sz="2250" b="1">
                 <a:solidFill>
                   <a:srgbClr val="171717"/>
@@ -10816,6 +11374,7 @@
               </a:defRPr>
             </a:lvl5pPr>
             <a:lvl6pPr>
+              <a:buNone/>
               <a:defRPr sz="2250" b="1">
                 <a:solidFill>
                   <a:srgbClr val="171717"/>
@@ -10826,6 +11385,7 @@
               </a:defRPr>
             </a:lvl6pPr>
             <a:lvl7pPr>
+              <a:buNone/>
               <a:defRPr sz="2250" b="1">
                 <a:solidFill>
                   <a:srgbClr val="171717"/>
@@ -10836,6 +11396,7 @@
               </a:defRPr>
             </a:lvl7pPr>
             <a:lvl8pPr>
+              <a:buNone/>
               <a:defRPr sz="2250" b="1">
                 <a:solidFill>
                   <a:srgbClr val="171717"/>
@@ -10846,6 +11407,7 @@
               </a:defRPr>
             </a:lvl8pPr>
             <a:lvl9pPr>
+              <a:buNone/>
               <a:defRPr sz="2250" b="1">
                 <a:solidFill>
                   <a:srgbClr val="171717"/>
@@ -10858,6 +11420,7 @@
           </a:lstStyle>
           <a:p xmlns:a="http://schemas.openxmlformats.org/drawingml/2006/main">
             <a:pPr>
+              <a:buNone/>
               <a:defRPr sz="2250" b="1">
                 <a:solidFill>
                   <a:srgbClr val="171717"/>
@@ -10881,6 +11444,7 @@
           </a:p>
           <a:p xmlns:a="http://schemas.openxmlformats.org/drawingml/2006/main">
             <a:pPr>
+              <a:buNone/>
               <a:defRPr sz="2250" b="1">
                 <a:solidFill>
                   <a:srgbClr val="171717"/>
@@ -10945,6 +11509,7 @@
               </a:defRPr>
             </a:defPPr>
             <a:lvl1pPr>
+              <a:buNone/>
               <a:defRPr sz="2100" b="0">
                 <a:solidFill>
                   <a:srgbClr val="171717"/>
@@ -10955,6 +11520,7 @@
               </a:defRPr>
             </a:lvl1pPr>
             <a:lvl2pPr>
+              <a:buNone/>
               <a:defRPr sz="2100" b="0">
                 <a:solidFill>
                   <a:srgbClr val="171717"/>
@@ -10965,6 +11531,7 @@
               </a:defRPr>
             </a:lvl2pPr>
             <a:lvl3pPr>
+              <a:buNone/>
               <a:defRPr sz="2100" b="0">
                 <a:solidFill>
                   <a:srgbClr val="171717"/>
@@ -10975,6 +11542,7 @@
               </a:defRPr>
             </a:lvl3pPr>
             <a:lvl4pPr>
+              <a:buNone/>
               <a:defRPr sz="2100" b="0">
                 <a:solidFill>
                   <a:srgbClr val="171717"/>
@@ -10985,6 +11553,7 @@
               </a:defRPr>
             </a:lvl4pPr>
             <a:lvl5pPr>
+              <a:buNone/>
               <a:defRPr sz="2100" b="0">
                 <a:solidFill>
                   <a:srgbClr val="171717"/>
@@ -10995,6 +11564,7 @@
               </a:defRPr>
             </a:lvl5pPr>
             <a:lvl6pPr>
+              <a:buNone/>
               <a:defRPr sz="2100" b="0">
                 <a:solidFill>
                   <a:srgbClr val="171717"/>
@@ -11005,6 +11575,7 @@
               </a:defRPr>
             </a:lvl6pPr>
             <a:lvl7pPr>
+              <a:buNone/>
               <a:defRPr sz="2100" b="0">
                 <a:solidFill>
                   <a:srgbClr val="171717"/>
@@ -11015,6 +11586,7 @@
               </a:defRPr>
             </a:lvl7pPr>
             <a:lvl8pPr>
+              <a:buNone/>
               <a:defRPr sz="2100" b="0">
                 <a:solidFill>
                   <a:srgbClr val="171717"/>
@@ -11025,6 +11597,7 @@
               </a:defRPr>
             </a:lvl8pPr>
             <a:lvl9pPr>
+              <a:buNone/>
               <a:defRPr sz="2100" b="0">
                 <a:solidFill>
                   <a:srgbClr val="171717"/>
@@ -11037,6 +11610,7 @@
           </a:lstStyle>
           <a:p xmlns:a="http://schemas.openxmlformats.org/drawingml/2006/main">
             <a:pPr>
+              <a:buNone/>
               <a:defRPr sz="2100" b="0">
                 <a:solidFill>
                   <a:srgbClr val="171717"/>
@@ -11060,6 +11634,7 @@
           </a:p>
           <a:p xmlns:a="http://schemas.openxmlformats.org/drawingml/2006/main">
             <a:pPr>
+              <a:buNone/>
               <a:defRPr sz="2100" b="0">
                 <a:solidFill>
                   <a:srgbClr val="171717"/>
@@ -11083,6 +11658,7 @@
           </a:p>
           <a:p xmlns:a="http://schemas.openxmlformats.org/drawingml/2006/main">
             <a:pPr>
+              <a:buNone/>
               <a:defRPr sz="2100" b="0">
                 <a:solidFill>
                   <a:srgbClr val="171717"/>
@@ -11176,6 +11752,7 @@
               </a:defRPr>
             </a:defPPr>
             <a:lvl1pPr>
+              <a:buNone/>
               <a:defRPr sz="3300" b="1">
                 <a:solidFill>
                   <a:srgbClr val="171717"/>
@@ -11186,6 +11763,7 @@
               </a:defRPr>
             </a:lvl1pPr>
             <a:lvl2pPr>
+              <a:buNone/>
               <a:defRPr sz="3300" b="1">
                 <a:solidFill>
                   <a:srgbClr val="171717"/>
@@ -11196,6 +11774,7 @@
               </a:defRPr>
             </a:lvl2pPr>
             <a:lvl3pPr>
+              <a:buNone/>
               <a:defRPr sz="3300" b="1">
                 <a:solidFill>
                   <a:srgbClr val="171717"/>
@@ -11206,6 +11785,7 @@
               </a:defRPr>
             </a:lvl3pPr>
             <a:lvl4pPr>
+              <a:buNone/>
               <a:defRPr sz="3300" b="1">
                 <a:solidFill>
                   <a:srgbClr val="171717"/>
@@ -11216,6 +11796,7 @@
               </a:defRPr>
             </a:lvl4pPr>
             <a:lvl5pPr>
+              <a:buNone/>
               <a:defRPr sz="3300" b="1">
                 <a:solidFill>
                   <a:srgbClr val="171717"/>
@@ -11226,6 +11807,7 @@
               </a:defRPr>
             </a:lvl5pPr>
             <a:lvl6pPr>
+              <a:buNone/>
               <a:defRPr sz="3300" b="1">
                 <a:solidFill>
                   <a:srgbClr val="171717"/>
@@ -11236,6 +11818,7 @@
               </a:defRPr>
             </a:lvl6pPr>
             <a:lvl7pPr>
+              <a:buNone/>
               <a:defRPr sz="3300" b="1">
                 <a:solidFill>
                   <a:srgbClr val="171717"/>
@@ -11246,6 +11829,7 @@
               </a:defRPr>
             </a:lvl7pPr>
             <a:lvl8pPr>
+              <a:buNone/>
               <a:defRPr sz="3300" b="1">
                 <a:solidFill>
                   <a:srgbClr val="171717"/>
@@ -11256,6 +11840,7 @@
               </a:defRPr>
             </a:lvl8pPr>
             <a:lvl9pPr>
+              <a:buNone/>
               <a:defRPr sz="3300" b="1">
                 <a:solidFill>
                   <a:srgbClr val="171717"/>
@@ -11268,6 +11853,7 @@
           </a:lstStyle>
           <a:p xmlns:a="http://schemas.openxmlformats.org/drawingml/2006/main">
             <a:pPr>
+              <a:buNone/>
               <a:defRPr sz="3300" b="1">
                 <a:solidFill>
                   <a:srgbClr val="171717"/>
@@ -11332,6 +11918,7 @@
               </a:defRPr>
             </a:defPPr>
             <a:lvl1pPr>
+              <a:buNone/>
               <a:defRPr sz="1275" b="0">
                 <a:solidFill>
                   <a:srgbClr val="555555"/>
@@ -11342,6 +11929,7 @@
               </a:defRPr>
             </a:lvl1pPr>
             <a:lvl2pPr>
+              <a:buNone/>
               <a:defRPr sz="1275" b="0">
                 <a:solidFill>
                   <a:srgbClr val="555555"/>
@@ -11352,6 +11940,7 @@
               </a:defRPr>
             </a:lvl2pPr>
             <a:lvl3pPr>
+              <a:buNone/>
               <a:defRPr sz="1275" b="0">
                 <a:solidFill>
                   <a:srgbClr val="555555"/>
@@ -11362,6 +11951,7 @@
               </a:defRPr>
             </a:lvl3pPr>
             <a:lvl4pPr>
+              <a:buNone/>
               <a:defRPr sz="1275" b="0">
                 <a:solidFill>
                   <a:srgbClr val="555555"/>
@@ -11372,6 +11962,7 @@
               </a:defRPr>
             </a:lvl4pPr>
             <a:lvl5pPr>
+              <a:buNone/>
               <a:defRPr sz="1275" b="0">
                 <a:solidFill>
                   <a:srgbClr val="555555"/>
@@ -11382,6 +11973,7 @@
               </a:defRPr>
             </a:lvl5pPr>
             <a:lvl6pPr>
+              <a:buNone/>
               <a:defRPr sz="1275" b="0">
                 <a:solidFill>
                   <a:srgbClr val="555555"/>
@@ -11392,6 +11984,7 @@
               </a:defRPr>
             </a:lvl6pPr>
             <a:lvl7pPr>
+              <a:buNone/>
               <a:defRPr sz="1275" b="0">
                 <a:solidFill>
                   <a:srgbClr val="555555"/>
@@ -11402,6 +11995,7 @@
               </a:defRPr>
             </a:lvl7pPr>
             <a:lvl8pPr>
+              <a:buNone/>
               <a:defRPr sz="1275" b="0">
                 <a:solidFill>
                   <a:srgbClr val="555555"/>
@@ -11412,6 +12006,7 @@
               </a:defRPr>
             </a:lvl8pPr>
             <a:lvl9pPr>
+              <a:buNone/>
               <a:defRPr sz="1275" b="0">
                 <a:solidFill>
                   <a:srgbClr val="555555"/>
@@ -11424,6 +12019,7 @@
           </a:lstStyle>
           <a:p xmlns:a="http://schemas.openxmlformats.org/drawingml/2006/main">
             <a:pPr>
+              <a:buNone/>
               <a:defRPr sz="1275" b="0">
                 <a:solidFill>
                   <a:srgbClr val="555555"/>
@@ -11488,6 +12084,7 @@
               </a:defRPr>
             </a:defPPr>
             <a:lvl1pPr>
+              <a:buNone/>
               <a:defRPr sz="1275" b="0">
                 <a:solidFill>
                   <a:srgbClr val="555555"/>
@@ -11498,6 +12095,7 @@
               </a:defRPr>
             </a:lvl1pPr>
             <a:lvl2pPr>
+              <a:buNone/>
               <a:defRPr sz="1275" b="0">
                 <a:solidFill>
                   <a:srgbClr val="555555"/>
@@ -11508,6 +12106,7 @@
               </a:defRPr>
             </a:lvl2pPr>
             <a:lvl3pPr>
+              <a:buNone/>
               <a:defRPr sz="1275" b="0">
                 <a:solidFill>
                   <a:srgbClr val="555555"/>
@@ -11518,6 +12117,7 @@
               </a:defRPr>
             </a:lvl3pPr>
             <a:lvl4pPr>
+              <a:buNone/>
               <a:defRPr sz="1275" b="0">
                 <a:solidFill>
                   <a:srgbClr val="555555"/>
@@ -11528,6 +12128,7 @@
               </a:defRPr>
             </a:lvl4pPr>
             <a:lvl5pPr>
+              <a:buNone/>
               <a:defRPr sz="1275" b="0">
                 <a:solidFill>
                   <a:srgbClr val="555555"/>
@@ -11538,6 +12139,7 @@
               </a:defRPr>
             </a:lvl5pPr>
             <a:lvl6pPr>
+              <a:buNone/>
               <a:defRPr sz="1275" b="0">
                 <a:solidFill>
                   <a:srgbClr val="555555"/>
@@ -11548,6 +12150,7 @@
               </a:defRPr>
             </a:lvl6pPr>
             <a:lvl7pPr>
+              <a:buNone/>
               <a:defRPr sz="1275" b="0">
                 <a:solidFill>
                   <a:srgbClr val="555555"/>
@@ -11558,6 +12161,7 @@
               </a:defRPr>
             </a:lvl7pPr>
             <a:lvl8pPr>
+              <a:buNone/>
               <a:defRPr sz="1275" b="0">
                 <a:solidFill>
                   <a:srgbClr val="555555"/>
@@ -11568,6 +12172,7 @@
               </a:defRPr>
             </a:lvl8pPr>
             <a:lvl9pPr>
+              <a:buNone/>
               <a:defRPr sz="1275" b="0">
                 <a:solidFill>
                   <a:srgbClr val="555555"/>
@@ -11580,6 +12185,7 @@
           </a:lstStyle>
           <a:p xmlns:a="http://schemas.openxmlformats.org/drawingml/2006/main">
             <a:pPr>
+              <a:buNone/>
               <a:defRPr sz="1275" b="0">
                 <a:solidFill>
                   <a:srgbClr val="555555"/>
@@ -11644,6 +12250,7 @@
               </a:defRPr>
             </a:defPPr>
             <a:lvl1pPr>
+              <a:buNone/>
               <a:defRPr sz="2100" b="1">
                 <a:solidFill>
                   <a:srgbClr val="171717"/>
@@ -11654,6 +12261,7 @@
               </a:defRPr>
             </a:lvl1pPr>
             <a:lvl2pPr>
+              <a:buNone/>
               <a:defRPr sz="2100" b="1">
                 <a:solidFill>
                   <a:srgbClr val="171717"/>
@@ -11664,6 +12272,7 @@
               </a:defRPr>
             </a:lvl2pPr>
             <a:lvl3pPr>
+              <a:buNone/>
               <a:defRPr sz="2100" b="1">
                 <a:solidFill>
                   <a:srgbClr val="171717"/>
@@ -11674,6 +12283,7 @@
               </a:defRPr>
             </a:lvl3pPr>
             <a:lvl4pPr>
+              <a:buNone/>
               <a:defRPr sz="2100" b="1">
                 <a:solidFill>
                   <a:srgbClr val="171717"/>
@@ -11684,6 +12294,7 @@
               </a:defRPr>
             </a:lvl4pPr>
             <a:lvl5pPr>
+              <a:buNone/>
               <a:defRPr sz="2100" b="1">
                 <a:solidFill>
                   <a:srgbClr val="171717"/>
@@ -11694,6 +12305,7 @@
               </a:defRPr>
             </a:lvl5pPr>
             <a:lvl6pPr>
+              <a:buNone/>
               <a:defRPr sz="2100" b="1">
                 <a:solidFill>
                   <a:srgbClr val="171717"/>
@@ -11704,6 +12316,7 @@
               </a:defRPr>
             </a:lvl6pPr>
             <a:lvl7pPr>
+              <a:buNone/>
               <a:defRPr sz="2100" b="1">
                 <a:solidFill>
                   <a:srgbClr val="171717"/>
@@ -11714,6 +12327,7 @@
               </a:defRPr>
             </a:lvl7pPr>
             <a:lvl8pPr>
+              <a:buNone/>
               <a:defRPr sz="2100" b="1">
                 <a:solidFill>
                   <a:srgbClr val="171717"/>
@@ -11724,6 +12338,7 @@
               </a:defRPr>
             </a:lvl8pPr>
             <a:lvl9pPr>
+              <a:buNone/>
               <a:defRPr sz="2100" b="1">
                 <a:solidFill>
                   <a:srgbClr val="171717"/>
@@ -11736,6 +12351,7 @@
           </a:lstStyle>
           <a:p xmlns:a="http://schemas.openxmlformats.org/drawingml/2006/main">
             <a:pPr>
+              <a:buNone/>
               <a:defRPr sz="2100" b="1">
                 <a:solidFill>
                   <a:srgbClr val="171717"/>
@@ -11800,6 +12416,7 @@
               </a:defRPr>
             </a:defPPr>
             <a:lvl1pPr>
+              <a:buNone/>
               <a:defRPr sz="2100" b="0">
                 <a:solidFill>
                   <a:srgbClr val="171717"/>
@@ -11810,6 +12427,7 @@
               </a:defRPr>
             </a:lvl1pPr>
             <a:lvl2pPr>
+              <a:buNone/>
               <a:defRPr sz="2100" b="0">
                 <a:solidFill>
                   <a:srgbClr val="171717"/>
@@ -11820,6 +12438,7 @@
               </a:defRPr>
             </a:lvl2pPr>
             <a:lvl3pPr>
+              <a:buNone/>
               <a:defRPr sz="2100" b="0">
                 <a:solidFill>
                   <a:srgbClr val="171717"/>
@@ -11830,6 +12449,7 @@
               </a:defRPr>
             </a:lvl3pPr>
             <a:lvl4pPr>
+              <a:buNone/>
               <a:defRPr sz="2100" b="0">
                 <a:solidFill>
                   <a:srgbClr val="171717"/>
@@ -11840,6 +12460,7 @@
               </a:defRPr>
             </a:lvl4pPr>
             <a:lvl5pPr>
+              <a:buNone/>
               <a:defRPr sz="2100" b="0">
                 <a:solidFill>
                   <a:srgbClr val="171717"/>
@@ -11850,6 +12471,7 @@
               </a:defRPr>
             </a:lvl5pPr>
             <a:lvl6pPr>
+              <a:buNone/>
               <a:defRPr sz="2100" b="0">
                 <a:solidFill>
                   <a:srgbClr val="171717"/>
@@ -11860,6 +12482,7 @@
               </a:defRPr>
             </a:lvl6pPr>
             <a:lvl7pPr>
+              <a:buNone/>
               <a:defRPr sz="2100" b="0">
                 <a:solidFill>
                   <a:srgbClr val="171717"/>
@@ -11870,6 +12493,7 @@
               </a:defRPr>
             </a:lvl7pPr>
             <a:lvl8pPr>
+              <a:buNone/>
               <a:defRPr sz="2100" b="0">
                 <a:solidFill>
                   <a:srgbClr val="171717"/>
@@ -11880,6 +12504,7 @@
               </a:defRPr>
             </a:lvl8pPr>
             <a:lvl9pPr>
+              <a:buNone/>
               <a:defRPr sz="2100" b="0">
                 <a:solidFill>
                   <a:srgbClr val="171717"/>
@@ -11892,6 +12517,7 @@
           </a:lstStyle>
           <a:p xmlns:a="http://schemas.openxmlformats.org/drawingml/2006/main">
             <a:pPr>
+              <a:buNone/>
               <a:defRPr sz="2100" b="0">
                 <a:solidFill>
                   <a:srgbClr val="171717"/>
@@ -11910,7 +12536,7 @@
                 <a:ea typeface="Arial"/>
                 <a:cs typeface="Arial"/>
               </a:rPr>
-              <a:t>Model comparison, physical checks, local quotes.</a:t>
+              <a:t>XGBoost (E1), rules (E3), local quotes (E4).</a:t>
             </a:r>
           </a:p>
         </p:txBody>
@@ -11956,6 +12582,7 @@
               </a:defRPr>
             </a:defPPr>
             <a:lvl1pPr>
+              <a:buNone/>
               <a:defRPr sz="2100" b="1">
                 <a:solidFill>
                   <a:srgbClr val="171717"/>
@@ -11966,6 +12593,7 @@
               </a:defRPr>
             </a:lvl1pPr>
             <a:lvl2pPr>
+              <a:buNone/>
               <a:defRPr sz="2100" b="1">
                 <a:solidFill>
                   <a:srgbClr val="171717"/>
@@ -11976,6 +12604,7 @@
               </a:defRPr>
             </a:lvl2pPr>
             <a:lvl3pPr>
+              <a:buNone/>
               <a:defRPr sz="2100" b="1">
                 <a:solidFill>
                   <a:srgbClr val="171717"/>
@@ -11986,6 +12615,7 @@
               </a:defRPr>
             </a:lvl3pPr>
             <a:lvl4pPr>
+              <a:buNone/>
               <a:defRPr sz="2100" b="1">
                 <a:solidFill>
                   <a:srgbClr val="171717"/>
@@ -11996,6 +12626,7 @@
               </a:defRPr>
             </a:lvl4pPr>
             <a:lvl5pPr>
+              <a:buNone/>
               <a:defRPr sz="2100" b="1">
                 <a:solidFill>
                   <a:srgbClr val="171717"/>
@@ -12006,6 +12637,7 @@
               </a:defRPr>
             </a:lvl5pPr>
             <a:lvl6pPr>
+              <a:buNone/>
               <a:defRPr sz="2100" b="1">
                 <a:solidFill>
                   <a:srgbClr val="171717"/>
@@ -12016,6 +12648,7 @@
               </a:defRPr>
             </a:lvl6pPr>
             <a:lvl7pPr>
+              <a:buNone/>
               <a:defRPr sz="2100" b="1">
                 <a:solidFill>
                   <a:srgbClr val="171717"/>
@@ -12026,6 +12659,7 @@
               </a:defRPr>
             </a:lvl7pPr>
             <a:lvl8pPr>
+              <a:buNone/>
               <a:defRPr sz="2100" b="1">
                 <a:solidFill>
                   <a:srgbClr val="171717"/>
@@ -12036,6 +12670,7 @@
               </a:defRPr>
             </a:lvl8pPr>
             <a:lvl9pPr>
+              <a:buNone/>
               <a:defRPr sz="2100" b="1">
                 <a:solidFill>
                   <a:srgbClr val="171717"/>
@@ -12048,6 +12683,7 @@
           </a:lstStyle>
           <a:p xmlns:a="http://schemas.openxmlformats.org/drawingml/2006/main">
             <a:pPr>
+              <a:buNone/>
               <a:defRPr sz="2100" b="1">
                 <a:solidFill>
                   <a:srgbClr val="171717"/>
@@ -12112,6 +12748,7 @@
               </a:defRPr>
             </a:defPPr>
             <a:lvl1pPr>
+              <a:buNone/>
               <a:defRPr sz="2100" b="0">
                 <a:solidFill>
                   <a:srgbClr val="171717"/>
@@ -12122,6 +12759,7 @@
               </a:defRPr>
             </a:lvl1pPr>
             <a:lvl2pPr>
+              <a:buNone/>
               <a:defRPr sz="2100" b="0">
                 <a:solidFill>
                   <a:srgbClr val="171717"/>
@@ -12132,6 +12770,7 @@
               </a:defRPr>
             </a:lvl2pPr>
             <a:lvl3pPr>
+              <a:buNone/>
               <a:defRPr sz="2100" b="0">
                 <a:solidFill>
                   <a:srgbClr val="171717"/>
@@ -12142,6 +12781,7 @@
               </a:defRPr>
             </a:lvl3pPr>
             <a:lvl4pPr>
+              <a:buNone/>
               <a:defRPr sz="2100" b="0">
                 <a:solidFill>
                   <a:srgbClr val="171717"/>
@@ -12152,6 +12792,7 @@
               </a:defRPr>
             </a:lvl4pPr>
             <a:lvl5pPr>
+              <a:buNone/>
               <a:defRPr sz="2100" b="0">
                 <a:solidFill>
                   <a:srgbClr val="171717"/>
@@ -12162,6 +12803,7 @@
               </a:defRPr>
             </a:lvl5pPr>
             <a:lvl6pPr>
+              <a:buNone/>
               <a:defRPr sz="2100" b="0">
                 <a:solidFill>
                   <a:srgbClr val="171717"/>
@@ -12172,6 +12814,7 @@
               </a:defRPr>
             </a:lvl6pPr>
             <a:lvl7pPr>
+              <a:buNone/>
               <a:defRPr sz="2100" b="0">
                 <a:solidFill>
                   <a:srgbClr val="171717"/>
@@ -12182,6 +12825,7 @@
               </a:defRPr>
             </a:lvl7pPr>
             <a:lvl8pPr>
+              <a:buNone/>
               <a:defRPr sz="2100" b="0">
                 <a:solidFill>
                   <a:srgbClr val="171717"/>
@@ -12192,6 +12836,7 @@
               </a:defRPr>
             </a:lvl8pPr>
             <a:lvl9pPr>
+              <a:buNone/>
               <a:defRPr sz="2100" b="0">
                 <a:solidFill>
                   <a:srgbClr val="171717"/>
@@ -12204,6 +12849,7 @@
           </a:lstStyle>
           <a:p xmlns:a="http://schemas.openxmlformats.org/drawingml/2006/main">
             <a:pPr>
+              <a:buNone/>
               <a:defRPr sz="2100" b="0">
                 <a:solidFill>
                   <a:srgbClr val="171717"/>
@@ -12222,7 +12868,7 @@
                 <a:ea typeface="Arial"/>
                 <a:cs typeface="Arial"/>
               </a:rPr>
-              <a:t>Missing readings and prediction ranges.</a:t>
+              <a:t>Donor checks (E2); separate calibration (E5).</a:t>
             </a:r>
           </a:p>
         </p:txBody>
@@ -12268,6 +12914,7 @@
               </a:defRPr>
             </a:defPPr>
             <a:lvl1pPr>
+              <a:buNone/>
               <a:defRPr sz="2100" b="1">
                 <a:solidFill>
                   <a:srgbClr val="171717"/>
@@ -12278,6 +12925,7 @@
               </a:defRPr>
             </a:lvl1pPr>
             <a:lvl2pPr>
+              <a:buNone/>
               <a:defRPr sz="2100" b="1">
                 <a:solidFill>
                   <a:srgbClr val="171717"/>
@@ -12288,6 +12936,7 @@
               </a:defRPr>
             </a:lvl2pPr>
             <a:lvl3pPr>
+              <a:buNone/>
               <a:defRPr sz="2100" b="1">
                 <a:solidFill>
                   <a:srgbClr val="171717"/>
@@ -12298,6 +12947,7 @@
               </a:defRPr>
             </a:lvl3pPr>
             <a:lvl4pPr>
+              <a:buNone/>
               <a:defRPr sz="2100" b="1">
                 <a:solidFill>
                   <a:srgbClr val="171717"/>
@@ -12308,6 +12958,7 @@
               </a:defRPr>
             </a:lvl4pPr>
             <a:lvl5pPr>
+              <a:buNone/>
               <a:defRPr sz="2100" b="1">
                 <a:solidFill>
                   <a:srgbClr val="171717"/>
@@ -12318,6 +12969,7 @@
               </a:defRPr>
             </a:lvl5pPr>
             <a:lvl6pPr>
+              <a:buNone/>
               <a:defRPr sz="2100" b="1">
                 <a:solidFill>
                   <a:srgbClr val="171717"/>
@@ -12328,6 +12980,7 @@
               </a:defRPr>
             </a:lvl6pPr>
             <a:lvl7pPr>
+              <a:buNone/>
               <a:defRPr sz="2100" b="1">
                 <a:solidFill>
                   <a:srgbClr val="171717"/>
@@ -12338,6 +12991,7 @@
               </a:defRPr>
             </a:lvl7pPr>
             <a:lvl8pPr>
+              <a:buNone/>
               <a:defRPr sz="2100" b="1">
                 <a:solidFill>
                   <a:srgbClr val="171717"/>
@@ -12348,6 +13002,7 @@
               </a:defRPr>
             </a:lvl8pPr>
             <a:lvl9pPr>
+              <a:buNone/>
               <a:defRPr sz="2100" b="1">
                 <a:solidFill>
                   <a:srgbClr val="171717"/>
@@ -12360,6 +13015,7 @@
           </a:lstStyle>
           <a:p xmlns:a="http://schemas.openxmlformats.org/drawingml/2006/main">
             <a:pPr>
+              <a:buNone/>
               <a:defRPr sz="2100" b="1">
                 <a:solidFill>
                   <a:srgbClr val="171717"/>
@@ -12424,6 +13080,7 @@
               </a:defRPr>
             </a:defPPr>
             <a:lvl1pPr>
+              <a:buNone/>
               <a:defRPr sz="2100" b="0">
                 <a:solidFill>
                   <a:srgbClr val="171717"/>
@@ -12434,6 +13091,7 @@
               </a:defRPr>
             </a:lvl1pPr>
             <a:lvl2pPr>
+              <a:buNone/>
               <a:defRPr sz="2100" b="0">
                 <a:solidFill>
                   <a:srgbClr val="171717"/>
@@ -12444,6 +13102,7 @@
               </a:defRPr>
             </a:lvl2pPr>
             <a:lvl3pPr>
+              <a:buNone/>
               <a:defRPr sz="2100" b="0">
                 <a:solidFill>
                   <a:srgbClr val="171717"/>
@@ -12454,6 +13113,7 @@
               </a:defRPr>
             </a:lvl3pPr>
             <a:lvl4pPr>
+              <a:buNone/>
               <a:defRPr sz="2100" b="0">
                 <a:solidFill>
                   <a:srgbClr val="171717"/>
@@ -12464,6 +13124,7 @@
               </a:defRPr>
             </a:lvl4pPr>
             <a:lvl5pPr>
+              <a:buNone/>
               <a:defRPr sz="2100" b="0">
                 <a:solidFill>
                   <a:srgbClr val="171717"/>
@@ -12474,6 +13135,7 @@
               </a:defRPr>
             </a:lvl5pPr>
             <a:lvl6pPr>
+              <a:buNone/>
               <a:defRPr sz="2100" b="0">
                 <a:solidFill>
                   <a:srgbClr val="171717"/>
@@ -12484,6 +13146,7 @@
               </a:defRPr>
             </a:lvl6pPr>
             <a:lvl7pPr>
+              <a:buNone/>
               <a:defRPr sz="2100" b="0">
                 <a:solidFill>
                   <a:srgbClr val="171717"/>
@@ -12494,6 +13157,7 @@
               </a:defRPr>
             </a:lvl7pPr>
             <a:lvl8pPr>
+              <a:buNone/>
               <a:defRPr sz="2100" b="0">
                 <a:solidFill>
                   <a:srgbClr val="171717"/>
@@ -12504,6 +13168,7 @@
               </a:defRPr>
             </a:lvl8pPr>
             <a:lvl9pPr>
+              <a:buNone/>
               <a:defRPr sz="2100" b="0">
                 <a:solidFill>
                   <a:srgbClr val="171717"/>
@@ -12516,6 +13181,7 @@
           </a:lstStyle>
           <a:p xmlns:a="http://schemas.openxmlformats.org/drawingml/2006/main">
             <a:pPr>
+              <a:buNone/>
               <a:defRPr sz="2100" b="0">
                 <a:solidFill>
                   <a:srgbClr val="171717"/>
@@ -12534,7 +13200,7 @@
                 <a:ea typeface="Arial"/>
                 <a:cs typeface="Arial"/>
               </a:rPr>
-              <a:t>A good model fit as a promise of accuracy.</a:t>
+              <a:t>Fit as accuracy: strong fit, missed coverage (E1/E5).</a:t>
             </a:r>
           </a:p>
         </p:txBody>
@@ -12580,6 +13246,7 @@
               </a:defRPr>
             </a:defPPr>
             <a:lvl1pPr>
+              <a:buNone/>
               <a:defRPr sz="2100" b="1">
                 <a:solidFill>
                   <a:srgbClr val="171717"/>
@@ -12590,6 +13257,7 @@
               </a:defRPr>
             </a:lvl1pPr>
             <a:lvl2pPr>
+              <a:buNone/>
               <a:defRPr sz="2100" b="1">
                 <a:solidFill>
                   <a:srgbClr val="171717"/>
@@ -12600,6 +13268,7 @@
               </a:defRPr>
             </a:lvl2pPr>
             <a:lvl3pPr>
+              <a:buNone/>
               <a:defRPr sz="2100" b="1">
                 <a:solidFill>
                   <a:srgbClr val="171717"/>
@@ -12610,6 +13279,7 @@
               </a:defRPr>
             </a:lvl3pPr>
             <a:lvl4pPr>
+              <a:buNone/>
               <a:defRPr sz="2100" b="1">
                 <a:solidFill>
                   <a:srgbClr val="171717"/>
@@ -12620,6 +13290,7 @@
               </a:defRPr>
             </a:lvl4pPr>
             <a:lvl5pPr>
+              <a:buNone/>
               <a:defRPr sz="2100" b="1">
                 <a:solidFill>
                   <a:srgbClr val="171717"/>
@@ -12630,6 +13301,7 @@
               </a:defRPr>
             </a:lvl5pPr>
             <a:lvl6pPr>
+              <a:buNone/>
               <a:defRPr sz="2100" b="1">
                 <a:solidFill>
                   <a:srgbClr val="171717"/>
@@ -12640,6 +13312,7 @@
               </a:defRPr>
             </a:lvl6pPr>
             <a:lvl7pPr>
+              <a:buNone/>
               <a:defRPr sz="2100" b="1">
                 <a:solidFill>
                   <a:srgbClr val="171717"/>
@@ -12650,6 +13323,7 @@
               </a:defRPr>
             </a:lvl7pPr>
             <a:lvl8pPr>
+              <a:buNone/>
               <a:defRPr sz="2100" b="1">
                 <a:solidFill>
                   <a:srgbClr val="171717"/>
@@ -12660,6 +13334,7 @@
               </a:defRPr>
             </a:lvl8pPr>
             <a:lvl9pPr>
+              <a:buNone/>
               <a:defRPr sz="2100" b="1">
                 <a:solidFill>
                   <a:srgbClr val="171717"/>
@@ -12672,6 +13347,7 @@
           </a:lstStyle>
           <a:p xmlns:a="http://schemas.openxmlformats.org/drawingml/2006/main">
             <a:pPr>
+              <a:buNone/>
               <a:defRPr sz="2100" b="1">
                 <a:solidFill>
                   <a:srgbClr val="171717"/>
@@ -12736,6 +13412,7 @@
               </a:defRPr>
             </a:defPPr>
             <a:lvl1pPr>
+              <a:buNone/>
               <a:defRPr sz="2100" b="0">
                 <a:solidFill>
                   <a:srgbClr val="171717"/>
@@ -12746,6 +13423,7 @@
               </a:defRPr>
             </a:lvl1pPr>
             <a:lvl2pPr>
+              <a:buNone/>
               <a:defRPr sz="2100" b="0">
                 <a:solidFill>
                   <a:srgbClr val="171717"/>
@@ -12756,6 +13434,7 @@
               </a:defRPr>
             </a:lvl2pPr>
             <a:lvl3pPr>
+              <a:buNone/>
               <a:defRPr sz="2100" b="0">
                 <a:solidFill>
                   <a:srgbClr val="171717"/>
@@ -12766,6 +13445,7 @@
               </a:defRPr>
             </a:lvl3pPr>
             <a:lvl4pPr>
+              <a:buNone/>
               <a:defRPr sz="2100" b="0">
                 <a:solidFill>
                   <a:srgbClr val="171717"/>
@@ -12776,6 +13456,7 @@
               </a:defRPr>
             </a:lvl4pPr>
             <a:lvl5pPr>
+              <a:buNone/>
               <a:defRPr sz="2100" b="0">
                 <a:solidFill>
                   <a:srgbClr val="171717"/>
@@ -12786,6 +13467,7 @@
               </a:defRPr>
             </a:lvl5pPr>
             <a:lvl6pPr>
+              <a:buNone/>
               <a:defRPr sz="2100" b="0">
                 <a:solidFill>
                   <a:srgbClr val="171717"/>
@@ -12796,6 +13478,7 @@
               </a:defRPr>
             </a:lvl6pPr>
             <a:lvl7pPr>
+              <a:buNone/>
               <a:defRPr sz="2100" b="0">
                 <a:solidFill>
                   <a:srgbClr val="171717"/>
@@ -12806,6 +13489,7 @@
               </a:defRPr>
             </a:lvl7pPr>
             <a:lvl8pPr>
+              <a:buNone/>
               <a:defRPr sz="2100" b="0">
                 <a:solidFill>
                   <a:srgbClr val="171717"/>
@@ -12816,6 +13500,7 @@
               </a:defRPr>
             </a:lvl8pPr>
             <a:lvl9pPr>
+              <a:buNone/>
               <a:defRPr sz="2100" b="0">
                 <a:solidFill>
                   <a:srgbClr val="171717"/>
@@ -12828,6 +13513,7 @@
           </a:lstStyle>
           <a:p xmlns:a="http://schemas.openxmlformats.org/drawingml/2006/main">
             <a:pPr>
+              <a:buNone/>
               <a:defRPr sz="2100" b="0">
                 <a:solidFill>
                   <a:srgbClr val="171717"/>
@@ -12846,7 +13532,7 @@
                 <a:ea typeface="Arial"/>
                 <a:cs typeface="Arial"/>
               </a:rPr>
-              <a:t>More complicated AI until we have measured examples.</a:t>
+              <a:t>Neural/LLM methods: no fair measured-data test yet.</a:t>
             </a:r>
           </a:p>
         </p:txBody>
@@ -12892,6 +13578,7 @@
               </a:defRPr>
             </a:defPPr>
             <a:lvl1pPr>
+              <a:buNone/>
               <a:defRPr sz="2250" b="1">
                 <a:solidFill>
                   <a:srgbClr val="171717"/>
@@ -12902,6 +13589,7 @@
               </a:defRPr>
             </a:lvl1pPr>
             <a:lvl2pPr>
+              <a:buNone/>
               <a:defRPr sz="2250" b="1">
                 <a:solidFill>
                   <a:srgbClr val="171717"/>
@@ -12912,6 +13600,7 @@
               </a:defRPr>
             </a:lvl2pPr>
             <a:lvl3pPr>
+              <a:buNone/>
               <a:defRPr sz="2250" b="1">
                 <a:solidFill>
                   <a:srgbClr val="171717"/>
@@ -12922,6 +13611,7 @@
               </a:defRPr>
             </a:lvl3pPr>
             <a:lvl4pPr>
+              <a:buNone/>
               <a:defRPr sz="2250" b="1">
                 <a:solidFill>
                   <a:srgbClr val="171717"/>
@@ -12932,6 +13622,7 @@
               </a:defRPr>
             </a:lvl4pPr>
             <a:lvl5pPr>
+              <a:buNone/>
               <a:defRPr sz="2250" b="1">
                 <a:solidFill>
                   <a:srgbClr val="171717"/>
@@ -12942,6 +13633,7 @@
               </a:defRPr>
             </a:lvl5pPr>
             <a:lvl6pPr>
+              <a:buNone/>
               <a:defRPr sz="2250" b="1">
                 <a:solidFill>
                   <a:srgbClr val="171717"/>
@@ -12952,6 +13644,7 @@
               </a:defRPr>
             </a:lvl6pPr>
             <a:lvl7pPr>
+              <a:buNone/>
               <a:defRPr sz="2250" b="1">
                 <a:solidFill>
                   <a:srgbClr val="171717"/>
@@ -12962,6 +13655,7 @@
               </a:defRPr>
             </a:lvl7pPr>
             <a:lvl8pPr>
+              <a:buNone/>
               <a:defRPr sz="2250" b="1">
                 <a:solidFill>
                   <a:srgbClr val="171717"/>
@@ -12972,6 +13666,7 @@
               </a:defRPr>
             </a:lvl8pPr>
             <a:lvl9pPr>
+              <a:buNone/>
               <a:defRPr sz="2250" b="1">
                 <a:solidFill>
                   <a:srgbClr val="171717"/>
@@ -12984,6 +13679,7 @@
           </a:lstStyle>
           <a:p xmlns:a="http://schemas.openxmlformats.org/drawingml/2006/main">
             <a:pPr>
+              <a:buNone/>
               <a:defRPr sz="2250" b="1">
                 <a:solidFill>
                   <a:srgbClr val="171717"/>
